--- a/07-Entregables/PC1/Rumbo — PC1 (presentación).pptx
+++ b/07-Entregables/PC1/Rumbo — PC1 (presentación).pptx
@@ -1848,7 +1848,7 @@
           <a:p>
             <a:r>
               <a:rPr lang="en-US" dirty="0"/>
-              <a:t>El prompt de CU-20 es una propuesta del equipo (el documento lo tiene completo, con un ejemplo). CLAUDE.md completo va en la carpeta de entrega.</a:t>
+              <a:t>El punto de control pide los prompts usados para construir el producto, que se desarrolla guiado con IA. CLAUDE.md completo y la skill van en la carpeta de entrega (08 · Agentes).</a:t>
             </a:r>
             <a:endParaRPr lang="en-US" dirty="0"/>
           </a:p>
@@ -15176,7 +15176,7 @@
                 <a:ea typeface="Calibri" pitchFamily="34" charset="-122"/>
                 <a:cs typeface="Calibri" pitchFamily="34" charset="-120"/>
               </a:rPr>
-              <a:t>Los prompts</a:t>
+              <a:t>Los prompts con que construimos Rumbo</a:t>
             </a:r>
             <a:endParaRPr lang="en-US" sz="3000" dirty="0"/>
           </a:p>
@@ -15291,11 +15291,11 @@
         <p:spPr>
           <a:xfrm>
             <a:off x="548640" y="1463040"/>
-            <a:ext cx="5760720" cy="4663440"/>
+            <a:ext cx="3566160" cy="3931920"/>
           </a:xfrm>
           <a:prstGeom prst="roundRect">
             <a:avLst>
-              <a:gd name="adj" fmla="val 2353"/>
+              <a:gd name="adj" fmla="val 3077"/>
             </a:avLst>
           </a:prstGeom>
           <a:solidFill>
@@ -15317,8 +15317,8 @@
         </p:nvSpPr>
         <p:spPr>
           <a:xfrm>
-            <a:off x="822960" y="1645920"/>
-            <a:ext cx="5212080" cy="365760"/>
+            <a:off x="777240" y="1645920"/>
+            <a:ext cx="3108960" cy="320040"/>
           </a:xfrm>
           <a:prstGeom prst="rect">
             <a:avLst/>
@@ -15334,7 +15334,7 @@
               <a:buNone/>
             </a:pPr>
             <a:r>
-              <a:rPr lang="en-US" sz="1600" b="1" dirty="0">
+              <a:rPr lang="en-US" sz="1300" b="1" dirty="0">
                 <a:solidFill>
                   <a:srgbClr val="73A5C4"/>
                 </a:solidFill>
@@ -15342,9 +15342,9 @@
                 <a:ea typeface="Calibri" pitchFamily="34" charset="-122"/>
                 <a:cs typeface="Calibri" pitchFamily="34" charset="-120"/>
               </a:rPr>
-              <a:t>Prompt de CU-20 · IA del producto</a:t>
-            </a:r>
-            <a:endParaRPr lang="en-US" sz="1600" dirty="0"/>
+              <a:t>1 · Prompt de sistema</a:t>
+            </a:r>
+            <a:endParaRPr lang="en-US" sz="1300" dirty="0"/>
           </a:p>
         </p:txBody>
       </p:sp>
@@ -15356,24 +15356,24 @@
         </p:nvSpPr>
         <p:spPr>
           <a:xfrm>
-            <a:off x="822960" y="2103120"/>
-            <a:ext cx="5303520" cy="3108960"/>
-          </a:xfrm>
-          <a:prstGeom prst="rect">
-            <a:avLst/>
-          </a:prstGeom>
-          <a:noFill/>
-          <a:ln/>
-        </p:spPr>
-        <p:txBody>
-          <a:bodyPr wrap="square" lIns="0" tIns="0" rIns="0" bIns="0" rtlCol="0" anchor="t"/>
+            <a:off x="777240" y="1965960"/>
+            <a:ext cx="3108960" cy="457200"/>
+          </a:xfrm>
+          <a:prstGeom prst="rect">
+            <a:avLst/>
+          </a:prstGeom>
+          <a:noFill/>
+          <a:ln/>
+        </p:spPr>
+        <p:txBody>
+          <a:bodyPr wrap="square" lIns="0" tIns="0" rIns="0" bIns="0" rtlCol="0" anchor="ctr"/>
           <a:lstStyle/>
           <a:p>
             <a:pPr indent="0" marL="0">
               <a:buNone/>
             </a:pPr>
             <a:r>
-              <a:rPr lang="en-US" sz="1150" dirty="0">
+              <a:rPr lang="en-US" sz="1800" b="1" dirty="0">
                 <a:solidFill>
                   <a:srgbClr val="FFFFFF"/>
                 </a:solidFill>
@@ -15381,269 +15381,115 @@
                 <a:ea typeface="Courier New" pitchFamily="34" charset="-122"/>
                 <a:cs typeface="Courier New" pitchFamily="34" charset="-120"/>
               </a:rPr>
-              <a:t>Sos redactor de contenido para redes sociales de una</a:t>
-            </a:r>
-            <a:endParaRPr lang="en-US" sz="1150" dirty="0"/>
-          </a:p>
-          <a:p>
-            <a:pPr indent="0" marL="0">
-              <a:buNone/>
-            </a:pPr>
-            <a:r>
-              <a:rPr lang="en-US" sz="1150" dirty="0">
+              <a:t>CLAUDE.md</a:t>
+            </a:r>
+            <a:endParaRPr lang="en-US" sz="1800" dirty="0"/>
+          </a:p>
+        </p:txBody>
+      </p:sp>
+      <p:sp>
+        <p:nvSpPr>
+          <p:cNvPr id="10" name="Text 8"/>
+          <p:cNvSpPr txBox="1"/>
+          <p:nvPr/>
+        </p:nvSpPr>
+        <p:spPr>
+          <a:xfrm>
+            <a:off x="777240" y="2606040"/>
+            <a:ext cx="3108960" cy="3291840"/>
+          </a:xfrm>
+          <a:prstGeom prst="rect">
+            <a:avLst/>
+          </a:prstGeom>
+          <a:noFill/>
+          <a:ln/>
+        </p:spPr>
+        <p:txBody>
+          <a:bodyPr wrap="square" lIns="0" tIns="0" rIns="0" bIns="0" rtlCol="0" anchor="t"/>
+          <a:lstStyle/>
+          <a:p>
+            <a:pPr marL="203200" indent="-203200">
+              <a:spcAft>
+                <a:spcPts val="800"/>
+              </a:spcAft>
+              <a:buSzPct val="100000"/>
+              <a:buChar char="•"/>
+            </a:pPr>
+            <a:r>
+              <a:rPr lang="en-US" sz="1350" dirty="0">
                 <a:solidFill>
                   <a:srgbClr val="FFFFFF"/>
                 </a:solidFill>
-                <a:latin typeface="Courier New" pitchFamily="34" charset="0"/>
-                <a:ea typeface="Courier New" pitchFamily="34" charset="-122"/>
-                <a:cs typeface="Courier New" pitchFamily="34" charset="-120"/>
-              </a:rPr>
-              <a:t>agencia de turismo argentina. [...]</a:t>
-            </a:r>
-            <a:endParaRPr lang="en-US" sz="1150" dirty="0"/>
-          </a:p>
-          <a:p>
-            <a:pPr indent="0" marL="0">
-              <a:buNone/>
-            </a:pPr>
-            <a:r>
-              <a:rPr lang="en-US" sz="1150" dirty="0">
+                <a:latin typeface="Calibri" pitchFamily="34" charset="0"/>
+                <a:ea typeface="Calibri" pitchFamily="34" charset="-122"/>
+                <a:cs typeface="Calibri" pitchFamily="34" charset="-120"/>
+              </a:rPr>
+              <a:t>El agente lo lee al empezar cada sesión.</a:t>
+            </a:r>
+            <a:endParaRPr lang="en-US" sz="1350" dirty="0"/>
+          </a:p>
+          <a:p>
+            <a:pPr marL="203200" indent="-203200">
+              <a:spcAft>
+                <a:spcPts val="800"/>
+              </a:spcAft>
+              <a:buSzPct val="100000"/>
+              <a:buChar char="•"/>
+            </a:pPr>
+            <a:r>
+              <a:rPr lang="en-US" sz="1350" dirty="0">
                 <a:solidFill>
                   <a:srgbClr val="FFFFFF"/>
                 </a:solidFill>
-                <a:latin typeface="Courier New" pitchFamily="34" charset="0"/>
-                <a:ea typeface="Courier New" pitchFamily="34" charset="-122"/>
-                <a:cs typeface="Courier New" pitchFamily="34" charset="-120"/>
-              </a:rPr>
-              <a:t>Proponé UN borrador a partir del tema, el canal y el tono.</a:t>
-            </a:r>
-            <a:endParaRPr lang="en-US" sz="1150" dirty="0"/>
-          </a:p>
-          <a:p>
-            <a:pPr indent="0" marL="0">
-              <a:buNone/>
-            </a:pPr>
-            <a:r>
-              <a:rPr lang="en-US" sz="1150" dirty="0">
+                <a:latin typeface="Calibri" pitchFamily="34" charset="0"/>
+                <a:ea typeface="Calibri" pitchFamily="34" charset="-122"/>
+                <a:cs typeface="Calibri" pitchFamily="34" charset="-120"/>
+              </a:rPr>
+              <a:t>Cómo entrar en contexto: identificar a la persona, traer el trabajo del equipo y leer el estado.</a:t>
+            </a:r>
+            <a:endParaRPr lang="en-US" sz="1350" dirty="0"/>
+          </a:p>
+          <a:p>
+            <a:pPr marL="203200" indent="-203200">
+              <a:spcAft>
+                <a:spcPts val="800"/>
+              </a:spcAft>
+              <a:buSzPct val="100000"/>
+              <a:buChar char="•"/>
+            </a:pPr>
+            <a:r>
+              <a:rPr lang="en-US" sz="1350" dirty="0">
                 <a:solidFill>
                   <a:srgbClr val="FFFFFF"/>
                 </a:solidFill>
-                <a:latin typeface="Courier New" pitchFamily="34" charset="0"/>
-                <a:ea typeface="Courier New" pitchFamily="34" charset="-122"/>
-                <a:cs typeface="Courier New" pitchFamily="34" charset="-120"/>
-              </a:rPr>
-              <a:t>- Usá solo la información del pedido: no inventes</a:t>
-            </a:r>
-            <a:endParaRPr lang="en-US" sz="1150" dirty="0"/>
-          </a:p>
-          <a:p>
-            <a:pPr indent="0" marL="0">
-              <a:buNone/>
-            </a:pPr>
-            <a:r>
-              <a:rPr lang="en-US" sz="1150" dirty="0">
+                <a:latin typeface="Calibri" pitchFamily="34" charset="0"/>
+                <a:ea typeface="Calibri" pitchFamily="34" charset="-122"/>
+                <a:cs typeface="Calibri" pitchFamily="34" charset="-120"/>
+              </a:rPr>
+              <a:t>Reglas: respetar el alcance, no inventar datos del negocio y no aprobar nada sin el equipo.</a:t>
+            </a:r>
+            <a:endParaRPr lang="en-US" sz="1350" dirty="0"/>
+          </a:p>
+          <a:p>
+            <a:pPr marL="203200" indent="-203200">
+              <a:spcAft>
+                <a:spcPts val="800"/>
+              </a:spcAft>
+              <a:buSzPct val="100000"/>
+              <a:buChar char="•"/>
+            </a:pPr>
+            <a:r>
+              <a:rPr lang="en-US" sz="1350" dirty="0">
                 <a:solidFill>
                   <a:srgbClr val="FFFFFF"/>
                 </a:solidFill>
-                <a:latin typeface="Courier New" pitchFamily="34" charset="0"/>
-                <a:ea typeface="Courier New" pitchFamily="34" charset="-122"/>
-                <a:cs typeface="Courier New" pitchFamily="34" charset="-120"/>
-              </a:rPr>
-              <a:t>  precios, fechas ni cupos. Si falta un dato, dejá</a:t>
-            </a:r>
-            <a:endParaRPr lang="en-US" sz="1150" dirty="0"/>
-          </a:p>
-          <a:p>
-            <a:pPr indent="0" marL="0">
-              <a:buNone/>
-            </a:pPr>
-            <a:r>
-              <a:rPr lang="en-US" sz="1150" dirty="0">
-                <a:solidFill>
-                  <a:srgbClr val="FFFFFF"/>
-                </a:solidFill>
-                <a:latin typeface="Courier New" pitchFamily="34" charset="0"/>
-                <a:ea typeface="Courier New" pitchFamily="34" charset="-122"/>
-                <a:cs typeface="Courier New" pitchFamily="34" charset="-120"/>
-              </a:rPr>
-              <a:t>  un marcador: [precio], [fecha de salida].</a:t>
-            </a:r>
-            <a:endParaRPr lang="en-US" sz="1150" dirty="0"/>
-          </a:p>
-          <a:p>
-            <a:pPr indent="0" marL="0">
-              <a:buNone/>
-            </a:pPr>
-            <a:r>
-              <a:rPr lang="en-US" sz="1150" dirty="0">
-                <a:solidFill>
-                  <a:srgbClr val="FFFFFF"/>
-                </a:solidFill>
-                <a:latin typeface="Courier New" pitchFamily="34" charset="0"/>
-                <a:ea typeface="Courier New" pitchFamily="34" charset="-122"/>
-                <a:cs typeface="Courier New" pitchFamily="34" charset="-120"/>
-              </a:rPr>
-              <a:t>- No incluyas datos personales de clientes.</a:t>
-            </a:r>
-            <a:endParaRPr lang="en-US" sz="1150" dirty="0"/>
-          </a:p>
-          <a:p>
-            <a:pPr indent="0" marL="0">
-              <a:buNone/>
-            </a:pPr>
-            <a:r>
-              <a:rPr lang="en-US" sz="1150" dirty="0">
-                <a:solidFill>
-                  <a:srgbClr val="FFFFFF"/>
-                </a:solidFill>
-                <a:latin typeface="Courier New" pitchFamily="34" charset="0"/>
-                <a:ea typeface="Courier New" pitchFamily="34" charset="-122"/>
-                <a:cs typeface="Courier New" pitchFamily="34" charset="-120"/>
-              </a:rPr>
-              <a:t>- Adaptá el formato al canal:</a:t>
-            </a:r>
-            <a:endParaRPr lang="en-US" sz="1150" dirty="0"/>
-          </a:p>
-          <a:p>
-            <a:pPr indent="0" marL="0">
-              <a:buNone/>
-            </a:pPr>
-            <a:r>
-              <a:rPr lang="en-US" sz="1150" dirty="0">
-                <a:solidFill>
-                  <a:srgbClr val="FFFFFF"/>
-                </a:solidFill>
-                <a:latin typeface="Courier New" pitchFamily="34" charset="0"/>
-                <a:ea typeface="Courier New" pitchFamily="34" charset="-122"/>
-                <a:cs typeface="Courier New" pitchFamily="34" charset="-120"/>
-              </a:rPr>
-              <a:t>  instagram: hasta 120 palabras, llamada a la</a:t>
-            </a:r>
-            <a:endParaRPr lang="en-US" sz="1150" dirty="0"/>
-          </a:p>
-          <a:p>
-            <a:pPr indent="0" marL="0">
-              <a:buNone/>
-            </a:pPr>
-            <a:r>
-              <a:rPr lang="en-US" sz="1150" dirty="0">
-                <a:solidFill>
-                  <a:srgbClr val="FFFFFF"/>
-                </a:solidFill>
-                <a:latin typeface="Courier New" pitchFamily="34" charset="0"/>
-                <a:ea typeface="Courier New" pitchFamily="34" charset="-122"/>
-                <a:cs typeface="Courier New" pitchFamily="34" charset="-120"/>
-              </a:rPr>
-              <a:t>    acción y entre 3 y 6 hashtags.</a:t>
-            </a:r>
-            <a:endParaRPr lang="en-US" sz="1150" dirty="0"/>
-          </a:p>
-          <a:p>
-            <a:pPr indent="0" marL="0">
-              <a:buNone/>
-            </a:pPr>
-            <a:r>
-              <a:rPr lang="en-US" sz="1150" dirty="0">
-                <a:solidFill>
-                  <a:srgbClr val="FFFFFF"/>
-                </a:solidFill>
-                <a:latin typeface="Courier New" pitchFamily="34" charset="0"/>
-                <a:ea typeface="Courier New" pitchFamily="34" charset="-122"/>
-                <a:cs typeface="Courier New" pitchFamily="34" charset="-120"/>
-              </a:rPr>
-              <a:t>  tiktok: guion de 15 a 30 segundos en escenas.</a:t>
-            </a:r>
-            <a:endParaRPr lang="en-US" sz="1150" dirty="0"/>
-          </a:p>
-          <a:p>
-            <a:pPr indent="0" marL="0">
-              <a:buNone/>
-            </a:pPr>
-            <a:r>
-              <a:rPr lang="en-US" sz="1150" dirty="0">
-                <a:solidFill>
-                  <a:srgbClr val="FFFFFF"/>
-                </a:solidFill>
-                <a:latin typeface="Courier New" pitchFamily="34" charset="0"/>
-                <a:ea typeface="Courier New" pitchFamily="34" charset="-122"/>
-                <a:cs typeface="Courier New" pitchFamily="34" charset="-120"/>
-              </a:rPr>
-              <a:t>  whatsapp_ventas: hasta 60 palabras, sin</a:t>
-            </a:r>
-            <a:endParaRPr lang="en-US" sz="1150" dirty="0"/>
-          </a:p>
-          <a:p>
-            <a:pPr indent="0" marL="0">
-              <a:buNone/>
-            </a:pPr>
-            <a:r>
-              <a:rPr lang="en-US" sz="1150" dirty="0">
-                <a:solidFill>
-                  <a:srgbClr val="FFFFFF"/>
-                </a:solidFill>
-                <a:latin typeface="Courier New" pitchFamily="34" charset="0"/>
-                <a:ea typeface="Courier New" pitchFamily="34" charset="-122"/>
-                <a:cs typeface="Courier New" pitchFamily="34" charset="-120"/>
-              </a:rPr>
-              <a:t>    hashtags, con una pregunta final.</a:t>
-            </a:r>
-            <a:endParaRPr lang="en-US" sz="1150" dirty="0"/>
-          </a:p>
-          <a:p>
-            <a:pPr indent="0" marL="0">
-              <a:buNone/>
-            </a:pPr>
-            <a:r>
-              <a:rPr lang="en-US" sz="1150" dirty="0">
-                <a:solidFill>
-                  <a:srgbClr val="FFFFFF"/>
-                </a:solidFill>
-                <a:latin typeface="Courier New" pitchFamily="34" charset="0"/>
-                <a:ea typeface="Courier New" pitchFamily="34" charset="-122"/>
-                <a:cs typeface="Courier New" pitchFamily="34" charset="-120"/>
-              </a:rPr>
-              <a:t>- No publicás nada: una persona revisa y publica.</a:t>
-            </a:r>
-            <a:endParaRPr lang="en-US" sz="1150" dirty="0"/>
-          </a:p>
-        </p:txBody>
-      </p:sp>
-      <p:sp>
-        <p:nvSpPr>
-          <p:cNvPr id="10" name="Text 8"/>
-          <p:cNvSpPr txBox="1"/>
-          <p:nvPr/>
-        </p:nvSpPr>
-        <p:spPr>
-          <a:xfrm>
-            <a:off x="822960" y="5303520"/>
-            <a:ext cx="5303520" cy="457200"/>
-          </a:xfrm>
-          <a:prstGeom prst="rect">
-            <a:avLst/>
-          </a:prstGeom>
-          <a:noFill/>
-          <a:ln/>
-        </p:spPr>
-        <p:txBody>
-          <a:bodyPr wrap="square" lIns="0" tIns="0" rIns="0" bIns="0" rtlCol="0" anchor="ctr"/>
-          <a:lstStyle/>
-          <a:p>
-            <a:pPr indent="0" marL="0">
-              <a:buNone/>
-            </a:pPr>
-            <a:r>
-              <a:rPr lang="en-US" sz="1150" b="1" dirty="0">
-                <a:solidFill>
-                  <a:srgbClr val="E8A93A"/>
-                </a:solidFill>
-                <a:latin typeface="Courier New" pitchFamily="34" charset="0"/>
-                <a:ea typeface="Courier New" pitchFamily="34" charset="-122"/>
-                <a:cs typeface="Courier New" pitchFamily="34" charset="-120"/>
-              </a:rPr>
-              <a:t>Tema: {tema} · Canal: {canal} · Tono: {tono}</a:t>
-            </a:r>
-            <a:endParaRPr lang="en-US" sz="1150" dirty="0"/>
+                <a:latin typeface="Calibri" pitchFamily="34" charset="0"/>
+                <a:ea typeface="Calibri" pitchFamily="34" charset="-122"/>
+                <a:cs typeface="Calibri" pitchFamily="34" charset="-120"/>
+              </a:rPr>
+              <a:t>Cómo cerrar: bitácora, commit con la identidad de la persona y subir.</a:t>
+            </a:r>
+            <a:endParaRPr lang="en-US" sz="1350" dirty="0"/>
           </a:p>
         </p:txBody>
       </p:sp>
@@ -15655,12 +15501,12 @@
         </p:nvSpPr>
         <p:spPr>
           <a:xfrm>
-            <a:off x="6583680" y="1463040"/>
-            <a:ext cx="5056632" cy="4663440"/>
+            <a:off x="4306824" y="1463040"/>
+            <a:ext cx="3566160" cy="3931920"/>
           </a:xfrm>
           <a:prstGeom prst="roundRect">
             <a:avLst>
-              <a:gd name="adj" fmla="val 2353"/>
+              <a:gd name="adj" fmla="val 3077"/>
             </a:avLst>
           </a:prstGeom>
           <a:solidFill>
@@ -15682,8 +15528,8 @@
         </p:nvSpPr>
         <p:spPr>
           <a:xfrm>
-            <a:off x="6858000" y="1645920"/>
-            <a:ext cx="4572000" cy="365760"/>
+            <a:off x="4535424" y="1645920"/>
+            <a:ext cx="3108960" cy="320040"/>
           </a:xfrm>
           <a:prstGeom prst="rect">
             <a:avLst/>
@@ -15699,7 +15545,46 @@
               <a:buNone/>
             </a:pPr>
             <a:r>
-              <a:rPr lang="en-US" sz="1600" b="1" dirty="0">
+              <a:rPr lang="en-US" sz="1300" b="1" dirty="0">
+                <a:solidFill>
+                  <a:srgbClr val="3E7196"/>
+                </a:solidFill>
+                <a:latin typeface="Calibri" pitchFamily="34" charset="0"/>
+                <a:ea typeface="Calibri" pitchFamily="34" charset="-122"/>
+                <a:cs typeface="Calibri" pitchFamily="34" charset="-120"/>
+              </a:rPr>
+              <a:t>2 · Prompt de cada sesión</a:t>
+            </a:r>
+            <a:endParaRPr lang="en-US" sz="1300" dirty="0"/>
+          </a:p>
+        </p:txBody>
+      </p:sp>
+      <p:sp>
+        <p:nvSpPr>
+          <p:cNvPr id="13" name="Text 11"/>
+          <p:cNvSpPr txBox="1"/>
+          <p:nvPr/>
+        </p:nvSpPr>
+        <p:spPr>
+          <a:xfrm>
+            <a:off x="4535424" y="1965960"/>
+            <a:ext cx="3108960" cy="457200"/>
+          </a:xfrm>
+          <a:prstGeom prst="rect">
+            <a:avLst/>
+          </a:prstGeom>
+          <a:noFill/>
+          <a:ln/>
+        </p:spPr>
+        <p:txBody>
+          <a:bodyPr wrap="square" lIns="0" tIns="0" rIns="0" bIns="0" rtlCol="0" anchor="ctr"/>
+          <a:lstStyle/>
+          <a:p>
+            <a:pPr indent="0" marL="0">
+              <a:buNone/>
+            </a:pPr>
+            <a:r>
+              <a:rPr lang="en-US" sz="1700" b="1" i="1" dirty="0">
                 <a:solidFill>
                   <a:srgbClr val="17354C"/>
                 </a:solidFill>
@@ -15707,22 +15592,22 @@
                 <a:ea typeface="Calibri" pitchFamily="34" charset="-122"/>
                 <a:cs typeface="Calibri" pitchFamily="34" charset="-120"/>
               </a:rPr>
-              <a:t>CLAUDE.md · prompt del agente de desarrollo</a:t>
-            </a:r>
-            <a:endParaRPr lang="en-US" sz="1600" dirty="0"/>
-          </a:p>
-        </p:txBody>
-      </p:sp>
-      <p:sp>
-        <p:nvSpPr>
-          <p:cNvPr id="13" name="Text 11"/>
-          <p:cNvSpPr txBox="1"/>
-          <p:nvPr/>
-        </p:nvSpPr>
-        <p:spPr>
-          <a:xfrm>
-            <a:off x="6858000" y="2148840"/>
-            <a:ext cx="4572000" cy="3749040"/>
+              <a:t>«Hola, entrá en contexto.»</a:t>
+            </a:r>
+            <a:endParaRPr lang="en-US" sz="1700" dirty="0"/>
+          </a:p>
+        </p:txBody>
+      </p:sp>
+      <p:sp>
+        <p:nvSpPr>
+          <p:cNvPr id="14" name="Text 12"/>
+          <p:cNvSpPr txBox="1"/>
+          <p:nvPr/>
+        </p:nvSpPr>
+        <p:spPr>
+          <a:xfrm>
+            <a:off x="4535424" y="2606040"/>
+            <a:ext cx="3108960" cy="3291840"/>
           </a:xfrm>
           <a:prstGeom prst="rect">
             <a:avLst/>
@@ -15742,7 +15627,7 @@
               <a:buChar char="•"/>
             </a:pPr>
             <a:r>
-              <a:rPr lang="en-US" sz="1400" dirty="0">
+              <a:rPr lang="en-US" sz="1350" dirty="0">
                 <a:solidFill>
                   <a:srgbClr val="1F2A33"/>
                 </a:solidFill>
@@ -15750,9 +15635,9 @@
                 <a:ea typeface="Calibri" pitchFamily="34" charset="-122"/>
                 <a:cs typeface="Calibri" pitchFamily="34" charset="-120"/>
               </a:rPr>
-              <a:t>Claude Code lo lee al empezar cada sesión: es su prompt de sistema para este proyecto.</a:t>
-            </a:r>
-            <a:endParaRPr lang="en-US" sz="1400" dirty="0"/>
+              <a:t>Con CLAUDE.md alcanza un pedido corto: el agente aplica el protocolo solo.</a:t>
+            </a:r>
+            <a:endParaRPr lang="en-US" sz="1350" dirty="0"/>
           </a:p>
           <a:p>
             <a:pPr marL="203200" indent="-203200">
@@ -15763,7 +15648,7 @@
               <a:buChar char="•"/>
             </a:pPr>
             <a:r>
-              <a:rPr lang="en-US" sz="1400" dirty="0">
+              <a:rPr lang="en-US" sz="1350" dirty="0">
                 <a:solidFill>
                   <a:srgbClr val="1F2A33"/>
                 </a:solidFill>
@@ -15771,9 +15656,9 @@
                 <a:ea typeface="Calibri" pitchFamily="34" charset="-122"/>
                 <a:cs typeface="Calibri" pitchFamily="34" charset="-120"/>
               </a:rPr>
-              <a:t>Cómo entrar en contexto: identificar a la persona, traer el trabajo del equipo y leer el estado.</a:t>
-            </a:r>
-            <a:endParaRPr lang="en-US" sz="1400" dirty="0"/>
+              <a:t>Después, cada pedido describe la tarea: «revisemos y decime qué falta».</a:t>
+            </a:r>
+            <a:endParaRPr lang="en-US" sz="1350" dirty="0"/>
           </a:p>
           <a:p>
             <a:pPr marL="203200" indent="-203200">
@@ -15784,7 +15669,7 @@
               <a:buChar char="•"/>
             </a:pPr>
             <a:r>
-              <a:rPr lang="en-US" sz="1400" dirty="0">
+              <a:rPr lang="en-US" sz="1350" dirty="0">
                 <a:solidFill>
                   <a:srgbClr val="1F2A33"/>
                 </a:solidFill>
@@ -15792,10 +15677,137 @@
                 <a:ea typeface="Calibri" pitchFamily="34" charset="-122"/>
                 <a:cs typeface="Calibri" pitchFamily="34" charset="-120"/>
               </a:rPr>
-              <a:t>Reglas: respetar el alcance, no inventar datos del negocio y no aprobar nada sin el equipo.</a:t>
-            </a:r>
-            <a:endParaRPr lang="en-US" sz="1400" dirty="0"/>
-          </a:p>
+              <a:t>Fuera de Claude Code, un prompt inicial le indica qué leer y qué no formalizar.</a:t>
+            </a:r>
+            <a:endParaRPr lang="en-US" sz="1350" dirty="0"/>
+          </a:p>
+        </p:txBody>
+      </p:sp>
+      <p:sp>
+        <p:nvSpPr>
+          <p:cNvPr id="15" name="Shape 13"/>
+          <p:cNvSpPr/>
+          <p:nvPr/>
+        </p:nvSpPr>
+        <p:spPr>
+          <a:xfrm>
+            <a:off x="8065008" y="1463040"/>
+            <a:ext cx="3566160" cy="3931920"/>
+          </a:xfrm>
+          <a:prstGeom prst="roundRect">
+            <a:avLst>
+              <a:gd name="adj" fmla="val 3077"/>
+            </a:avLst>
+          </a:prstGeom>
+          <a:solidFill>
+            <a:srgbClr val="FFFFFF"/>
+          </a:solidFill>
+          <a:ln w="9525">
+            <a:solidFill>
+              <a:srgbClr val="E3E8ED"/>
+            </a:solidFill>
+            <a:prstDash val="solid"/>
+          </a:ln>
+        </p:spPr>
+      </p:sp>
+      <p:sp>
+        <p:nvSpPr>
+          <p:cNvPr id="16" name="Text 14"/>
+          <p:cNvSpPr txBox="1"/>
+          <p:nvPr/>
+        </p:nvSpPr>
+        <p:spPr>
+          <a:xfrm>
+            <a:off x="8293608" y="1645920"/>
+            <a:ext cx="3108960" cy="320040"/>
+          </a:xfrm>
+          <a:prstGeom prst="rect">
+            <a:avLst/>
+          </a:prstGeom>
+          <a:noFill/>
+          <a:ln/>
+        </p:spPr>
+        <p:txBody>
+          <a:bodyPr wrap="square" lIns="0" tIns="0" rIns="0" bIns="0" rtlCol="0" anchor="ctr"/>
+          <a:lstStyle/>
+          <a:p>
+            <a:pPr indent="0" marL="0">
+              <a:buNone/>
+            </a:pPr>
+            <a:r>
+              <a:rPr lang="en-US" sz="1300" b="1" dirty="0">
+                <a:solidFill>
+                  <a:srgbClr val="3E7196"/>
+                </a:solidFill>
+                <a:latin typeface="Calibri" pitchFamily="34" charset="0"/>
+                <a:ea typeface="Calibri" pitchFamily="34" charset="-122"/>
+                <a:cs typeface="Calibri" pitchFamily="34" charset="-120"/>
+              </a:rPr>
+              <a:t>3 · Prompts reutilizables</a:t>
+            </a:r>
+            <a:endParaRPr lang="en-US" sz="1300" dirty="0"/>
+          </a:p>
+        </p:txBody>
+      </p:sp>
+      <p:sp>
+        <p:nvSpPr>
+          <p:cNvPr id="17" name="Text 15"/>
+          <p:cNvSpPr txBox="1"/>
+          <p:nvPr/>
+        </p:nvSpPr>
+        <p:spPr>
+          <a:xfrm>
+            <a:off x="8293608" y="1965960"/>
+            <a:ext cx="3108960" cy="457200"/>
+          </a:xfrm>
+          <a:prstGeom prst="rect">
+            <a:avLst/>
+          </a:prstGeom>
+          <a:noFill/>
+          <a:ln/>
+        </p:spPr>
+        <p:txBody>
+          <a:bodyPr wrap="square" lIns="0" tIns="0" rIns="0" bIns="0" rtlCol="0" anchor="ctr"/>
+          <a:lstStyle/>
+          <a:p>
+            <a:pPr indent="0" marL="0">
+              <a:buNone/>
+            </a:pPr>
+            <a:r>
+              <a:rPr lang="en-US" sz="1800" b="1" dirty="0">
+                <a:solidFill>
+                  <a:srgbClr val="17354C"/>
+                </a:solidFill>
+                <a:latin typeface="Courier New" pitchFamily="34" charset="0"/>
+                <a:ea typeface="Courier New" pitchFamily="34" charset="-122"/>
+                <a:cs typeface="Courier New" pitchFamily="34" charset="-120"/>
+              </a:rPr>
+              <a:t>Skills del proyecto</a:t>
+            </a:r>
+            <a:endParaRPr lang="en-US" sz="1800" dirty="0"/>
+          </a:p>
+        </p:txBody>
+      </p:sp>
+      <p:sp>
+        <p:nvSpPr>
+          <p:cNvPr id="18" name="Text 16"/>
+          <p:cNvSpPr txBox="1"/>
+          <p:nvPr/>
+        </p:nvSpPr>
+        <p:spPr>
+          <a:xfrm>
+            <a:off x="8293608" y="2606040"/>
+            <a:ext cx="3108960" cy="3291840"/>
+          </a:xfrm>
+          <a:prstGeom prst="rect">
+            <a:avLst/>
+          </a:prstGeom>
+          <a:noFill/>
+          <a:ln/>
+        </p:spPr>
+        <p:txBody>
+          <a:bodyPr wrap="square" lIns="0" tIns="0" rIns="0" bIns="0" rtlCol="0" anchor="t"/>
+          <a:lstStyle/>
           <a:p>
             <a:pPr marL="203200" indent="-203200">
               <a:spcAft>
@@ -15805,7 +15817,7 @@
               <a:buChar char="•"/>
             </a:pPr>
             <a:r>
-              <a:rPr lang="en-US" sz="1400" dirty="0">
+              <a:rPr lang="en-US" sz="1350" dirty="0">
                 <a:solidFill>
                   <a:srgbClr val="1F2A33"/>
                 </a:solidFill>
@@ -15813,9 +15825,51 @@
                 <a:ea typeface="Calibri" pitchFamily="34" charset="-122"/>
                 <a:cs typeface="Calibri" pitchFamily="34" charset="-120"/>
               </a:rPr>
-              <a:t>Cómo cerrar: registrar en la bitácora, hacer commit con la identidad de la persona y subir.</a:t>
-            </a:r>
-            <a:endParaRPr lang="en-US" sz="1400" dirty="0"/>
+              <a:t>Un procedimiento que se repite se escribe una vez como skill, versionada en el repositorio.</a:t>
+            </a:r>
+            <a:endParaRPr lang="en-US" sz="1350" dirty="0"/>
+          </a:p>
+          <a:p>
+            <a:pPr marL="203200" indent="-203200">
+              <a:spcAft>
+                <a:spcPts val="800"/>
+              </a:spcAft>
+              <a:buSzPct val="100000"/>
+              <a:buChar char="•"/>
+            </a:pPr>
+            <a:r>
+              <a:rPr lang="en-US" sz="1350" dirty="0">
+                <a:solidFill>
+                  <a:srgbClr val="1F2A33"/>
+                </a:solidFill>
+                <a:latin typeface="Calibri" pitchFamily="34" charset="0"/>
+                <a:ea typeface="Calibri" pitchFamily="34" charset="-122"/>
+                <a:cs typeface="Calibri" pitchFamily="34" charset="-120"/>
+              </a:rPr>
+              <a:t>Ejemplo: gestionar-skills, para incorporar una skill nueva con su origen, versión y licencia.</a:t>
+            </a:r>
+            <a:endParaRPr lang="en-US" sz="1350" dirty="0"/>
+          </a:p>
+          <a:p>
+            <a:pPr marL="203200" indent="-203200">
+              <a:spcAft>
+                <a:spcPts val="800"/>
+              </a:spcAft>
+              <a:buSzPct val="100000"/>
+              <a:buChar char="•"/>
+            </a:pPr>
+            <a:r>
+              <a:rPr lang="en-US" sz="1350" dirty="0">
+                <a:solidFill>
+                  <a:srgbClr val="1F2A33"/>
+                </a:solidFill>
+                <a:latin typeface="Calibri" pitchFamily="34" charset="0"/>
+                <a:ea typeface="Calibri" pitchFamily="34" charset="-122"/>
+                <a:cs typeface="Calibri" pitchFamily="34" charset="-120"/>
+              </a:rPr>
+              <a:t>Mismo pedido, mismo resultado, para cualquier integrante.</a:t>
+            </a:r>
+            <a:endParaRPr lang="en-US" sz="1350" dirty="0"/>
           </a:p>
         </p:txBody>
       </p:sp>

--- a/07-Entregables/PC1/Rumbo — PC1 (presentación).pptx
+++ b/07-Entregables/PC1/Rumbo — PC1 (presentación).pptx
@@ -3696,7 +3696,7 @@
       </p:sp>
       <p:pic>
         <p:nvPicPr>
-          <p:cNvPr id="7" name="Image 0" descr="C:\Users\lucia\OneDrive\Desktop\Trabajo de campo\Vault-Rumbo\07-Entregables\Prototipo\img\03-cu14-agenda.png">    </p:cNvPr>
+          <p:cNvPr id="7" name="Image 0" descr="C:\Users\Usuario\Desktop\Vault-Rumbo\07-Entregables\Prototipo\img\03-cu14-agenda.png">    </p:cNvPr>
           <p:cNvPicPr>
             <a:picLocks noChangeAspect="1"/>
           </p:cNvPicPr>
@@ -3820,7 +3820,7 @@
       </p:sp>
       <p:pic>
         <p:nvPicPr>
-          <p:cNvPr id="11" name="Image 1" descr="C:\Users\lucia\OneDrive\Desktop\Trabajo de campo\Vault-Rumbo\07-Entregables\Prototipo\img\49-admin-agenda-agencia.png">    </p:cNvPr>
+          <p:cNvPr id="11" name="Image 1" descr="C:\Users\Usuario\Desktop\Vault-Rumbo\07-Entregables\Prototipo\img\49-admin-agenda-agencia.png">    </p:cNvPr>
           <p:cNvPicPr>
             <a:picLocks noChangeAspect="1"/>
           </p:cNvPicPr>
@@ -3944,7 +3944,7 @@
       </p:sp>
       <p:pic>
         <p:nvPicPr>
-          <p:cNvPr id="15" name="Image 2" descr="C:\Users\lucia\OneDrive\Desktop\Trabajo de campo\Vault-Rumbo\07-Entregables\Prototipo\img\28-cu21-dashboard.png">    </p:cNvPr>
+          <p:cNvPr id="15" name="Image 2" descr="C:\Users\Usuario\Desktop\Vault-Rumbo\07-Entregables\Prototipo\img\28-cu21-dashboard.png">    </p:cNvPr>
           <p:cNvPicPr>
             <a:picLocks noChangeAspect="1"/>
           </p:cNvPicPr>
@@ -4060,7 +4060,7 @@
                 <a:ea typeface="Calibri" pitchFamily="34" charset="-122"/>
                 <a:cs typeface="Calibri" pitchFamily="34" charset="-120"/>
               </a:rPr>
-              <a:t>Dashboard y reportes de la empresa</a:t>
+              <a:t>Todo lo del admin, más el dashboard y los reportes de la empresa</a:t>
             </a:r>
             <a:endParaRPr lang="en-US" sz="1300" dirty="0"/>
           </a:p>
@@ -4068,7 +4068,7 @@
       </p:sp>
       <p:pic>
         <p:nvPicPr>
-          <p:cNvPr id="19" name="Image 3" descr="C:\Users\lucia\OneDrive\Desktop\Trabajo de campo\Vault-Rumbo\07-Entregables\Prototipo\img\34-freelance-embudo.png">    </p:cNvPr>
+          <p:cNvPr id="19" name="Image 3" descr="C:\Users\Usuario\Desktop\Vault-Rumbo\07-Entregables\Prototipo\img\34-freelance-embudo.png">    </p:cNvPr>
           <p:cNvPicPr>
             <a:picLocks noChangeAspect="1"/>
           </p:cNvPicPr>
@@ -4402,7 +4402,7 @@
       </p:sp>
       <p:pic>
         <p:nvPicPr>
-          <p:cNvPr id="7" name="Image 0" descr="C:\Users\lucia\OneDrive\Desktop\Trabajo de campo\Vault-Rumbo\07-Entregables\Prototipo\img\35-mobile-agenda.png">    </p:cNvPr>
+          <p:cNvPr id="7" name="Image 0" descr="C:\Users\Usuario\Desktop\Vault-Rumbo\07-Entregables\Prototipo\img\35-mobile-agenda.png">    </p:cNvPr>
           <p:cNvPicPr>
             <a:picLocks noChangeAspect="1"/>
           </p:cNvPicPr>
@@ -4450,7 +4450,7 @@
       </p:sp>
       <p:pic>
         <p:nvPicPr>
-          <p:cNvPr id="9" name="Image 1" descr="C:\Users\lucia\OneDrive\Desktop\Trabajo de campo\Vault-Rumbo\07-Entregables\Prototipo\img\53-mobile-detalle-alerta.png">    </p:cNvPr>
+          <p:cNvPr id="9" name="Image 1" descr="C:\Users\Usuario\Desktop\Vault-Rumbo\07-Entregables\Prototipo\img\53-mobile-detalle-alerta.png">    </p:cNvPr>
           <p:cNvPicPr>
             <a:picLocks noChangeAspect="1"/>
           </p:cNvPicPr>
@@ -4498,7 +4498,7 @@
       </p:sp>
       <p:pic>
         <p:nvPicPr>
-          <p:cNvPr id="11" name="Image 2" descr="C:\Users\lucia\OneDrive\Desktop\Trabajo de campo\Vault-Rumbo\07-Entregables\Prototipo\img\57-mobile-clientes.png">    </p:cNvPr>
+          <p:cNvPr id="11" name="Image 2" descr="C:\Users\Usuario\Desktop\Vault-Rumbo\07-Entregables\Prototipo\img\57-mobile-clientes.png">    </p:cNvPr>
           <p:cNvPicPr>
             <a:picLocks noChangeAspect="1"/>
           </p:cNvPicPr>
@@ -4546,7 +4546,7 @@
       </p:sp>
       <p:pic>
         <p:nvPicPr>
-          <p:cNvPr id="13" name="Image 3" descr="C:\Users\lucia\OneDrive\Desktop\Trabajo de campo\Vault-Rumbo\07-Entregables\Prototipo\img\36-mobile-ficha-cliente.png">    </p:cNvPr>
+          <p:cNvPr id="13" name="Image 3" descr="C:\Users\Usuario\Desktop\Vault-Rumbo\07-Entregables\Prototipo\img\36-mobile-ficha-cliente.png">    </p:cNvPr>
           <p:cNvPicPr>
             <a:picLocks noChangeAspect="1"/>
           </p:cNvPicPr>
@@ -7478,7 +7478,7 @@
       </p:sp>
       <p:pic>
         <p:nvPicPr>
-          <p:cNvPr id="7" name="Image 0" descr="C:\Users\lucia\OneDrive\Desktop\Trabajo de campo\Vault-Rumbo\03-Dominio\Diagramas\Clases\DGM-clases.png">    </p:cNvPr>
+          <p:cNvPr id="7" name="Image 0" descr="C:\Users\Usuario\Desktop\Vault-Rumbo\03-Dominio\Diagramas\Clases\DGM-clases.png">    </p:cNvPr>
           <p:cNvPicPr>
             <a:picLocks noChangeAspect="1"/>
           </p:cNvPicPr>
@@ -7946,7 +7946,7 @@
       </p:sp>
       <p:pic>
         <p:nvPicPr>
-          <p:cNvPr id="7" name="Image 0" descr="C:\Users\lucia\OneDrive\Desktop\Trabajo de campo\Vault-Rumbo\05-Diseño\Arquitectura\img\ARQ-despliegue.png">    </p:cNvPr>
+          <p:cNvPr id="7" name="Image 0" descr="C:\Users\Usuario\Desktop\Vault-Rumbo\05-Diseño\Arquitectura\img\ARQ-despliegue.png">    </p:cNvPr>
           <p:cNvPicPr>
             <a:picLocks noChangeAspect="1"/>
           </p:cNvPicPr>
@@ -8350,7 +8350,7 @@
       </p:sp>
       <p:pic>
         <p:nvPicPr>
-          <p:cNvPr id="7" name="Image 0" descr="C:\Users\lucia\OneDrive\Desktop\Trabajo de campo\Vault-Rumbo\05-Diseño\Arquitectura\img\ARQ-C4-1-contexto.png">    </p:cNvPr>
+          <p:cNvPr id="7" name="Image 0" descr="C:\Users\Usuario\Desktop\Vault-Rumbo\05-Diseño\Arquitectura\img\ARQ-C4-1-contexto.png">    </p:cNvPr>
           <p:cNvPicPr>
             <a:picLocks noChangeAspect="1"/>
           </p:cNvPicPr>
@@ -8374,7 +8374,7 @@
       </p:pic>
       <p:pic>
         <p:nvPicPr>
-          <p:cNvPr id="8" name="Image 1" descr="C:\Users\lucia\OneDrive\Desktop\Trabajo de campo\Vault-Rumbo\05-Diseño\Arquitectura\img\ARQ-C4-2-contenedores.png">    </p:cNvPr>
+          <p:cNvPr id="8" name="Image 1" descr="C:\Users\Usuario\Desktop\Vault-Rumbo\05-Diseño\Arquitectura\img\ARQ-C4-2-contenedores.png">    </p:cNvPr>
           <p:cNvPicPr>
             <a:picLocks noChangeAspect="1"/>
           </p:cNvPicPr>
@@ -8686,7 +8686,7 @@
       </p:sp>
       <p:pic>
         <p:nvPicPr>
-          <p:cNvPr id="7" name="Image 0" descr="C:\Users\lucia\OneDrive\Desktop\Trabajo de campo\Vault-Rumbo\05-Diseño\Arquitectura\img\ARQ-C4-3-componentes.png">    </p:cNvPr>
+          <p:cNvPr id="7" name="Image 0" descr="C:\Users\Usuario\Desktop\Vault-Rumbo\05-Diseño\Arquitectura\img\ARQ-C4-3-componentes.png">    </p:cNvPr>
           <p:cNvPicPr>
             <a:picLocks noChangeAspect="1"/>
           </p:cNvPicPr>
@@ -9048,7 +9048,7 @@
       </p:sp>
       <p:pic>
         <p:nvPicPr>
-          <p:cNvPr id="7" name="Image 0" descr="C:\Users\lucia\OneDrive\Desktop\Trabajo de campo\Vault-Rumbo\03-Dominio\Diagramas\DER\DGM-ER.png">    </p:cNvPr>
+          <p:cNvPr id="7" name="Image 0" descr="C:\Users\Usuario\Desktop\Vault-Rumbo\03-Dominio\Diagramas\DER\DGM-ER.png">    </p:cNvPr>
           <p:cNvPicPr>
             <a:picLocks noChangeAspect="1"/>
           </p:cNvPicPr>
@@ -9535,7 +9535,7 @@
       </p:sp>
       <p:pic>
         <p:nvPicPr>
-          <p:cNvPr id="7" name="Image 0" descr="C:\Users\lucia\OneDrive\Desktop\Trabajo de campo\Vault-Rumbo\05-Diseño\Arquitectura\img\ARQ-MVC.png">    </p:cNvPr>
+          <p:cNvPr id="7" name="Image 0" descr="C:\Users\Usuario\Desktop\Vault-Rumbo\05-Diseño\Arquitectura\img\ARQ-MVC.png">    </p:cNvPr>
           <p:cNvPicPr>
             <a:picLocks noChangeAspect="1"/>
           </p:cNvPicPr>
@@ -16342,7 +16342,7 @@
       </p:sp>
       <p:pic>
         <p:nvPicPr>
-          <p:cNvPr id="10" name="Image 0" descr="C:\Users\lucia\OneDrive\Desktop\Trabajo de campo\Vault-Rumbo\05-Diseño\img\DES-pipeline-calidad.png">    </p:cNvPr>
+          <p:cNvPr id="10" name="Image 0" descr="C:\Users\Usuario\Desktop\Vault-Rumbo\05-Diseño\img\DES-pipeline-calidad.png">    </p:cNvPr>
           <p:cNvPicPr>
             <a:picLocks noChangeAspect="1"/>
           </p:cNvPicPr>
@@ -16615,7 +16615,7 @@
       </p:sp>
       <p:pic>
         <p:nvPicPr>
-          <p:cNvPr id="7" name="Image 0" descr="C:\Users\lucia\OneDrive\Desktop\Trabajo de campo\Vault-Rumbo\05-Diseño\img\DES-iteraciones.png">    </p:cNvPr>
+          <p:cNvPr id="7" name="Image 0" descr="C:\Users\Usuario\Desktop\Vault-Rumbo\05-Diseño\img\DES-iteraciones.png">    </p:cNvPr>
           <p:cNvPicPr>
             <a:picLocks noChangeAspect="1"/>
           </p:cNvPicPr>
@@ -17269,7 +17269,7 @@
       </p:sp>
       <p:pic>
         <p:nvPicPr>
-          <p:cNvPr id="7" name="Image 0" descr="C:\Users\lucia\OneDrive\Desktop\Trabajo de campo\Vault-Rumbo\05-Diseño\img\DES-pipeline-calidad.png">    </p:cNvPr>
+          <p:cNvPr id="7" name="Image 0" descr="C:\Users\Usuario\Desktop\Vault-Rumbo\05-Diseño\img\DES-pipeline-calidad.png">    </p:cNvPr>
           <p:cNvPicPr>
             <a:picLocks noChangeAspect="1"/>
           </p:cNvPicPr>
@@ -26760,7 +26760,7 @@
       </p:sp>
       <p:pic>
         <p:nvPicPr>
-          <p:cNvPr id="7" name="Image 0" descr="C:\Users\lucia\OneDrive\Desktop\Trabajo de campo\Vault-Rumbo\05-Diseño\Arquitectura\img\ARQ-capas-conceptual.png">    </p:cNvPr>
+          <p:cNvPr id="7" name="Image 0" descr="C:\Users\Usuario\Desktop\Vault-Rumbo\05-Diseño\Arquitectura\img\ARQ-capas-conceptual.png">    </p:cNvPr>
           <p:cNvPicPr>
             <a:picLocks noChangeAspect="1"/>
           </p:cNvPicPr>
@@ -27309,7 +27309,7 @@
       </p:sp>
       <p:pic>
         <p:nvPicPr>
-          <p:cNvPr id="7" name="Image 0" descr="C:\Users\lucia\OneDrive\Desktop\Trabajo de campo\Vault-Rumbo\07-Entregables\Prototipo\img\03-cu14-agenda.png">    </p:cNvPr>
+          <p:cNvPr id="7" name="Image 0" descr="C:\Users\Usuario\Desktop\Vault-Rumbo\07-Entregables\Prototipo\img\03-cu14-agenda.png">    </p:cNvPr>
           <p:cNvPicPr>
             <a:picLocks noChangeAspect="1"/>
           </p:cNvPicPr>

--- a/07-Entregables/PC1/Rumbo — PC1 (presentación).pptx
+++ b/07-Entregables/PC1/Rumbo — PC1 (presentación).pptx
@@ -4,6 +4,9 @@
   <p:sldMasterIdLst>
     <p:sldMasterId id="2147483648" r:id="rId1"/>
   </p:sldMasterIdLst>
+  <p:notesMasterIdLst>
+    <p:notesMasterId r:id="rId29"/>
+  </p:notesMasterIdLst>
   <p:sldIdLst>
     <p:sldId id="256" r:id="rId2"/>
     <p:sldId id="257" r:id="rId3"/>
@@ -33,9 +36,6 @@
     <p:sldId id="281" r:id="rId27"/>
     <p:sldId id="282" r:id="rId28"/>
   </p:sldIdLst>
-  <p:notesMasterIdLst>
-    <p:notesMasterId r:id="rId29"/>
-  </p:notesMasterIdLst>
   <p:sldSz cx="12192000" cy="6858000"/>
   <p:notesSz cx="6858000" cy="12192000"/>
   <p:defaultTextStyle>
@@ -130,6 +130,11 @@
       </a:defRPr>
     </a:lvl9pPr>
   </p:defaultTextStyle>
+  <p:extLst>
+    <p:ext uri="{EFAFB233-063F-42B5-8137-9DF3F51BA10A}">
+      <p15:sldGuideLst xmlns:p15="http://schemas.microsoft.com/office/powerpoint/2012/main"/>
+    </p:ext>
+  </p:extLst>
 </p:presentation>
 </file>
 
@@ -155,234 +160,10 @@
           <a:chExt cx="0" cy="0"/>
         </a:xfrm>
       </p:grpSpPr>
-      <p:sp>
-        <p:nvSpPr>
-          <p:cNvPr id="2" name="Header Placeholder 1"/>
-          <p:cNvSpPr>
-            <a:spLocks noGrp="1"/>
-          </p:cNvSpPr>
-          <p:nvPr>
-            <p:ph type="hdr" sz="quarter"/>
-          </p:nvPr>
-        </p:nvSpPr>
-        <p:spPr>
-          <a:xfrm>
-            <a:off x="0" y="0"/>
-            <a:ext cx="2971800" cy="458788"/>
-          </a:xfrm>
-          <a:prstGeom prst="rect">
-            <a:avLst/>
-          </a:prstGeom>
-        </p:spPr>
-        <p:txBody>
-          <a:bodyPr vert="horz" lIns="91440" tIns="45720" rIns="91440" bIns="45720" rtlCol="0"/>
-          <a:lstStyle>
-            <a:lvl1pPr algn="l">
-              <a:defRPr sz="1200"/>
-            </a:lvl1pPr>
-          </a:lstStyle>
-          <a:p>
-            <a:endParaRPr lang="en-US"/>
-          </a:p>
-        </p:txBody>
-      </p:sp>
-      <p:sp>
-        <p:nvSpPr>
-          <p:cNvPr id="3" name="Date Placeholder 2"/>
-          <p:cNvSpPr>
-            <a:spLocks noGrp="1"/>
-          </p:cNvSpPr>
-          <p:nvPr>
-            <p:ph type="dt" idx="1"/>
-          </p:nvPr>
-        </p:nvSpPr>
-        <p:spPr>
-          <a:xfrm>
-            <a:off x="3884613" y="0"/>
-            <a:ext cx="2971800" cy="458788"/>
-          </a:xfrm>
-          <a:prstGeom prst="rect">
-            <a:avLst/>
-          </a:prstGeom>
-        </p:spPr>
-        <p:txBody>
-          <a:bodyPr vert="horz" lIns="91440" tIns="45720" rIns="91440" bIns="45720" rtlCol="0"/>
-          <a:lstStyle>
-            <a:lvl1pPr algn="r">
-              <a:defRPr sz="1200"/>
-            </a:lvl1pPr>
-          </a:lstStyle>
-          <a:p>
-            <a:fld id="{5282F153-3F37-0F45-9E97-73ACFA13230C}" type="datetimeFigureOut">
-              <a:rPr lang="en-US"/>
-              <a:t>7/23/19</a:t>
-            </a:fld>
-            <a:endParaRPr lang="en-US"/>
-          </a:p>
-        </p:txBody>
-      </p:sp>
-      <p:sp>
-        <p:nvSpPr>
-          <p:cNvPr id="4" name="Slide Image Placeholder 3"/>
-          <p:cNvSpPr>
-            <a:spLocks noGrp="1" noRot="1" noChangeAspect="1"/>
-          </p:cNvSpPr>
-          <p:nvPr>
-            <p:ph type="sldImg" idx="2"/>
-          </p:nvPr>
-        </p:nvSpPr>
-        <p:spPr>
-          <a:xfrm>
-            <a:off x="685800" y="1143000"/>
-            <a:ext cx="5486400" cy="3086100"/>
-          </a:xfrm>
-          <a:prstGeom prst="rect">
-            <a:avLst/>
-          </a:prstGeom>
-          <a:noFill/>
-          <a:ln w="12700">
-            <a:solidFill>
-              <a:prstClr val="black"/>
-            </a:solidFill>
-          </a:ln>
-        </p:spPr>
-        <p:txBody>
-          <a:bodyPr vert="horz" lIns="91440" tIns="45720" rIns="91440" bIns="45720" rtlCol="0" anchor="ctr"/>
-          <a:lstStyle/>
-          <a:p>
-            <a:endParaRPr lang="en-US"/>
-          </a:p>
-        </p:txBody>
-      </p:sp>
-      <p:sp>
-        <p:nvSpPr>
-          <p:cNvPr id="5" name="Notes Placeholder 4"/>
-          <p:cNvSpPr>
-            <a:spLocks noGrp="1"/>
-          </p:cNvSpPr>
-          <p:nvPr>
-            <p:ph type="body" sz="quarter" idx="3"/>
-          </p:nvPr>
-        </p:nvSpPr>
-        <p:spPr>
-          <a:xfrm>
-            <a:off x="685800" y="4400550"/>
-            <a:ext cx="5486400" cy="3600450"/>
-          </a:xfrm>
-          <a:prstGeom prst="rect">
-            <a:avLst/>
-          </a:prstGeom>
-        </p:spPr>
-        <p:txBody>
-          <a:bodyPr vert="horz" lIns="91440" tIns="45720" rIns="91440" bIns="45720" rtlCol="0"/>
-          <a:lstStyle/>
-          <a:p>
-            <a:pPr lvl="0"/>
-            <a:r>
-              <a:rPr lang="en-US"/>
-              <a:t>Click to edit Master text styles</a:t>
-            </a:r>
-          </a:p>
-          <a:p>
-            <a:pPr lvl="1"/>
-            <a:r>
-              <a:rPr lang="en-US"/>
-              <a:t>Second level</a:t>
-            </a:r>
-          </a:p>
-          <a:p>
-            <a:pPr lvl="2"/>
-            <a:r>
-              <a:rPr lang="en-US"/>
-              <a:t>Third level</a:t>
-            </a:r>
-          </a:p>
-          <a:p>
-            <a:pPr lvl="3"/>
-            <a:r>
-              <a:rPr lang="en-US"/>
-              <a:t>Fourth level</a:t>
-            </a:r>
-          </a:p>
-          <a:p>
-            <a:pPr lvl="4"/>
-            <a:r>
-              <a:rPr lang="en-US"/>
-              <a:t>Fifth level</a:t>
-            </a:r>
-          </a:p>
-        </p:txBody>
-      </p:sp>
-      <p:sp>
-        <p:nvSpPr>
-          <p:cNvPr id="6" name="Footer Placeholder 5"/>
-          <p:cNvSpPr>
-            <a:spLocks noGrp="1"/>
-          </p:cNvSpPr>
-          <p:nvPr>
-            <p:ph type="ftr" sz="quarter" idx="4"/>
-          </p:nvPr>
-        </p:nvSpPr>
-        <p:spPr>
-          <a:xfrm>
-            <a:off x="0" y="8685213"/>
-            <a:ext cx="2971800" cy="458787"/>
-          </a:xfrm>
-          <a:prstGeom prst="rect">
-            <a:avLst/>
-          </a:prstGeom>
-        </p:spPr>
-        <p:txBody>
-          <a:bodyPr vert="horz" lIns="91440" tIns="45720" rIns="91440" bIns="45720" rtlCol="0" anchor="b"/>
-          <a:lstStyle>
-            <a:lvl1pPr algn="l">
-              <a:defRPr sz="1200"/>
-            </a:lvl1pPr>
-          </a:lstStyle>
-          <a:p>
-            <a:endParaRPr lang="en-US"/>
-          </a:p>
-        </p:txBody>
-      </p:sp>
-      <p:sp>
-        <p:nvSpPr>
-          <p:cNvPr id="7" name="Slide Number Placeholder 6"/>
-          <p:cNvSpPr>
-            <a:spLocks noGrp="1"/>
-          </p:cNvSpPr>
-          <p:nvPr>
-            <p:ph type="sldNum" sz="quarter" idx="5"/>
-          </p:nvPr>
-        </p:nvSpPr>
-        <p:spPr>
-          <a:xfrm>
-            <a:off x="3884613" y="8685213"/>
-            <a:ext cx="2971800" cy="458787"/>
-          </a:xfrm>
-          <a:prstGeom prst="rect">
-            <a:avLst/>
-          </a:prstGeom>
-        </p:spPr>
-        <p:txBody>
-          <a:bodyPr vert="horz" lIns="91440" tIns="45720" rIns="91440" bIns="45720" rtlCol="0" anchor="b"/>
-          <a:lstStyle>
-            <a:lvl1pPr algn="r">
-              <a:defRPr sz="1200"/>
-            </a:lvl1pPr>
-          </a:lstStyle>
-          <a:p>
-            <a:fld id="{CE5E9CC1-C706-0F49-92D6-E571CC5EEA8F}" type="slidenum">
-              <a:rPr lang="en-US"/>
-              <a:t>‹#›</a:t>
-            </a:fld>
-            <a:endParaRPr lang="en-US"/>
-          </a:p>
-        </p:txBody>
-      </p:sp>
     </p:spTree>
     <p:extLst>
       <p:ext uri="{BB962C8B-B14F-4D97-AF65-F5344CB8AC3E}">
-        <p14:creationId xmlns:p14="http://schemas.microsoft.com/office/powerpoint/2010/main" val="1024086991"/>
+        <p14:creationId xmlns:p14="http://schemas.microsoft.com/office/powerpoint/2010/main" val="1821385458"/>
       </p:ext>
     </p:extLst>
   </p:cSld>
@@ -530,7 +311,6 @@
               <a:rPr lang="en-US" dirty="0"/>
               <a:t>Presentación del equipo y del proyecto. Rumbo es un CRM a medida para una agencia de turismo PyME real, con la que hicimos el relevamiento en dos rondas.</a:t>
             </a:r>
-            <a:endParaRPr lang="en-US" dirty="0"/>
           </a:p>
         </p:txBody>
       </p:sp>
@@ -614,10 +394,6 @@
           <a:bodyPr/>
           <a:lstStyle/>
           <a:p>
-            <a:r>
-              <a:rPr lang="en-US" dirty="0"/>
-              <a:t/>
-            </a:r>
             <a:endParaRPr lang="en-US" dirty="0"/>
           </a:p>
         </p:txBody>
@@ -702,10 +478,6 @@
           <a:bodyPr/>
           <a:lstStyle/>
           <a:p>
-            <a:r>
-              <a:rPr lang="en-US" dirty="0"/>
-              <a:t/>
-            </a:r>
             <a:endParaRPr lang="en-US" dirty="0"/>
           </a:p>
         </p:txBody>
@@ -794,7 +566,6 @@
               <a:rPr lang="en-US" dirty="0"/>
               <a:t>Si hay tiempo, demo en vivo desde Figma. Si no, las capturas de las diapositivas anteriores alcanzan.</a:t>
             </a:r>
-            <a:endParaRPr lang="en-US" dirty="0"/>
           </a:p>
         </p:txBody>
       </p:sp>
@@ -882,7 +653,6 @@
               <a:rPr lang="en-US" dirty="0"/>
               <a:t>CU-01 De la consulta a la venta: 5 pasos. Diagramas de secuencia, actividad y estados en los anexos del documento.</a:t>
             </a:r>
-            <a:endParaRPr lang="en-US" dirty="0"/>
           </a:p>
         </p:txBody>
       </p:sp>
@@ -970,7 +740,6 @@
               <a:rPr lang="en-US" dirty="0"/>
               <a:t>Cliente, Oportunidad, Cotización, Viaje, Pago, Alerta, Hotel, Reseña, Usuario, ContenidoRed, Destino, RequisitoDestino y Operador, más la clase asociativa ViajeHotel.</a:t>
             </a:r>
-            <a:endParaRPr lang="en-US" dirty="0"/>
           </a:p>
         </p:txBody>
       </p:sp>
@@ -1054,10 +823,6 @@
           <a:bodyPr/>
           <a:lstStyle/>
           <a:p>
-            <a:r>
-              <a:rPr lang="en-US" dirty="0"/>
-              <a:t/>
-            </a:r>
             <a:endParaRPr lang="en-US" dirty="0"/>
           </a:p>
         </p:txBody>
@@ -1142,10 +907,6 @@
           <a:bodyPr/>
           <a:lstStyle/>
           <a:p>
-            <a:r>
-              <a:rPr lang="en-US" dirty="0"/>
-              <a:t/>
-            </a:r>
             <a:endParaRPr lang="en-US" dirty="0"/>
           </a:p>
         </p:txBody>
@@ -1230,10 +991,6 @@
           <a:bodyPr/>
           <a:lstStyle/>
           <a:p>
-            <a:r>
-              <a:rPr lang="en-US" dirty="0"/>
-              <a:t/>
-            </a:r>
             <a:endParaRPr lang="en-US" dirty="0"/>
           </a:p>
         </p:txBody>
@@ -1318,10 +1075,6 @@
           <a:bodyPr/>
           <a:lstStyle/>
           <a:p>
-            <a:r>
-              <a:rPr lang="en-US" dirty="0"/>
-              <a:t/>
-            </a:r>
             <a:endParaRPr lang="en-US" dirty="0"/>
           </a:p>
         </p:txBody>
@@ -1406,10 +1159,6 @@
           <a:bodyPr/>
           <a:lstStyle/>
           <a:p>
-            <a:r>
-              <a:rPr lang="en-US" dirty="0"/>
-              <a:t/>
-            </a:r>
             <a:endParaRPr lang="en-US" dirty="0"/>
           </a:p>
         </p:txBody>
@@ -1498,7 +1247,6 @@
               <a:rPr lang="en-US" dirty="0"/>
               <a:t>El orden sigue el contenido del «Documento con el MVC» que pide la cátedra, igual que el documento entregado. El material completo (anexos, todos los diagramas y pantallas) está en la carpeta de entrega.</a:t>
             </a:r>
-            <a:endParaRPr lang="en-US" dirty="0"/>
           </a:p>
         </p:txBody>
       </p:sp>
@@ -1586,7 +1334,6 @@
               <a:rPr lang="en-US" dirty="0"/>
               <a:t>Contrato preliminar: en PC2, el contrato de referencia pasa a ser el que genera FastAPI a medida que se escriben los endpoints.</a:t>
             </a:r>
-            <a:endParaRPr lang="en-US" dirty="0"/>
           </a:p>
         </p:txBody>
       </p:sp>
@@ -1670,10 +1417,6 @@
           <a:bodyPr/>
           <a:lstStyle/>
           <a:p>
-            <a:r>
-              <a:rPr lang="en-US" dirty="0"/>
-              <a:t/>
-            </a:r>
             <a:endParaRPr lang="en-US" dirty="0"/>
           </a:p>
         </p:txBody>
@@ -1758,10 +1501,6 @@
           <a:bodyPr/>
           <a:lstStyle/>
           <a:p>
-            <a:r>
-              <a:rPr lang="en-US" dirty="0"/>
-              <a:t/>
-            </a:r>
             <a:endParaRPr lang="en-US" dirty="0"/>
           </a:p>
         </p:txBody>
@@ -1850,7 +1589,6 @@
               <a:rPr lang="en-US" dirty="0"/>
               <a:t>El punto de control pide los prompts usados para construir el producto, que se desarrolla guiado con IA. CLAUDE.md completo y la skill van en la carpeta de entrega (08 · Agentes).</a:t>
             </a:r>
-            <a:endParaRPr lang="en-US" dirty="0"/>
           </a:p>
         </p:txBody>
       </p:sp>
@@ -1938,7 +1676,6 @@
               <a:rPr lang="en-US" dirty="0"/>
               <a:t>Mermaid permite que los diagramas vivan junto al análisis y se mantengan al día: si cambia el modelo, se cambia el código y se regenera la imagen.</a:t>
             </a:r>
-            <a:endParaRPr lang="en-US" dirty="0"/>
           </a:p>
         </p:txBody>
       </p:sp>
@@ -2026,7 +1763,6 @@
               <a:rPr lang="en-US" dirty="0"/>
               <a:t>Una iteración por punto de control: PC1 análisis y diseño (02/10), PC2 código (20/11), PC3 pruebas y documentación (04/12). Cada cierre deja un tag en Git.</a:t>
             </a:r>
-            <a:endParaRPr lang="en-US" dirty="0"/>
           </a:p>
         </p:txBody>
       </p:sp>
@@ -2110,10 +1846,6 @@
           <a:bodyPr/>
           <a:lstStyle/>
           <a:p>
-            <a:r>
-              <a:rPr lang="en-US" dirty="0"/>
-              <a:t/>
-            </a:r>
             <a:endParaRPr lang="en-US" dirty="0"/>
           </a:p>
         </p:txBody>
@@ -2202,7 +1934,6 @@
               <a:rPr lang="en-US" dirty="0"/>
               <a:t>Cierre y preguntas.</a:t>
             </a:r>
-            <a:endParaRPr lang="en-US" dirty="0"/>
           </a:p>
         </p:txBody>
       </p:sp>
@@ -2290,7 +2021,6 @@
               <a:rPr lang="en-US" dirty="0"/>
               <a:t>Situación actual tomada del relevamiento con la agencia (dos rondas: 10/09 y 17/09).</a:t>
             </a:r>
-            <a:endParaRPr lang="en-US" dirty="0"/>
           </a:p>
         </p:txBody>
       </p:sp>
@@ -2378,7 +2108,6 @@
               <a:rPr lang="en-US" dirty="0"/>
               <a:t>Los back office argentinos (SAVIA) cubren administración y facturación, pero no el seguimiento comercial ni el CRM proactivo.</a:t>
             </a:r>
-            <a:endParaRPr lang="en-US" dirty="0"/>
           </a:p>
         </p:txBody>
       </p:sp>
@@ -2466,7 +2195,6 @@
               <a:rPr lang="en-US" dirty="0"/>
               <a:t>Justificación: el trabajo manual pierde ventas y cobros; las herramientas genéricas no entienden reservas, comisiones ni cuotas; y como proyecto integrador combina web, mobile, backend, base relacional, API REST e IA.</a:t>
             </a:r>
-            <a:endParaRPr lang="en-US" dirty="0"/>
           </a:p>
         </p:txBody>
       </p:sp>
@@ -2550,10 +2278,6 @@
           <a:bodyPr/>
           <a:lstStyle/>
           <a:p>
-            <a:r>
-              <a:rPr lang="en-US" dirty="0"/>
-              <a:t/>
-            </a:r>
             <a:endParaRPr lang="en-US" dirty="0"/>
           </a:p>
         </p:txBody>
@@ -2642,7 +2366,6 @@
               <a:rPr lang="en-US" dirty="0"/>
               <a:t>Admin, dueña y freelance son especializaciones del empleado: heredan los casos operativos. El freelance no gestiona hoteles, no registra reseñas y no usa redes.</a:t>
             </a:r>
-            <a:endParaRPr lang="en-US" dirty="0"/>
           </a:p>
         </p:txBody>
       </p:sp>
@@ -2730,7 +2453,6 @@
               <a:rPr lang="en-US" dirty="0"/>
               <a:t>Cada capa se puede cambiar sin tocar las otras mientras se respete el contrato entre ellas: OpenAPI entre frontend y backend, y el esquema SQL entre backend y base de datos.</a:t>
             </a:r>
-            <a:endParaRPr lang="en-US" dirty="0"/>
           </a:p>
         </p:txBody>
       </p:sp>
@@ -2814,10 +2536,6 @@
           <a:bodyPr/>
           <a:lstStyle/>
           <a:p>
-            <a:r>
-              <a:rPr lang="en-US" dirty="0"/>
-              <a:t/>
-            </a:r>
             <a:endParaRPr lang="en-US" dirty="0"/>
           </a:p>
         </p:txBody>
@@ -2891,6 +2609,11 @@
 <file path=ppt/slideMasters/slideMaster1.xml><?xml version="1.0" encoding="utf-8"?>
 <p:sldMaster xmlns:a="http://schemas.openxmlformats.org/drawingml/2006/main" xmlns:r="http://schemas.openxmlformats.org/officeDocument/2006/relationships" xmlns:p="http://schemas.openxmlformats.org/presentationml/2006/main">
   <p:cSld>
+    <p:bg>
+      <p:bgRef idx="1001">
+        <a:schemeClr val="bg1"/>
+      </p:bgRef>
+    </p:bg>
     <p:spTree>
       <p:nvGrpSpPr>
         <p:cNvPr id="1" name=""/>
@@ -3173,6 +2896,7 @@
         <a:solidFill>
           <a:srgbClr val="17354C"/>
         </a:solidFill>
+        <a:effectLst/>
       </p:bgPr>
     </p:bg>
     <p:spTree>
@@ -3210,7 +2934,7 @@
           <a:bodyPr wrap="square" lIns="0" tIns="0" rIns="0" bIns="0" rtlCol="0" anchor="ctr"/>
           <a:lstStyle/>
           <a:p>
-            <a:pPr algn="r" indent="0" marL="0">
+            <a:pPr marL="0" indent="0" algn="r">
               <a:buNone/>
             </a:pPr>
             <a:r>
@@ -3271,7 +2995,7 @@
           <a:bodyPr wrap="square" lIns="0" tIns="0" rIns="0" bIns="0" rtlCol="0" anchor="ctr"/>
           <a:lstStyle/>
           <a:p>
-            <a:pPr algn="ctr" indent="0" marL="0">
+            <a:pPr marL="0" indent="0" algn="ctr">
               <a:buNone/>
             </a:pPr>
             <a:r>
@@ -3310,7 +3034,7 @@
           <a:bodyPr wrap="square" lIns="0" tIns="0" rIns="0" bIns="0" rtlCol="0" anchor="ctr"/>
           <a:lstStyle/>
           <a:p>
-            <a:pPr indent="0" marL="0">
+            <a:pPr marL="0" indent="0">
               <a:buNone/>
             </a:pPr>
             <a:r>
@@ -3349,7 +3073,7 @@
           <a:bodyPr wrap="square" lIns="0" tIns="0" rIns="0" bIns="0" rtlCol="0" anchor="ctr"/>
           <a:lstStyle/>
           <a:p>
-            <a:pPr indent="0" marL="0">
+            <a:pPr marL="0" indent="0">
               <a:buNone/>
             </a:pPr>
             <a:r>
@@ -3388,7 +3112,7 @@
           <a:bodyPr wrap="square" lIns="0" tIns="0" rIns="0" bIns="0" rtlCol="0" anchor="ctr"/>
           <a:lstStyle/>
           <a:p>
-            <a:pPr indent="0" marL="0">
+            <a:pPr marL="0" indent="0">
               <a:buNone/>
             </a:pPr>
             <a:r>
@@ -3427,7 +3151,7 @@
           <a:bodyPr wrap="square" lIns="0" tIns="0" rIns="0" bIns="0" rtlCol="0" anchor="ctr"/>
           <a:lstStyle/>
           <a:p>
-            <a:pPr indent="0" marL="0">
+            <a:pPr marL="0" indent="0">
               <a:buNone/>
             </a:pPr>
             <a:r>
@@ -3466,7 +3190,7 @@
           <a:bodyPr wrap="square" lIns="0" tIns="0" rIns="0" bIns="0" rtlCol="0" anchor="ctr"/>
           <a:lstStyle/>
           <a:p>
-            <a:pPr indent="0" marL="0">
+            <a:pPr marL="0" indent="0">
               <a:buNone/>
             </a:pPr>
             <a:r>
@@ -3500,6 +3224,7 @@
         <a:solidFill>
           <a:srgbClr val="F6F8FA"/>
         </a:solidFill>
+        <a:effectLst/>
       </p:bgPr>
     </p:bg>
     <p:spTree>
@@ -3537,11 +3262,11 @@
           <a:bodyPr wrap="square" lIns="0" tIns="0" rIns="0" bIns="0" rtlCol="0" anchor="ctr"/>
           <a:lstStyle/>
           <a:p>
-            <a:pPr indent="0" marL="0">
-              <a:buNone/>
-            </a:pPr>
-            <a:r>
-              <a:rPr lang="en-US" sz="1100" b="1" spc="200" kern="0" dirty="0">
+            <a:pPr marL="0" indent="0">
+              <a:buNone/>
+            </a:pPr>
+            <a:r>
+              <a:rPr lang="en-US" sz="1100" b="1" kern="0" spc="200" dirty="0">
                 <a:solidFill>
                   <a:srgbClr val="3E7196"/>
                 </a:solidFill>
@@ -3576,7 +3301,7 @@
           <a:bodyPr wrap="square" lIns="0" tIns="0" rIns="0" bIns="0" rtlCol="0" anchor="t"/>
           <a:lstStyle/>
           <a:p>
-            <a:pPr indent="0" marL="0">
+            <a:pPr marL="0" indent="0">
               <a:buNone/>
             </a:pPr>
             <a:r>
@@ -3591,67 +3316,6 @@
               <a:t>Una vista por perfil</a:t>
             </a:r>
             <a:endParaRPr lang="en-US" sz="3000" dirty="0"/>
-          </a:p>
-        </p:txBody>
-      </p:sp>
-      <p:sp>
-        <p:nvSpPr>
-          <p:cNvPr id="4" name="Shape 2"/>
-          <p:cNvSpPr/>
-          <p:nvPr/>
-        </p:nvSpPr>
-        <p:spPr>
-          <a:xfrm>
-            <a:off x="9722815" y="384048"/>
-            <a:ext cx="1920240" cy="365760"/>
-          </a:xfrm>
-          <a:prstGeom prst="roundRect">
-            <a:avLst>
-              <a:gd name="adj" fmla="val 50000"/>
-            </a:avLst>
-          </a:prstGeom>
-          <a:solidFill>
-            <a:srgbClr val="E9F1F7"/>
-          </a:solidFill>
-          <a:ln/>
-        </p:spPr>
-      </p:sp>
-      <p:sp>
-        <p:nvSpPr>
-          <p:cNvPr id="5" name="Text 3"/>
-          <p:cNvSpPr txBox="1"/>
-          <p:nvPr/>
-        </p:nvSpPr>
-        <p:spPr>
-          <a:xfrm>
-            <a:off x="9722815" y="384048"/>
-            <a:ext cx="1920240" cy="365760"/>
-          </a:xfrm>
-          <a:prstGeom prst="rect">
-            <a:avLst/>
-          </a:prstGeom>
-          <a:noFill/>
-          <a:ln/>
-        </p:spPr>
-        <p:txBody>
-          <a:bodyPr wrap="square" lIns="0" tIns="0" rIns="0" bIns="0" rtlCol="0" anchor="ctr"/>
-          <a:lstStyle/>
-          <a:p>
-            <a:pPr algn="ctr" indent="0" marL="0">
-              <a:buNone/>
-            </a:pPr>
-            <a:r>
-              <a:rPr lang="en-US" sz="1200" b="1" dirty="0">
-                <a:solidFill>
-                  <a:srgbClr val="22506F"/>
-                </a:solidFill>
-                <a:latin typeface="Calibri" pitchFamily="34" charset="0"/>
-                <a:ea typeface="Calibri" pitchFamily="34" charset="-122"/>
-                <a:cs typeface="Calibri" pitchFamily="34" charset="-120"/>
-              </a:rPr>
-              <a:t>Expone: Paloma</a:t>
-            </a:r>
-            <a:endParaRPr lang="en-US" sz="1200" dirty="0"/>
           </a:p>
         </p:txBody>
       </p:sp>
@@ -3676,7 +3340,7 @@
           <a:bodyPr wrap="square" lIns="0" tIns="0" rIns="0" bIns="0" rtlCol="0" anchor="ctr"/>
           <a:lstStyle/>
           <a:p>
-            <a:pPr algn="r" indent="0" marL="0">
+            <a:pPr marL="0" indent="0" algn="r">
               <a:buNone/>
             </a:pPr>
             <a:r>
@@ -3696,255 +3360,7 @@
       </p:sp>
       <p:pic>
         <p:nvPicPr>
-          <p:cNvPr id="7" name="Image 0" descr="C:\Users\Usuario\Desktop\Vault-Rumbo\07-Entregables\Prototipo\img\03-cu14-agenda.png">    </p:cNvPr>
-          <p:cNvPicPr>
-            <a:picLocks noChangeAspect="1"/>
-          </p:cNvPicPr>
-          <p:nvPr/>
-        </p:nvPicPr>
-        <p:blipFill>
-          <a:blip r:embed="rId1"/>
-          <a:stretch>
-            <a:fillRect/>
-          </a:stretch>
-        </p:blipFill>
-        <p:spPr>
-          <a:xfrm>
-            <a:off x="644236" y="1371600"/>
-            <a:ext cx="2826327" cy="2331720"/>
-          </a:xfrm>
-          <a:prstGeom prst="rect">
-            <a:avLst/>
-          </a:prstGeom>
-        </p:spPr>
-      </p:pic>
-      <p:sp>
-        <p:nvSpPr>
-          <p:cNvPr id="8" name="Shape 5"/>
-          <p:cNvSpPr/>
-          <p:nvPr/>
-        </p:nvSpPr>
-        <p:spPr>
-          <a:xfrm>
-            <a:off x="644236" y="1371600"/>
-            <a:ext cx="2826327" cy="2331720"/>
-          </a:xfrm>
-          <a:prstGeom prst="rect">
-            <a:avLst/>
-          </a:prstGeom>
-          <a:ln w="12700">
-            <a:solidFill>
-              <a:srgbClr val="D5DDE4"/>
-            </a:solidFill>
-            <a:prstDash val="solid"/>
-          </a:ln>
-        </p:spPr>
-      </p:sp>
-      <p:sp>
-        <p:nvSpPr>
-          <p:cNvPr id="9" name="Text 6"/>
-          <p:cNvSpPr txBox="1"/>
-          <p:nvPr/>
-        </p:nvSpPr>
-        <p:spPr>
-          <a:xfrm>
-            <a:off x="3749040" y="1828800"/>
-            <a:ext cx="2194560" cy="411480"/>
-          </a:xfrm>
-          <a:prstGeom prst="rect">
-            <a:avLst/>
-          </a:prstGeom>
-          <a:noFill/>
-          <a:ln/>
-        </p:spPr>
-        <p:txBody>
-          <a:bodyPr wrap="square" lIns="0" tIns="0" rIns="0" bIns="0" rtlCol="0" anchor="ctr"/>
-          <a:lstStyle/>
-          <a:p>
-            <a:pPr indent="0" marL="0">
-              <a:buNone/>
-            </a:pPr>
-            <a:r>
-              <a:rPr lang="en-US" sz="2000" b="1" dirty="0">
-                <a:solidFill>
-                  <a:srgbClr val="17354C"/>
-                </a:solidFill>
-                <a:latin typeface="Calibri" pitchFamily="34" charset="0"/>
-                <a:ea typeface="Calibri" pitchFamily="34" charset="-122"/>
-                <a:cs typeface="Calibri" pitchFamily="34" charset="-120"/>
-              </a:rPr>
-              <a:t>Empleado</a:t>
-            </a:r>
-            <a:endParaRPr lang="en-US" sz="2000" dirty="0"/>
-          </a:p>
-        </p:txBody>
-      </p:sp>
-      <p:sp>
-        <p:nvSpPr>
-          <p:cNvPr id="10" name="Text 7"/>
-          <p:cNvSpPr txBox="1"/>
-          <p:nvPr/>
-        </p:nvSpPr>
-        <p:spPr>
-          <a:xfrm>
-            <a:off x="3749040" y="2286000"/>
-            <a:ext cx="2194560" cy="914400"/>
-          </a:xfrm>
-          <a:prstGeom prst="rect">
-            <a:avLst/>
-          </a:prstGeom>
-          <a:noFill/>
-          <a:ln/>
-        </p:spPr>
-        <p:txBody>
-          <a:bodyPr wrap="square" lIns="0" tIns="0" rIns="0" bIns="0" rtlCol="0" anchor="ctr"/>
-          <a:lstStyle/>
-          <a:p>
-            <a:pPr indent="0" marL="0">
-              <a:buNone/>
-            </a:pPr>
-            <a:r>
-              <a:rPr lang="en-US" sz="1300" dirty="0">
-                <a:solidFill>
-                  <a:srgbClr val="5B6B78"/>
-                </a:solidFill>
-                <a:latin typeface="Calibri" pitchFamily="34" charset="0"/>
-                <a:ea typeface="Calibri" pitchFamily="34" charset="-122"/>
-                <a:cs typeface="Calibri" pitchFamily="34" charset="-120"/>
-              </a:rPr>
-              <a:t>Todo el circuito; su agenda y su dashboard</a:t>
-            </a:r>
-            <a:endParaRPr lang="en-US" sz="1300" dirty="0"/>
-          </a:p>
-        </p:txBody>
-      </p:sp>
-      <p:pic>
-        <p:nvPicPr>
-          <p:cNvPr id="11" name="Image 1" descr="C:\Users\Usuario\Desktop\Vault-Rumbo\07-Entregables\Prototipo\img\49-admin-agenda-agencia.png">    </p:cNvPr>
-          <p:cNvPicPr>
-            <a:picLocks noChangeAspect="1"/>
-          </p:cNvPicPr>
-          <p:nvPr/>
-        </p:nvPicPr>
-        <p:blipFill>
-          <a:blip r:embed="rId2"/>
-          <a:stretch>
-            <a:fillRect/>
-          </a:stretch>
-        </p:blipFill>
-        <p:spPr>
-          <a:xfrm>
-            <a:off x="6267796" y="1371600"/>
-            <a:ext cx="2826327" cy="2331720"/>
-          </a:xfrm>
-          <a:prstGeom prst="rect">
-            <a:avLst/>
-          </a:prstGeom>
-        </p:spPr>
-      </p:pic>
-      <p:sp>
-        <p:nvSpPr>
-          <p:cNvPr id="12" name="Shape 8"/>
-          <p:cNvSpPr/>
-          <p:nvPr/>
-        </p:nvSpPr>
-        <p:spPr>
-          <a:xfrm>
-            <a:off x="6267796" y="1371600"/>
-            <a:ext cx="2826327" cy="2331720"/>
-          </a:xfrm>
-          <a:prstGeom prst="rect">
-            <a:avLst/>
-          </a:prstGeom>
-          <a:ln w="12700">
-            <a:solidFill>
-              <a:srgbClr val="D5DDE4"/>
-            </a:solidFill>
-            <a:prstDash val="solid"/>
-          </a:ln>
-        </p:spPr>
-      </p:sp>
-      <p:sp>
-        <p:nvSpPr>
-          <p:cNvPr id="13" name="Text 9"/>
-          <p:cNvSpPr txBox="1"/>
-          <p:nvPr/>
-        </p:nvSpPr>
-        <p:spPr>
-          <a:xfrm>
-            <a:off x="9372600" y="1828800"/>
-            <a:ext cx="2194560" cy="411480"/>
-          </a:xfrm>
-          <a:prstGeom prst="rect">
-            <a:avLst/>
-          </a:prstGeom>
-          <a:noFill/>
-          <a:ln/>
-        </p:spPr>
-        <p:txBody>
-          <a:bodyPr wrap="square" lIns="0" tIns="0" rIns="0" bIns="0" rtlCol="0" anchor="ctr"/>
-          <a:lstStyle/>
-          <a:p>
-            <a:pPr indent="0" marL="0">
-              <a:buNone/>
-            </a:pPr>
-            <a:r>
-              <a:rPr lang="en-US" sz="2000" b="1" dirty="0">
-                <a:solidFill>
-                  <a:srgbClr val="17354C"/>
-                </a:solidFill>
-                <a:latin typeface="Calibri" pitchFamily="34" charset="0"/>
-                <a:ea typeface="Calibri" pitchFamily="34" charset="-122"/>
-                <a:cs typeface="Calibri" pitchFamily="34" charset="-120"/>
-              </a:rPr>
-              <a:t>Admin</a:t>
-            </a:r>
-            <a:endParaRPr lang="en-US" sz="2000" dirty="0"/>
-          </a:p>
-        </p:txBody>
-      </p:sp>
-      <p:sp>
-        <p:nvSpPr>
-          <p:cNvPr id="14" name="Text 10"/>
-          <p:cNvSpPr txBox="1"/>
-          <p:nvPr/>
-        </p:nvSpPr>
-        <p:spPr>
-          <a:xfrm>
-            <a:off x="9372600" y="2286000"/>
-            <a:ext cx="2194560" cy="914400"/>
-          </a:xfrm>
-          <a:prstGeom prst="rect">
-            <a:avLst/>
-          </a:prstGeom>
-          <a:noFill/>
-          <a:ln/>
-        </p:spPr>
-        <p:txBody>
-          <a:bodyPr wrap="square" lIns="0" tIns="0" rIns="0" bIns="0" rtlCol="0" anchor="ctr"/>
-          <a:lstStyle/>
-          <a:p>
-            <a:pPr indent="0" marL="0">
-              <a:buNone/>
-            </a:pPr>
-            <a:r>
-              <a:rPr lang="en-US" sz="1300" dirty="0">
-                <a:solidFill>
-                  <a:srgbClr val="5B6B78"/>
-                </a:solidFill>
-                <a:latin typeface="Calibri" pitchFamily="34" charset="0"/>
-                <a:ea typeface="Calibri" pitchFamily="34" charset="-122"/>
-                <a:cs typeface="Calibri" pitchFamily="34" charset="-120"/>
-              </a:rPr>
-              <a:t>Alertas de toda la agencia y configuración</a:t>
-            </a:r>
-            <a:endParaRPr lang="en-US" sz="1300" dirty="0"/>
-          </a:p>
-        </p:txBody>
-      </p:sp>
-      <p:pic>
-        <p:nvPicPr>
-          <p:cNvPr id="15" name="Image 2" descr="C:\Users\Usuario\Desktop\Vault-Rumbo\07-Entregables\Prototipo\img\28-cu21-dashboard.png">    </p:cNvPr>
+          <p:cNvPr id="7" name="Image 0" descr="C:\Users\Usuario\Desktop\Vault-Rumbo\07-Entregables\Prototipo\img\03-cu14-agenda.png"/>
           <p:cNvPicPr>
             <a:picLocks noChangeAspect="1"/>
           </p:cNvPicPr>
@@ -3958,8 +3374,8 @@
         </p:blipFill>
         <p:spPr>
           <a:xfrm>
-            <a:off x="548640" y="4024884"/>
-            <a:ext cx="3017520" cy="2145792"/>
+            <a:off x="644236" y="1371600"/>
+            <a:ext cx="2826327" cy="2331720"/>
           </a:xfrm>
           <a:prstGeom prst="rect">
             <a:avLst/>
@@ -3968,14 +3384,14 @@
       </p:pic>
       <p:sp>
         <p:nvSpPr>
-          <p:cNvPr id="16" name="Shape 11"/>
+          <p:cNvPr id="8" name="Shape 5"/>
           <p:cNvSpPr/>
           <p:nvPr/>
         </p:nvSpPr>
         <p:spPr>
           <a:xfrm>
-            <a:off x="548640" y="4024884"/>
-            <a:ext cx="3017520" cy="2145792"/>
+            <a:off x="644236" y="1371600"/>
+            <a:ext cx="2826327" cy="2331720"/>
           </a:xfrm>
           <a:prstGeom prst="rect">
             <a:avLst/>
@@ -3990,13 +3406,13 @@
       </p:sp>
       <p:sp>
         <p:nvSpPr>
-          <p:cNvPr id="17" name="Text 12"/>
-          <p:cNvSpPr txBox="1"/>
-          <p:nvPr/>
-        </p:nvSpPr>
-        <p:spPr>
-          <a:xfrm>
-            <a:off x="3749040" y="4389120"/>
+          <p:cNvPr id="9" name="Text 6"/>
+          <p:cNvSpPr txBox="1"/>
+          <p:nvPr/>
+        </p:nvSpPr>
+        <p:spPr>
+          <a:xfrm>
+            <a:off x="3749040" y="1828800"/>
             <a:ext cx="2194560" cy="411480"/>
           </a:xfrm>
           <a:prstGeom prst="rect">
@@ -4009,7 +3425,7 @@
           <a:bodyPr wrap="square" lIns="0" tIns="0" rIns="0" bIns="0" rtlCol="0" anchor="ctr"/>
           <a:lstStyle/>
           <a:p>
-            <a:pPr indent="0" marL="0">
+            <a:pPr marL="0" indent="0">
               <a:buNone/>
             </a:pPr>
             <a:r>
@@ -4021,7 +3437,7 @@
                 <a:ea typeface="Calibri" pitchFamily="34" charset="-122"/>
                 <a:cs typeface="Calibri" pitchFamily="34" charset="-120"/>
               </a:rPr>
-              <a:t>Dueña</a:t>
+              <a:t>Empleado</a:t>
             </a:r>
             <a:endParaRPr lang="en-US" sz="2000" dirty="0"/>
           </a:p>
@@ -4029,13 +3445,13 @@
       </p:sp>
       <p:sp>
         <p:nvSpPr>
-          <p:cNvPr id="18" name="Text 13"/>
-          <p:cNvSpPr txBox="1"/>
-          <p:nvPr/>
-        </p:nvSpPr>
-        <p:spPr>
-          <a:xfrm>
-            <a:off x="3749040" y="4846320"/>
+          <p:cNvPr id="10" name="Text 7"/>
+          <p:cNvSpPr txBox="1"/>
+          <p:nvPr/>
+        </p:nvSpPr>
+        <p:spPr>
+          <a:xfrm>
+            <a:off x="3749040" y="2286000"/>
             <a:ext cx="2194560" cy="914400"/>
           </a:xfrm>
           <a:prstGeom prst="rect">
@@ -4048,7 +3464,7 @@
           <a:bodyPr wrap="square" lIns="0" tIns="0" rIns="0" bIns="0" rtlCol="0" anchor="ctr"/>
           <a:lstStyle/>
           <a:p>
-            <a:pPr indent="0" marL="0">
+            <a:pPr marL="0" indent="0">
               <a:buNone/>
             </a:pPr>
             <a:r>
@@ -4060,7 +3476,7 @@
                 <a:ea typeface="Calibri" pitchFamily="34" charset="-122"/>
                 <a:cs typeface="Calibri" pitchFamily="34" charset="-120"/>
               </a:rPr>
-              <a:t>Todo lo del admin, más el dashboard y los reportes de la empresa</a:t>
+              <a:t>Todo el circuito; su agenda y su dashboard</a:t>
             </a:r>
             <a:endParaRPr lang="en-US" sz="1300" dirty="0"/>
           </a:p>
@@ -4068,7 +3484,7 @@
       </p:sp>
       <p:pic>
         <p:nvPicPr>
-          <p:cNvPr id="19" name="Image 3" descr="C:\Users\Usuario\Desktop\Vault-Rumbo\07-Entregables\Prototipo\img\34-freelance-embudo.png">    </p:cNvPr>
+          <p:cNvPr id="11" name="Image 1" descr="C:\Users\Usuario\Desktop\Vault-Rumbo\07-Entregables\Prototipo\img\49-admin-agenda-agencia.png"/>
           <p:cNvPicPr>
             <a:picLocks noChangeAspect="1"/>
           </p:cNvPicPr>
@@ -4082,8 +3498,8 @@
         </p:blipFill>
         <p:spPr>
           <a:xfrm>
-            <a:off x="6172200" y="4024884"/>
-            <a:ext cx="3017520" cy="2145792"/>
+            <a:off x="6267796" y="1371600"/>
+            <a:ext cx="2826327" cy="2331720"/>
           </a:xfrm>
           <a:prstGeom prst="rect">
             <a:avLst/>
@@ -4092,14 +3508,14 @@
       </p:pic>
       <p:sp>
         <p:nvSpPr>
-          <p:cNvPr id="20" name="Shape 14"/>
+          <p:cNvPr id="12" name="Shape 8"/>
           <p:cNvSpPr/>
           <p:nvPr/>
         </p:nvSpPr>
         <p:spPr>
           <a:xfrm>
-            <a:off x="6172200" y="4024884"/>
-            <a:ext cx="3017520" cy="2145792"/>
+            <a:off x="6267796" y="1371600"/>
+            <a:ext cx="2826327" cy="2331720"/>
           </a:xfrm>
           <a:prstGeom prst="rect">
             <a:avLst/>
@@ -4114,6 +3530,254 @@
       </p:sp>
       <p:sp>
         <p:nvSpPr>
+          <p:cNvPr id="13" name="Text 9"/>
+          <p:cNvSpPr txBox="1"/>
+          <p:nvPr/>
+        </p:nvSpPr>
+        <p:spPr>
+          <a:xfrm>
+            <a:off x="9372600" y="1828800"/>
+            <a:ext cx="2194560" cy="411480"/>
+          </a:xfrm>
+          <a:prstGeom prst="rect">
+            <a:avLst/>
+          </a:prstGeom>
+          <a:noFill/>
+          <a:ln/>
+        </p:spPr>
+        <p:txBody>
+          <a:bodyPr wrap="square" lIns="0" tIns="0" rIns="0" bIns="0" rtlCol="0" anchor="ctr"/>
+          <a:lstStyle/>
+          <a:p>
+            <a:pPr marL="0" indent="0">
+              <a:buNone/>
+            </a:pPr>
+            <a:r>
+              <a:rPr lang="en-US" sz="2000" b="1" dirty="0">
+                <a:solidFill>
+                  <a:srgbClr val="17354C"/>
+                </a:solidFill>
+                <a:latin typeface="Calibri" pitchFamily="34" charset="0"/>
+                <a:ea typeface="Calibri" pitchFamily="34" charset="-122"/>
+                <a:cs typeface="Calibri" pitchFamily="34" charset="-120"/>
+              </a:rPr>
+              <a:t>Admin</a:t>
+            </a:r>
+            <a:endParaRPr lang="en-US" sz="2000" dirty="0"/>
+          </a:p>
+        </p:txBody>
+      </p:sp>
+      <p:sp>
+        <p:nvSpPr>
+          <p:cNvPr id="14" name="Text 10"/>
+          <p:cNvSpPr txBox="1"/>
+          <p:nvPr/>
+        </p:nvSpPr>
+        <p:spPr>
+          <a:xfrm>
+            <a:off x="9372600" y="2286000"/>
+            <a:ext cx="2194560" cy="914400"/>
+          </a:xfrm>
+          <a:prstGeom prst="rect">
+            <a:avLst/>
+          </a:prstGeom>
+          <a:noFill/>
+          <a:ln/>
+        </p:spPr>
+        <p:txBody>
+          <a:bodyPr wrap="square" lIns="0" tIns="0" rIns="0" bIns="0" rtlCol="0" anchor="ctr"/>
+          <a:lstStyle/>
+          <a:p>
+            <a:pPr marL="0" indent="0">
+              <a:buNone/>
+            </a:pPr>
+            <a:r>
+              <a:rPr lang="en-US" sz="1300" dirty="0">
+                <a:solidFill>
+                  <a:srgbClr val="5B6B78"/>
+                </a:solidFill>
+                <a:latin typeface="Calibri" pitchFamily="34" charset="0"/>
+                <a:ea typeface="Calibri" pitchFamily="34" charset="-122"/>
+                <a:cs typeface="Calibri" pitchFamily="34" charset="-120"/>
+              </a:rPr>
+              <a:t>Alertas de toda la agencia y configuración</a:t>
+            </a:r>
+            <a:endParaRPr lang="en-US" sz="1300" dirty="0"/>
+          </a:p>
+        </p:txBody>
+      </p:sp>
+      <p:pic>
+        <p:nvPicPr>
+          <p:cNvPr id="15" name="Image 2" descr="C:\Users\Usuario\Desktop\Vault-Rumbo\07-Entregables\Prototipo\img\28-cu21-dashboard.png"/>
+          <p:cNvPicPr>
+            <a:picLocks noChangeAspect="1"/>
+          </p:cNvPicPr>
+          <p:nvPr/>
+        </p:nvPicPr>
+        <p:blipFill>
+          <a:blip r:embed="rId5"/>
+          <a:stretch>
+            <a:fillRect/>
+          </a:stretch>
+        </p:blipFill>
+        <p:spPr>
+          <a:xfrm>
+            <a:off x="548640" y="4024884"/>
+            <a:ext cx="3017520" cy="2145792"/>
+          </a:xfrm>
+          <a:prstGeom prst="rect">
+            <a:avLst/>
+          </a:prstGeom>
+        </p:spPr>
+      </p:pic>
+      <p:sp>
+        <p:nvSpPr>
+          <p:cNvPr id="16" name="Shape 11"/>
+          <p:cNvSpPr/>
+          <p:nvPr/>
+        </p:nvSpPr>
+        <p:spPr>
+          <a:xfrm>
+            <a:off x="548640" y="4024884"/>
+            <a:ext cx="3017520" cy="2145792"/>
+          </a:xfrm>
+          <a:prstGeom prst="rect">
+            <a:avLst/>
+          </a:prstGeom>
+          <a:ln w="12700">
+            <a:solidFill>
+              <a:srgbClr val="D5DDE4"/>
+            </a:solidFill>
+            <a:prstDash val="solid"/>
+          </a:ln>
+        </p:spPr>
+      </p:sp>
+      <p:sp>
+        <p:nvSpPr>
+          <p:cNvPr id="17" name="Text 12"/>
+          <p:cNvSpPr txBox="1"/>
+          <p:nvPr/>
+        </p:nvSpPr>
+        <p:spPr>
+          <a:xfrm>
+            <a:off x="3749040" y="4389120"/>
+            <a:ext cx="2194560" cy="411480"/>
+          </a:xfrm>
+          <a:prstGeom prst="rect">
+            <a:avLst/>
+          </a:prstGeom>
+          <a:noFill/>
+          <a:ln/>
+        </p:spPr>
+        <p:txBody>
+          <a:bodyPr wrap="square" lIns="0" tIns="0" rIns="0" bIns="0" rtlCol="0" anchor="ctr"/>
+          <a:lstStyle/>
+          <a:p>
+            <a:pPr marL="0" indent="0">
+              <a:buNone/>
+            </a:pPr>
+            <a:r>
+              <a:rPr lang="en-US" sz="2000" b="1" dirty="0">
+                <a:solidFill>
+                  <a:srgbClr val="17354C"/>
+                </a:solidFill>
+                <a:latin typeface="Calibri" pitchFamily="34" charset="0"/>
+                <a:ea typeface="Calibri" pitchFamily="34" charset="-122"/>
+                <a:cs typeface="Calibri" pitchFamily="34" charset="-120"/>
+              </a:rPr>
+              <a:t>Dueña</a:t>
+            </a:r>
+            <a:endParaRPr lang="en-US" sz="2000" dirty="0"/>
+          </a:p>
+        </p:txBody>
+      </p:sp>
+      <p:sp>
+        <p:nvSpPr>
+          <p:cNvPr id="18" name="Text 13"/>
+          <p:cNvSpPr txBox="1"/>
+          <p:nvPr/>
+        </p:nvSpPr>
+        <p:spPr>
+          <a:xfrm>
+            <a:off x="3749040" y="4846320"/>
+            <a:ext cx="2194560" cy="914400"/>
+          </a:xfrm>
+          <a:prstGeom prst="rect">
+            <a:avLst/>
+          </a:prstGeom>
+          <a:noFill/>
+          <a:ln/>
+        </p:spPr>
+        <p:txBody>
+          <a:bodyPr wrap="square" lIns="0" tIns="0" rIns="0" bIns="0" rtlCol="0" anchor="ctr"/>
+          <a:lstStyle/>
+          <a:p>
+            <a:pPr marL="0" indent="0">
+              <a:buNone/>
+            </a:pPr>
+            <a:r>
+              <a:rPr lang="en-US" sz="1300" dirty="0">
+                <a:solidFill>
+                  <a:srgbClr val="5B6B78"/>
+                </a:solidFill>
+                <a:latin typeface="Calibri" pitchFamily="34" charset="0"/>
+                <a:ea typeface="Calibri" pitchFamily="34" charset="-122"/>
+                <a:cs typeface="Calibri" pitchFamily="34" charset="-120"/>
+              </a:rPr>
+              <a:t>Todo lo del admin, más el dashboard y los reportes de la empresa</a:t>
+            </a:r>
+            <a:endParaRPr lang="en-US" sz="1300" dirty="0"/>
+          </a:p>
+        </p:txBody>
+      </p:sp>
+      <p:pic>
+        <p:nvPicPr>
+          <p:cNvPr id="19" name="Image 3" descr="C:\Users\Usuario\Desktop\Vault-Rumbo\07-Entregables\Prototipo\img\34-freelance-embudo.png"/>
+          <p:cNvPicPr>
+            <a:picLocks noChangeAspect="1"/>
+          </p:cNvPicPr>
+          <p:nvPr/>
+        </p:nvPicPr>
+        <p:blipFill>
+          <a:blip r:embed="rId6"/>
+          <a:stretch>
+            <a:fillRect/>
+          </a:stretch>
+        </p:blipFill>
+        <p:spPr>
+          <a:xfrm>
+            <a:off x="6172200" y="4024884"/>
+            <a:ext cx="3017520" cy="2145792"/>
+          </a:xfrm>
+          <a:prstGeom prst="rect">
+            <a:avLst/>
+          </a:prstGeom>
+        </p:spPr>
+      </p:pic>
+      <p:sp>
+        <p:nvSpPr>
+          <p:cNvPr id="20" name="Shape 14"/>
+          <p:cNvSpPr/>
+          <p:nvPr/>
+        </p:nvSpPr>
+        <p:spPr>
+          <a:xfrm>
+            <a:off x="6172200" y="4024884"/>
+            <a:ext cx="3017520" cy="2145792"/>
+          </a:xfrm>
+          <a:prstGeom prst="rect">
+            <a:avLst/>
+          </a:prstGeom>
+          <a:ln w="12700">
+            <a:solidFill>
+              <a:srgbClr val="D5DDE4"/>
+            </a:solidFill>
+            <a:prstDash val="solid"/>
+          </a:ln>
+        </p:spPr>
+      </p:sp>
+      <p:sp>
+        <p:nvSpPr>
           <p:cNvPr id="21" name="Text 15"/>
           <p:cNvSpPr txBox="1"/>
           <p:nvPr/>
@@ -4133,7 +3797,7 @@
           <a:bodyPr wrap="square" lIns="0" tIns="0" rIns="0" bIns="0" rtlCol="0" anchor="ctr"/>
           <a:lstStyle/>
           <a:p>
-            <a:pPr indent="0" marL="0">
+            <a:pPr marL="0" indent="0">
               <a:buNone/>
             </a:pPr>
             <a:r>
@@ -4172,7 +3836,7 @@
           <a:bodyPr wrap="square" lIns="0" tIns="0" rIns="0" bIns="0" rtlCol="0" anchor="ctr"/>
           <a:lstStyle/>
           <a:p>
-            <a:pPr indent="0" marL="0">
+            <a:pPr marL="0" indent="0">
               <a:buNone/>
             </a:pPr>
             <a:r>
@@ -4206,6 +3870,7 @@
         <a:solidFill>
           <a:srgbClr val="F6F8FA"/>
         </a:solidFill>
+        <a:effectLst/>
       </p:bgPr>
     </p:bg>
     <p:spTree>
@@ -4243,11 +3908,11 @@
           <a:bodyPr wrap="square" lIns="0" tIns="0" rIns="0" bIns="0" rtlCol="0" anchor="ctr"/>
           <a:lstStyle/>
           <a:p>
-            <a:pPr indent="0" marL="0">
-              <a:buNone/>
-            </a:pPr>
-            <a:r>
-              <a:rPr lang="en-US" sz="1100" b="1" spc="200" kern="0" dirty="0">
+            <a:pPr marL="0" indent="0">
+              <a:buNone/>
+            </a:pPr>
+            <a:r>
+              <a:rPr lang="en-US" sz="1100" b="1" kern="0" spc="200" dirty="0">
                 <a:solidFill>
                   <a:srgbClr val="3E7196"/>
                 </a:solidFill>
@@ -4282,7 +3947,7 @@
           <a:bodyPr wrap="square" lIns="0" tIns="0" rIns="0" bIns="0" rtlCol="0" anchor="t"/>
           <a:lstStyle/>
           <a:p>
-            <a:pPr indent="0" marL="0">
+            <a:pPr marL="0" indent="0">
               <a:buNone/>
             </a:pPr>
             <a:r>
@@ -4297,67 +3962,6 @@
               <a:t>Mobile: agenda, alertas y clientes</a:t>
             </a:r>
             <a:endParaRPr lang="en-US" sz="3000" dirty="0"/>
-          </a:p>
-        </p:txBody>
-      </p:sp>
-      <p:sp>
-        <p:nvSpPr>
-          <p:cNvPr id="4" name="Shape 2"/>
-          <p:cNvSpPr/>
-          <p:nvPr/>
-        </p:nvSpPr>
-        <p:spPr>
-          <a:xfrm>
-            <a:off x="9722815" y="384048"/>
-            <a:ext cx="1920240" cy="365760"/>
-          </a:xfrm>
-          <a:prstGeom prst="roundRect">
-            <a:avLst>
-              <a:gd name="adj" fmla="val 50000"/>
-            </a:avLst>
-          </a:prstGeom>
-          <a:solidFill>
-            <a:srgbClr val="E9F1F7"/>
-          </a:solidFill>
-          <a:ln/>
-        </p:spPr>
-      </p:sp>
-      <p:sp>
-        <p:nvSpPr>
-          <p:cNvPr id="5" name="Text 3"/>
-          <p:cNvSpPr txBox="1"/>
-          <p:nvPr/>
-        </p:nvSpPr>
-        <p:spPr>
-          <a:xfrm>
-            <a:off x="9722815" y="384048"/>
-            <a:ext cx="1920240" cy="365760"/>
-          </a:xfrm>
-          <a:prstGeom prst="rect">
-            <a:avLst/>
-          </a:prstGeom>
-          <a:noFill/>
-          <a:ln/>
-        </p:spPr>
-        <p:txBody>
-          <a:bodyPr wrap="square" lIns="0" tIns="0" rIns="0" bIns="0" rtlCol="0" anchor="ctr"/>
-          <a:lstStyle/>
-          <a:p>
-            <a:pPr algn="ctr" indent="0" marL="0">
-              <a:buNone/>
-            </a:pPr>
-            <a:r>
-              <a:rPr lang="en-US" sz="1200" b="1" dirty="0">
-                <a:solidFill>
-                  <a:srgbClr val="22506F"/>
-                </a:solidFill>
-                <a:latin typeface="Calibri" pitchFamily="34" charset="0"/>
-                <a:ea typeface="Calibri" pitchFamily="34" charset="-122"/>
-                <a:cs typeface="Calibri" pitchFamily="34" charset="-120"/>
-              </a:rPr>
-              <a:t>Expone: Paloma</a:t>
-            </a:r>
-            <a:endParaRPr lang="en-US" sz="1200" dirty="0"/>
           </a:p>
         </p:txBody>
       </p:sp>
@@ -4382,7 +3986,7 @@
           <a:bodyPr wrap="square" lIns="0" tIns="0" rIns="0" bIns="0" rtlCol="0" anchor="ctr"/>
           <a:lstStyle/>
           <a:p>
-            <a:pPr algn="r" indent="0" marL="0">
+            <a:pPr marL="0" indent="0" algn="r">
               <a:buNone/>
             </a:pPr>
             <a:r>
@@ -4402,103 +4006,7 @@
       </p:sp>
       <p:pic>
         <p:nvPicPr>
-          <p:cNvPr id="7" name="Image 0" descr="C:\Users\Usuario\Desktop\Vault-Rumbo\07-Entregables\Prototipo\img\35-mobile-agenda.png">    </p:cNvPr>
-          <p:cNvPicPr>
-            <a:picLocks noChangeAspect="1"/>
-          </p:cNvPicPr>
-          <p:nvPr/>
-        </p:nvPicPr>
-        <p:blipFill>
-          <a:blip r:embed="rId1"/>
-          <a:stretch>
-            <a:fillRect/>
-          </a:stretch>
-        </p:blipFill>
-        <p:spPr>
-          <a:xfrm>
-            <a:off x="4481318" y="1417320"/>
-            <a:ext cx="1690123" cy="3657600"/>
-          </a:xfrm>
-          <a:prstGeom prst="rect">
-            <a:avLst/>
-          </a:prstGeom>
-        </p:spPr>
-      </p:pic>
-      <p:sp>
-        <p:nvSpPr>
-          <p:cNvPr id="8" name="Shape 5"/>
-          <p:cNvSpPr/>
-          <p:nvPr/>
-        </p:nvSpPr>
-        <p:spPr>
-          <a:xfrm>
-            <a:off x="4481318" y="1417320"/>
-            <a:ext cx="1690123" cy="3657600"/>
-          </a:xfrm>
-          <a:prstGeom prst="roundRect">
-            <a:avLst>
-              <a:gd name="adj" fmla="val 5410"/>
-            </a:avLst>
-          </a:prstGeom>
-          <a:ln w="12700">
-            <a:solidFill>
-              <a:srgbClr val="C9D3DC"/>
-            </a:solidFill>
-            <a:prstDash val="solid"/>
-          </a:ln>
-        </p:spPr>
-      </p:sp>
-      <p:pic>
-        <p:nvPicPr>
-          <p:cNvPr id="9" name="Image 1" descr="C:\Users\Usuario\Desktop\Vault-Rumbo\07-Entregables\Prototipo\img\53-mobile-detalle-alerta.png">    </p:cNvPr>
-          <p:cNvPicPr>
-            <a:picLocks noChangeAspect="1"/>
-          </p:cNvPicPr>
-          <p:nvPr/>
-        </p:nvPicPr>
-        <p:blipFill>
-          <a:blip r:embed="rId2"/>
-          <a:stretch>
-            <a:fillRect/>
-          </a:stretch>
-        </p:blipFill>
-        <p:spPr>
-          <a:xfrm>
-            <a:off x="6310118" y="1417320"/>
-            <a:ext cx="1690123" cy="3657600"/>
-          </a:xfrm>
-          <a:prstGeom prst="rect">
-            <a:avLst/>
-          </a:prstGeom>
-        </p:spPr>
-      </p:pic>
-      <p:sp>
-        <p:nvSpPr>
-          <p:cNvPr id="10" name="Shape 6"/>
-          <p:cNvSpPr/>
-          <p:nvPr/>
-        </p:nvSpPr>
-        <p:spPr>
-          <a:xfrm>
-            <a:off x="6310118" y="1417320"/>
-            <a:ext cx="1690123" cy="3657600"/>
-          </a:xfrm>
-          <a:prstGeom prst="roundRect">
-            <a:avLst>
-              <a:gd name="adj" fmla="val 5410"/>
-            </a:avLst>
-          </a:prstGeom>
-          <a:ln w="12700">
-            <a:solidFill>
-              <a:srgbClr val="C9D3DC"/>
-            </a:solidFill>
-            <a:prstDash val="solid"/>
-          </a:ln>
-        </p:spPr>
-      </p:sp>
-      <p:pic>
-        <p:nvPicPr>
-          <p:cNvPr id="11" name="Image 2" descr="C:\Users\Usuario\Desktop\Vault-Rumbo\07-Entregables\Prototipo\img\57-mobile-clientes.png">    </p:cNvPr>
+          <p:cNvPr id="7" name="Image 0" descr="C:\Users\Usuario\Desktop\Vault-Rumbo\07-Entregables\Prototipo\img\35-mobile-agenda.png"/>
           <p:cNvPicPr>
             <a:picLocks noChangeAspect="1"/>
           </p:cNvPicPr>
@@ -4512,7 +4020,7 @@
         </p:blipFill>
         <p:spPr>
           <a:xfrm>
-            <a:off x="8138918" y="1417320"/>
+            <a:off x="4481318" y="1417320"/>
             <a:ext cx="1690123" cy="3657600"/>
           </a:xfrm>
           <a:prstGeom prst="rect">
@@ -4522,13 +4030,13 @@
       </p:pic>
       <p:sp>
         <p:nvSpPr>
-          <p:cNvPr id="12" name="Shape 7"/>
+          <p:cNvPr id="8" name="Shape 5"/>
           <p:cNvSpPr/>
           <p:nvPr/>
         </p:nvSpPr>
         <p:spPr>
           <a:xfrm>
-            <a:off x="8138918" y="1417320"/>
+            <a:off x="4481318" y="1417320"/>
             <a:ext cx="1690123" cy="3657600"/>
           </a:xfrm>
           <a:prstGeom prst="roundRect">
@@ -4546,7 +4054,7 @@
       </p:sp>
       <p:pic>
         <p:nvPicPr>
-          <p:cNvPr id="13" name="Image 3" descr="C:\Users\Usuario\Desktop\Vault-Rumbo\07-Entregables\Prototipo\img\36-mobile-ficha-cliente.png">    </p:cNvPr>
+          <p:cNvPr id="9" name="Image 1" descr="C:\Users\Usuario\Desktop\Vault-Rumbo\07-Entregables\Prototipo\img\53-mobile-detalle-alerta.png"/>
           <p:cNvPicPr>
             <a:picLocks noChangeAspect="1"/>
           </p:cNvPicPr>
@@ -4560,7 +4068,7 @@
         </p:blipFill>
         <p:spPr>
           <a:xfrm>
-            <a:off x="9967718" y="1417320"/>
+            <a:off x="6310118" y="1417320"/>
             <a:ext cx="1690123" cy="3657600"/>
           </a:xfrm>
           <a:prstGeom prst="rect">
@@ -4570,13 +4078,13 @@
       </p:pic>
       <p:sp>
         <p:nvSpPr>
-          <p:cNvPr id="14" name="Shape 8"/>
+          <p:cNvPr id="10" name="Shape 6"/>
           <p:cNvSpPr/>
           <p:nvPr/>
         </p:nvSpPr>
         <p:spPr>
           <a:xfrm>
-            <a:off x="9967718" y="1417320"/>
+            <a:off x="6310118" y="1417320"/>
             <a:ext cx="1690123" cy="3657600"/>
           </a:xfrm>
           <a:prstGeom prst="roundRect">
@@ -4592,6 +4100,102 @@
           </a:ln>
         </p:spPr>
       </p:sp>
+      <p:pic>
+        <p:nvPicPr>
+          <p:cNvPr id="11" name="Image 2" descr="C:\Users\Usuario\Desktop\Vault-Rumbo\07-Entregables\Prototipo\img\57-mobile-clientes.png"/>
+          <p:cNvPicPr>
+            <a:picLocks noChangeAspect="1"/>
+          </p:cNvPicPr>
+          <p:nvPr/>
+        </p:nvPicPr>
+        <p:blipFill>
+          <a:blip r:embed="rId5"/>
+          <a:stretch>
+            <a:fillRect/>
+          </a:stretch>
+        </p:blipFill>
+        <p:spPr>
+          <a:xfrm>
+            <a:off x="8138918" y="1417320"/>
+            <a:ext cx="1690123" cy="3657600"/>
+          </a:xfrm>
+          <a:prstGeom prst="rect">
+            <a:avLst/>
+          </a:prstGeom>
+        </p:spPr>
+      </p:pic>
+      <p:sp>
+        <p:nvSpPr>
+          <p:cNvPr id="12" name="Shape 7"/>
+          <p:cNvSpPr/>
+          <p:nvPr/>
+        </p:nvSpPr>
+        <p:spPr>
+          <a:xfrm>
+            <a:off x="8138918" y="1417320"/>
+            <a:ext cx="1690123" cy="3657600"/>
+          </a:xfrm>
+          <a:prstGeom prst="roundRect">
+            <a:avLst>
+              <a:gd name="adj" fmla="val 5410"/>
+            </a:avLst>
+          </a:prstGeom>
+          <a:ln w="12700">
+            <a:solidFill>
+              <a:srgbClr val="C9D3DC"/>
+            </a:solidFill>
+            <a:prstDash val="solid"/>
+          </a:ln>
+        </p:spPr>
+      </p:sp>
+      <p:pic>
+        <p:nvPicPr>
+          <p:cNvPr id="13" name="Image 3" descr="C:\Users\Usuario\Desktop\Vault-Rumbo\07-Entregables\Prototipo\img\36-mobile-ficha-cliente.png"/>
+          <p:cNvPicPr>
+            <a:picLocks noChangeAspect="1"/>
+          </p:cNvPicPr>
+          <p:nvPr/>
+        </p:nvPicPr>
+        <p:blipFill>
+          <a:blip r:embed="rId6"/>
+          <a:stretch>
+            <a:fillRect/>
+          </a:stretch>
+        </p:blipFill>
+        <p:spPr>
+          <a:xfrm>
+            <a:off x="9967718" y="1417320"/>
+            <a:ext cx="1690123" cy="3657600"/>
+          </a:xfrm>
+          <a:prstGeom prst="rect">
+            <a:avLst/>
+          </a:prstGeom>
+        </p:spPr>
+      </p:pic>
+      <p:sp>
+        <p:nvSpPr>
+          <p:cNvPr id="14" name="Shape 8"/>
+          <p:cNvSpPr/>
+          <p:nvPr/>
+        </p:nvSpPr>
+        <p:spPr>
+          <a:xfrm>
+            <a:off x="9967718" y="1417320"/>
+            <a:ext cx="1690123" cy="3657600"/>
+          </a:xfrm>
+          <a:prstGeom prst="roundRect">
+            <a:avLst>
+              <a:gd name="adj" fmla="val 5410"/>
+            </a:avLst>
+          </a:prstGeom>
+          <a:ln w="12700">
+            <a:solidFill>
+              <a:srgbClr val="C9D3DC"/>
+            </a:solidFill>
+            <a:prstDash val="solid"/>
+          </a:ln>
+        </p:spPr>
+      </p:sp>
       <p:sp>
         <p:nvSpPr>
           <p:cNvPr id="15" name="Text 9"/>
@@ -4719,7 +4323,7 @@
           <a:bodyPr wrap="square" lIns="0" tIns="0" rIns="0" bIns="0" rtlCol="0" anchor="ctr"/>
           <a:lstStyle/>
           <a:p>
-            <a:pPr indent="0" marL="0">
+            <a:pPr marL="0" indent="0">
               <a:buNone/>
             </a:pPr>
             <a:r>
@@ -4753,6 +4357,7 @@
         <a:solidFill>
           <a:srgbClr val="17354C"/>
         </a:solidFill>
+        <a:effectLst/>
       </p:bgPr>
     </p:bg>
     <p:spTree>
@@ -4790,11 +4395,11 @@
           <a:bodyPr wrap="square" lIns="0" tIns="0" rIns="0" bIns="0" rtlCol="0" anchor="ctr"/>
           <a:lstStyle/>
           <a:p>
-            <a:pPr indent="0" marL="0">
-              <a:buNone/>
-            </a:pPr>
-            <a:r>
-              <a:rPr lang="en-US" sz="1100" b="1" spc="200" kern="0" dirty="0">
+            <a:pPr marL="0" indent="0">
+              <a:buNone/>
+            </a:pPr>
+            <a:r>
+              <a:rPr lang="en-US" sz="1100" b="1" kern="0" spc="200" dirty="0">
                 <a:solidFill>
                   <a:srgbClr val="73A5C4"/>
                 </a:solidFill>
@@ -4829,7 +4434,7 @@
           <a:bodyPr wrap="square" lIns="0" tIns="0" rIns="0" bIns="0" rtlCol="0" anchor="t"/>
           <a:lstStyle/>
           <a:p>
-            <a:pPr indent="0" marL="0">
+            <a:pPr marL="0" indent="0">
               <a:buNone/>
             </a:pPr>
             <a:r>
@@ -4849,19 +4454,212 @@
       </p:sp>
       <p:sp>
         <p:nvSpPr>
-          <p:cNvPr id="4" name="Shape 2"/>
+          <p:cNvPr id="6" name="Text 4"/>
+          <p:cNvSpPr txBox="1"/>
+          <p:nvPr/>
+        </p:nvSpPr>
+        <p:spPr>
+          <a:xfrm>
+            <a:off x="11094415" y="6446520"/>
+            <a:ext cx="548640" cy="274320"/>
+          </a:xfrm>
+          <a:prstGeom prst="rect">
+            <a:avLst/>
+          </a:prstGeom>
+          <a:noFill/>
+          <a:ln/>
+        </p:spPr>
+        <p:txBody>
+          <a:bodyPr wrap="square" lIns="0" tIns="0" rIns="0" bIns="0" rtlCol="0" anchor="ctr"/>
+          <a:lstStyle/>
+          <a:p>
+            <a:pPr marL="0" indent="0" algn="r">
+              <a:buNone/>
+            </a:pPr>
+            <a:r>
+              <a:rPr lang="en-US" sz="1000" dirty="0">
+                <a:solidFill>
+                  <a:srgbClr val="73A5C4"/>
+                </a:solidFill>
+                <a:latin typeface="Calibri" pitchFamily="34" charset="0"/>
+                <a:ea typeface="Calibri" pitchFamily="34" charset="-122"/>
+                <a:cs typeface="Calibri" pitchFamily="34" charset="-120"/>
+              </a:rPr>
+              <a:t>12</a:t>
+            </a:r>
+            <a:endParaRPr lang="en-US" sz="1000" dirty="0"/>
+          </a:p>
+        </p:txBody>
+      </p:sp>
+      <p:sp>
+        <p:nvSpPr>
+          <p:cNvPr id="7" name="Text 5"/>
+          <p:cNvSpPr txBox="1"/>
+          <p:nvPr/>
+        </p:nvSpPr>
+        <p:spPr>
+          <a:xfrm>
+            <a:off x="548640" y="1737360"/>
+            <a:ext cx="3200400" cy="731520"/>
+          </a:xfrm>
+          <a:prstGeom prst="rect">
+            <a:avLst/>
+          </a:prstGeom>
+          <a:noFill/>
+          <a:ln/>
+        </p:spPr>
+        <p:txBody>
+          <a:bodyPr wrap="square" lIns="0" tIns="0" rIns="0" bIns="0" rtlCol="0" anchor="ctr"/>
+          <a:lstStyle/>
+          <a:p>
+            <a:pPr marL="0" indent="0">
+              <a:buNone/>
+            </a:pPr>
+            <a:r>
+              <a:rPr lang="en-US" sz="4000" b="1" dirty="0">
+                <a:solidFill>
+                  <a:srgbClr val="FFFFFF"/>
+                </a:solidFill>
+                <a:latin typeface="Calibri" pitchFamily="34" charset="0"/>
+                <a:ea typeface="Calibri" pitchFamily="34" charset="-122"/>
+                <a:cs typeface="Calibri" pitchFamily="34" charset="-120"/>
+              </a:rPr>
+              <a:t>59</a:t>
+            </a:r>
+            <a:endParaRPr lang="en-US" sz="4000" dirty="0"/>
+          </a:p>
+        </p:txBody>
+      </p:sp>
+      <p:sp>
+        <p:nvSpPr>
+          <p:cNvPr id="8" name="Text 6"/>
+          <p:cNvSpPr txBox="1"/>
+          <p:nvPr/>
+        </p:nvSpPr>
+        <p:spPr>
+          <a:xfrm>
+            <a:off x="548640" y="2468880"/>
+            <a:ext cx="3200400" cy="457200"/>
+          </a:xfrm>
+          <a:prstGeom prst="rect">
+            <a:avLst/>
+          </a:prstGeom>
+          <a:noFill/>
+          <a:ln/>
+        </p:spPr>
+        <p:txBody>
+          <a:bodyPr wrap="square" lIns="0" tIns="0" rIns="0" bIns="0" rtlCol="0" anchor="t"/>
+          <a:lstStyle/>
+          <a:p>
+            <a:pPr marL="0" indent="0">
+              <a:buNone/>
+            </a:pPr>
+            <a:r>
+              <a:rPr lang="en-US" sz="1300" dirty="0">
+                <a:solidFill>
+                  <a:srgbClr val="73A5C4"/>
+                </a:solidFill>
+                <a:latin typeface="Calibri" pitchFamily="34" charset="0"/>
+                <a:ea typeface="Calibri" pitchFamily="34" charset="-122"/>
+                <a:cs typeface="Calibri" pitchFamily="34" charset="-120"/>
+              </a:rPr>
+              <a:t>pantallas</a:t>
+            </a:r>
+            <a:endParaRPr lang="en-US" sz="1300" dirty="0"/>
+          </a:p>
+        </p:txBody>
+      </p:sp>
+      <p:sp>
+        <p:nvSpPr>
+          <p:cNvPr id="9" name="Text 7"/>
+          <p:cNvSpPr txBox="1"/>
+          <p:nvPr/>
+        </p:nvSpPr>
+        <p:spPr>
+          <a:xfrm>
+            <a:off x="548640" y="3108960"/>
+            <a:ext cx="3200400" cy="731520"/>
+          </a:xfrm>
+          <a:prstGeom prst="rect">
+            <a:avLst/>
+          </a:prstGeom>
+          <a:noFill/>
+          <a:ln/>
+        </p:spPr>
+        <p:txBody>
+          <a:bodyPr wrap="square" lIns="0" tIns="0" rIns="0" bIns="0" rtlCol="0" anchor="ctr"/>
+          <a:lstStyle/>
+          <a:p>
+            <a:pPr marL="0" indent="0">
+              <a:buNone/>
+            </a:pPr>
+            <a:r>
+              <a:rPr lang="en-US" sz="4000" b="1" dirty="0">
+                <a:solidFill>
+                  <a:srgbClr val="FFFFFF"/>
+                </a:solidFill>
+                <a:latin typeface="Calibri" pitchFamily="34" charset="0"/>
+                <a:ea typeface="Calibri" pitchFamily="34" charset="-122"/>
+                <a:cs typeface="Calibri" pitchFamily="34" charset="-120"/>
+              </a:rPr>
+              <a:t>5</a:t>
+            </a:r>
+            <a:endParaRPr lang="en-US" sz="4000" dirty="0"/>
+          </a:p>
+        </p:txBody>
+      </p:sp>
+      <p:sp>
+        <p:nvSpPr>
+          <p:cNvPr id="10" name="Text 8"/>
+          <p:cNvSpPr txBox="1"/>
+          <p:nvPr/>
+        </p:nvSpPr>
+        <p:spPr>
+          <a:xfrm>
+            <a:off x="548640" y="3840480"/>
+            <a:ext cx="3200400" cy="457200"/>
+          </a:xfrm>
+          <a:prstGeom prst="rect">
+            <a:avLst/>
+          </a:prstGeom>
+          <a:noFill/>
+          <a:ln/>
+        </p:spPr>
+        <p:txBody>
+          <a:bodyPr wrap="square" lIns="0" tIns="0" rIns="0" bIns="0" rtlCol="0" anchor="t"/>
+          <a:lstStyle/>
+          <a:p>
+            <a:pPr marL="0" indent="0">
+              <a:buNone/>
+            </a:pPr>
+            <a:r>
+              <a:rPr lang="en-US" sz="1300" dirty="0">
+                <a:solidFill>
+                  <a:srgbClr val="73A5C4"/>
+                </a:solidFill>
+                <a:latin typeface="Calibri" pitchFamily="34" charset="0"/>
+                <a:ea typeface="Calibri" pitchFamily="34" charset="-122"/>
+                <a:cs typeface="Calibri" pitchFamily="34" charset="-120"/>
+              </a:rPr>
+              <a:t>puntos de inicio</a:t>
+            </a:r>
+            <a:endParaRPr lang="en-US" sz="1300" dirty="0"/>
+          </a:p>
+        </p:txBody>
+      </p:sp>
+      <p:sp>
+        <p:nvSpPr>
+          <p:cNvPr id="11" name="Shape 9"/>
           <p:cNvSpPr/>
           <p:nvPr/>
         </p:nvSpPr>
         <p:spPr>
           <a:xfrm>
-            <a:off x="9722815" y="384048"/>
-            <a:ext cx="1920240" cy="365760"/>
-          </a:xfrm>
-          <a:prstGeom prst="roundRect">
-            <a:avLst>
-              <a:gd name="adj" fmla="val 50000"/>
-            </a:avLst>
+            <a:off x="4206240" y="1737360"/>
+            <a:ext cx="457200" cy="457200"/>
+          </a:xfrm>
+          <a:prstGeom prst="ellipse">
+            <a:avLst/>
           </a:prstGeom>
           <a:solidFill>
             <a:srgbClr val="22506F"/>
@@ -4871,14 +4669,14 @@
       </p:sp>
       <p:sp>
         <p:nvSpPr>
-          <p:cNvPr id="5" name="Text 3"/>
-          <p:cNvSpPr txBox="1"/>
-          <p:nvPr/>
-        </p:nvSpPr>
-        <p:spPr>
-          <a:xfrm>
-            <a:off x="9722815" y="384048"/>
-            <a:ext cx="1920240" cy="365760"/>
+          <p:cNvPr id="12" name="Text 10"/>
+          <p:cNvSpPr txBox="1"/>
+          <p:nvPr/>
+        </p:nvSpPr>
+        <p:spPr>
+          <a:xfrm>
+            <a:off x="4206240" y="1737360"/>
+            <a:ext cx="457200" cy="457200"/>
           </a:xfrm>
           <a:prstGeom prst="rect">
             <a:avLst/>
@@ -4890,11 +4688,11 @@
           <a:bodyPr wrap="square" lIns="0" tIns="0" rIns="0" bIns="0" rtlCol="0" anchor="ctr"/>
           <a:lstStyle/>
           <a:p>
-            <a:pPr algn="ctr" indent="0" marL="0">
-              <a:buNone/>
-            </a:pPr>
-            <a:r>
-              <a:rPr lang="en-US" sz="1200" b="1" dirty="0">
+            <a:pPr marL="0" indent="0" algn="ctr">
+              <a:buNone/>
+            </a:pPr>
+            <a:r>
+              <a:rPr lang="en-US" sz="1600" b="1" dirty="0">
                 <a:solidFill>
                   <a:srgbClr val="FFFFFF"/>
                 </a:solidFill>
@@ -4902,22 +4700,22 @@
                 <a:ea typeface="Calibri" pitchFamily="34" charset="-122"/>
                 <a:cs typeface="Calibri" pitchFamily="34" charset="-120"/>
               </a:rPr>
-              <a:t>Expone: Paloma</a:t>
-            </a:r>
-            <a:endParaRPr lang="en-US" sz="1200" dirty="0"/>
-          </a:p>
-        </p:txBody>
-      </p:sp>
-      <p:sp>
-        <p:nvSpPr>
-          <p:cNvPr id="6" name="Text 4"/>
-          <p:cNvSpPr txBox="1"/>
-          <p:nvPr/>
-        </p:nvSpPr>
-        <p:spPr>
-          <a:xfrm>
-            <a:off x="11094415" y="6446520"/>
-            <a:ext cx="548640" cy="274320"/>
+              <a:t>1</a:t>
+            </a:r>
+            <a:endParaRPr lang="en-US" sz="1600" dirty="0"/>
+          </a:p>
+        </p:txBody>
+      </p:sp>
+      <p:sp>
+        <p:nvSpPr>
+          <p:cNvPr id="13" name="Text 11"/>
+          <p:cNvSpPr txBox="1"/>
+          <p:nvPr/>
+        </p:nvSpPr>
+        <p:spPr>
+          <a:xfrm>
+            <a:off x="4846320" y="1719072"/>
+            <a:ext cx="6766560" cy="640080"/>
           </a:xfrm>
           <a:prstGeom prst="rect">
             <a:avLst/>
@@ -4929,50 +4727,11 @@
           <a:bodyPr wrap="square" lIns="0" tIns="0" rIns="0" bIns="0" rtlCol="0" anchor="ctr"/>
           <a:lstStyle/>
           <a:p>
-            <a:pPr algn="r" indent="0" marL="0">
-              <a:buNone/>
-            </a:pPr>
-            <a:r>
-              <a:rPr lang="en-US" sz="1000" dirty="0">
-                <a:solidFill>
-                  <a:srgbClr val="73A5C4"/>
-                </a:solidFill>
-                <a:latin typeface="Calibri" pitchFamily="34" charset="0"/>
-                <a:ea typeface="Calibri" pitchFamily="34" charset="-122"/>
-                <a:cs typeface="Calibri" pitchFamily="34" charset="-120"/>
-              </a:rPr>
-              <a:t>12</a:t>
-            </a:r>
-            <a:endParaRPr lang="en-US" sz="1000" dirty="0"/>
-          </a:p>
-        </p:txBody>
-      </p:sp>
-      <p:sp>
-        <p:nvSpPr>
-          <p:cNvPr id="7" name="Text 5"/>
-          <p:cNvSpPr txBox="1"/>
-          <p:nvPr/>
-        </p:nvSpPr>
-        <p:spPr>
-          <a:xfrm>
-            <a:off x="548640" y="1737360"/>
-            <a:ext cx="3200400" cy="731520"/>
-          </a:xfrm>
-          <a:prstGeom prst="rect">
-            <a:avLst/>
-          </a:prstGeom>
-          <a:noFill/>
-          <a:ln/>
-        </p:spPr>
-        <p:txBody>
-          <a:bodyPr wrap="square" lIns="0" tIns="0" rIns="0" bIns="0" rtlCol="0" anchor="ctr"/>
-          <a:lstStyle/>
-          <a:p>
-            <a:pPr indent="0" marL="0">
-              <a:buNone/>
-            </a:pPr>
-            <a:r>
-              <a:rPr lang="en-US" sz="4000" b="1" dirty="0">
+            <a:pPr marL="0" indent="0">
+              <a:buNone/>
+            </a:pPr>
+            <a:r>
+              <a:rPr lang="en-US" sz="1600" dirty="0">
                 <a:solidFill>
                   <a:srgbClr val="FFFFFF"/>
                 </a:solidFill>
@@ -4980,138 +4739,21 @@
                 <a:ea typeface="Calibri" pitchFamily="34" charset="-122"/>
                 <a:cs typeface="Calibri" pitchFamily="34" charset="-120"/>
               </a:rPr>
-              <a:t>59</a:t>
-            </a:r>
-            <a:endParaRPr lang="en-US" sz="4000" dirty="0"/>
-          </a:p>
-        </p:txBody>
-      </p:sp>
-      <p:sp>
-        <p:nvSpPr>
-          <p:cNvPr id="8" name="Text 6"/>
-          <p:cNvSpPr txBox="1"/>
-          <p:nvPr/>
-        </p:nvSpPr>
-        <p:spPr>
-          <a:xfrm>
-            <a:off x="548640" y="2468880"/>
-            <a:ext cx="3200400" cy="457200"/>
-          </a:xfrm>
-          <a:prstGeom prst="rect">
-            <a:avLst/>
-          </a:prstGeom>
-          <a:noFill/>
-          <a:ln/>
-        </p:spPr>
-        <p:txBody>
-          <a:bodyPr wrap="square" lIns="0" tIns="0" rIns="0" bIns="0" rtlCol="0" anchor="t"/>
-          <a:lstStyle/>
-          <a:p>
-            <a:pPr indent="0" marL="0">
-              <a:buNone/>
-            </a:pPr>
-            <a:r>
-              <a:rPr lang="en-US" sz="1300" dirty="0">
-                <a:solidFill>
-                  <a:srgbClr val="73A5C4"/>
-                </a:solidFill>
-                <a:latin typeface="Calibri" pitchFamily="34" charset="0"/>
-                <a:ea typeface="Calibri" pitchFamily="34" charset="-122"/>
-                <a:cs typeface="Calibri" pitchFamily="34" charset="-120"/>
-              </a:rPr>
-              <a:t>pantallas</a:t>
-            </a:r>
-            <a:endParaRPr lang="en-US" sz="1300" dirty="0"/>
-          </a:p>
-        </p:txBody>
-      </p:sp>
-      <p:sp>
-        <p:nvSpPr>
-          <p:cNvPr id="9" name="Text 7"/>
-          <p:cNvSpPr txBox="1"/>
-          <p:nvPr/>
-        </p:nvSpPr>
-        <p:spPr>
-          <a:xfrm>
-            <a:off x="548640" y="3108960"/>
-            <a:ext cx="3200400" cy="731520"/>
-          </a:xfrm>
-          <a:prstGeom prst="rect">
-            <a:avLst/>
-          </a:prstGeom>
-          <a:noFill/>
-          <a:ln/>
-        </p:spPr>
-        <p:txBody>
-          <a:bodyPr wrap="square" lIns="0" tIns="0" rIns="0" bIns="0" rtlCol="0" anchor="ctr"/>
-          <a:lstStyle/>
-          <a:p>
-            <a:pPr indent="0" marL="0">
-              <a:buNone/>
-            </a:pPr>
-            <a:r>
-              <a:rPr lang="en-US" sz="4000" b="1" dirty="0">
-                <a:solidFill>
-                  <a:srgbClr val="FFFFFF"/>
-                </a:solidFill>
-                <a:latin typeface="Calibri" pitchFamily="34" charset="0"/>
-                <a:ea typeface="Calibri" pitchFamily="34" charset="-122"/>
-                <a:cs typeface="Calibri" pitchFamily="34" charset="-120"/>
-              </a:rPr>
-              <a:t>5</a:t>
-            </a:r>
-            <a:endParaRPr lang="en-US" sz="4000" dirty="0"/>
-          </a:p>
-        </p:txBody>
-      </p:sp>
-      <p:sp>
-        <p:nvSpPr>
-          <p:cNvPr id="10" name="Text 8"/>
-          <p:cNvSpPr txBox="1"/>
-          <p:nvPr/>
-        </p:nvSpPr>
-        <p:spPr>
-          <a:xfrm>
-            <a:off x="548640" y="3840480"/>
-            <a:ext cx="3200400" cy="457200"/>
-          </a:xfrm>
-          <a:prstGeom prst="rect">
-            <a:avLst/>
-          </a:prstGeom>
-          <a:noFill/>
-          <a:ln/>
-        </p:spPr>
-        <p:txBody>
-          <a:bodyPr wrap="square" lIns="0" tIns="0" rIns="0" bIns="0" rtlCol="0" anchor="t"/>
-          <a:lstStyle/>
-          <a:p>
-            <a:pPr indent="0" marL="0">
-              <a:buNone/>
-            </a:pPr>
-            <a:r>
-              <a:rPr lang="en-US" sz="1300" dirty="0">
-                <a:solidFill>
-                  <a:srgbClr val="73A5C4"/>
-                </a:solidFill>
-                <a:latin typeface="Calibri" pitchFamily="34" charset="0"/>
-                <a:ea typeface="Calibri" pitchFamily="34" charset="-122"/>
-                <a:cs typeface="Calibri" pitchFamily="34" charset="-120"/>
-              </a:rPr>
-              <a:t>puntos de inicio</a:t>
-            </a:r>
-            <a:endParaRPr lang="en-US" sz="1300" dirty="0"/>
-          </a:p>
-        </p:txBody>
-      </p:sp>
-      <p:sp>
-        <p:nvSpPr>
-          <p:cNvPr id="11" name="Shape 9"/>
+              <a:t>Rumbo · escritorio (empleado): inicio de sesión → agenda → cliente → consulta → cotización → viaje → cobro</a:t>
+            </a:r>
+            <a:endParaRPr lang="en-US" sz="1600" dirty="0"/>
+          </a:p>
+        </p:txBody>
+      </p:sp>
+      <p:sp>
+        <p:nvSpPr>
+          <p:cNvPr id="14" name="Shape 12"/>
           <p:cNvSpPr/>
           <p:nvPr/>
         </p:nvSpPr>
         <p:spPr>
           <a:xfrm>
-            <a:off x="4206240" y="1737360"/>
+            <a:off x="4206240" y="2468880"/>
             <a:ext cx="457200" cy="457200"/>
           </a:xfrm>
           <a:prstGeom prst="ellipse">
@@ -5125,13 +4767,13 @@
       </p:sp>
       <p:sp>
         <p:nvSpPr>
-          <p:cNvPr id="12" name="Text 10"/>
-          <p:cNvSpPr txBox="1"/>
-          <p:nvPr/>
-        </p:nvSpPr>
-        <p:spPr>
-          <a:xfrm>
-            <a:off x="4206240" y="1737360"/>
+          <p:cNvPr id="15" name="Text 13"/>
+          <p:cNvSpPr txBox="1"/>
+          <p:nvPr/>
+        </p:nvSpPr>
+        <p:spPr>
+          <a:xfrm>
+            <a:off x="4206240" y="2468880"/>
             <a:ext cx="457200" cy="457200"/>
           </a:xfrm>
           <a:prstGeom prst="rect">
@@ -5144,7 +4786,7 @@
           <a:bodyPr wrap="square" lIns="0" tIns="0" rIns="0" bIns="0" rtlCol="0" anchor="ctr"/>
           <a:lstStyle/>
           <a:p>
-            <a:pPr algn="ctr" indent="0" marL="0">
+            <a:pPr marL="0" indent="0" algn="ctr">
               <a:buNone/>
             </a:pPr>
             <a:r>
@@ -5156,7 +4798,7 @@
                 <a:ea typeface="Calibri" pitchFamily="34" charset="-122"/>
                 <a:cs typeface="Calibri" pitchFamily="34" charset="-120"/>
               </a:rPr>
-              <a:t>1</a:t>
+              <a:t>2</a:t>
             </a:r>
             <a:endParaRPr lang="en-US" sz="1600" dirty="0"/>
           </a:p>
@@ -5164,13 +4806,13 @@
       </p:sp>
       <p:sp>
         <p:nvSpPr>
-          <p:cNvPr id="13" name="Text 11"/>
-          <p:cNvSpPr txBox="1"/>
-          <p:nvPr/>
-        </p:nvSpPr>
-        <p:spPr>
-          <a:xfrm>
-            <a:off x="4846320" y="1719072"/>
+          <p:cNvPr id="16" name="Text 14"/>
+          <p:cNvSpPr txBox="1"/>
+          <p:nvPr/>
+        </p:nvSpPr>
+        <p:spPr>
+          <a:xfrm>
+            <a:off x="4846320" y="2450592"/>
             <a:ext cx="6766560" cy="640080"/>
           </a:xfrm>
           <a:prstGeom prst="rect">
@@ -5183,7 +4825,7 @@
           <a:bodyPr wrap="square" lIns="0" tIns="0" rIns="0" bIns="0" rtlCol="0" anchor="ctr"/>
           <a:lstStyle/>
           <a:p>
-            <a:pPr indent="0" marL="0">
+            <a:pPr marL="0" indent="0">
               <a:buNone/>
             </a:pPr>
             <a:r>
@@ -5195,7 +4837,7 @@
                 <a:ea typeface="Calibri" pitchFamily="34" charset="-122"/>
                 <a:cs typeface="Calibri" pitchFamily="34" charset="-120"/>
               </a:rPr>
-              <a:t>Rumbo · escritorio (empleado): inicio de sesión → agenda → cliente → consulta → cotización → viaje → cobro</a:t>
+              <a:t>Rumbo · mobile</a:t>
             </a:r>
             <a:endParaRPr lang="en-US" sz="1600" dirty="0"/>
           </a:p>
@@ -5203,13 +4845,13 @@
       </p:sp>
       <p:sp>
         <p:nvSpPr>
-          <p:cNvPr id="14" name="Shape 12"/>
+          <p:cNvPr id="17" name="Shape 15"/>
           <p:cNvSpPr/>
           <p:nvPr/>
         </p:nvSpPr>
         <p:spPr>
           <a:xfrm>
-            <a:off x="4206240" y="2468880"/>
+            <a:off x="4206240" y="3200400"/>
             <a:ext cx="457200" cy="457200"/>
           </a:xfrm>
           <a:prstGeom prst="ellipse">
@@ -5223,13 +4865,13 @@
       </p:sp>
       <p:sp>
         <p:nvSpPr>
-          <p:cNvPr id="15" name="Text 13"/>
-          <p:cNvSpPr txBox="1"/>
-          <p:nvPr/>
-        </p:nvSpPr>
-        <p:spPr>
-          <a:xfrm>
-            <a:off x="4206240" y="2468880"/>
+          <p:cNvPr id="18" name="Text 16"/>
+          <p:cNvSpPr txBox="1"/>
+          <p:nvPr/>
+        </p:nvSpPr>
+        <p:spPr>
+          <a:xfrm>
+            <a:off x="4206240" y="3200400"/>
             <a:ext cx="457200" cy="457200"/>
           </a:xfrm>
           <a:prstGeom prst="rect">
@@ -5242,7 +4884,7 @@
           <a:bodyPr wrap="square" lIns="0" tIns="0" rIns="0" bIns="0" rtlCol="0" anchor="ctr"/>
           <a:lstStyle/>
           <a:p>
-            <a:pPr algn="ctr" indent="0" marL="0">
+            <a:pPr marL="0" indent="0" algn="ctr">
               <a:buNone/>
             </a:pPr>
             <a:r>
@@ -5254,7 +4896,7 @@
                 <a:ea typeface="Calibri" pitchFamily="34" charset="-122"/>
                 <a:cs typeface="Calibri" pitchFamily="34" charset="-120"/>
               </a:rPr>
-              <a:t>2</a:t>
+              <a:t>3</a:t>
             </a:r>
             <a:endParaRPr lang="en-US" sz="1600" dirty="0"/>
           </a:p>
@@ -5262,13 +4904,13 @@
       </p:sp>
       <p:sp>
         <p:nvSpPr>
-          <p:cNvPr id="16" name="Text 14"/>
-          <p:cNvSpPr txBox="1"/>
-          <p:nvPr/>
-        </p:nvSpPr>
-        <p:spPr>
-          <a:xfrm>
-            <a:off x="4846320" y="2450592"/>
+          <p:cNvPr id="19" name="Text 17"/>
+          <p:cNvSpPr txBox="1"/>
+          <p:nvPr/>
+        </p:nvSpPr>
+        <p:spPr>
+          <a:xfrm>
+            <a:off x="4846320" y="3182112"/>
             <a:ext cx="6766560" cy="640080"/>
           </a:xfrm>
           <a:prstGeom prst="rect">
@@ -5281,7 +4923,7 @@
           <a:bodyPr wrap="square" lIns="0" tIns="0" rIns="0" bIns="0" rtlCol="0" anchor="ctr"/>
           <a:lstStyle/>
           <a:p>
-            <a:pPr indent="0" marL="0">
+            <a:pPr marL="0" indent="0">
               <a:buNone/>
             </a:pPr>
             <a:r>
@@ -5293,7 +4935,7 @@
                 <a:ea typeface="Calibri" pitchFamily="34" charset="-122"/>
                 <a:cs typeface="Calibri" pitchFamily="34" charset="-120"/>
               </a:rPr>
-              <a:t>Rumbo · mobile</a:t>
+              <a:t>Dueña · dashboard</a:t>
             </a:r>
             <a:endParaRPr lang="en-US" sz="1600" dirty="0"/>
           </a:p>
@@ -5301,13 +4943,13 @@
       </p:sp>
       <p:sp>
         <p:nvSpPr>
-          <p:cNvPr id="17" name="Shape 15"/>
+          <p:cNvPr id="20" name="Shape 18"/>
           <p:cNvSpPr/>
           <p:nvPr/>
         </p:nvSpPr>
         <p:spPr>
           <a:xfrm>
-            <a:off x="4206240" y="3200400"/>
+            <a:off x="4206240" y="3931920"/>
             <a:ext cx="457200" cy="457200"/>
           </a:xfrm>
           <a:prstGeom prst="ellipse">
@@ -5321,13 +4963,13 @@
       </p:sp>
       <p:sp>
         <p:nvSpPr>
-          <p:cNvPr id="18" name="Text 16"/>
-          <p:cNvSpPr txBox="1"/>
-          <p:nvPr/>
-        </p:nvSpPr>
-        <p:spPr>
-          <a:xfrm>
-            <a:off x="4206240" y="3200400"/>
+          <p:cNvPr id="21" name="Text 19"/>
+          <p:cNvSpPr txBox="1"/>
+          <p:nvPr/>
+        </p:nvSpPr>
+        <p:spPr>
+          <a:xfrm>
+            <a:off x="4206240" y="3931920"/>
             <a:ext cx="457200" cy="457200"/>
           </a:xfrm>
           <a:prstGeom prst="rect">
@@ -5340,7 +4982,7 @@
           <a:bodyPr wrap="square" lIns="0" tIns="0" rIns="0" bIns="0" rtlCol="0" anchor="ctr"/>
           <a:lstStyle/>
           <a:p>
-            <a:pPr algn="ctr" indent="0" marL="0">
+            <a:pPr marL="0" indent="0" algn="ctr">
               <a:buNone/>
             </a:pPr>
             <a:r>
@@ -5352,7 +4994,7 @@
                 <a:ea typeface="Calibri" pitchFamily="34" charset="-122"/>
                 <a:cs typeface="Calibri" pitchFamily="34" charset="-120"/>
               </a:rPr>
-              <a:t>3</a:t>
+              <a:t>4</a:t>
             </a:r>
             <a:endParaRPr lang="en-US" sz="1600" dirty="0"/>
           </a:p>
@@ -5360,13 +5002,13 @@
       </p:sp>
       <p:sp>
         <p:nvSpPr>
-          <p:cNvPr id="19" name="Text 17"/>
-          <p:cNvSpPr txBox="1"/>
-          <p:nvPr/>
-        </p:nvSpPr>
-        <p:spPr>
-          <a:xfrm>
-            <a:off x="4846320" y="3182112"/>
+          <p:cNvPr id="22" name="Text 20"/>
+          <p:cNvSpPr txBox="1"/>
+          <p:nvPr/>
+        </p:nvSpPr>
+        <p:spPr>
+          <a:xfrm>
+            <a:off x="4846320" y="3913632"/>
             <a:ext cx="6766560" cy="640080"/>
           </a:xfrm>
           <a:prstGeom prst="rect">
@@ -5379,7 +5021,7 @@
           <a:bodyPr wrap="square" lIns="0" tIns="0" rIns="0" bIns="0" rtlCol="0" anchor="ctr"/>
           <a:lstStyle/>
           <a:p>
-            <a:pPr indent="0" marL="0">
+            <a:pPr marL="0" indent="0">
               <a:buNone/>
             </a:pPr>
             <a:r>
@@ -5391,7 +5033,7 @@
                 <a:ea typeface="Calibri" pitchFamily="34" charset="-122"/>
                 <a:cs typeface="Calibri" pitchFamily="34" charset="-120"/>
               </a:rPr>
-              <a:t>Dueña · dashboard</a:t>
+              <a:t>Admin · configuración</a:t>
             </a:r>
             <a:endParaRPr lang="en-US" sz="1600" dirty="0"/>
           </a:p>
@@ -5399,13 +5041,13 @@
       </p:sp>
       <p:sp>
         <p:nvSpPr>
-          <p:cNvPr id="20" name="Shape 18"/>
+          <p:cNvPr id="23" name="Shape 21"/>
           <p:cNvSpPr/>
           <p:nvPr/>
         </p:nvSpPr>
         <p:spPr>
           <a:xfrm>
-            <a:off x="4206240" y="3931920"/>
+            <a:off x="4206240" y="4663440"/>
             <a:ext cx="457200" cy="457200"/>
           </a:xfrm>
           <a:prstGeom prst="ellipse">
@@ -5419,86 +5061,8 @@
       </p:sp>
       <p:sp>
         <p:nvSpPr>
-          <p:cNvPr id="21" name="Text 19"/>
-          <p:cNvSpPr txBox="1"/>
-          <p:nvPr/>
-        </p:nvSpPr>
-        <p:spPr>
-          <a:xfrm>
-            <a:off x="4206240" y="3931920"/>
-            <a:ext cx="457200" cy="457200"/>
-          </a:xfrm>
-          <a:prstGeom prst="rect">
-            <a:avLst/>
-          </a:prstGeom>
-          <a:noFill/>
-          <a:ln/>
-        </p:spPr>
-        <p:txBody>
-          <a:bodyPr wrap="square" lIns="0" tIns="0" rIns="0" bIns="0" rtlCol="0" anchor="ctr"/>
-          <a:lstStyle/>
-          <a:p>
-            <a:pPr algn="ctr" indent="0" marL="0">
-              <a:buNone/>
-            </a:pPr>
-            <a:r>
-              <a:rPr lang="en-US" sz="1600" b="1" dirty="0">
-                <a:solidFill>
-                  <a:srgbClr val="FFFFFF"/>
-                </a:solidFill>
-                <a:latin typeface="Calibri" pitchFamily="34" charset="0"/>
-                <a:ea typeface="Calibri" pitchFamily="34" charset="-122"/>
-                <a:cs typeface="Calibri" pitchFamily="34" charset="-120"/>
-              </a:rPr>
-              <a:t>4</a:t>
-            </a:r>
-            <a:endParaRPr lang="en-US" sz="1600" dirty="0"/>
-          </a:p>
-        </p:txBody>
-      </p:sp>
-      <p:sp>
-        <p:nvSpPr>
-          <p:cNvPr id="22" name="Text 20"/>
-          <p:cNvSpPr txBox="1"/>
-          <p:nvPr/>
-        </p:nvSpPr>
-        <p:spPr>
-          <a:xfrm>
-            <a:off x="4846320" y="3913632"/>
-            <a:ext cx="6766560" cy="640080"/>
-          </a:xfrm>
-          <a:prstGeom prst="rect">
-            <a:avLst/>
-          </a:prstGeom>
-          <a:noFill/>
-          <a:ln/>
-        </p:spPr>
-        <p:txBody>
-          <a:bodyPr wrap="square" lIns="0" tIns="0" rIns="0" bIns="0" rtlCol="0" anchor="ctr"/>
-          <a:lstStyle/>
-          <a:p>
-            <a:pPr indent="0" marL="0">
-              <a:buNone/>
-            </a:pPr>
-            <a:r>
-              <a:rPr lang="en-US" sz="1600" dirty="0">
-                <a:solidFill>
-                  <a:srgbClr val="FFFFFF"/>
-                </a:solidFill>
-                <a:latin typeface="Calibri" pitchFamily="34" charset="0"/>
-                <a:ea typeface="Calibri" pitchFamily="34" charset="-122"/>
-                <a:cs typeface="Calibri" pitchFamily="34" charset="-120"/>
-              </a:rPr>
-              <a:t>Admin · configuración</a:t>
-            </a:r>
-            <a:endParaRPr lang="en-US" sz="1600" dirty="0"/>
-          </a:p>
-        </p:txBody>
-      </p:sp>
-      <p:sp>
-        <p:nvSpPr>
-          <p:cNvPr id="23" name="Shape 21"/>
-          <p:cNvSpPr/>
+          <p:cNvPr id="24" name="Text 22"/>
+          <p:cNvSpPr txBox="1"/>
           <p:nvPr/>
         </p:nvSpPr>
         <p:spPr>
@@ -5506,26 +5070,6 @@
             <a:off x="4206240" y="4663440"/>
             <a:ext cx="457200" cy="457200"/>
           </a:xfrm>
-          <a:prstGeom prst="ellipse">
-            <a:avLst/>
-          </a:prstGeom>
-          <a:solidFill>
-            <a:srgbClr val="22506F"/>
-          </a:solidFill>
-          <a:ln/>
-        </p:spPr>
-      </p:sp>
-      <p:sp>
-        <p:nvSpPr>
-          <p:cNvPr id="24" name="Text 22"/>
-          <p:cNvSpPr txBox="1"/>
-          <p:nvPr/>
-        </p:nvSpPr>
-        <p:spPr>
-          <a:xfrm>
-            <a:off x="4206240" y="4663440"/>
-            <a:ext cx="457200" cy="457200"/>
-          </a:xfrm>
           <a:prstGeom prst="rect">
             <a:avLst/>
           </a:prstGeom>
@@ -5536,7 +5080,7 @@
           <a:bodyPr wrap="square" lIns="0" tIns="0" rIns="0" bIns="0" rtlCol="0" anchor="ctr"/>
           <a:lstStyle/>
           <a:p>
-            <a:pPr algn="ctr" indent="0" marL="0">
+            <a:pPr marL="0" indent="0" algn="ctr">
               <a:buNone/>
             </a:pPr>
             <a:r>
@@ -5575,7 +5119,7 @@
           <a:bodyPr wrap="square" lIns="0" tIns="0" rIns="0" bIns="0" rtlCol="0" anchor="ctr"/>
           <a:lstStyle/>
           <a:p>
-            <a:pPr indent="0" marL="0">
+            <a:pPr marL="0" indent="0">
               <a:buNone/>
             </a:pPr>
             <a:r>
@@ -5596,7 +5140,7 @@
       <p:sp>
         <p:nvSpPr>
           <p:cNvPr id="26" name="Text 24">
-            <a:hlinkClick r:id="rId1" tooltip=""/>
+            <a:hlinkClick r:id="rId3"/>
           </p:cNvPr>
           <p:cNvSpPr txBox="1"/>
           <p:nvPr/>
@@ -5616,7 +5160,7 @@
           <a:bodyPr wrap="square" lIns="0" tIns="0" rIns="0" bIns="0" rtlCol="0" anchor="ctr"/>
           <a:lstStyle/>
           <a:p>
-            <a:pPr indent="0" marL="0">
+            <a:pPr marL="0" indent="0">
               <a:buNone/>
             </a:pPr>
             <a:r>
@@ -5627,7 +5171,7 @@
                 <a:latin typeface="Calibri" pitchFamily="34" charset="0"/>
                 <a:ea typeface="Calibri" pitchFamily="34" charset="-122"/>
                 <a:cs typeface="Calibri" pitchFamily="34" charset="-120"/>
-                <a:hlinkClick r:id="rId1" invalidUrl="" action="" tgtFrame="" tooltip="" history="1" highlightClick="0" endSnd="0">
+                <a:hlinkClick r:id="rId3">
                   <a:extLst>
                     <a:ext uri="{A12FA001-AC4F-418D-AE19-62706E023703}">
                       <ahyp:hlinkClr xmlns:ahyp="http://schemas.microsoft.com/office/drawing/2018/hyperlinkcolor" val="tx"/>
@@ -5657,6 +5201,7 @@
         <a:solidFill>
           <a:srgbClr val="F6F8FA"/>
         </a:solidFill>
+        <a:effectLst/>
       </p:bgPr>
     </p:bg>
     <p:spTree>
@@ -5694,11 +5239,11 @@
           <a:bodyPr wrap="square" lIns="0" tIns="0" rIns="0" bIns="0" rtlCol="0" anchor="ctr"/>
           <a:lstStyle/>
           <a:p>
-            <a:pPr indent="0" marL="0">
-              <a:buNone/>
-            </a:pPr>
-            <a:r>
-              <a:rPr lang="en-US" sz="1100" b="1" spc="200" kern="0" dirty="0">
+            <a:pPr marL="0" indent="0">
+              <a:buNone/>
+            </a:pPr>
+            <a:r>
+              <a:rPr lang="en-US" sz="1100" b="1" kern="0" spc="200" dirty="0">
                 <a:solidFill>
                   <a:srgbClr val="3E7196"/>
                 </a:solidFill>
@@ -5733,7 +5278,7 @@
           <a:bodyPr wrap="square" lIns="0" tIns="0" rIns="0" bIns="0" rtlCol="0" anchor="t"/>
           <a:lstStyle/>
           <a:p>
-            <a:pPr indent="0" marL="0">
+            <a:pPr marL="0" indent="0">
               <a:buNone/>
             </a:pPr>
             <a:r>
@@ -5748,67 +5293,6 @@
               <a:t>El circuito que Rumbo digitaliza</a:t>
             </a:r>
             <a:endParaRPr lang="en-US" sz="3000" dirty="0"/>
-          </a:p>
-        </p:txBody>
-      </p:sp>
-      <p:sp>
-        <p:nvSpPr>
-          <p:cNvPr id="4" name="Shape 2"/>
-          <p:cNvSpPr/>
-          <p:nvPr/>
-        </p:nvSpPr>
-        <p:spPr>
-          <a:xfrm>
-            <a:off x="9722815" y="384048"/>
-            <a:ext cx="1920240" cy="365760"/>
-          </a:xfrm>
-          <a:prstGeom prst="roundRect">
-            <a:avLst>
-              <a:gd name="adj" fmla="val 50000"/>
-            </a:avLst>
-          </a:prstGeom>
-          <a:solidFill>
-            <a:srgbClr val="E9F1F7"/>
-          </a:solidFill>
-          <a:ln/>
-        </p:spPr>
-      </p:sp>
-      <p:sp>
-        <p:nvSpPr>
-          <p:cNvPr id="5" name="Text 3"/>
-          <p:cNvSpPr txBox="1"/>
-          <p:nvPr/>
-        </p:nvSpPr>
-        <p:spPr>
-          <a:xfrm>
-            <a:off x="9722815" y="384048"/>
-            <a:ext cx="1920240" cy="365760"/>
-          </a:xfrm>
-          <a:prstGeom prst="rect">
-            <a:avLst/>
-          </a:prstGeom>
-          <a:noFill/>
-          <a:ln/>
-        </p:spPr>
-        <p:txBody>
-          <a:bodyPr wrap="square" lIns="0" tIns="0" rIns="0" bIns="0" rtlCol="0" anchor="ctr"/>
-          <a:lstStyle/>
-          <a:p>
-            <a:pPr algn="ctr" indent="0" marL="0">
-              <a:buNone/>
-            </a:pPr>
-            <a:r>
-              <a:rPr lang="en-US" sz="1200" b="1" dirty="0">
-                <a:solidFill>
-                  <a:srgbClr val="22506F"/>
-                </a:solidFill>
-                <a:latin typeface="Calibri" pitchFamily="34" charset="0"/>
-                <a:ea typeface="Calibri" pitchFamily="34" charset="-122"/>
-                <a:cs typeface="Calibri" pitchFamily="34" charset="-120"/>
-              </a:rPr>
-              <a:t>Expone: Francisco</a:t>
-            </a:r>
-            <a:endParaRPr lang="en-US" sz="1200" dirty="0"/>
           </a:p>
         </p:txBody>
       </p:sp>
@@ -5833,7 +5317,7 @@
           <a:bodyPr wrap="square" lIns="0" tIns="0" rIns="0" bIns="0" rtlCol="0" anchor="ctr"/>
           <a:lstStyle/>
           <a:p>
-            <a:pPr algn="r" indent="0" marL="0">
+            <a:pPr marL="0" indent="0" algn="r">
               <a:buNone/>
             </a:pPr>
             <a:r>
@@ -5919,7 +5403,7 @@
           <a:bodyPr wrap="square" lIns="0" tIns="0" rIns="0" bIns="0" rtlCol="0" anchor="ctr"/>
           <a:lstStyle/>
           <a:p>
-            <a:pPr algn="ctr" indent="0" marL="0">
+            <a:pPr marL="0" indent="0" algn="ctr">
               <a:buNone/>
             </a:pPr>
             <a:r>
@@ -5958,7 +5442,7 @@
           <a:bodyPr wrap="square" lIns="0" tIns="0" rIns="0" bIns="0" rtlCol="0" anchor="ctr"/>
           <a:lstStyle/>
           <a:p>
-            <a:pPr indent="0" marL="0">
+            <a:pPr marL="0" indent="0">
               <a:buNone/>
             </a:pPr>
             <a:r>
@@ -5997,7 +5481,7 @@
           <a:bodyPr wrap="square" lIns="0" tIns="0" rIns="0" bIns="0" rtlCol="0" anchor="ctr"/>
           <a:lstStyle/>
           <a:p>
-            <a:pPr indent="0" marL="0">
+            <a:pPr marL="0" indent="0">
               <a:buNone/>
             </a:pPr>
             <a:r>
@@ -6083,7 +5567,7 @@
           <a:bodyPr wrap="square" lIns="0" tIns="0" rIns="0" bIns="0" rtlCol="0" anchor="ctr"/>
           <a:lstStyle/>
           <a:p>
-            <a:pPr algn="ctr" indent="0" marL="0">
+            <a:pPr marL="0" indent="0" algn="ctr">
               <a:buNone/>
             </a:pPr>
             <a:r>
@@ -6122,7 +5606,7 @@
           <a:bodyPr wrap="square" lIns="0" tIns="0" rIns="0" bIns="0" rtlCol="0" anchor="ctr"/>
           <a:lstStyle/>
           <a:p>
-            <a:pPr indent="0" marL="0">
+            <a:pPr marL="0" indent="0">
               <a:buNone/>
             </a:pPr>
             <a:r>
@@ -6161,7 +5645,7 @@
           <a:bodyPr wrap="square" lIns="0" tIns="0" rIns="0" bIns="0" rtlCol="0" anchor="ctr"/>
           <a:lstStyle/>
           <a:p>
-            <a:pPr indent="0" marL="0">
+            <a:pPr marL="0" indent="0">
               <a:buNone/>
             </a:pPr>
             <a:r>
@@ -6247,7 +5731,7 @@
           <a:bodyPr wrap="square" lIns="0" tIns="0" rIns="0" bIns="0" rtlCol="0" anchor="ctr"/>
           <a:lstStyle/>
           <a:p>
-            <a:pPr algn="ctr" indent="0" marL="0">
+            <a:pPr marL="0" indent="0" algn="ctr">
               <a:buNone/>
             </a:pPr>
             <a:r>
@@ -6286,7 +5770,7 @@
           <a:bodyPr wrap="square" lIns="0" tIns="0" rIns="0" bIns="0" rtlCol="0" anchor="ctr"/>
           <a:lstStyle/>
           <a:p>
-            <a:pPr indent="0" marL="0">
+            <a:pPr marL="0" indent="0">
               <a:buNone/>
             </a:pPr>
             <a:r>
@@ -6325,7 +5809,7 @@
           <a:bodyPr wrap="square" lIns="0" tIns="0" rIns="0" bIns="0" rtlCol="0" anchor="ctr"/>
           <a:lstStyle/>
           <a:p>
-            <a:pPr indent="0" marL="0">
+            <a:pPr marL="0" indent="0">
               <a:buNone/>
             </a:pPr>
             <a:r>
@@ -6411,7 +5895,7 @@
           <a:bodyPr wrap="square" lIns="0" tIns="0" rIns="0" bIns="0" rtlCol="0" anchor="ctr"/>
           <a:lstStyle/>
           <a:p>
-            <a:pPr algn="ctr" indent="0" marL="0">
+            <a:pPr marL="0" indent="0" algn="ctr">
               <a:buNone/>
             </a:pPr>
             <a:r>
@@ -6450,7 +5934,7 @@
           <a:bodyPr wrap="square" lIns="0" tIns="0" rIns="0" bIns="0" rtlCol="0" anchor="ctr"/>
           <a:lstStyle/>
           <a:p>
-            <a:pPr indent="0" marL="0">
+            <a:pPr marL="0" indent="0">
               <a:buNone/>
             </a:pPr>
             <a:r>
@@ -6489,7 +5973,7 @@
           <a:bodyPr wrap="square" lIns="0" tIns="0" rIns="0" bIns="0" rtlCol="0" anchor="ctr"/>
           <a:lstStyle/>
           <a:p>
-            <a:pPr indent="0" marL="0">
+            <a:pPr marL="0" indent="0">
               <a:buNone/>
             </a:pPr>
             <a:r>
@@ -6575,7 +6059,7 @@
           <a:bodyPr wrap="square" lIns="0" tIns="0" rIns="0" bIns="0" rtlCol="0" anchor="ctr"/>
           <a:lstStyle/>
           <a:p>
-            <a:pPr algn="ctr" indent="0" marL="0">
+            <a:pPr marL="0" indent="0" algn="ctr">
               <a:buNone/>
             </a:pPr>
             <a:r>
@@ -6614,7 +6098,7 @@
           <a:bodyPr wrap="square" lIns="0" tIns="0" rIns="0" bIns="0" rtlCol="0" anchor="ctr"/>
           <a:lstStyle/>
           <a:p>
-            <a:pPr indent="0" marL="0">
+            <a:pPr marL="0" indent="0">
               <a:buNone/>
             </a:pPr>
             <a:r>
@@ -6653,7 +6137,7 @@
           <a:bodyPr wrap="square" lIns="0" tIns="0" rIns="0" bIns="0" rtlCol="0" anchor="ctr"/>
           <a:lstStyle/>
           <a:p>
-            <a:pPr indent="0" marL="0">
+            <a:pPr marL="0" indent="0">
               <a:buNone/>
             </a:pPr>
             <a:r>
@@ -6692,7 +6176,7 @@
           <a:bodyPr wrap="square" lIns="0" tIns="0" rIns="0" bIns="0" rtlCol="0" anchor="ctr"/>
           <a:lstStyle/>
           <a:p>
-            <a:pPr indent="0" marL="0">
+            <a:pPr marL="0" indent="0">
               <a:buNone/>
             </a:pPr>
             <a:r>
@@ -6753,7 +6237,7 @@
           <a:bodyPr wrap="square" lIns="0" tIns="0" rIns="0" bIns="0" rtlCol="0" anchor="ctr"/>
           <a:lstStyle/>
           <a:p>
-            <a:pPr algn="ctr" indent="0" marL="0">
+            <a:pPr marL="0" indent="0" algn="ctr">
               <a:buNone/>
             </a:pPr>
             <a:r>
@@ -6792,7 +6276,7 @@
           <a:bodyPr wrap="square" lIns="0" tIns="0" rIns="0" bIns="0" rtlCol="0" anchor="ctr"/>
           <a:lstStyle/>
           <a:p>
-            <a:pPr algn="ctr" indent="0" marL="0">
+            <a:pPr marL="0" indent="0" algn="ctr">
               <a:buNone/>
             </a:pPr>
             <a:r>
@@ -6853,7 +6337,7 @@
           <a:bodyPr wrap="square" lIns="0" tIns="0" rIns="0" bIns="0" rtlCol="0" anchor="ctr"/>
           <a:lstStyle/>
           <a:p>
-            <a:pPr algn="ctr" indent="0" marL="0">
+            <a:pPr marL="0" indent="0" algn="ctr">
               <a:buNone/>
             </a:pPr>
             <a:r>
@@ -6892,7 +6376,7 @@
           <a:bodyPr wrap="square" lIns="0" tIns="0" rIns="0" bIns="0" rtlCol="0" anchor="ctr"/>
           <a:lstStyle/>
           <a:p>
-            <a:pPr algn="ctr" indent="0" marL="0">
+            <a:pPr marL="0" indent="0" algn="ctr">
               <a:buNone/>
             </a:pPr>
             <a:r>
@@ -6953,7 +6437,7 @@
           <a:bodyPr wrap="square" lIns="0" tIns="0" rIns="0" bIns="0" rtlCol="0" anchor="ctr"/>
           <a:lstStyle/>
           <a:p>
-            <a:pPr algn="ctr" indent="0" marL="0">
+            <a:pPr marL="0" indent="0" algn="ctr">
               <a:buNone/>
             </a:pPr>
             <a:r>
@@ -6992,7 +6476,7 @@
           <a:bodyPr wrap="square" lIns="0" tIns="0" rIns="0" bIns="0" rtlCol="0" anchor="ctr"/>
           <a:lstStyle/>
           <a:p>
-            <a:pPr algn="ctr" indent="0" marL="0">
+            <a:pPr marL="0" indent="0" algn="ctr">
               <a:buNone/>
             </a:pPr>
             <a:r>
@@ -7053,7 +6537,7 @@
           <a:bodyPr wrap="square" lIns="0" tIns="0" rIns="0" bIns="0" rtlCol="0" anchor="ctr"/>
           <a:lstStyle/>
           <a:p>
-            <a:pPr algn="ctr" indent="0" marL="0">
+            <a:pPr marL="0" indent="0" algn="ctr">
               <a:buNone/>
             </a:pPr>
             <a:r>
@@ -7092,7 +6576,7 @@
           <a:bodyPr wrap="square" lIns="0" tIns="0" rIns="0" bIns="0" rtlCol="0" anchor="ctr"/>
           <a:lstStyle/>
           <a:p>
-            <a:pPr algn="ctr" indent="0" marL="0">
+            <a:pPr marL="0" indent="0" algn="ctr">
               <a:buNone/>
             </a:pPr>
             <a:r>
@@ -7153,7 +6637,7 @@
           <a:bodyPr wrap="square" lIns="0" tIns="0" rIns="0" bIns="0" rtlCol="0" anchor="ctr"/>
           <a:lstStyle/>
           <a:p>
-            <a:pPr algn="ctr" indent="0" marL="0">
+            <a:pPr marL="0" indent="0" algn="ctr">
               <a:buNone/>
             </a:pPr>
             <a:r>
@@ -7192,7 +6676,7 @@
           <a:bodyPr wrap="square" lIns="0" tIns="0" rIns="0" bIns="0" rtlCol="0" anchor="t"/>
           <a:lstStyle/>
           <a:p>
-            <a:pPr indent="0" marL="0">
+            <a:pPr marL="0" indent="0">
               <a:buNone/>
             </a:pPr>
             <a:r>
@@ -7206,9 +6690,6 @@
               </a:rPr>
               <a:t>El primer cobro pasa el viaje a </a:t>
             </a:r>
-            <a:pPr indent="0" marL="0">
-              <a:buNone/>
-            </a:pPr>
             <a:r>
               <a:rPr lang="en-US" sz="1400" b="1" dirty="0">
                 <a:solidFill>
@@ -7220,9 +6701,6 @@
               </a:rPr>
               <a:t>vendido</a:t>
             </a:r>
-            <a:pPr indent="0" marL="0">
-              <a:buNone/>
-            </a:pPr>
             <a:r>
               <a:rPr lang="en-US" sz="1400" dirty="0">
                 <a:solidFill>
@@ -7234,9 +6712,6 @@
               </a:rPr>
               <a:t>; si salda el total, a </a:t>
             </a:r>
-            <a:pPr indent="0" marL="0">
-              <a:buNone/>
-            </a:pPr>
             <a:r>
               <a:rPr lang="en-US" sz="1400" b="1" dirty="0">
                 <a:solidFill>
@@ -7248,9 +6723,6 @@
               </a:rPr>
               <a:t>confirmado</a:t>
             </a:r>
-            <a:pPr indent="0" marL="0">
-              <a:buNone/>
-            </a:pPr>
             <a:r>
               <a:rPr lang="en-US" sz="1400" dirty="0">
                 <a:solidFill>
@@ -7282,6 +6754,7 @@
         <a:solidFill>
           <a:srgbClr val="F6F8FA"/>
         </a:solidFill>
+        <a:effectLst/>
       </p:bgPr>
     </p:bg>
     <p:spTree>
@@ -7319,11 +6792,11 @@
           <a:bodyPr wrap="square" lIns="0" tIns="0" rIns="0" bIns="0" rtlCol="0" anchor="ctr"/>
           <a:lstStyle/>
           <a:p>
-            <a:pPr indent="0" marL="0">
-              <a:buNone/>
-            </a:pPr>
-            <a:r>
-              <a:rPr lang="en-US" sz="1100" b="1" spc="200" kern="0" dirty="0">
+            <a:pPr marL="0" indent="0">
+              <a:buNone/>
+            </a:pPr>
+            <a:r>
+              <a:rPr lang="en-US" sz="1100" b="1" kern="0" spc="200" dirty="0">
                 <a:solidFill>
                   <a:srgbClr val="3E7196"/>
                 </a:solidFill>
@@ -7358,7 +6831,7 @@
           <a:bodyPr wrap="square" lIns="0" tIns="0" rIns="0" bIns="0" rtlCol="0" anchor="t"/>
           <a:lstStyle/>
           <a:p>
-            <a:pPr indent="0" marL="0">
+            <a:pPr marL="0" indent="0">
               <a:buNone/>
             </a:pPr>
             <a:r>
@@ -7373,67 +6846,6 @@
               <a:t>Modelo de dominio: diagrama de clases</a:t>
             </a:r>
             <a:endParaRPr lang="en-US" sz="3000" dirty="0"/>
-          </a:p>
-        </p:txBody>
-      </p:sp>
-      <p:sp>
-        <p:nvSpPr>
-          <p:cNvPr id="4" name="Shape 2"/>
-          <p:cNvSpPr/>
-          <p:nvPr/>
-        </p:nvSpPr>
-        <p:spPr>
-          <a:xfrm>
-            <a:off x="9722815" y="384048"/>
-            <a:ext cx="1920240" cy="365760"/>
-          </a:xfrm>
-          <a:prstGeom prst="roundRect">
-            <a:avLst>
-              <a:gd name="adj" fmla="val 50000"/>
-            </a:avLst>
-          </a:prstGeom>
-          <a:solidFill>
-            <a:srgbClr val="E9F1F7"/>
-          </a:solidFill>
-          <a:ln/>
-        </p:spPr>
-      </p:sp>
-      <p:sp>
-        <p:nvSpPr>
-          <p:cNvPr id="5" name="Text 3"/>
-          <p:cNvSpPr txBox="1"/>
-          <p:nvPr/>
-        </p:nvSpPr>
-        <p:spPr>
-          <a:xfrm>
-            <a:off x="9722815" y="384048"/>
-            <a:ext cx="1920240" cy="365760"/>
-          </a:xfrm>
-          <a:prstGeom prst="rect">
-            <a:avLst/>
-          </a:prstGeom>
-          <a:noFill/>
-          <a:ln/>
-        </p:spPr>
-        <p:txBody>
-          <a:bodyPr wrap="square" lIns="0" tIns="0" rIns="0" bIns="0" rtlCol="0" anchor="ctr"/>
-          <a:lstStyle/>
-          <a:p>
-            <a:pPr algn="ctr" indent="0" marL="0">
-              <a:buNone/>
-            </a:pPr>
-            <a:r>
-              <a:rPr lang="en-US" sz="1200" b="1" dirty="0">
-                <a:solidFill>
-                  <a:srgbClr val="22506F"/>
-                </a:solidFill>
-                <a:latin typeface="Calibri" pitchFamily="34" charset="0"/>
-                <a:ea typeface="Calibri" pitchFamily="34" charset="-122"/>
-                <a:cs typeface="Calibri" pitchFamily="34" charset="-120"/>
-              </a:rPr>
-              <a:t>Expone: Nahuel</a:t>
-            </a:r>
-            <a:endParaRPr lang="en-US" sz="1200" dirty="0"/>
           </a:p>
         </p:txBody>
       </p:sp>
@@ -7458,7 +6870,7 @@
           <a:bodyPr wrap="square" lIns="0" tIns="0" rIns="0" bIns="0" rtlCol="0" anchor="ctr"/>
           <a:lstStyle/>
           <a:p>
-            <a:pPr algn="r" indent="0" marL="0">
+            <a:pPr marL="0" indent="0" algn="r">
               <a:buNone/>
             </a:pPr>
             <a:r>
@@ -7478,14 +6890,14 @@
       </p:sp>
       <p:pic>
         <p:nvPicPr>
-          <p:cNvPr id="7" name="Image 0" descr="C:\Users\Usuario\Desktop\Vault-Rumbo\03-Dominio\Diagramas\Clases\DGM-clases.png">    </p:cNvPr>
+          <p:cNvPr id="7" name="Image 0" descr="C:\Users\Usuario\Desktop\Vault-Rumbo\03-Dominio\Diagramas\Clases\DGM-clases.png"/>
           <p:cNvPicPr>
             <a:picLocks noChangeAspect="1"/>
           </p:cNvPicPr>
           <p:nvPr/>
         </p:nvPicPr>
         <p:blipFill>
-          <a:blip r:embed="rId1"/>
+          <a:blip r:embed="rId3"/>
           <a:stretch>
             <a:fillRect/>
           </a:stretch>
@@ -7521,7 +6933,7 @@
           <a:bodyPr wrap="square" lIns="0" tIns="0" rIns="0" bIns="0" rtlCol="0" anchor="ctr"/>
           <a:lstStyle/>
           <a:p>
-            <a:pPr indent="0" marL="0">
+            <a:pPr marL="0" indent="0">
               <a:buNone/>
             </a:pPr>
             <a:r>
@@ -7560,7 +6972,7 @@
           <a:bodyPr wrap="square" lIns="0" tIns="0" rIns="0" bIns="0" rtlCol="0" anchor="t"/>
           <a:lstStyle/>
           <a:p>
-            <a:pPr indent="0" marL="0">
+            <a:pPr marL="0" indent="0">
               <a:buNone/>
             </a:pPr>
             <a:r>
@@ -7599,7 +7011,7 @@
           <a:bodyPr wrap="square" lIns="0" tIns="0" rIns="0" bIns="0" rtlCol="0" anchor="ctr"/>
           <a:lstStyle/>
           <a:p>
-            <a:pPr indent="0" marL="0">
+            <a:pPr marL="0" indent="0">
               <a:buNone/>
             </a:pPr>
             <a:r>
@@ -7638,7 +7050,7 @@
           <a:bodyPr wrap="square" lIns="0" tIns="0" rIns="0" bIns="0" rtlCol="0" anchor="t"/>
           <a:lstStyle/>
           <a:p>
-            <a:pPr indent="0" marL="0">
+            <a:pPr marL="0" indent="0">
               <a:buNone/>
             </a:pPr>
             <a:r>
@@ -7677,7 +7089,7 @@
           <a:bodyPr wrap="square" lIns="0" tIns="0" rIns="0" bIns="0" rtlCol="0" anchor="ctr"/>
           <a:lstStyle/>
           <a:p>
-            <a:pPr indent="0" marL="0">
+            <a:pPr marL="0" indent="0">
               <a:buNone/>
             </a:pPr>
             <a:r>
@@ -7716,7 +7128,7 @@
           <a:bodyPr wrap="square" lIns="0" tIns="0" rIns="0" bIns="0" rtlCol="0" anchor="t"/>
           <a:lstStyle/>
           <a:p>
-            <a:pPr indent="0" marL="0">
+            <a:pPr marL="0" indent="0">
               <a:buNone/>
             </a:pPr>
             <a:r>
@@ -7750,6 +7162,7 @@
         <a:solidFill>
           <a:srgbClr val="F6F8FA"/>
         </a:solidFill>
+        <a:effectLst/>
       </p:bgPr>
     </p:bg>
     <p:spTree>
@@ -7787,11 +7200,11 @@
           <a:bodyPr wrap="square" lIns="0" tIns="0" rIns="0" bIns="0" rtlCol="0" anchor="ctr"/>
           <a:lstStyle/>
           <a:p>
-            <a:pPr indent="0" marL="0">
-              <a:buNone/>
-            </a:pPr>
-            <a:r>
-              <a:rPr lang="en-US" sz="1100" b="1" spc="200" kern="0" dirty="0">
+            <a:pPr marL="0" indent="0">
+              <a:buNone/>
+            </a:pPr>
+            <a:r>
+              <a:rPr lang="en-US" sz="1100" b="1" kern="0" spc="200" dirty="0">
                 <a:solidFill>
                   <a:srgbClr val="3E7196"/>
                 </a:solidFill>
@@ -7826,7 +7239,7 @@
           <a:bodyPr wrap="square" lIns="0" tIns="0" rIns="0" bIns="0" rtlCol="0" anchor="t"/>
           <a:lstStyle/>
           <a:p>
-            <a:pPr indent="0" marL="0">
+            <a:pPr marL="0" indent="0">
               <a:buNone/>
             </a:pPr>
             <a:r>
@@ -7841,67 +7254,6 @@
               <a:t>Arquitectura: vista general y despliegue</a:t>
             </a:r>
             <a:endParaRPr lang="en-US" sz="3000" dirty="0"/>
-          </a:p>
-        </p:txBody>
-      </p:sp>
-      <p:sp>
-        <p:nvSpPr>
-          <p:cNvPr id="4" name="Shape 2"/>
-          <p:cNvSpPr/>
-          <p:nvPr/>
-        </p:nvSpPr>
-        <p:spPr>
-          <a:xfrm>
-            <a:off x="9722815" y="384048"/>
-            <a:ext cx="1920240" cy="365760"/>
-          </a:xfrm>
-          <a:prstGeom prst="roundRect">
-            <a:avLst>
-              <a:gd name="adj" fmla="val 50000"/>
-            </a:avLst>
-          </a:prstGeom>
-          <a:solidFill>
-            <a:srgbClr val="E9F1F7"/>
-          </a:solidFill>
-          <a:ln/>
-        </p:spPr>
-      </p:sp>
-      <p:sp>
-        <p:nvSpPr>
-          <p:cNvPr id="5" name="Text 3"/>
-          <p:cNvSpPr txBox="1"/>
-          <p:nvPr/>
-        </p:nvSpPr>
-        <p:spPr>
-          <a:xfrm>
-            <a:off x="9722815" y="384048"/>
-            <a:ext cx="1920240" cy="365760"/>
-          </a:xfrm>
-          <a:prstGeom prst="rect">
-            <a:avLst/>
-          </a:prstGeom>
-          <a:noFill/>
-          <a:ln/>
-        </p:spPr>
-        <p:txBody>
-          <a:bodyPr wrap="square" lIns="0" tIns="0" rIns="0" bIns="0" rtlCol="0" anchor="ctr"/>
-          <a:lstStyle/>
-          <a:p>
-            <a:pPr algn="ctr" indent="0" marL="0">
-              <a:buNone/>
-            </a:pPr>
-            <a:r>
-              <a:rPr lang="en-US" sz="1200" b="1" dirty="0">
-                <a:solidFill>
-                  <a:srgbClr val="22506F"/>
-                </a:solidFill>
-                <a:latin typeface="Calibri" pitchFamily="34" charset="0"/>
-                <a:ea typeface="Calibri" pitchFamily="34" charset="-122"/>
-                <a:cs typeface="Calibri" pitchFamily="34" charset="-120"/>
-              </a:rPr>
-              <a:t>Expone: Nahuel</a:t>
-            </a:r>
-            <a:endParaRPr lang="en-US" sz="1200" dirty="0"/>
           </a:p>
         </p:txBody>
       </p:sp>
@@ -7926,7 +7278,7 @@
           <a:bodyPr wrap="square" lIns="0" tIns="0" rIns="0" bIns="0" rtlCol="0" anchor="ctr"/>
           <a:lstStyle/>
           <a:p>
-            <a:pPr algn="r" indent="0" marL="0">
+            <a:pPr marL="0" indent="0" algn="r">
               <a:buNone/>
             </a:pPr>
             <a:r>
@@ -7946,14 +7298,14 @@
       </p:sp>
       <p:pic>
         <p:nvPicPr>
-          <p:cNvPr id="7" name="Image 0" descr="C:\Users\Usuario\Desktop\Vault-Rumbo\05-Diseño\Arquitectura\img\ARQ-despliegue.png">    </p:cNvPr>
+          <p:cNvPr id="7" name="Image 0" descr="C:\Users\Usuario\Desktop\Vault-Rumbo\05-Diseño\Arquitectura\img\ARQ-despliegue.png"/>
           <p:cNvPicPr>
             <a:picLocks noChangeAspect="1"/>
           </p:cNvPicPr>
           <p:nvPr/>
         </p:nvPicPr>
         <p:blipFill>
-          <a:blip r:embed="rId1"/>
+          <a:blip r:embed="rId3"/>
           <a:stretch>
             <a:fillRect/>
           </a:stretch>
@@ -8154,6 +7506,7 @@
         <a:solidFill>
           <a:srgbClr val="F6F8FA"/>
         </a:solidFill>
+        <a:effectLst/>
       </p:bgPr>
     </p:bg>
     <p:spTree>
@@ -8191,11 +7544,11 @@
           <a:bodyPr wrap="square" lIns="0" tIns="0" rIns="0" bIns="0" rtlCol="0" anchor="ctr"/>
           <a:lstStyle/>
           <a:p>
-            <a:pPr indent="0" marL="0">
-              <a:buNone/>
-            </a:pPr>
-            <a:r>
-              <a:rPr lang="en-US" sz="1100" b="1" spc="200" kern="0" dirty="0">
+            <a:pPr marL="0" indent="0">
+              <a:buNone/>
+            </a:pPr>
+            <a:r>
+              <a:rPr lang="en-US" sz="1100" b="1" kern="0" spc="200" dirty="0">
                 <a:solidFill>
                   <a:srgbClr val="3E7196"/>
                 </a:solidFill>
@@ -8230,7 +7583,7 @@
           <a:bodyPr wrap="square" lIns="0" tIns="0" rIns="0" bIns="0" rtlCol="0" anchor="t"/>
           <a:lstStyle/>
           <a:p>
-            <a:pPr indent="0" marL="0">
+            <a:pPr marL="0" indent="0">
               <a:buNone/>
             </a:pPr>
             <a:r>
@@ -8245,67 +7598,6 @@
               <a:t>Modelo C4: contexto y contenedores</a:t>
             </a:r>
             <a:endParaRPr lang="en-US" sz="3000" dirty="0"/>
-          </a:p>
-        </p:txBody>
-      </p:sp>
-      <p:sp>
-        <p:nvSpPr>
-          <p:cNvPr id="4" name="Shape 2"/>
-          <p:cNvSpPr/>
-          <p:nvPr/>
-        </p:nvSpPr>
-        <p:spPr>
-          <a:xfrm>
-            <a:off x="9722815" y="384048"/>
-            <a:ext cx="1920240" cy="365760"/>
-          </a:xfrm>
-          <a:prstGeom prst="roundRect">
-            <a:avLst>
-              <a:gd name="adj" fmla="val 50000"/>
-            </a:avLst>
-          </a:prstGeom>
-          <a:solidFill>
-            <a:srgbClr val="E9F1F7"/>
-          </a:solidFill>
-          <a:ln/>
-        </p:spPr>
-      </p:sp>
-      <p:sp>
-        <p:nvSpPr>
-          <p:cNvPr id="5" name="Text 3"/>
-          <p:cNvSpPr txBox="1"/>
-          <p:nvPr/>
-        </p:nvSpPr>
-        <p:spPr>
-          <a:xfrm>
-            <a:off x="9722815" y="384048"/>
-            <a:ext cx="1920240" cy="365760"/>
-          </a:xfrm>
-          <a:prstGeom prst="rect">
-            <a:avLst/>
-          </a:prstGeom>
-          <a:noFill/>
-          <a:ln/>
-        </p:spPr>
-        <p:txBody>
-          <a:bodyPr wrap="square" lIns="0" tIns="0" rIns="0" bIns="0" rtlCol="0" anchor="ctr"/>
-          <a:lstStyle/>
-          <a:p>
-            <a:pPr algn="ctr" indent="0" marL="0">
-              <a:buNone/>
-            </a:pPr>
-            <a:r>
-              <a:rPr lang="en-US" sz="1200" b="1" dirty="0">
-                <a:solidFill>
-                  <a:srgbClr val="22506F"/>
-                </a:solidFill>
-                <a:latin typeface="Calibri" pitchFamily="34" charset="0"/>
-                <a:ea typeface="Calibri" pitchFamily="34" charset="-122"/>
-                <a:cs typeface="Calibri" pitchFamily="34" charset="-120"/>
-              </a:rPr>
-              <a:t>Expone: Nahuel</a:t>
-            </a:r>
-            <a:endParaRPr lang="en-US" sz="1200" dirty="0"/>
           </a:p>
         </p:txBody>
       </p:sp>
@@ -8330,7 +7622,7 @@
           <a:bodyPr wrap="square" lIns="0" tIns="0" rIns="0" bIns="0" rtlCol="0" anchor="ctr"/>
           <a:lstStyle/>
           <a:p>
-            <a:pPr algn="r" indent="0" marL="0">
+            <a:pPr marL="0" indent="0" algn="r">
               <a:buNone/>
             </a:pPr>
             <a:r>
@@ -8350,14 +7642,14 @@
       </p:sp>
       <p:pic>
         <p:nvPicPr>
-          <p:cNvPr id="7" name="Image 0" descr="C:\Users\Usuario\Desktop\Vault-Rumbo\05-Diseño\Arquitectura\img\ARQ-C4-1-contexto.png">    </p:cNvPr>
+          <p:cNvPr id="7" name="Image 0" descr="C:\Users\Usuario\Desktop\Vault-Rumbo\05-Diseño\Arquitectura\img\ARQ-C4-1-contexto.png"/>
           <p:cNvPicPr>
             <a:picLocks noChangeAspect="1"/>
           </p:cNvPicPr>
           <p:nvPr/>
         </p:nvPicPr>
         <p:blipFill>
-          <a:blip r:embed="rId1"/>
+          <a:blip r:embed="rId3"/>
           <a:stretch>
             <a:fillRect/>
           </a:stretch>
@@ -8374,14 +7666,14 @@
       </p:pic>
       <p:pic>
         <p:nvPicPr>
-          <p:cNvPr id="8" name="Image 1" descr="C:\Users\Usuario\Desktop\Vault-Rumbo\05-Diseño\Arquitectura\img\ARQ-C4-2-contenedores.png">    </p:cNvPr>
+          <p:cNvPr id="8" name="Image 1" descr="C:\Users\Usuario\Desktop\Vault-Rumbo\05-Diseño\Arquitectura\img\ARQ-C4-2-contenedores.png"/>
           <p:cNvPicPr>
             <a:picLocks noChangeAspect="1"/>
           </p:cNvPicPr>
           <p:nvPr/>
         </p:nvPicPr>
         <p:blipFill>
-          <a:blip r:embed="rId2"/>
+          <a:blip r:embed="rId4"/>
           <a:stretch>
             <a:fillRect/>
           </a:stretch>
@@ -8417,7 +7709,7 @@
           <a:bodyPr wrap="square" lIns="0" tIns="0" rIns="0" bIns="0" rtlCol="0" anchor="ctr"/>
           <a:lstStyle/>
           <a:p>
-            <a:pPr algn="ctr" indent="0" marL="0">
+            <a:pPr marL="0" indent="0" algn="ctr">
               <a:buNone/>
             </a:pPr>
             <a:r>
@@ -8456,7 +7748,7 @@
           <a:bodyPr wrap="square" lIns="0" tIns="0" rIns="0" bIns="0" rtlCol="0" anchor="ctr"/>
           <a:lstStyle/>
           <a:p>
-            <a:pPr algn="ctr" indent="0" marL="0">
+            <a:pPr marL="0" indent="0" algn="ctr">
               <a:buNone/>
             </a:pPr>
             <a:r>
@@ -8490,6 +7782,7 @@
         <a:solidFill>
           <a:srgbClr val="F6F8FA"/>
         </a:solidFill>
+        <a:effectLst/>
       </p:bgPr>
     </p:bg>
     <p:spTree>
@@ -8527,11 +7820,11 @@
           <a:bodyPr wrap="square" lIns="0" tIns="0" rIns="0" bIns="0" rtlCol="0" anchor="ctr"/>
           <a:lstStyle/>
           <a:p>
-            <a:pPr indent="0" marL="0">
-              <a:buNone/>
-            </a:pPr>
-            <a:r>
-              <a:rPr lang="en-US" sz="1100" b="1" spc="200" kern="0" dirty="0">
+            <a:pPr marL="0" indent="0">
+              <a:buNone/>
+            </a:pPr>
+            <a:r>
+              <a:rPr lang="en-US" sz="1100" b="1" kern="0" spc="200" dirty="0">
                 <a:solidFill>
                   <a:srgbClr val="3E7196"/>
                 </a:solidFill>
@@ -8566,7 +7859,7 @@
           <a:bodyPr wrap="square" lIns="0" tIns="0" rIns="0" bIns="0" rtlCol="0" anchor="t"/>
           <a:lstStyle/>
           <a:p>
-            <a:pPr indent="0" marL="0">
+            <a:pPr marL="0" indent="0">
               <a:buNone/>
             </a:pPr>
             <a:r>
@@ -8581,67 +7874,6 @@
               <a:t>Modelo C4: componentes de la API</a:t>
             </a:r>
             <a:endParaRPr lang="en-US" sz="3000" dirty="0"/>
-          </a:p>
-        </p:txBody>
-      </p:sp>
-      <p:sp>
-        <p:nvSpPr>
-          <p:cNvPr id="4" name="Shape 2"/>
-          <p:cNvSpPr/>
-          <p:nvPr/>
-        </p:nvSpPr>
-        <p:spPr>
-          <a:xfrm>
-            <a:off x="9722815" y="384048"/>
-            <a:ext cx="1920240" cy="365760"/>
-          </a:xfrm>
-          <a:prstGeom prst="roundRect">
-            <a:avLst>
-              <a:gd name="adj" fmla="val 50000"/>
-            </a:avLst>
-          </a:prstGeom>
-          <a:solidFill>
-            <a:srgbClr val="E9F1F7"/>
-          </a:solidFill>
-          <a:ln/>
-        </p:spPr>
-      </p:sp>
-      <p:sp>
-        <p:nvSpPr>
-          <p:cNvPr id="5" name="Text 3"/>
-          <p:cNvSpPr txBox="1"/>
-          <p:nvPr/>
-        </p:nvSpPr>
-        <p:spPr>
-          <a:xfrm>
-            <a:off x="9722815" y="384048"/>
-            <a:ext cx="1920240" cy="365760"/>
-          </a:xfrm>
-          <a:prstGeom prst="rect">
-            <a:avLst/>
-          </a:prstGeom>
-          <a:noFill/>
-          <a:ln/>
-        </p:spPr>
-        <p:txBody>
-          <a:bodyPr wrap="square" lIns="0" tIns="0" rIns="0" bIns="0" rtlCol="0" anchor="ctr"/>
-          <a:lstStyle/>
-          <a:p>
-            <a:pPr algn="ctr" indent="0" marL="0">
-              <a:buNone/>
-            </a:pPr>
-            <a:r>
-              <a:rPr lang="en-US" sz="1200" b="1" dirty="0">
-                <a:solidFill>
-                  <a:srgbClr val="22506F"/>
-                </a:solidFill>
-                <a:latin typeface="Calibri" pitchFamily="34" charset="0"/>
-                <a:ea typeface="Calibri" pitchFamily="34" charset="-122"/>
-                <a:cs typeface="Calibri" pitchFamily="34" charset="-120"/>
-              </a:rPr>
-              <a:t>Expone: Nahuel</a:t>
-            </a:r>
-            <a:endParaRPr lang="en-US" sz="1200" dirty="0"/>
           </a:p>
         </p:txBody>
       </p:sp>
@@ -8666,7 +7898,7 @@
           <a:bodyPr wrap="square" lIns="0" tIns="0" rIns="0" bIns="0" rtlCol="0" anchor="ctr"/>
           <a:lstStyle/>
           <a:p>
-            <a:pPr algn="r" indent="0" marL="0">
+            <a:pPr marL="0" indent="0" algn="r">
               <a:buNone/>
             </a:pPr>
             <a:r>
@@ -8686,14 +7918,14 @@
       </p:sp>
       <p:pic>
         <p:nvPicPr>
-          <p:cNvPr id="7" name="Image 0" descr="C:\Users\Usuario\Desktop\Vault-Rumbo\05-Diseño\Arquitectura\img\ARQ-C4-3-componentes.png">    </p:cNvPr>
+          <p:cNvPr id="7" name="Image 0" descr="C:\Users\Usuario\Desktop\Vault-Rumbo\05-Diseño\Arquitectura\img\ARQ-C4-3-componentes.png"/>
           <p:cNvPicPr>
             <a:picLocks noChangeAspect="1"/>
           </p:cNvPicPr>
           <p:nvPr/>
         </p:nvPicPr>
         <p:blipFill>
-          <a:blip r:embed="rId1"/>
+          <a:blip r:embed="rId3"/>
           <a:stretch>
             <a:fillRect/>
           </a:stretch>
@@ -8852,6 +8084,7 @@
         <a:solidFill>
           <a:srgbClr val="F6F8FA"/>
         </a:solidFill>
+        <a:effectLst/>
       </p:bgPr>
     </p:bg>
     <p:spTree>
@@ -8889,11 +8122,11 @@
           <a:bodyPr wrap="square" lIns="0" tIns="0" rIns="0" bIns="0" rtlCol="0" anchor="ctr"/>
           <a:lstStyle/>
           <a:p>
-            <a:pPr indent="0" marL="0">
-              <a:buNone/>
-            </a:pPr>
-            <a:r>
-              <a:rPr lang="en-US" sz="1100" b="1" spc="200" kern="0" dirty="0">
+            <a:pPr marL="0" indent="0">
+              <a:buNone/>
+            </a:pPr>
+            <a:r>
+              <a:rPr lang="en-US" sz="1100" b="1" kern="0" spc="200" dirty="0">
                 <a:solidFill>
                   <a:srgbClr val="3E7196"/>
                 </a:solidFill>
@@ -8928,7 +8161,7 @@
           <a:bodyPr wrap="square" lIns="0" tIns="0" rIns="0" bIns="0" rtlCol="0" anchor="t"/>
           <a:lstStyle/>
           <a:p>
-            <a:pPr indent="0" marL="0">
+            <a:pPr marL="0" indent="0">
               <a:buNone/>
             </a:pPr>
             <a:r>
@@ -8943,67 +8176,6 @@
               <a:t>Modelo entidad-relación y SQL</a:t>
             </a:r>
             <a:endParaRPr lang="en-US" sz="3000" dirty="0"/>
-          </a:p>
-        </p:txBody>
-      </p:sp>
-      <p:sp>
-        <p:nvSpPr>
-          <p:cNvPr id="4" name="Shape 2"/>
-          <p:cNvSpPr/>
-          <p:nvPr/>
-        </p:nvSpPr>
-        <p:spPr>
-          <a:xfrm>
-            <a:off x="9722815" y="384048"/>
-            <a:ext cx="1920240" cy="365760"/>
-          </a:xfrm>
-          <a:prstGeom prst="roundRect">
-            <a:avLst>
-              <a:gd name="adj" fmla="val 50000"/>
-            </a:avLst>
-          </a:prstGeom>
-          <a:solidFill>
-            <a:srgbClr val="E9F1F7"/>
-          </a:solidFill>
-          <a:ln/>
-        </p:spPr>
-      </p:sp>
-      <p:sp>
-        <p:nvSpPr>
-          <p:cNvPr id="5" name="Text 3"/>
-          <p:cNvSpPr txBox="1"/>
-          <p:nvPr/>
-        </p:nvSpPr>
-        <p:spPr>
-          <a:xfrm>
-            <a:off x="9722815" y="384048"/>
-            <a:ext cx="1920240" cy="365760"/>
-          </a:xfrm>
-          <a:prstGeom prst="rect">
-            <a:avLst/>
-          </a:prstGeom>
-          <a:noFill/>
-          <a:ln/>
-        </p:spPr>
-        <p:txBody>
-          <a:bodyPr wrap="square" lIns="0" tIns="0" rIns="0" bIns="0" rtlCol="0" anchor="ctr"/>
-          <a:lstStyle/>
-          <a:p>
-            <a:pPr algn="ctr" indent="0" marL="0">
-              <a:buNone/>
-            </a:pPr>
-            <a:r>
-              <a:rPr lang="en-US" sz="1200" b="1" dirty="0">
-                <a:solidFill>
-                  <a:srgbClr val="22506F"/>
-                </a:solidFill>
-                <a:latin typeface="Calibri" pitchFamily="34" charset="0"/>
-                <a:ea typeface="Calibri" pitchFamily="34" charset="-122"/>
-                <a:cs typeface="Calibri" pitchFamily="34" charset="-120"/>
-              </a:rPr>
-              <a:t>Expone: Nahuel</a:t>
-            </a:r>
-            <a:endParaRPr lang="en-US" sz="1200" dirty="0"/>
           </a:p>
         </p:txBody>
       </p:sp>
@@ -9028,7 +8200,7 @@
           <a:bodyPr wrap="square" lIns="0" tIns="0" rIns="0" bIns="0" rtlCol="0" anchor="ctr"/>
           <a:lstStyle/>
           <a:p>
-            <a:pPr algn="r" indent="0" marL="0">
+            <a:pPr marL="0" indent="0" algn="r">
               <a:buNone/>
             </a:pPr>
             <a:r>
@@ -9048,14 +8220,14 @@
       </p:sp>
       <p:pic>
         <p:nvPicPr>
-          <p:cNvPr id="7" name="Image 0" descr="C:\Users\Usuario\Desktop\Vault-Rumbo\03-Dominio\Diagramas\DER\DGM-ER.png">    </p:cNvPr>
+          <p:cNvPr id="7" name="Image 0" descr="C:\Users\Usuario\Desktop\Vault-Rumbo\03-Dominio\Diagramas\DER\DGM-ER.png"/>
           <p:cNvPicPr>
             <a:picLocks noChangeAspect="1"/>
           </p:cNvPicPr>
           <p:nvPr/>
         </p:nvPicPr>
         <p:blipFill>
-          <a:blip r:embed="rId1"/>
+          <a:blip r:embed="rId3"/>
           <a:stretch>
             <a:fillRect/>
           </a:stretch>
@@ -9118,7 +8290,7 @@
           <a:bodyPr wrap="square" lIns="0" tIns="0" rIns="0" bIns="0" rtlCol="0" anchor="ctr"/>
           <a:lstStyle/>
           <a:p>
-            <a:pPr indent="0" marL="0">
+            <a:pPr marL="0" indent="0">
               <a:buNone/>
             </a:pPr>
             <a:r>
@@ -9305,7 +8477,7 @@
           <a:bodyPr wrap="square" lIns="0" tIns="0" rIns="0" bIns="0" rtlCol="0" anchor="ctr"/>
           <a:lstStyle/>
           <a:p>
-            <a:pPr indent="0" marL="0">
+            <a:pPr marL="0" indent="0">
               <a:buNone/>
             </a:pPr>
             <a:r>
@@ -9339,6 +8511,7 @@
         <a:solidFill>
           <a:srgbClr val="F6F8FA"/>
         </a:solidFill>
+        <a:effectLst/>
       </p:bgPr>
     </p:bg>
     <p:spTree>
@@ -9376,11 +8549,11 @@
           <a:bodyPr wrap="square" lIns="0" tIns="0" rIns="0" bIns="0" rtlCol="0" anchor="ctr"/>
           <a:lstStyle/>
           <a:p>
-            <a:pPr indent="0" marL="0">
-              <a:buNone/>
-            </a:pPr>
-            <a:r>
-              <a:rPr lang="en-US" sz="1100" b="1" spc="200" kern="0" dirty="0">
+            <a:pPr marL="0" indent="0">
+              <a:buNone/>
+            </a:pPr>
+            <a:r>
+              <a:rPr lang="en-US" sz="1100" b="1" kern="0" spc="200" dirty="0">
                 <a:solidFill>
                   <a:srgbClr val="3E7196"/>
                 </a:solidFill>
@@ -9415,7 +8588,7 @@
           <a:bodyPr wrap="square" lIns="0" tIns="0" rIns="0" bIns="0" rtlCol="0" anchor="t"/>
           <a:lstStyle/>
           <a:p>
-            <a:pPr indent="0" marL="0">
+            <a:pPr marL="0" indent="0">
               <a:buNone/>
             </a:pPr>
             <a:r>
@@ -9430,67 +8603,6 @@
               <a:t>MVC en Rumbo</a:t>
             </a:r>
             <a:endParaRPr lang="en-US" sz="3000" dirty="0"/>
-          </a:p>
-        </p:txBody>
-      </p:sp>
-      <p:sp>
-        <p:nvSpPr>
-          <p:cNvPr id="4" name="Shape 2"/>
-          <p:cNvSpPr/>
-          <p:nvPr/>
-        </p:nvSpPr>
-        <p:spPr>
-          <a:xfrm>
-            <a:off x="9722815" y="384048"/>
-            <a:ext cx="1920240" cy="365760"/>
-          </a:xfrm>
-          <a:prstGeom prst="roundRect">
-            <a:avLst>
-              <a:gd name="adj" fmla="val 50000"/>
-            </a:avLst>
-          </a:prstGeom>
-          <a:solidFill>
-            <a:srgbClr val="E9F1F7"/>
-          </a:solidFill>
-          <a:ln/>
-        </p:spPr>
-      </p:sp>
-      <p:sp>
-        <p:nvSpPr>
-          <p:cNvPr id="5" name="Text 3"/>
-          <p:cNvSpPr txBox="1"/>
-          <p:nvPr/>
-        </p:nvSpPr>
-        <p:spPr>
-          <a:xfrm>
-            <a:off x="9722815" y="384048"/>
-            <a:ext cx="1920240" cy="365760"/>
-          </a:xfrm>
-          <a:prstGeom prst="rect">
-            <a:avLst/>
-          </a:prstGeom>
-          <a:noFill/>
-          <a:ln/>
-        </p:spPr>
-        <p:txBody>
-          <a:bodyPr wrap="square" lIns="0" tIns="0" rIns="0" bIns="0" rtlCol="0" anchor="ctr"/>
-          <a:lstStyle/>
-          <a:p>
-            <a:pPr algn="ctr" indent="0" marL="0">
-              <a:buNone/>
-            </a:pPr>
-            <a:r>
-              <a:rPr lang="en-US" sz="1200" b="1" dirty="0">
-                <a:solidFill>
-                  <a:srgbClr val="22506F"/>
-                </a:solidFill>
-                <a:latin typeface="Calibri" pitchFamily="34" charset="0"/>
-                <a:ea typeface="Calibri" pitchFamily="34" charset="-122"/>
-                <a:cs typeface="Calibri" pitchFamily="34" charset="-120"/>
-              </a:rPr>
-              <a:t>Expone: Francisco</a:t>
-            </a:r>
-            <a:endParaRPr lang="en-US" sz="1200" dirty="0"/>
           </a:p>
         </p:txBody>
       </p:sp>
@@ -9515,7 +8627,7 @@
           <a:bodyPr wrap="square" lIns="0" tIns="0" rIns="0" bIns="0" rtlCol="0" anchor="ctr"/>
           <a:lstStyle/>
           <a:p>
-            <a:pPr algn="r" indent="0" marL="0">
+            <a:pPr marL="0" indent="0" algn="r">
               <a:buNone/>
             </a:pPr>
             <a:r>
@@ -9535,14 +8647,14 @@
       </p:sp>
       <p:pic>
         <p:nvPicPr>
-          <p:cNvPr id="7" name="Image 0" descr="C:\Users\Usuario\Desktop\Vault-Rumbo\05-Diseño\Arquitectura\img\ARQ-MVC.png">    </p:cNvPr>
+          <p:cNvPr id="7" name="Image 0" descr="C:\Users\Usuario\Desktop\Vault-Rumbo\05-Diseño\Arquitectura\img\ARQ-MVC.png"/>
           <p:cNvPicPr>
             <a:picLocks noChangeAspect="1"/>
           </p:cNvPicPr>
           <p:nvPr/>
         </p:nvPicPr>
         <p:blipFill>
-          <a:blip r:embed="rId1"/>
+          <a:blip r:embed="rId3"/>
           <a:stretch>
             <a:fillRect/>
           </a:stretch>
@@ -9605,7 +8717,7 @@
           <a:bodyPr wrap="square" lIns="0" tIns="0" rIns="0" bIns="0" rtlCol="0" anchor="ctr"/>
           <a:lstStyle/>
           <a:p>
-            <a:pPr indent="0" marL="0">
+            <a:pPr marL="0" indent="0">
               <a:buNone/>
             </a:pPr>
             <a:r>
@@ -9644,7 +8756,7 @@
           <a:bodyPr wrap="square" lIns="0" tIns="0" rIns="0" bIns="0" rtlCol="0" anchor="ctr"/>
           <a:lstStyle/>
           <a:p>
-            <a:pPr indent="0" marL="0">
+            <a:pPr marL="0" indent="0">
               <a:buNone/>
             </a:pPr>
             <a:r>
@@ -9710,7 +8822,7 @@
           <a:bodyPr wrap="square" lIns="0" tIns="0" rIns="0" bIns="0" rtlCol="0" anchor="ctr"/>
           <a:lstStyle/>
           <a:p>
-            <a:pPr indent="0" marL="0">
+            <a:pPr marL="0" indent="0">
               <a:buNone/>
             </a:pPr>
             <a:r>
@@ -9749,7 +8861,7 @@
           <a:bodyPr wrap="square" lIns="0" tIns="0" rIns="0" bIns="0" rtlCol="0" anchor="ctr"/>
           <a:lstStyle/>
           <a:p>
-            <a:pPr indent="0" marL="0">
+            <a:pPr marL="0" indent="0">
               <a:buNone/>
             </a:pPr>
             <a:r>
@@ -9815,7 +8927,7 @@
           <a:bodyPr wrap="square" lIns="0" tIns="0" rIns="0" bIns="0" rtlCol="0" anchor="ctr"/>
           <a:lstStyle/>
           <a:p>
-            <a:pPr indent="0" marL="0">
+            <a:pPr marL="0" indent="0">
               <a:buNone/>
             </a:pPr>
             <a:r>
@@ -9854,7 +8966,7 @@
           <a:bodyPr wrap="square" lIns="0" tIns="0" rIns="0" bIns="0" rtlCol="0" anchor="ctr"/>
           <a:lstStyle/>
           <a:p>
-            <a:pPr indent="0" marL="0">
+            <a:pPr marL="0" indent="0">
               <a:buNone/>
             </a:pPr>
             <a:r>
@@ -9893,7 +9005,7 @@
           <a:bodyPr wrap="square" lIns="0" tIns="0" rIns="0" bIns="0" rtlCol="0" anchor="ctr"/>
           <a:lstStyle/>
           <a:p>
-            <a:pPr indent="0" marL="0">
+            <a:pPr marL="0" indent="0">
               <a:buNone/>
             </a:pPr>
             <a:r>
@@ -9927,6 +9039,7 @@
         <a:solidFill>
           <a:srgbClr val="F6F8FA"/>
         </a:solidFill>
+        <a:effectLst/>
       </p:bgPr>
     </p:bg>
     <p:spTree>
@@ -9964,11 +9077,11 @@
           <a:bodyPr wrap="square" lIns="0" tIns="0" rIns="0" bIns="0" rtlCol="0" anchor="ctr"/>
           <a:lstStyle/>
           <a:p>
-            <a:pPr indent="0" marL="0">
-              <a:buNone/>
-            </a:pPr>
-            <a:r>
-              <a:rPr lang="en-US" sz="1100" b="1" spc="200" kern="0" dirty="0">
+            <a:pPr marL="0" indent="0">
+              <a:buNone/>
+            </a:pPr>
+            <a:r>
+              <a:rPr lang="en-US" sz="1100" b="1" kern="0" spc="200" dirty="0">
                 <a:solidFill>
                   <a:srgbClr val="3E7196"/>
                 </a:solidFill>
@@ -10003,7 +9116,7 @@
           <a:bodyPr wrap="square" lIns="0" tIns="0" rIns="0" bIns="0" rtlCol="0" anchor="t"/>
           <a:lstStyle/>
           <a:p>
-            <a:pPr indent="0" marL="0">
+            <a:pPr marL="0" indent="0">
               <a:buNone/>
             </a:pPr>
             <a:r>
@@ -10042,7 +9155,7 @@
           <a:bodyPr wrap="square" lIns="0" tIns="0" rIns="0" bIns="0" rtlCol="0" anchor="ctr"/>
           <a:lstStyle/>
           <a:p>
-            <a:pPr algn="r" indent="0" marL="0">
+            <a:pPr marL="0" indent="0" algn="r">
               <a:buNone/>
             </a:pPr>
             <a:r>
@@ -10128,7 +9241,7 @@
           <a:bodyPr wrap="square" lIns="0" tIns="0" rIns="0" bIns="0" rtlCol="0" anchor="ctr"/>
           <a:lstStyle/>
           <a:p>
-            <a:pPr algn="ctr" indent="0" marL="0">
+            <a:pPr marL="0" indent="0" algn="ctr">
               <a:buNone/>
             </a:pPr>
             <a:r>
@@ -10167,7 +9280,7 @@
           <a:bodyPr wrap="square" lIns="0" tIns="0" rIns="0" bIns="0" rtlCol="0" anchor="ctr"/>
           <a:lstStyle/>
           <a:p>
-            <a:pPr indent="0" marL="0">
+            <a:pPr marL="0" indent="0">
               <a:buNone/>
             </a:pPr>
             <a:r>
@@ -10206,7 +9319,7 @@
           <a:bodyPr wrap="square" lIns="0" tIns="0" rIns="0" bIns="0" rtlCol="0" anchor="ctr"/>
           <a:lstStyle/>
           <a:p>
-            <a:pPr indent="0" marL="0">
+            <a:pPr marL="0" indent="0">
               <a:buNone/>
             </a:pPr>
             <a:r>
@@ -10245,20 +9358,9 @@
           <a:bodyPr wrap="square" lIns="0" tIns="0" rIns="0" bIns="0" rtlCol="0" anchor="ctr"/>
           <a:lstStyle/>
           <a:p>
-            <a:pPr indent="0" marL="0">
-              <a:buNone/>
-            </a:pPr>
-            <a:r>
-              <a:rPr lang="en-US" sz="1100" b="1" dirty="0">
-                <a:solidFill>
-                  <a:srgbClr val="3E7196"/>
-                </a:solidFill>
-                <a:latin typeface="Calibri" pitchFamily="34" charset="0"/>
-                <a:ea typeface="Calibri" pitchFamily="34" charset="-122"/>
-                <a:cs typeface="Calibri" pitchFamily="34" charset="-120"/>
-              </a:rPr>
-              <a:t>Francisco</a:t>
-            </a:r>
+            <a:pPr marL="0" indent="0">
+              <a:buNone/>
+            </a:pPr>
             <a:endParaRPr lang="en-US" sz="1100" dirty="0"/>
           </a:p>
         </p:txBody>
@@ -10331,7 +9433,7 @@
           <a:bodyPr wrap="square" lIns="0" tIns="0" rIns="0" bIns="0" rtlCol="0" anchor="ctr"/>
           <a:lstStyle/>
           <a:p>
-            <a:pPr algn="ctr" indent="0" marL="0">
+            <a:pPr marL="0" indent="0" algn="ctr">
               <a:buNone/>
             </a:pPr>
             <a:r>
@@ -10370,7 +9472,7 @@
           <a:bodyPr wrap="square" lIns="0" tIns="0" rIns="0" bIns="0" rtlCol="0" anchor="ctr"/>
           <a:lstStyle/>
           <a:p>
-            <a:pPr indent="0" marL="0">
+            <a:pPr marL="0" indent="0">
               <a:buNone/>
             </a:pPr>
             <a:r>
@@ -10409,7 +9511,7 @@
           <a:bodyPr wrap="square" lIns="0" tIns="0" rIns="0" bIns="0" rtlCol="0" anchor="ctr"/>
           <a:lstStyle/>
           <a:p>
-            <a:pPr indent="0" marL="0">
+            <a:pPr marL="0" indent="0">
               <a:buNone/>
             </a:pPr>
             <a:r>
@@ -10448,20 +9550,9 @@
           <a:bodyPr wrap="square" lIns="0" tIns="0" rIns="0" bIns="0" rtlCol="0" anchor="ctr"/>
           <a:lstStyle/>
           <a:p>
-            <a:pPr indent="0" marL="0">
-              <a:buNone/>
-            </a:pPr>
-            <a:r>
-              <a:rPr lang="en-US" sz="1100" b="1" dirty="0">
-                <a:solidFill>
-                  <a:srgbClr val="3E7196"/>
-                </a:solidFill>
-                <a:latin typeface="Calibri" pitchFamily="34" charset="0"/>
-                <a:ea typeface="Calibri" pitchFamily="34" charset="-122"/>
-                <a:cs typeface="Calibri" pitchFamily="34" charset="-120"/>
-              </a:rPr>
-              <a:t>Francisco</a:t>
-            </a:r>
+            <a:pPr marL="0" indent="0">
+              <a:buNone/>
+            </a:pPr>
             <a:endParaRPr lang="en-US" sz="1100" dirty="0"/>
           </a:p>
         </p:txBody>
@@ -10534,7 +9625,7 @@
           <a:bodyPr wrap="square" lIns="0" tIns="0" rIns="0" bIns="0" rtlCol="0" anchor="ctr"/>
           <a:lstStyle/>
           <a:p>
-            <a:pPr algn="ctr" indent="0" marL="0">
+            <a:pPr marL="0" indent="0" algn="ctr">
               <a:buNone/>
             </a:pPr>
             <a:r>
@@ -10573,7 +9664,7 @@
           <a:bodyPr wrap="square" lIns="0" tIns="0" rIns="0" bIns="0" rtlCol="0" anchor="ctr"/>
           <a:lstStyle/>
           <a:p>
-            <a:pPr indent="0" marL="0">
+            <a:pPr marL="0" indent="0">
               <a:buNone/>
             </a:pPr>
             <a:r>
@@ -10612,7 +9703,7 @@
           <a:bodyPr wrap="square" lIns="0" tIns="0" rIns="0" bIns="0" rtlCol="0" anchor="ctr"/>
           <a:lstStyle/>
           <a:p>
-            <a:pPr indent="0" marL="0">
+            <a:pPr marL="0" indent="0">
               <a:buNone/>
             </a:pPr>
             <a:r>
@@ -10651,20 +9742,9 @@
           <a:bodyPr wrap="square" lIns="0" tIns="0" rIns="0" bIns="0" rtlCol="0" anchor="ctr"/>
           <a:lstStyle/>
           <a:p>
-            <a:pPr indent="0" marL="0">
-              <a:buNone/>
-            </a:pPr>
-            <a:r>
-              <a:rPr lang="en-US" sz="1100" b="1" dirty="0">
-                <a:solidFill>
-                  <a:srgbClr val="3E7196"/>
-                </a:solidFill>
-                <a:latin typeface="Calibri" pitchFamily="34" charset="0"/>
-                <a:ea typeface="Calibri" pitchFamily="34" charset="-122"/>
-                <a:cs typeface="Calibri" pitchFamily="34" charset="-120"/>
-              </a:rPr>
-              <a:t>Francisco y Paloma</a:t>
-            </a:r>
+            <a:pPr marL="0" indent="0">
+              <a:buNone/>
+            </a:pPr>
             <a:endParaRPr lang="en-US" sz="1100" dirty="0"/>
           </a:p>
         </p:txBody>
@@ -10737,7 +9817,7 @@
           <a:bodyPr wrap="square" lIns="0" tIns="0" rIns="0" bIns="0" rtlCol="0" anchor="ctr"/>
           <a:lstStyle/>
           <a:p>
-            <a:pPr algn="ctr" indent="0" marL="0">
+            <a:pPr marL="0" indent="0" algn="ctr">
               <a:buNone/>
             </a:pPr>
             <a:r>
@@ -10776,7 +9856,7 @@
           <a:bodyPr wrap="square" lIns="0" tIns="0" rIns="0" bIns="0" rtlCol="0" anchor="ctr"/>
           <a:lstStyle/>
           <a:p>
-            <a:pPr indent="0" marL="0">
+            <a:pPr marL="0" indent="0">
               <a:buNone/>
             </a:pPr>
             <a:r>
@@ -10815,7 +9895,7 @@
           <a:bodyPr wrap="square" lIns="0" tIns="0" rIns="0" bIns="0" rtlCol="0" anchor="ctr"/>
           <a:lstStyle/>
           <a:p>
-            <a:pPr indent="0" marL="0">
+            <a:pPr marL="0" indent="0">
               <a:buNone/>
             </a:pPr>
             <a:r>
@@ -10854,20 +9934,9 @@
           <a:bodyPr wrap="square" lIns="0" tIns="0" rIns="0" bIns="0" rtlCol="0" anchor="ctr"/>
           <a:lstStyle/>
           <a:p>
-            <a:pPr indent="0" marL="0">
-              <a:buNone/>
-            </a:pPr>
-            <a:r>
-              <a:rPr lang="en-US" sz="1100" b="1" dirty="0">
-                <a:solidFill>
-                  <a:srgbClr val="3E7196"/>
-                </a:solidFill>
-                <a:latin typeface="Calibri" pitchFamily="34" charset="0"/>
-                <a:ea typeface="Calibri" pitchFamily="34" charset="-122"/>
-                <a:cs typeface="Calibri" pitchFamily="34" charset="-120"/>
-              </a:rPr>
-              <a:t>Francisco y Nahuel</a:t>
-            </a:r>
+            <a:pPr marL="0" indent="0">
+              <a:buNone/>
+            </a:pPr>
             <a:endParaRPr lang="en-US" sz="1100" dirty="0"/>
           </a:p>
         </p:txBody>
@@ -10940,7 +10009,7 @@
           <a:bodyPr wrap="square" lIns="0" tIns="0" rIns="0" bIns="0" rtlCol="0" anchor="ctr"/>
           <a:lstStyle/>
           <a:p>
-            <a:pPr algn="ctr" indent="0" marL="0">
+            <a:pPr marL="0" indent="0" algn="ctr">
               <a:buNone/>
             </a:pPr>
             <a:r>
@@ -10979,7 +10048,7 @@
           <a:bodyPr wrap="square" lIns="0" tIns="0" rIns="0" bIns="0" rtlCol="0" anchor="ctr"/>
           <a:lstStyle/>
           <a:p>
-            <a:pPr indent="0" marL="0">
+            <a:pPr marL="0" indent="0">
               <a:buNone/>
             </a:pPr>
             <a:r>
@@ -11018,7 +10087,7 @@
           <a:bodyPr wrap="square" lIns="0" tIns="0" rIns="0" bIns="0" rtlCol="0" anchor="ctr"/>
           <a:lstStyle/>
           <a:p>
-            <a:pPr indent="0" marL="0">
+            <a:pPr marL="0" indent="0">
               <a:buNone/>
             </a:pPr>
             <a:r>
@@ -11057,20 +10126,9 @@
           <a:bodyPr wrap="square" lIns="0" tIns="0" rIns="0" bIns="0" rtlCol="0" anchor="ctr"/>
           <a:lstStyle/>
           <a:p>
-            <a:pPr indent="0" marL="0">
-              <a:buNone/>
-            </a:pPr>
-            <a:r>
-              <a:rPr lang="en-US" sz="1100" b="1" dirty="0">
-                <a:solidFill>
-                  <a:srgbClr val="3E7196"/>
-                </a:solidFill>
-                <a:latin typeface="Calibri" pitchFamily="34" charset="0"/>
-                <a:ea typeface="Calibri" pitchFamily="34" charset="-122"/>
-                <a:cs typeface="Calibri" pitchFamily="34" charset="-120"/>
-              </a:rPr>
-              <a:t>Nahuel</a:t>
-            </a:r>
+            <a:pPr marL="0" indent="0">
+              <a:buNone/>
+            </a:pPr>
             <a:endParaRPr lang="en-US" sz="1100" dirty="0"/>
           </a:p>
         </p:txBody>
@@ -11143,7 +10201,7 @@
           <a:bodyPr wrap="square" lIns="0" tIns="0" rIns="0" bIns="0" rtlCol="0" anchor="ctr"/>
           <a:lstStyle/>
           <a:p>
-            <a:pPr algn="ctr" indent="0" marL="0">
+            <a:pPr marL="0" indent="0" algn="ctr">
               <a:buNone/>
             </a:pPr>
             <a:r>
@@ -11182,7 +10240,7 @@
           <a:bodyPr wrap="square" lIns="0" tIns="0" rIns="0" bIns="0" rtlCol="0" anchor="ctr"/>
           <a:lstStyle/>
           <a:p>
-            <a:pPr indent="0" marL="0">
+            <a:pPr marL="0" indent="0">
               <a:buNone/>
             </a:pPr>
             <a:r>
@@ -11221,7 +10279,7 @@
           <a:bodyPr wrap="square" lIns="0" tIns="0" rIns="0" bIns="0" rtlCol="0" anchor="ctr"/>
           <a:lstStyle/>
           <a:p>
-            <a:pPr indent="0" marL="0">
+            <a:pPr marL="0" indent="0">
               <a:buNone/>
             </a:pPr>
             <a:r>
@@ -11260,20 +10318,9 @@
           <a:bodyPr wrap="square" lIns="0" tIns="0" rIns="0" bIns="0" rtlCol="0" anchor="ctr"/>
           <a:lstStyle/>
           <a:p>
-            <a:pPr indent="0" marL="0">
-              <a:buNone/>
-            </a:pPr>
-            <a:r>
-              <a:rPr lang="en-US" sz="1100" b="1" dirty="0">
-                <a:solidFill>
-                  <a:srgbClr val="3E7196"/>
-                </a:solidFill>
-                <a:latin typeface="Calibri" pitchFamily="34" charset="0"/>
-                <a:ea typeface="Calibri" pitchFamily="34" charset="-122"/>
-                <a:cs typeface="Calibri" pitchFamily="34" charset="-120"/>
-              </a:rPr>
-              <a:t>Francisco y Nahuel</a:t>
-            </a:r>
+            <a:pPr marL="0" indent="0">
+              <a:buNone/>
+            </a:pPr>
             <a:endParaRPr lang="en-US" sz="1100" dirty="0"/>
           </a:p>
         </p:txBody>
@@ -11346,7 +10393,7 @@
           <a:bodyPr wrap="square" lIns="0" tIns="0" rIns="0" bIns="0" rtlCol="0" anchor="ctr"/>
           <a:lstStyle/>
           <a:p>
-            <a:pPr algn="ctr" indent="0" marL="0">
+            <a:pPr marL="0" indent="0" algn="ctr">
               <a:buNone/>
             </a:pPr>
             <a:r>
@@ -11385,7 +10432,7 @@
           <a:bodyPr wrap="square" lIns="0" tIns="0" rIns="0" bIns="0" rtlCol="0" anchor="ctr"/>
           <a:lstStyle/>
           <a:p>
-            <a:pPr indent="0" marL="0">
+            <a:pPr marL="0" indent="0">
               <a:buNone/>
             </a:pPr>
             <a:r>
@@ -11424,7 +10471,7 @@
           <a:bodyPr wrap="square" lIns="0" tIns="0" rIns="0" bIns="0" rtlCol="0" anchor="ctr"/>
           <a:lstStyle/>
           <a:p>
-            <a:pPr indent="0" marL="0">
+            <a:pPr marL="0" indent="0">
               <a:buNone/>
             </a:pPr>
             <a:r>
@@ -11463,20 +10510,9 @@
           <a:bodyPr wrap="square" lIns="0" tIns="0" rIns="0" bIns="0" rtlCol="0" anchor="ctr"/>
           <a:lstStyle/>
           <a:p>
-            <a:pPr indent="0" marL="0">
-              <a:buNone/>
-            </a:pPr>
-            <a:r>
-              <a:rPr lang="en-US" sz="1100" b="1" dirty="0">
-                <a:solidFill>
-                  <a:srgbClr val="3E7196"/>
-                </a:solidFill>
-                <a:latin typeface="Calibri" pitchFamily="34" charset="0"/>
-                <a:ea typeface="Calibri" pitchFamily="34" charset="-122"/>
-                <a:cs typeface="Calibri" pitchFamily="34" charset="-120"/>
-              </a:rPr>
-              <a:t>Francisco</a:t>
-            </a:r>
+            <a:pPr marL="0" indent="0">
+              <a:buNone/>
+            </a:pPr>
             <a:endParaRPr lang="en-US" sz="1100" dirty="0"/>
           </a:p>
         </p:txBody>
@@ -11549,7 +10585,7 @@
           <a:bodyPr wrap="square" lIns="0" tIns="0" rIns="0" bIns="0" rtlCol="0" anchor="ctr"/>
           <a:lstStyle/>
           <a:p>
-            <a:pPr algn="ctr" indent="0" marL="0">
+            <a:pPr marL="0" indent="0" algn="ctr">
               <a:buNone/>
             </a:pPr>
             <a:r>
@@ -11588,7 +10624,7 @@
           <a:bodyPr wrap="square" lIns="0" tIns="0" rIns="0" bIns="0" rtlCol="0" anchor="ctr"/>
           <a:lstStyle/>
           <a:p>
-            <a:pPr indent="0" marL="0">
+            <a:pPr marL="0" indent="0">
               <a:buNone/>
             </a:pPr>
             <a:r>
@@ -11627,7 +10663,7 @@
           <a:bodyPr wrap="square" lIns="0" tIns="0" rIns="0" bIns="0" rtlCol="0" anchor="ctr"/>
           <a:lstStyle/>
           <a:p>
-            <a:pPr indent="0" marL="0">
+            <a:pPr marL="0" indent="0">
               <a:buNone/>
             </a:pPr>
             <a:r>
@@ -11666,20 +10702,9 @@
           <a:bodyPr wrap="square" lIns="0" tIns="0" rIns="0" bIns="0" rtlCol="0" anchor="ctr"/>
           <a:lstStyle/>
           <a:p>
-            <a:pPr indent="0" marL="0">
-              <a:buNone/>
-            </a:pPr>
-            <a:r>
-              <a:rPr lang="en-US" sz="1100" b="1" dirty="0">
-                <a:solidFill>
-                  <a:srgbClr val="3E7196"/>
-                </a:solidFill>
-                <a:latin typeface="Calibri" pitchFamily="34" charset="0"/>
-                <a:ea typeface="Calibri" pitchFamily="34" charset="-122"/>
-                <a:cs typeface="Calibri" pitchFamily="34" charset="-120"/>
-              </a:rPr>
-              <a:t>Francisco</a:t>
-            </a:r>
+            <a:pPr marL="0" indent="0">
+              <a:buNone/>
+            </a:pPr>
             <a:endParaRPr lang="en-US" sz="1100" dirty="0"/>
           </a:p>
         </p:txBody>
@@ -11700,6 +10725,7 @@
         <a:solidFill>
           <a:srgbClr val="F6F8FA"/>
         </a:solidFill>
+        <a:effectLst/>
       </p:bgPr>
     </p:bg>
     <p:spTree>
@@ -11737,11 +10763,11 @@
           <a:bodyPr wrap="square" lIns="0" tIns="0" rIns="0" bIns="0" rtlCol="0" anchor="ctr"/>
           <a:lstStyle/>
           <a:p>
-            <a:pPr indent="0" marL="0">
-              <a:buNone/>
-            </a:pPr>
-            <a:r>
-              <a:rPr lang="en-US" sz="1100" b="1" spc="200" kern="0" dirty="0">
+            <a:pPr marL="0" indent="0">
+              <a:buNone/>
+            </a:pPr>
+            <a:r>
+              <a:rPr lang="en-US" sz="1100" b="1" kern="0" spc="200" dirty="0">
                 <a:solidFill>
                   <a:srgbClr val="3E7196"/>
                 </a:solidFill>
@@ -11776,7 +10802,7 @@
           <a:bodyPr wrap="square" lIns="0" tIns="0" rIns="0" bIns="0" rtlCol="0" anchor="t"/>
           <a:lstStyle/>
           <a:p>
-            <a:pPr indent="0" marL="0">
+            <a:pPr marL="0" indent="0">
               <a:buNone/>
             </a:pPr>
             <a:r>
@@ -11791,67 +10817,6 @@
               <a:t>Comunicación Vista–Controlador: OpenAPI</a:t>
             </a:r>
             <a:endParaRPr lang="en-US" sz="3000" dirty="0"/>
-          </a:p>
-        </p:txBody>
-      </p:sp>
-      <p:sp>
-        <p:nvSpPr>
-          <p:cNvPr id="4" name="Shape 2"/>
-          <p:cNvSpPr/>
-          <p:nvPr/>
-        </p:nvSpPr>
-        <p:spPr>
-          <a:xfrm>
-            <a:off x="9722815" y="384048"/>
-            <a:ext cx="1920240" cy="365760"/>
-          </a:xfrm>
-          <a:prstGeom prst="roundRect">
-            <a:avLst>
-              <a:gd name="adj" fmla="val 50000"/>
-            </a:avLst>
-          </a:prstGeom>
-          <a:solidFill>
-            <a:srgbClr val="E9F1F7"/>
-          </a:solidFill>
-          <a:ln/>
-        </p:spPr>
-      </p:sp>
-      <p:sp>
-        <p:nvSpPr>
-          <p:cNvPr id="5" name="Text 3"/>
-          <p:cNvSpPr txBox="1"/>
-          <p:nvPr/>
-        </p:nvSpPr>
-        <p:spPr>
-          <a:xfrm>
-            <a:off x="9722815" y="384048"/>
-            <a:ext cx="1920240" cy="365760"/>
-          </a:xfrm>
-          <a:prstGeom prst="rect">
-            <a:avLst/>
-          </a:prstGeom>
-          <a:noFill/>
-          <a:ln/>
-        </p:spPr>
-        <p:txBody>
-          <a:bodyPr wrap="square" lIns="0" tIns="0" rIns="0" bIns="0" rtlCol="0" anchor="ctr"/>
-          <a:lstStyle/>
-          <a:p>
-            <a:pPr algn="ctr" indent="0" marL="0">
-              <a:buNone/>
-            </a:pPr>
-            <a:r>
-              <a:rPr lang="en-US" sz="1200" b="1" dirty="0">
-                <a:solidFill>
-                  <a:srgbClr val="22506F"/>
-                </a:solidFill>
-                <a:latin typeface="Calibri" pitchFamily="34" charset="0"/>
-                <a:ea typeface="Calibri" pitchFamily="34" charset="-122"/>
-                <a:cs typeface="Calibri" pitchFamily="34" charset="-120"/>
-              </a:rPr>
-              <a:t>Expone: Nahuel</a:t>
-            </a:r>
-            <a:endParaRPr lang="en-US" sz="1200" dirty="0"/>
           </a:p>
         </p:txBody>
       </p:sp>
@@ -11876,7 +10841,7 @@
           <a:bodyPr wrap="square" lIns="0" tIns="0" rIns="0" bIns="0" rtlCol="0" anchor="ctr"/>
           <a:lstStyle/>
           <a:p>
-            <a:pPr algn="r" indent="0" marL="0">
+            <a:pPr marL="0" indent="0" algn="r">
               <a:buNone/>
             </a:pPr>
             <a:r>
@@ -11915,7 +10880,7 @@
           <a:bodyPr wrap="square" lIns="0" tIns="0" rIns="0" bIns="0" rtlCol="0" anchor="ctr"/>
           <a:lstStyle/>
           <a:p>
-            <a:pPr indent="0" marL="0">
+            <a:pPr marL="0" indent="0">
               <a:buNone/>
             </a:pPr>
             <a:r>
@@ -11954,7 +10919,7 @@
           <a:bodyPr wrap="square" lIns="0" tIns="0" rIns="0" bIns="0" rtlCol="0" anchor="t"/>
           <a:lstStyle/>
           <a:p>
-            <a:pPr indent="0" marL="0">
+            <a:pPr marL="0" indent="0">
               <a:buNone/>
             </a:pPr>
             <a:r>
@@ -11993,7 +10958,7 @@
           <a:bodyPr wrap="square" lIns="0" tIns="0" rIns="0" bIns="0" rtlCol="0" anchor="ctr"/>
           <a:lstStyle/>
           <a:p>
-            <a:pPr indent="0" marL="0">
+            <a:pPr marL="0" indent="0">
               <a:buNone/>
             </a:pPr>
             <a:r>
@@ -12032,7 +10997,7 @@
           <a:bodyPr wrap="square" lIns="0" tIns="0" rIns="0" bIns="0" rtlCol="0" anchor="t"/>
           <a:lstStyle/>
           <a:p>
-            <a:pPr indent="0" marL="0">
+            <a:pPr marL="0" indent="0">
               <a:buNone/>
             </a:pPr>
             <a:r>
@@ -12071,7 +11036,7 @@
           <a:bodyPr wrap="square" lIns="0" tIns="0" rIns="0" bIns="0" rtlCol="0" anchor="ctr"/>
           <a:lstStyle/>
           <a:p>
-            <a:pPr indent="0" marL="0">
+            <a:pPr marL="0" indent="0">
               <a:buNone/>
             </a:pPr>
             <a:r>
@@ -12110,7 +11075,7 @@
           <a:bodyPr wrap="square" lIns="0" tIns="0" rIns="0" bIns="0" rtlCol="0" anchor="t"/>
           <a:lstStyle/>
           <a:p>
-            <a:pPr indent="0" marL="0">
+            <a:pPr marL="0" indent="0">
               <a:buNone/>
             </a:pPr>
             <a:r>
@@ -12298,6 +11263,7 @@
         <a:solidFill>
           <a:srgbClr val="F6F8FA"/>
         </a:solidFill>
+        <a:effectLst/>
       </p:bgPr>
     </p:bg>
     <p:spTree>
@@ -12335,11 +11301,11 @@
           <a:bodyPr wrap="square" lIns="0" tIns="0" rIns="0" bIns="0" rtlCol="0" anchor="ctr"/>
           <a:lstStyle/>
           <a:p>
-            <a:pPr indent="0" marL="0">
-              <a:buNone/>
-            </a:pPr>
-            <a:r>
-              <a:rPr lang="en-US" sz="1100" b="1" spc="200" kern="0" dirty="0">
+            <a:pPr marL="0" indent="0">
+              <a:buNone/>
+            </a:pPr>
+            <a:r>
+              <a:rPr lang="en-US" sz="1100" b="1" kern="0" spc="200" dirty="0">
                 <a:solidFill>
                   <a:srgbClr val="3E7196"/>
                 </a:solidFill>
@@ -12374,7 +11340,7 @@
           <a:bodyPr wrap="square" lIns="0" tIns="0" rIns="0" bIns="0" rtlCol="0" anchor="t"/>
           <a:lstStyle/>
           <a:p>
-            <a:pPr indent="0" marL="0">
+            <a:pPr marL="0" indent="0">
               <a:buNone/>
             </a:pPr>
             <a:r>
@@ -12416,45 +11382,6 @@
       </p:sp>
       <p:sp>
         <p:nvSpPr>
-          <p:cNvPr id="5" name="Text 3"/>
-          <p:cNvSpPr txBox="1"/>
-          <p:nvPr/>
-        </p:nvSpPr>
-        <p:spPr>
-          <a:xfrm>
-            <a:off x="9722815" y="384048"/>
-            <a:ext cx="1920240" cy="365760"/>
-          </a:xfrm>
-          <a:prstGeom prst="rect">
-            <a:avLst/>
-          </a:prstGeom>
-          <a:noFill/>
-          <a:ln/>
-        </p:spPr>
-        <p:txBody>
-          <a:bodyPr wrap="square" lIns="0" tIns="0" rIns="0" bIns="0" rtlCol="0" anchor="ctr"/>
-          <a:lstStyle/>
-          <a:p>
-            <a:pPr algn="ctr" indent="0" marL="0">
-              <a:buNone/>
-            </a:pPr>
-            <a:r>
-              <a:rPr lang="en-US" sz="1200" b="1" dirty="0">
-                <a:solidFill>
-                  <a:srgbClr val="22506F"/>
-                </a:solidFill>
-                <a:latin typeface="Calibri" pitchFamily="34" charset="0"/>
-                <a:ea typeface="Calibri" pitchFamily="34" charset="-122"/>
-                <a:cs typeface="Calibri" pitchFamily="34" charset="-120"/>
-              </a:rPr>
-              <a:t>Expone: Francisco</a:t>
-            </a:r>
-            <a:endParaRPr lang="en-US" sz="1200" dirty="0"/>
-          </a:p>
-        </p:txBody>
-      </p:sp>
-      <p:sp>
-        <p:nvSpPr>
           <p:cNvPr id="6" name="Text 4"/>
           <p:cNvSpPr txBox="1"/>
           <p:nvPr/>
@@ -12474,7 +11401,7 @@
           <a:bodyPr wrap="square" lIns="0" tIns="0" rIns="0" bIns="0" rtlCol="0" anchor="ctr"/>
           <a:lstStyle/>
           <a:p>
-            <a:pPr algn="r" indent="0" marL="0">
+            <a:pPr marL="0" indent="0" algn="r">
               <a:buNone/>
             </a:pPr>
             <a:r>
@@ -12540,7 +11467,7 @@
           <a:bodyPr wrap="square" lIns="0" tIns="0" rIns="0" bIns="0" rtlCol="0" anchor="ctr"/>
           <a:lstStyle/>
           <a:p>
-            <a:pPr indent="0" marL="0">
+            <a:pPr marL="0" indent="0">
               <a:buNone/>
             </a:pPr>
             <a:r>
@@ -12579,7 +11506,7 @@
           <a:bodyPr wrap="square" lIns="0" tIns="0" rIns="0" bIns="0" rtlCol="0" anchor="ctr"/>
           <a:lstStyle/>
           <a:p>
-            <a:pPr indent="0" marL="0">
+            <a:pPr marL="0" indent="0">
               <a:buNone/>
             </a:pPr>
             <a:r>
@@ -12745,7 +11672,7 @@
           <a:bodyPr wrap="square" lIns="0" tIns="0" rIns="0" bIns="0" rtlCol="0" anchor="ctr"/>
           <a:lstStyle/>
           <a:p>
-            <a:pPr indent="0" marL="0">
+            <a:pPr marL="0" indent="0">
               <a:buNone/>
             </a:pPr>
             <a:r>
@@ -12779,16 +11706,34 @@
         </p:nvGraphicFramePr>
         <p:xfrm>
           <a:off x="6217920" y="2011680"/>
-          <a:ext cx="5422392" cy="914400"/>
+          <a:ext cx="5422392" cy="2286000"/>
         </p:xfrm>
         <a:graphic>
           <a:graphicData uri="http://schemas.openxmlformats.org/drawingml/2006/table">
             <a:tbl>
               <a:tblPr/>
               <a:tblGrid>
-                <a:gridCol w="2862072"/>
-                <a:gridCol w="1280160"/>
-                <a:gridCol w="1280160"/>
+                <a:gridCol w="2862072">
+                  <a:extLst>
+                    <a:ext uri="{9D8B030D-6E8A-4147-A177-3AD203B41FA5}">
+                      <a16:colId xmlns:a16="http://schemas.microsoft.com/office/drawing/2014/main" val="20000"/>
+                    </a:ext>
+                  </a:extLst>
+                </a:gridCol>
+                <a:gridCol w="1280160">
+                  <a:extLst>
+                    <a:ext uri="{9D8B030D-6E8A-4147-A177-3AD203B41FA5}">
+                      <a16:colId xmlns:a16="http://schemas.microsoft.com/office/drawing/2014/main" val="20001"/>
+                    </a:ext>
+                  </a:extLst>
+                </a:gridCol>
+                <a:gridCol w="1280160">
+                  <a:extLst>
+                    <a:ext uri="{9D8B030D-6E8A-4147-A177-3AD203B41FA5}">
+                      <a16:colId xmlns:a16="http://schemas.microsoft.com/office/drawing/2014/main" val="20002"/>
+                    </a:ext>
+                  </a:extLst>
+                </a:gridCol>
               </a:tblGrid>
               <a:tr h="457200">
                 <a:tc>
@@ -12796,7 +11741,7 @@
                     <a:bodyPr/>
                     <a:lstStyle/>
                     <a:p>
-                      <a:pPr algn="ctr" indent="0" marL="0">
+                      <a:pPr marL="0" indent="0" algn="ctr">
                         <a:buNone/>
                       </a:pPr>
                       <a:endParaRPr lang="en-US" sz="1400" dirty="0">
@@ -12806,7 +11751,7 @@
                       </a:endParaRPr>
                     </a:p>
                   </a:txBody>
-                  <a:tcPr marL="91440" marR="91440" marT="45720" marB="45720">
+                  <a:tcPr>
                     <a:lnL w="9525" cap="flat" cmpd="sng" algn="ctr">
                       <a:solidFill>
                         <a:srgbClr val="E3E8ED"/>
@@ -12853,7 +11798,7 @@
                     <a:bodyPr/>
                     <a:lstStyle/>
                     <a:p>
-                      <a:pPr algn="ctr" indent="0" marL="0">
+                      <a:pPr marL="0" indent="0" algn="ctr">
                         <a:buNone/>
                       </a:pPr>
                       <a:r>
@@ -12874,7 +11819,7 @@
                       </a:endParaRPr>
                     </a:p>
                   </a:txBody>
-                  <a:tcPr marL="91440" marR="91440" marT="45720" marB="45720">
+                  <a:tcPr>
                     <a:lnL w="9525" cap="flat" cmpd="sng" algn="ctr">
                       <a:solidFill>
                         <a:srgbClr val="E3E8ED"/>
@@ -12921,7 +11866,7 @@
                     <a:bodyPr/>
                     <a:lstStyle/>
                     <a:p>
-                      <a:pPr algn="ctr" indent="0" marL="0">
+                      <a:pPr marL="0" indent="0" algn="ctr">
                         <a:buNone/>
                       </a:pPr>
                       <a:r>
@@ -12942,7 +11887,7 @@
                       </a:endParaRPr>
                     </a:p>
                   </a:txBody>
-                  <a:tcPr marL="91440" marR="91440" marT="45720" marB="45720">
+                  <a:tcPr>
                     <a:lnL w="9525" cap="flat" cmpd="sng" algn="ctr">
                       <a:solidFill>
                         <a:srgbClr val="E3E8ED"/>
@@ -12984,6 +11929,11 @@
                     </a:solidFill>
                   </a:tcPr>
                 </a:tc>
+                <a:extLst>
+                  <a:ext uri="{0D108BD9-81ED-4DB2-BD59-A6C34878D82A}">
+                    <a16:rowId xmlns:a16="http://schemas.microsoft.com/office/drawing/2014/main" val="10000"/>
+                  </a:ext>
+                </a:extLst>
               </a:tr>
               <a:tr h="457200">
                 <a:tc>
@@ -12991,7 +11941,7 @@
                     <a:bodyPr/>
                     <a:lstStyle/>
                     <a:p>
-                      <a:pPr algn="l" indent="0" marL="0">
+                      <a:pPr marL="0" indent="0" algn="l">
                         <a:buNone/>
                       </a:pPr>
                       <a:r>
@@ -13012,7 +11962,7 @@
                       </a:endParaRPr>
                     </a:p>
                   </a:txBody>
-                  <a:tcPr marL="91440" marR="91440" marT="45720" marB="45720">
+                  <a:tcPr>
                     <a:lnL w="9525" cap="flat" cmpd="sng" algn="ctr">
                       <a:solidFill>
                         <a:srgbClr val="E3E8ED"/>
@@ -13059,7 +12009,7 @@
                     <a:bodyPr/>
                     <a:lstStyle/>
                     <a:p>
-                      <a:pPr algn="ctr" indent="0" marL="0">
+                      <a:pPr marL="0" indent="0" algn="ctr">
                         <a:buNone/>
                       </a:pPr>
                       <a:r>
@@ -13080,7 +12030,7 @@
                       </a:endParaRPr>
                     </a:p>
                   </a:txBody>
-                  <a:tcPr marL="91440" marR="91440" marT="45720" marB="45720">
+                  <a:tcPr>
                     <a:lnL w="9525" cap="flat" cmpd="sng" algn="ctr">
                       <a:solidFill>
                         <a:srgbClr val="E3E8ED"/>
@@ -13127,7 +12077,7 @@
                     <a:bodyPr/>
                     <a:lstStyle/>
                     <a:p>
-                      <a:pPr algn="ctr" indent="0" marL="0">
+                      <a:pPr marL="0" indent="0" algn="ctr">
                         <a:buNone/>
                       </a:pPr>
                       <a:r>
@@ -13148,7 +12098,7 @@
                       </a:endParaRPr>
                     </a:p>
                   </a:txBody>
-                  <a:tcPr marL="91440" marR="91440" marT="45720" marB="45720">
+                  <a:tcPr>
                     <a:lnL w="9525" cap="flat" cmpd="sng" algn="ctr">
                       <a:solidFill>
                         <a:srgbClr val="E3E8ED"/>
@@ -13190,6 +12140,11 @@
                     </a:solidFill>
                   </a:tcPr>
                 </a:tc>
+                <a:extLst>
+                  <a:ext uri="{0D108BD9-81ED-4DB2-BD59-A6C34878D82A}">
+                    <a16:rowId xmlns:a16="http://schemas.microsoft.com/office/drawing/2014/main" val="10001"/>
+                  </a:ext>
+                </a:extLst>
               </a:tr>
               <a:tr h="457200">
                 <a:tc>
@@ -13197,7 +12152,7 @@
                     <a:bodyPr/>
                     <a:lstStyle/>
                     <a:p>
-                      <a:pPr algn="l" indent="0" marL="0">
+                      <a:pPr marL="0" indent="0" algn="l">
                         <a:buNone/>
                       </a:pPr>
                       <a:r>
@@ -13218,7 +12173,7 @@
                       </a:endParaRPr>
                     </a:p>
                   </a:txBody>
-                  <a:tcPr marL="91440" marR="91440" marT="45720" marB="45720">
+                  <a:tcPr>
                     <a:lnL w="9525" cap="flat" cmpd="sng" algn="ctr">
                       <a:solidFill>
                         <a:srgbClr val="E3E8ED"/>
@@ -13265,7 +12220,7 @@
                     <a:bodyPr/>
                     <a:lstStyle/>
                     <a:p>
-                      <a:pPr algn="ctr" indent="0" marL="0">
+                      <a:pPr marL="0" indent="0" algn="ctr">
                         <a:buNone/>
                       </a:pPr>
                       <a:r>
@@ -13286,7 +12241,7 @@
                       </a:endParaRPr>
                     </a:p>
                   </a:txBody>
-                  <a:tcPr marL="91440" marR="91440" marT="45720" marB="45720">
+                  <a:tcPr>
                     <a:lnL w="9525" cap="flat" cmpd="sng" algn="ctr">
                       <a:solidFill>
                         <a:srgbClr val="E3E8ED"/>
@@ -13333,7 +12288,7 @@
                     <a:bodyPr/>
                     <a:lstStyle/>
                     <a:p>
-                      <a:pPr algn="ctr" indent="0" marL="0">
+                      <a:pPr marL="0" indent="0" algn="ctr">
                         <a:buNone/>
                       </a:pPr>
                       <a:r>
@@ -13354,7 +12309,7 @@
                       </a:endParaRPr>
                     </a:p>
                   </a:txBody>
-                  <a:tcPr marL="91440" marR="91440" marT="45720" marB="45720">
+                  <a:tcPr>
                     <a:lnL w="9525" cap="flat" cmpd="sng" algn="ctr">
                       <a:solidFill>
                         <a:srgbClr val="E3E8ED"/>
@@ -13396,6 +12351,11 @@
                     </a:solidFill>
                   </a:tcPr>
                 </a:tc>
+                <a:extLst>
+                  <a:ext uri="{0D108BD9-81ED-4DB2-BD59-A6C34878D82A}">
+                    <a16:rowId xmlns:a16="http://schemas.microsoft.com/office/drawing/2014/main" val="10002"/>
+                  </a:ext>
+                </a:extLst>
               </a:tr>
               <a:tr h="457200">
                 <a:tc>
@@ -13403,7 +12363,7 @@
                     <a:bodyPr/>
                     <a:lstStyle/>
                     <a:p>
-                      <a:pPr algn="l" indent="0" marL="0">
+                      <a:pPr marL="0" indent="0" algn="l">
                         <a:buNone/>
                       </a:pPr>
                       <a:r>
@@ -13424,7 +12384,7 @@
                       </a:endParaRPr>
                     </a:p>
                   </a:txBody>
-                  <a:tcPr marL="91440" marR="91440" marT="45720" marB="45720">
+                  <a:tcPr>
                     <a:lnL w="9525" cap="flat" cmpd="sng" algn="ctr">
                       <a:solidFill>
                         <a:srgbClr val="E3E8ED"/>
@@ -13471,7 +12431,7 @@
                     <a:bodyPr/>
                     <a:lstStyle/>
                     <a:p>
-                      <a:pPr algn="ctr" indent="0" marL="0">
+                      <a:pPr marL="0" indent="0" algn="ctr">
                         <a:buNone/>
                       </a:pPr>
                       <a:r>
@@ -13492,7 +12452,7 @@
                       </a:endParaRPr>
                     </a:p>
                   </a:txBody>
-                  <a:tcPr marL="91440" marR="91440" marT="45720" marB="45720">
+                  <a:tcPr>
                     <a:lnL w="9525" cap="flat" cmpd="sng" algn="ctr">
                       <a:solidFill>
                         <a:srgbClr val="E3E8ED"/>
@@ -13539,7 +12499,7 @@
                     <a:bodyPr/>
                     <a:lstStyle/>
                     <a:p>
-                      <a:pPr algn="ctr" indent="0" marL="0">
+                      <a:pPr marL="0" indent="0" algn="ctr">
                         <a:buNone/>
                       </a:pPr>
                       <a:r>
@@ -13560,7 +12520,7 @@
                       </a:endParaRPr>
                     </a:p>
                   </a:txBody>
-                  <a:tcPr marL="91440" marR="91440" marT="45720" marB="45720">
+                  <a:tcPr>
                     <a:lnL w="9525" cap="flat" cmpd="sng" algn="ctr">
                       <a:solidFill>
                         <a:srgbClr val="E3E8ED"/>
@@ -13602,6 +12562,11 @@
                     </a:solidFill>
                   </a:tcPr>
                 </a:tc>
+                <a:extLst>
+                  <a:ext uri="{0D108BD9-81ED-4DB2-BD59-A6C34878D82A}">
+                    <a16:rowId xmlns:a16="http://schemas.microsoft.com/office/drawing/2014/main" val="10003"/>
+                  </a:ext>
+                </a:extLst>
               </a:tr>
               <a:tr h="457200">
                 <a:tc>
@@ -13609,7 +12574,7 @@
                     <a:bodyPr/>
                     <a:lstStyle/>
                     <a:p>
-                      <a:pPr algn="l" indent="0" marL="0">
+                      <a:pPr marL="0" indent="0" algn="l">
                         <a:buNone/>
                       </a:pPr>
                       <a:r>
@@ -13630,7 +12595,7 @@
                       </a:endParaRPr>
                     </a:p>
                   </a:txBody>
-                  <a:tcPr marL="91440" marR="91440" marT="45720" marB="45720">
+                  <a:tcPr>
                     <a:lnL w="9525" cap="flat" cmpd="sng" algn="ctr">
                       <a:solidFill>
                         <a:srgbClr val="E3E8ED"/>
@@ -13677,7 +12642,7 @@
                     <a:bodyPr/>
                     <a:lstStyle/>
                     <a:p>
-                      <a:pPr algn="ctr" indent="0" marL="0">
+                      <a:pPr marL="0" indent="0" algn="ctr">
                         <a:buNone/>
                       </a:pPr>
                       <a:r>
@@ -13698,7 +12663,7 @@
                       </a:endParaRPr>
                     </a:p>
                   </a:txBody>
-                  <a:tcPr marL="91440" marR="91440" marT="45720" marB="45720">
+                  <a:tcPr>
                     <a:lnL w="9525" cap="flat" cmpd="sng" algn="ctr">
                       <a:solidFill>
                         <a:srgbClr val="E3E8ED"/>
@@ -13745,7 +12710,7 @@
                     <a:bodyPr/>
                     <a:lstStyle/>
                     <a:p>
-                      <a:pPr algn="ctr" indent="0" marL="0">
+                      <a:pPr marL="0" indent="0" algn="ctr">
                         <a:buNone/>
                       </a:pPr>
                       <a:r>
@@ -13766,7 +12731,7 @@
                       </a:endParaRPr>
                     </a:p>
                   </a:txBody>
-                  <a:tcPr marL="91440" marR="91440" marT="45720" marB="45720">
+                  <a:tcPr>
                     <a:lnL w="9525" cap="flat" cmpd="sng" algn="ctr">
                       <a:solidFill>
                         <a:srgbClr val="E3E8ED"/>
@@ -13808,6 +12773,11 @@
                     </a:solidFill>
                   </a:tcPr>
                 </a:tc>
+                <a:extLst>
+                  <a:ext uri="{0D108BD9-81ED-4DB2-BD59-A6C34878D82A}">
+                    <a16:rowId xmlns:a16="http://schemas.microsoft.com/office/drawing/2014/main" val="10004"/>
+                  </a:ext>
+                </a:extLst>
               </a:tr>
             </a:tbl>
           </a:graphicData>
@@ -13834,7 +12804,7 @@
           <a:bodyPr wrap="square" lIns="0" tIns="0" rIns="0" bIns="0" rtlCol="0" anchor="ctr"/>
           <a:lstStyle/>
           <a:p>
-            <a:pPr indent="0" marL="0">
+            <a:pPr marL="0" indent="0">
               <a:buNone/>
             </a:pPr>
             <a:r>
@@ -13868,6 +12838,7 @@
         <a:solidFill>
           <a:srgbClr val="F6F8FA"/>
         </a:solidFill>
+        <a:effectLst/>
       </p:bgPr>
     </p:bg>
     <p:spTree>
@@ -13905,11 +12876,11 @@
           <a:bodyPr wrap="square" lIns="0" tIns="0" rIns="0" bIns="0" rtlCol="0" anchor="ctr"/>
           <a:lstStyle/>
           <a:p>
-            <a:pPr indent="0" marL="0">
-              <a:buNone/>
-            </a:pPr>
-            <a:r>
-              <a:rPr lang="en-US" sz="1100" b="1" spc="200" kern="0" dirty="0">
+            <a:pPr marL="0" indent="0">
+              <a:buNone/>
+            </a:pPr>
+            <a:r>
+              <a:rPr lang="en-US" sz="1100" b="1" kern="0" spc="200" dirty="0">
                 <a:solidFill>
                   <a:srgbClr val="3E7196"/>
                 </a:solidFill>
@@ -13944,7 +12915,7 @@
           <a:bodyPr wrap="square" lIns="0" tIns="0" rIns="0" bIns="0" rtlCol="0" anchor="t"/>
           <a:lstStyle/>
           <a:p>
-            <a:pPr indent="0" marL="0">
+            <a:pPr marL="0" indent="0">
               <a:buNone/>
             </a:pPr>
             <a:r>
@@ -13959,67 +12930,6 @@
               <a:t>Cómo trabajamos con agentes de IA</a:t>
             </a:r>
             <a:endParaRPr lang="en-US" sz="3000" dirty="0"/>
-          </a:p>
-        </p:txBody>
-      </p:sp>
-      <p:sp>
-        <p:nvSpPr>
-          <p:cNvPr id="4" name="Shape 2"/>
-          <p:cNvSpPr/>
-          <p:nvPr/>
-        </p:nvSpPr>
-        <p:spPr>
-          <a:xfrm>
-            <a:off x="9722815" y="384048"/>
-            <a:ext cx="1920240" cy="365760"/>
-          </a:xfrm>
-          <a:prstGeom prst="roundRect">
-            <a:avLst>
-              <a:gd name="adj" fmla="val 50000"/>
-            </a:avLst>
-          </a:prstGeom>
-          <a:solidFill>
-            <a:srgbClr val="E9F1F7"/>
-          </a:solidFill>
-          <a:ln/>
-        </p:spPr>
-      </p:sp>
-      <p:sp>
-        <p:nvSpPr>
-          <p:cNvPr id="5" name="Text 3"/>
-          <p:cNvSpPr txBox="1"/>
-          <p:nvPr/>
-        </p:nvSpPr>
-        <p:spPr>
-          <a:xfrm>
-            <a:off x="9722815" y="384048"/>
-            <a:ext cx="1920240" cy="365760"/>
-          </a:xfrm>
-          <a:prstGeom prst="rect">
-            <a:avLst/>
-          </a:prstGeom>
-          <a:noFill/>
-          <a:ln/>
-        </p:spPr>
-        <p:txBody>
-          <a:bodyPr wrap="square" lIns="0" tIns="0" rIns="0" bIns="0" rtlCol="0" anchor="ctr"/>
-          <a:lstStyle/>
-          <a:p>
-            <a:pPr algn="ctr" indent="0" marL="0">
-              <a:buNone/>
-            </a:pPr>
-            <a:r>
-              <a:rPr lang="en-US" sz="1200" b="1" dirty="0">
-                <a:solidFill>
-                  <a:srgbClr val="22506F"/>
-                </a:solidFill>
-                <a:latin typeface="Calibri" pitchFamily="34" charset="0"/>
-                <a:ea typeface="Calibri" pitchFamily="34" charset="-122"/>
-                <a:cs typeface="Calibri" pitchFamily="34" charset="-120"/>
-              </a:rPr>
-              <a:t>Expone: Francisco</a:t>
-            </a:r>
-            <a:endParaRPr lang="en-US" sz="1200" dirty="0"/>
           </a:p>
         </p:txBody>
       </p:sp>
@@ -14044,7 +12954,7 @@
           <a:bodyPr wrap="square" lIns="0" tIns="0" rIns="0" bIns="0" rtlCol="0" anchor="ctr"/>
           <a:lstStyle/>
           <a:p>
-            <a:pPr algn="r" indent="0" marL="0">
+            <a:pPr marL="0" indent="0" algn="r">
               <a:buNone/>
             </a:pPr>
             <a:r>
@@ -14103,7 +13013,7 @@
           <a:bodyPr wrap="square" lIns="0" tIns="0" rIns="0" bIns="0" rtlCol="0" anchor="ctr"/>
           <a:lstStyle/>
           <a:p>
-            <a:pPr algn="ctr" indent="0" marL="0">
+            <a:pPr marL="0" indent="0" algn="ctr">
               <a:buNone/>
             </a:pPr>
             <a:r>
@@ -14169,7 +13079,7 @@
           <a:bodyPr wrap="square" lIns="0" tIns="0" rIns="0" bIns="0" rtlCol="0" anchor="ctr"/>
           <a:lstStyle/>
           <a:p>
-            <a:pPr indent="0" marL="0">
+            <a:pPr marL="0" indent="0">
               <a:buNone/>
             </a:pPr>
             <a:r>
@@ -14208,7 +13118,7 @@
           <a:bodyPr wrap="square" lIns="0" tIns="0" rIns="0" bIns="0" rtlCol="0" anchor="ctr"/>
           <a:lstStyle/>
           <a:p>
-            <a:pPr indent="0" marL="0">
+            <a:pPr marL="0" indent="0">
               <a:buNone/>
             </a:pPr>
             <a:r>
@@ -14267,7 +13177,7 @@
           <a:bodyPr wrap="square" lIns="0" tIns="0" rIns="0" bIns="0" rtlCol="0" anchor="ctr"/>
           <a:lstStyle/>
           <a:p>
-            <a:pPr algn="ctr" indent="0" marL="0">
+            <a:pPr marL="0" indent="0" algn="ctr">
               <a:buNone/>
             </a:pPr>
             <a:r>
@@ -14333,7 +13243,7 @@
           <a:bodyPr wrap="square" lIns="0" tIns="0" rIns="0" bIns="0" rtlCol="0" anchor="ctr"/>
           <a:lstStyle/>
           <a:p>
-            <a:pPr indent="0" marL="0">
+            <a:pPr marL="0" indent="0">
               <a:buNone/>
             </a:pPr>
             <a:r>
@@ -14372,7 +13282,7 @@
           <a:bodyPr wrap="square" lIns="0" tIns="0" rIns="0" bIns="0" rtlCol="0" anchor="ctr"/>
           <a:lstStyle/>
           <a:p>
-            <a:pPr indent="0" marL="0">
+            <a:pPr marL="0" indent="0">
               <a:buNone/>
             </a:pPr>
             <a:r>
@@ -14431,7 +13341,7 @@
           <a:bodyPr wrap="square" lIns="0" tIns="0" rIns="0" bIns="0" rtlCol="0" anchor="ctr"/>
           <a:lstStyle/>
           <a:p>
-            <a:pPr algn="ctr" indent="0" marL="0">
+            <a:pPr marL="0" indent="0" algn="ctr">
               <a:buNone/>
             </a:pPr>
             <a:r>
@@ -14497,7 +13407,7 @@
           <a:bodyPr wrap="square" lIns="0" tIns="0" rIns="0" bIns="0" rtlCol="0" anchor="ctr"/>
           <a:lstStyle/>
           <a:p>
-            <a:pPr indent="0" marL="0">
+            <a:pPr marL="0" indent="0">
               <a:buNone/>
             </a:pPr>
             <a:r>
@@ -14536,7 +13446,7 @@
           <a:bodyPr wrap="square" lIns="0" tIns="0" rIns="0" bIns="0" rtlCol="0" anchor="ctr"/>
           <a:lstStyle/>
           <a:p>
-            <a:pPr indent="0" marL="0">
+            <a:pPr marL="0" indent="0">
               <a:buNone/>
             </a:pPr>
             <a:r>
@@ -14595,7 +13505,7 @@
           <a:bodyPr wrap="square" lIns="0" tIns="0" rIns="0" bIns="0" rtlCol="0" anchor="ctr"/>
           <a:lstStyle/>
           <a:p>
-            <a:pPr algn="ctr" indent="0" marL="0">
+            <a:pPr marL="0" indent="0" algn="ctr">
               <a:buNone/>
             </a:pPr>
             <a:r>
@@ -14661,7 +13571,7 @@
           <a:bodyPr wrap="square" lIns="0" tIns="0" rIns="0" bIns="0" rtlCol="0" anchor="ctr"/>
           <a:lstStyle/>
           <a:p>
-            <a:pPr indent="0" marL="0">
+            <a:pPr marL="0" indent="0">
               <a:buNone/>
             </a:pPr>
             <a:r>
@@ -14700,7 +13610,7 @@
           <a:bodyPr wrap="square" lIns="0" tIns="0" rIns="0" bIns="0" rtlCol="0" anchor="ctr"/>
           <a:lstStyle/>
           <a:p>
-            <a:pPr indent="0" marL="0">
+            <a:pPr marL="0" indent="0">
               <a:buNone/>
             </a:pPr>
             <a:r>
@@ -14766,7 +13676,7 @@
           <a:bodyPr wrap="square" lIns="0" tIns="0" rIns="0" bIns="0" rtlCol="0" anchor="ctr"/>
           <a:lstStyle/>
           <a:p>
-            <a:pPr indent="0" marL="0">
+            <a:pPr marL="0" indent="0">
               <a:buNone/>
             </a:pPr>
             <a:r>
@@ -14805,7 +13715,7 @@
           <a:bodyPr wrap="square" lIns="0" tIns="0" rIns="0" bIns="0" rtlCol="0" anchor="ctr"/>
           <a:lstStyle/>
           <a:p>
-            <a:pPr indent="0" marL="0">
+            <a:pPr marL="0" indent="0">
               <a:buNone/>
             </a:pPr>
             <a:r>
@@ -14871,7 +13781,7 @@
           <a:bodyPr wrap="square" lIns="0" tIns="0" rIns="0" bIns="0" rtlCol="0" anchor="ctr"/>
           <a:lstStyle/>
           <a:p>
-            <a:pPr indent="0" marL="0">
+            <a:pPr marL="0" indent="0">
               <a:buNone/>
             </a:pPr>
             <a:r>
@@ -14910,7 +13820,7 @@
           <a:bodyPr wrap="square" lIns="0" tIns="0" rIns="0" bIns="0" rtlCol="0" anchor="ctr"/>
           <a:lstStyle/>
           <a:p>
-            <a:pPr indent="0" marL="0">
+            <a:pPr marL="0" indent="0">
               <a:buNone/>
             </a:pPr>
             <a:r>
@@ -14976,7 +13886,7 @@
           <a:bodyPr wrap="square" lIns="0" tIns="0" rIns="0" bIns="0" rtlCol="0" anchor="ctr"/>
           <a:lstStyle/>
           <a:p>
-            <a:pPr indent="0" marL="0">
+            <a:pPr marL="0" indent="0">
               <a:buNone/>
             </a:pPr>
             <a:r>
@@ -15015,7 +13925,7 @@
           <a:bodyPr wrap="square" lIns="0" tIns="0" rIns="0" bIns="0" rtlCol="0" anchor="ctr"/>
           <a:lstStyle/>
           <a:p>
-            <a:pPr indent="0" marL="0">
+            <a:pPr marL="0" indent="0">
               <a:buNone/>
             </a:pPr>
             <a:r>
@@ -15054,7 +13964,7 @@
           <a:bodyPr wrap="square" lIns="0" tIns="0" rIns="0" bIns="0" rtlCol="0" anchor="ctr"/>
           <a:lstStyle/>
           <a:p>
-            <a:pPr indent="0" marL="0">
+            <a:pPr marL="0" indent="0">
               <a:buNone/>
             </a:pPr>
             <a:r>
@@ -15088,6 +13998,7 @@
         <a:solidFill>
           <a:srgbClr val="F6F8FA"/>
         </a:solidFill>
+        <a:effectLst/>
       </p:bgPr>
     </p:bg>
     <p:spTree>
@@ -15125,11 +14036,11 @@
           <a:bodyPr wrap="square" lIns="0" tIns="0" rIns="0" bIns="0" rtlCol="0" anchor="ctr"/>
           <a:lstStyle/>
           <a:p>
-            <a:pPr indent="0" marL="0">
-              <a:buNone/>
-            </a:pPr>
-            <a:r>
-              <a:rPr lang="en-US" sz="1100" b="1" spc="200" kern="0" dirty="0">
+            <a:pPr marL="0" indent="0">
+              <a:buNone/>
+            </a:pPr>
+            <a:r>
+              <a:rPr lang="en-US" sz="1100" b="1" kern="0" spc="200" dirty="0">
                 <a:solidFill>
                   <a:srgbClr val="3E7196"/>
                 </a:solidFill>
@@ -15164,7 +14075,7 @@
           <a:bodyPr wrap="square" lIns="0" tIns="0" rIns="0" bIns="0" rtlCol="0" anchor="t"/>
           <a:lstStyle/>
           <a:p>
-            <a:pPr indent="0" marL="0">
+            <a:pPr marL="0" indent="0">
               <a:buNone/>
             </a:pPr>
             <a:r>
@@ -15179,67 +14090,6 @@
               <a:t>Los prompts con que construimos Rumbo</a:t>
             </a:r>
             <a:endParaRPr lang="en-US" sz="3000" dirty="0"/>
-          </a:p>
-        </p:txBody>
-      </p:sp>
-      <p:sp>
-        <p:nvSpPr>
-          <p:cNvPr id="4" name="Shape 2"/>
-          <p:cNvSpPr/>
-          <p:nvPr/>
-        </p:nvSpPr>
-        <p:spPr>
-          <a:xfrm>
-            <a:off x="9722815" y="384048"/>
-            <a:ext cx="1920240" cy="365760"/>
-          </a:xfrm>
-          <a:prstGeom prst="roundRect">
-            <a:avLst>
-              <a:gd name="adj" fmla="val 50000"/>
-            </a:avLst>
-          </a:prstGeom>
-          <a:solidFill>
-            <a:srgbClr val="E9F1F7"/>
-          </a:solidFill>
-          <a:ln/>
-        </p:spPr>
-      </p:sp>
-      <p:sp>
-        <p:nvSpPr>
-          <p:cNvPr id="5" name="Text 3"/>
-          <p:cNvSpPr txBox="1"/>
-          <p:nvPr/>
-        </p:nvSpPr>
-        <p:spPr>
-          <a:xfrm>
-            <a:off x="9722815" y="384048"/>
-            <a:ext cx="1920240" cy="365760"/>
-          </a:xfrm>
-          <a:prstGeom prst="rect">
-            <a:avLst/>
-          </a:prstGeom>
-          <a:noFill/>
-          <a:ln/>
-        </p:spPr>
-        <p:txBody>
-          <a:bodyPr wrap="square" lIns="0" tIns="0" rIns="0" bIns="0" rtlCol="0" anchor="ctr"/>
-          <a:lstStyle/>
-          <a:p>
-            <a:pPr algn="ctr" indent="0" marL="0">
-              <a:buNone/>
-            </a:pPr>
-            <a:r>
-              <a:rPr lang="en-US" sz="1200" b="1" dirty="0">
-                <a:solidFill>
-                  <a:srgbClr val="22506F"/>
-                </a:solidFill>
-                <a:latin typeface="Calibri" pitchFamily="34" charset="0"/>
-                <a:ea typeface="Calibri" pitchFamily="34" charset="-122"/>
-                <a:cs typeface="Calibri" pitchFamily="34" charset="-120"/>
-              </a:rPr>
-              <a:t>Expone: Francisco</a:t>
-            </a:r>
-            <a:endParaRPr lang="en-US" sz="1200" dirty="0"/>
           </a:p>
         </p:txBody>
       </p:sp>
@@ -15264,7 +14114,7 @@
           <a:bodyPr wrap="square" lIns="0" tIns="0" rIns="0" bIns="0" rtlCol="0" anchor="ctr"/>
           <a:lstStyle/>
           <a:p>
-            <a:pPr algn="r" indent="0" marL="0">
+            <a:pPr marL="0" indent="0" algn="r">
               <a:buNone/>
             </a:pPr>
             <a:r>
@@ -15330,7 +14180,7 @@
           <a:bodyPr wrap="square" lIns="0" tIns="0" rIns="0" bIns="0" rtlCol="0" anchor="ctr"/>
           <a:lstStyle/>
           <a:p>
-            <a:pPr indent="0" marL="0">
+            <a:pPr marL="0" indent="0">
               <a:buNone/>
             </a:pPr>
             <a:r>
@@ -15369,7 +14219,7 @@
           <a:bodyPr wrap="square" lIns="0" tIns="0" rIns="0" bIns="0" rtlCol="0" anchor="ctr"/>
           <a:lstStyle/>
           <a:p>
-            <a:pPr indent="0" marL="0">
+            <a:pPr marL="0" indent="0">
               <a:buNone/>
             </a:pPr>
             <a:r>
@@ -15541,7 +14391,7 @@
           <a:bodyPr wrap="square" lIns="0" tIns="0" rIns="0" bIns="0" rtlCol="0" anchor="ctr"/>
           <a:lstStyle/>
           <a:p>
-            <a:pPr indent="0" marL="0">
+            <a:pPr marL="0" indent="0">
               <a:buNone/>
             </a:pPr>
             <a:r>
@@ -15580,7 +14430,7 @@
           <a:bodyPr wrap="square" lIns="0" tIns="0" rIns="0" bIns="0" rtlCol="0" anchor="ctr"/>
           <a:lstStyle/>
           <a:p>
-            <a:pPr indent="0" marL="0">
+            <a:pPr marL="0" indent="0">
               <a:buNone/>
             </a:pPr>
             <a:r>
@@ -15731,7 +14581,7 @@
           <a:bodyPr wrap="square" lIns="0" tIns="0" rIns="0" bIns="0" rtlCol="0" anchor="ctr"/>
           <a:lstStyle/>
           <a:p>
-            <a:pPr indent="0" marL="0">
+            <a:pPr marL="0" indent="0">
               <a:buNone/>
             </a:pPr>
             <a:r>
@@ -15770,7 +14620,7 @@
           <a:bodyPr wrap="square" lIns="0" tIns="0" rIns="0" bIns="0" rtlCol="0" anchor="ctr"/>
           <a:lstStyle/>
           <a:p>
-            <a:pPr indent="0" marL="0">
+            <a:pPr marL="0" indent="0">
               <a:buNone/>
             </a:pPr>
             <a:r>
@@ -15889,6 +14739,7 @@
         <a:solidFill>
           <a:srgbClr val="F6F8FA"/>
         </a:solidFill>
+        <a:effectLst/>
       </p:bgPr>
     </p:bg>
     <p:spTree>
@@ -15926,11 +14777,11 @@
           <a:bodyPr wrap="square" lIns="0" tIns="0" rIns="0" bIns="0" rtlCol="0" anchor="ctr"/>
           <a:lstStyle/>
           <a:p>
-            <a:pPr indent="0" marL="0">
-              <a:buNone/>
-            </a:pPr>
-            <a:r>
-              <a:rPr lang="en-US" sz="1100" b="1" spc="200" kern="0" dirty="0">
+            <a:pPr marL="0" indent="0">
+              <a:buNone/>
+            </a:pPr>
+            <a:r>
+              <a:rPr lang="en-US" sz="1100" b="1" kern="0" spc="200" dirty="0">
                 <a:solidFill>
                   <a:srgbClr val="3E7196"/>
                 </a:solidFill>
@@ -15965,7 +14816,7 @@
           <a:bodyPr wrap="square" lIns="0" tIns="0" rIns="0" bIns="0" rtlCol="0" anchor="t"/>
           <a:lstStyle/>
           <a:p>
-            <a:pPr indent="0" marL="0">
+            <a:pPr marL="0" indent="0">
               <a:buNone/>
             </a:pPr>
             <a:r>
@@ -15980,67 +14831,6 @@
               <a:t>Diagramas como código</a:t>
             </a:r>
             <a:endParaRPr lang="en-US" sz="3000" dirty="0"/>
-          </a:p>
-        </p:txBody>
-      </p:sp>
-      <p:sp>
-        <p:nvSpPr>
-          <p:cNvPr id="4" name="Shape 2"/>
-          <p:cNvSpPr/>
-          <p:nvPr/>
-        </p:nvSpPr>
-        <p:spPr>
-          <a:xfrm>
-            <a:off x="9722815" y="384048"/>
-            <a:ext cx="1920240" cy="365760"/>
-          </a:xfrm>
-          <a:prstGeom prst="roundRect">
-            <a:avLst>
-              <a:gd name="adj" fmla="val 50000"/>
-            </a:avLst>
-          </a:prstGeom>
-          <a:solidFill>
-            <a:srgbClr val="E9F1F7"/>
-          </a:solidFill>
-          <a:ln/>
-        </p:spPr>
-      </p:sp>
-      <p:sp>
-        <p:nvSpPr>
-          <p:cNvPr id="5" name="Text 3"/>
-          <p:cNvSpPr txBox="1"/>
-          <p:nvPr/>
-        </p:nvSpPr>
-        <p:spPr>
-          <a:xfrm>
-            <a:off x="9722815" y="384048"/>
-            <a:ext cx="1920240" cy="365760"/>
-          </a:xfrm>
-          <a:prstGeom prst="rect">
-            <a:avLst/>
-          </a:prstGeom>
-          <a:noFill/>
-          <a:ln/>
-        </p:spPr>
-        <p:txBody>
-          <a:bodyPr wrap="square" lIns="0" tIns="0" rIns="0" bIns="0" rtlCol="0" anchor="ctr"/>
-          <a:lstStyle/>
-          <a:p>
-            <a:pPr algn="ctr" indent="0" marL="0">
-              <a:buNone/>
-            </a:pPr>
-            <a:r>
-              <a:rPr lang="en-US" sz="1200" b="1" dirty="0">
-                <a:solidFill>
-                  <a:srgbClr val="22506F"/>
-                </a:solidFill>
-                <a:latin typeface="Calibri" pitchFamily="34" charset="0"/>
-                <a:ea typeface="Calibri" pitchFamily="34" charset="-122"/>
-                <a:cs typeface="Calibri" pitchFamily="34" charset="-120"/>
-              </a:rPr>
-              <a:t>Expone: Francisco</a:t>
-            </a:r>
-            <a:endParaRPr lang="en-US" sz="1200" dirty="0"/>
           </a:p>
         </p:txBody>
       </p:sp>
@@ -16065,7 +14855,7 @@
           <a:bodyPr wrap="square" lIns="0" tIns="0" rIns="0" bIns="0" rtlCol="0" anchor="ctr"/>
           <a:lstStyle/>
           <a:p>
-            <a:pPr algn="r" indent="0" marL="0">
+            <a:pPr marL="0" indent="0" algn="r">
               <a:buNone/>
             </a:pPr>
             <a:r>
@@ -16237,7 +15027,7 @@
           <a:bodyPr wrap="square" lIns="0" tIns="0" rIns="0" bIns="0" rtlCol="0" anchor="t"/>
           <a:lstStyle/>
           <a:p>
-            <a:pPr indent="0" marL="0">
+            <a:pPr marL="0" indent="0">
               <a:buNone/>
             </a:pPr>
             <a:r>
@@ -16254,7 +15044,7 @@
             <a:endParaRPr lang="en-US" sz="1050" dirty="0"/>
           </a:p>
           <a:p>
-            <a:pPr indent="0" marL="0">
+            <a:pPr marL="0" indent="0">
               <a:buNone/>
             </a:pPr>
             <a:r>
@@ -16271,7 +15061,7 @@
             <a:endParaRPr lang="en-US" sz="1050" dirty="0"/>
           </a:p>
           <a:p>
-            <a:pPr indent="0" marL="0">
+            <a:pPr marL="0" indent="0">
               <a:buNone/>
             </a:pPr>
             <a:r>
@@ -16288,7 +15078,7 @@
             <a:endParaRPr lang="en-US" sz="1050" dirty="0"/>
           </a:p>
           <a:p>
-            <a:pPr indent="0" marL="0">
+            <a:pPr marL="0" indent="0">
               <a:buNone/>
             </a:pPr>
             <a:r>
@@ -16305,7 +15095,7 @@
             <a:endParaRPr lang="en-US" sz="1050" dirty="0"/>
           </a:p>
           <a:p>
-            <a:pPr indent="0" marL="0">
+            <a:pPr marL="0" indent="0">
               <a:buNone/>
             </a:pPr>
             <a:r>
@@ -16322,7 +15112,7 @@
             <a:endParaRPr lang="en-US" sz="1050" dirty="0"/>
           </a:p>
           <a:p>
-            <a:pPr indent="0" marL="0">
+            <a:pPr marL="0" indent="0">
               <a:buNone/>
             </a:pPr>
             <a:r>
@@ -16342,14 +15132,14 @@
       </p:sp>
       <p:pic>
         <p:nvPicPr>
-          <p:cNvPr id="10" name="Image 0" descr="C:\Users\Usuario\Desktop\Vault-Rumbo\05-Diseño\img\DES-pipeline-calidad.png">    </p:cNvPr>
+          <p:cNvPr id="10" name="Image 0" descr="C:\Users\Usuario\Desktop\Vault-Rumbo\05-Diseño\img\DES-pipeline-calidad.png"/>
           <p:cNvPicPr>
             <a:picLocks noChangeAspect="1"/>
           </p:cNvPicPr>
           <p:nvPr/>
         </p:nvPicPr>
         <p:blipFill>
-          <a:blip r:embed="rId1"/>
+          <a:blip r:embed="rId3"/>
           <a:stretch>
             <a:fillRect/>
           </a:stretch>
@@ -16385,7 +15175,7 @@
           <a:bodyPr wrap="square" lIns="0" tIns="0" rIns="0" bIns="0" rtlCol="0" anchor="ctr"/>
           <a:lstStyle/>
           <a:p>
-            <a:pPr indent="0" marL="0">
+            <a:pPr marL="0" indent="0">
               <a:buNone/>
             </a:pPr>
             <a:r>
@@ -16419,6 +15209,7 @@
         <a:solidFill>
           <a:srgbClr val="F6F8FA"/>
         </a:solidFill>
+        <a:effectLst/>
       </p:bgPr>
     </p:bg>
     <p:spTree>
@@ -16456,11 +15247,11 @@
           <a:bodyPr wrap="square" lIns="0" tIns="0" rIns="0" bIns="0" rtlCol="0" anchor="ctr"/>
           <a:lstStyle/>
           <a:p>
-            <a:pPr indent="0" marL="0">
-              <a:buNone/>
-            </a:pPr>
-            <a:r>
-              <a:rPr lang="en-US" sz="1100" b="1" spc="200" kern="0" dirty="0">
+            <a:pPr marL="0" indent="0">
+              <a:buNone/>
+            </a:pPr>
+            <a:r>
+              <a:rPr lang="en-US" sz="1100" b="1" kern="0" spc="200" dirty="0">
                 <a:solidFill>
                   <a:srgbClr val="3E7196"/>
                 </a:solidFill>
@@ -16495,7 +15286,7 @@
           <a:bodyPr wrap="square" lIns="0" tIns="0" rIns="0" bIns="0" rtlCol="0" anchor="t"/>
           <a:lstStyle/>
           <a:p>
-            <a:pPr indent="0" marL="0">
+            <a:pPr marL="0" indent="0">
               <a:buNone/>
             </a:pPr>
             <a:r>
@@ -16510,67 +15301,6 @@
               <a:t>Modelo de desarrollo: iterativo e incremental</a:t>
             </a:r>
             <a:endParaRPr lang="en-US" sz="3000" dirty="0"/>
-          </a:p>
-        </p:txBody>
-      </p:sp>
-      <p:sp>
-        <p:nvSpPr>
-          <p:cNvPr id="4" name="Shape 2"/>
-          <p:cNvSpPr/>
-          <p:nvPr/>
-        </p:nvSpPr>
-        <p:spPr>
-          <a:xfrm>
-            <a:off x="9722815" y="384048"/>
-            <a:ext cx="1920240" cy="365760"/>
-          </a:xfrm>
-          <a:prstGeom prst="roundRect">
-            <a:avLst>
-              <a:gd name="adj" fmla="val 50000"/>
-            </a:avLst>
-          </a:prstGeom>
-          <a:solidFill>
-            <a:srgbClr val="E9F1F7"/>
-          </a:solidFill>
-          <a:ln/>
-        </p:spPr>
-      </p:sp>
-      <p:sp>
-        <p:nvSpPr>
-          <p:cNvPr id="5" name="Text 3"/>
-          <p:cNvSpPr txBox="1"/>
-          <p:nvPr/>
-        </p:nvSpPr>
-        <p:spPr>
-          <a:xfrm>
-            <a:off x="9722815" y="384048"/>
-            <a:ext cx="1920240" cy="365760"/>
-          </a:xfrm>
-          <a:prstGeom prst="rect">
-            <a:avLst/>
-          </a:prstGeom>
-          <a:noFill/>
-          <a:ln/>
-        </p:spPr>
-        <p:txBody>
-          <a:bodyPr wrap="square" lIns="0" tIns="0" rIns="0" bIns="0" rtlCol="0" anchor="ctr"/>
-          <a:lstStyle/>
-          <a:p>
-            <a:pPr algn="ctr" indent="0" marL="0">
-              <a:buNone/>
-            </a:pPr>
-            <a:r>
-              <a:rPr lang="en-US" sz="1200" b="1" dirty="0">
-                <a:solidFill>
-                  <a:srgbClr val="22506F"/>
-                </a:solidFill>
-                <a:latin typeface="Calibri" pitchFamily="34" charset="0"/>
-                <a:ea typeface="Calibri" pitchFamily="34" charset="-122"/>
-                <a:cs typeface="Calibri" pitchFamily="34" charset="-120"/>
-              </a:rPr>
-              <a:t>Expone: Paloma</a:t>
-            </a:r>
-            <a:endParaRPr lang="en-US" sz="1200" dirty="0"/>
           </a:p>
         </p:txBody>
       </p:sp>
@@ -16595,7 +15325,7 @@
           <a:bodyPr wrap="square" lIns="0" tIns="0" rIns="0" bIns="0" rtlCol="0" anchor="ctr"/>
           <a:lstStyle/>
           <a:p>
-            <a:pPr algn="r" indent="0" marL="0">
+            <a:pPr marL="0" indent="0" algn="r">
               <a:buNone/>
             </a:pPr>
             <a:r>
@@ -16615,14 +15345,14 @@
       </p:sp>
       <p:pic>
         <p:nvPicPr>
-          <p:cNvPr id="7" name="Image 0" descr="C:\Users\Usuario\Desktop\Vault-Rumbo\05-Diseño\img\DES-iteraciones.png">    </p:cNvPr>
+          <p:cNvPr id="7" name="Image 0" descr="C:\Users\Usuario\Desktop\Vault-Rumbo\05-Diseño\img\DES-iteraciones.png"/>
           <p:cNvPicPr>
             <a:picLocks noChangeAspect="1"/>
           </p:cNvPicPr>
           <p:nvPr/>
         </p:nvPicPr>
         <p:blipFill>
-          <a:blip r:embed="rId1"/>
+          <a:blip r:embed="rId3"/>
           <a:stretch>
             <a:fillRect/>
           </a:stretch>
@@ -16685,7 +15415,7 @@
           <a:bodyPr wrap="square" lIns="0" tIns="0" rIns="0" bIns="0" rtlCol="0" anchor="t"/>
           <a:lstStyle/>
           <a:p>
-            <a:pPr indent="0" marL="0">
+            <a:pPr marL="0" indent="0">
               <a:buNone/>
             </a:pPr>
             <a:r>
@@ -16724,7 +15454,7 @@
           <a:bodyPr wrap="square" lIns="0" tIns="0" rIns="0" bIns="0" rtlCol="0" anchor="t"/>
           <a:lstStyle/>
           <a:p>
-            <a:pPr indent="0" marL="0">
+            <a:pPr marL="0" indent="0">
               <a:buNone/>
             </a:pPr>
             <a:r>
@@ -16790,7 +15520,7 @@
           <a:bodyPr wrap="square" lIns="0" tIns="0" rIns="0" bIns="0" rtlCol="0" anchor="t"/>
           <a:lstStyle/>
           <a:p>
-            <a:pPr indent="0" marL="0">
+            <a:pPr marL="0" indent="0">
               <a:buNone/>
             </a:pPr>
             <a:r>
@@ -16829,7 +15559,7 @@
           <a:bodyPr wrap="square" lIns="0" tIns="0" rIns="0" bIns="0" rtlCol="0" anchor="t"/>
           <a:lstStyle/>
           <a:p>
-            <a:pPr indent="0" marL="0">
+            <a:pPr marL="0" indent="0">
               <a:buNone/>
             </a:pPr>
             <a:r>
@@ -16895,7 +15625,7 @@
           <a:bodyPr wrap="square" lIns="0" tIns="0" rIns="0" bIns="0" rtlCol="0" anchor="t"/>
           <a:lstStyle/>
           <a:p>
-            <a:pPr indent="0" marL="0">
+            <a:pPr marL="0" indent="0">
               <a:buNone/>
             </a:pPr>
             <a:r>
@@ -16934,7 +15664,7 @@
           <a:bodyPr wrap="square" lIns="0" tIns="0" rIns="0" bIns="0" rtlCol="0" anchor="t"/>
           <a:lstStyle/>
           <a:p>
-            <a:pPr indent="0" marL="0">
+            <a:pPr marL="0" indent="0">
               <a:buNone/>
             </a:pPr>
             <a:r>
@@ -17000,7 +15730,7 @@
           <a:bodyPr wrap="square" lIns="0" tIns="0" rIns="0" bIns="0" rtlCol="0" anchor="t"/>
           <a:lstStyle/>
           <a:p>
-            <a:pPr indent="0" marL="0">
+            <a:pPr marL="0" indent="0">
               <a:buNone/>
             </a:pPr>
             <a:r>
@@ -17039,7 +15769,7 @@
           <a:bodyPr wrap="square" lIns="0" tIns="0" rIns="0" bIns="0" rtlCol="0" anchor="t"/>
           <a:lstStyle/>
           <a:p>
-            <a:pPr indent="0" marL="0">
+            <a:pPr marL="0" indent="0">
               <a:buNone/>
             </a:pPr>
             <a:r>
@@ -17073,6 +15803,7 @@
         <a:solidFill>
           <a:srgbClr val="F6F8FA"/>
         </a:solidFill>
+        <a:effectLst/>
       </p:bgPr>
     </p:bg>
     <p:spTree>
@@ -17110,11 +15841,11 @@
           <a:bodyPr wrap="square" lIns="0" tIns="0" rIns="0" bIns="0" rtlCol="0" anchor="ctr"/>
           <a:lstStyle/>
           <a:p>
-            <a:pPr indent="0" marL="0">
-              <a:buNone/>
-            </a:pPr>
-            <a:r>
-              <a:rPr lang="en-US" sz="1100" b="1" spc="200" kern="0" dirty="0">
+            <a:pPr marL="0" indent="0">
+              <a:buNone/>
+            </a:pPr>
+            <a:r>
+              <a:rPr lang="en-US" sz="1100" b="1" kern="0" spc="200" dirty="0">
                 <a:solidFill>
                   <a:srgbClr val="3E7196"/>
                 </a:solidFill>
@@ -17149,7 +15880,7 @@
           <a:bodyPr wrap="square" lIns="0" tIns="0" rIns="0" bIns="0" rtlCol="0" anchor="t"/>
           <a:lstStyle/>
           <a:p>
-            <a:pPr indent="0" marL="0">
+            <a:pPr marL="0" indent="0">
               <a:buNone/>
             </a:pPr>
             <a:r>
@@ -17164,67 +15895,6 @@
               <a:t>Git y control de calidad</a:t>
             </a:r>
             <a:endParaRPr lang="en-US" sz="3000" dirty="0"/>
-          </a:p>
-        </p:txBody>
-      </p:sp>
-      <p:sp>
-        <p:nvSpPr>
-          <p:cNvPr id="4" name="Shape 2"/>
-          <p:cNvSpPr/>
-          <p:nvPr/>
-        </p:nvSpPr>
-        <p:spPr>
-          <a:xfrm>
-            <a:off x="9722815" y="384048"/>
-            <a:ext cx="1920240" cy="365760"/>
-          </a:xfrm>
-          <a:prstGeom prst="roundRect">
-            <a:avLst>
-              <a:gd name="adj" fmla="val 50000"/>
-            </a:avLst>
-          </a:prstGeom>
-          <a:solidFill>
-            <a:srgbClr val="E9F1F7"/>
-          </a:solidFill>
-          <a:ln/>
-        </p:spPr>
-      </p:sp>
-      <p:sp>
-        <p:nvSpPr>
-          <p:cNvPr id="5" name="Text 3"/>
-          <p:cNvSpPr txBox="1"/>
-          <p:nvPr/>
-        </p:nvSpPr>
-        <p:spPr>
-          <a:xfrm>
-            <a:off x="9722815" y="384048"/>
-            <a:ext cx="1920240" cy="365760"/>
-          </a:xfrm>
-          <a:prstGeom prst="rect">
-            <a:avLst/>
-          </a:prstGeom>
-          <a:noFill/>
-          <a:ln/>
-        </p:spPr>
-        <p:txBody>
-          <a:bodyPr wrap="square" lIns="0" tIns="0" rIns="0" bIns="0" rtlCol="0" anchor="ctr"/>
-          <a:lstStyle/>
-          <a:p>
-            <a:pPr algn="ctr" indent="0" marL="0">
-              <a:buNone/>
-            </a:pPr>
-            <a:r>
-              <a:rPr lang="en-US" sz="1200" b="1" dirty="0">
-                <a:solidFill>
-                  <a:srgbClr val="22506F"/>
-                </a:solidFill>
-                <a:latin typeface="Calibri" pitchFamily="34" charset="0"/>
-                <a:ea typeface="Calibri" pitchFamily="34" charset="-122"/>
-                <a:cs typeface="Calibri" pitchFamily="34" charset="-120"/>
-              </a:rPr>
-              <a:t>Expone: Paloma</a:t>
-            </a:r>
-            <a:endParaRPr lang="en-US" sz="1200" dirty="0"/>
           </a:p>
         </p:txBody>
       </p:sp>
@@ -17249,7 +15919,7 @@
           <a:bodyPr wrap="square" lIns="0" tIns="0" rIns="0" bIns="0" rtlCol="0" anchor="ctr"/>
           <a:lstStyle/>
           <a:p>
-            <a:pPr algn="r" indent="0" marL="0">
+            <a:pPr marL="0" indent="0" algn="r">
               <a:buNone/>
             </a:pPr>
             <a:r>
@@ -17269,14 +15939,14 @@
       </p:sp>
       <p:pic>
         <p:nvPicPr>
-          <p:cNvPr id="7" name="Image 0" descr="C:\Users\Usuario\Desktop\Vault-Rumbo\05-Diseño\img\DES-pipeline-calidad.png">    </p:cNvPr>
+          <p:cNvPr id="7" name="Image 0" descr="C:\Users\Usuario\Desktop\Vault-Rumbo\05-Diseño\img\DES-pipeline-calidad.png"/>
           <p:cNvPicPr>
             <a:picLocks noChangeAspect="1"/>
           </p:cNvPicPr>
           <p:nvPr/>
         </p:nvPicPr>
         <p:blipFill>
-          <a:blip r:embed="rId1"/>
+          <a:blip r:embed="rId3"/>
           <a:stretch>
             <a:fillRect/>
           </a:stretch>
@@ -17339,7 +16009,7 @@
           <a:bodyPr wrap="square" lIns="0" tIns="0" rIns="0" bIns="0" rtlCol="0" anchor="ctr"/>
           <a:lstStyle/>
           <a:p>
-            <a:pPr indent="0" marL="0">
+            <a:pPr marL="0" indent="0">
               <a:buNone/>
             </a:pPr>
             <a:r>
@@ -17479,16 +16149,34 @@
         </p:nvGraphicFramePr>
         <p:xfrm>
           <a:off x="6126480" y="3200400"/>
-          <a:ext cx="5513832" cy="914400"/>
+          <a:ext cx="5513832" cy="1828800"/>
         </p:xfrm>
         <a:graphic>
           <a:graphicData uri="http://schemas.openxmlformats.org/drawingml/2006/table">
             <a:tbl>
               <a:tblPr/>
               <a:tblGrid>
-                <a:gridCol w="1280160"/>
-                <a:gridCol w="2103120"/>
-                <a:gridCol w="2130552"/>
+                <a:gridCol w="1280160">
+                  <a:extLst>
+                    <a:ext uri="{9D8B030D-6E8A-4147-A177-3AD203B41FA5}">
+                      <a16:colId xmlns:a16="http://schemas.microsoft.com/office/drawing/2014/main" val="20000"/>
+                    </a:ext>
+                  </a:extLst>
+                </a:gridCol>
+                <a:gridCol w="2103120">
+                  <a:extLst>
+                    <a:ext uri="{9D8B030D-6E8A-4147-A177-3AD203B41FA5}">
+                      <a16:colId xmlns:a16="http://schemas.microsoft.com/office/drawing/2014/main" val="20001"/>
+                    </a:ext>
+                  </a:extLst>
+                </a:gridCol>
+                <a:gridCol w="2130552">
+                  <a:extLst>
+                    <a:ext uri="{9D8B030D-6E8A-4147-A177-3AD203B41FA5}">
+                      <a16:colId xmlns:a16="http://schemas.microsoft.com/office/drawing/2014/main" val="20002"/>
+                    </a:ext>
+                  </a:extLst>
+                </a:gridCol>
               </a:tblGrid>
               <a:tr h="457200">
                 <a:tc>
@@ -17496,7 +16184,7 @@
                     <a:bodyPr/>
                     <a:lstStyle/>
                     <a:p>
-                      <a:pPr indent="0" marL="0">
+                      <a:pPr marL="0" indent="0">
                         <a:buNone/>
                       </a:pPr>
                       <a:r>
@@ -17517,7 +16205,7 @@
                       </a:endParaRPr>
                     </a:p>
                   </a:txBody>
-                  <a:tcPr marL="91440" marR="91440" marT="45720" marB="45720">
+                  <a:tcPr>
                     <a:lnL w="9525" cap="flat" cmpd="sng" algn="ctr">
                       <a:solidFill>
                         <a:srgbClr val="E3E8ED"/>
@@ -17564,7 +16252,7 @@
                     <a:bodyPr/>
                     <a:lstStyle/>
                     <a:p>
-                      <a:pPr indent="0" marL="0">
+                      <a:pPr marL="0" indent="0">
                         <a:buNone/>
                       </a:pPr>
                       <a:r>
@@ -17585,7 +16273,7 @@
                       </a:endParaRPr>
                     </a:p>
                   </a:txBody>
-                  <a:tcPr marL="91440" marR="91440" marT="45720" marB="45720">
+                  <a:tcPr>
                     <a:lnL w="9525" cap="flat" cmpd="sng" algn="ctr">
                       <a:solidFill>
                         <a:srgbClr val="E3E8ED"/>
@@ -17632,7 +16320,7 @@
                     <a:bodyPr/>
                     <a:lstStyle/>
                     <a:p>
-                      <a:pPr indent="0" marL="0">
+                      <a:pPr marL="0" indent="0">
                         <a:buNone/>
                       </a:pPr>
                       <a:r>
@@ -17653,7 +16341,7 @@
                       </a:endParaRPr>
                     </a:p>
                   </a:txBody>
-                  <a:tcPr marL="91440" marR="91440" marT="45720" marB="45720">
+                  <a:tcPr>
                     <a:lnL w="9525" cap="flat" cmpd="sng" algn="ctr">
                       <a:solidFill>
                         <a:srgbClr val="E3E8ED"/>
@@ -17695,6 +16383,11 @@
                     </a:solidFill>
                   </a:tcPr>
                 </a:tc>
+                <a:extLst>
+                  <a:ext uri="{0D108BD9-81ED-4DB2-BD59-A6C34878D82A}">
+                    <a16:rowId xmlns:a16="http://schemas.microsoft.com/office/drawing/2014/main" val="10000"/>
+                  </a:ext>
+                </a:extLst>
               </a:tr>
               <a:tr h="457200">
                 <a:tc>
@@ -17702,7 +16395,7 @@
                     <a:bodyPr/>
                     <a:lstStyle/>
                     <a:p>
-                      <a:pPr indent="0" marL="0">
+                      <a:pPr marL="0" indent="0">
                         <a:buNone/>
                       </a:pPr>
                       <a:r>
@@ -17723,7 +16416,7 @@
                       </a:endParaRPr>
                     </a:p>
                   </a:txBody>
-                  <a:tcPr marL="91440" marR="91440" marT="45720" marB="45720">
+                  <a:tcPr>
                     <a:lnL w="9525" cap="flat" cmpd="sng" algn="ctr">
                       <a:solidFill>
                         <a:srgbClr val="E3E8ED"/>
@@ -17770,7 +16463,7 @@
                     <a:bodyPr/>
                     <a:lstStyle/>
                     <a:p>
-                      <a:pPr indent="0" marL="0">
+                      <a:pPr marL="0" indent="0">
                         <a:buNone/>
                       </a:pPr>
                       <a:r>
@@ -17791,7 +16484,7 @@
                       </a:endParaRPr>
                     </a:p>
                   </a:txBody>
-                  <a:tcPr marL="91440" marR="91440" marT="45720" marB="45720">
+                  <a:tcPr>
                     <a:lnL w="9525" cap="flat" cmpd="sng" algn="ctr">
                       <a:solidFill>
                         <a:srgbClr val="E3E8ED"/>
@@ -17838,7 +16531,7 @@
                     <a:bodyPr/>
                     <a:lstStyle/>
                     <a:p>
-                      <a:pPr indent="0" marL="0">
+                      <a:pPr marL="0" indent="0">
                         <a:buNone/>
                       </a:pPr>
                       <a:r>
@@ -17859,7 +16552,7 @@
                       </a:endParaRPr>
                     </a:p>
                   </a:txBody>
-                  <a:tcPr marL="91440" marR="91440" marT="45720" marB="45720">
+                  <a:tcPr>
                     <a:lnL w="9525" cap="flat" cmpd="sng" algn="ctr">
                       <a:solidFill>
                         <a:srgbClr val="E3E8ED"/>
@@ -17901,6 +16594,11 @@
                     </a:solidFill>
                   </a:tcPr>
                 </a:tc>
+                <a:extLst>
+                  <a:ext uri="{0D108BD9-81ED-4DB2-BD59-A6C34878D82A}">
+                    <a16:rowId xmlns:a16="http://schemas.microsoft.com/office/drawing/2014/main" val="10001"/>
+                  </a:ext>
+                </a:extLst>
               </a:tr>
               <a:tr h="457200">
                 <a:tc>
@@ -17908,7 +16606,7 @@
                     <a:bodyPr/>
                     <a:lstStyle/>
                     <a:p>
-                      <a:pPr indent="0" marL="0">
+                      <a:pPr marL="0" indent="0">
                         <a:buNone/>
                       </a:pPr>
                       <a:r>
@@ -17929,7 +16627,7 @@
                       </a:endParaRPr>
                     </a:p>
                   </a:txBody>
-                  <a:tcPr marL="91440" marR="91440" marT="45720" marB="45720">
+                  <a:tcPr>
                     <a:lnL w="9525" cap="flat" cmpd="sng" algn="ctr">
                       <a:solidFill>
                         <a:srgbClr val="E3E8ED"/>
@@ -17976,7 +16674,7 @@
                     <a:bodyPr/>
                     <a:lstStyle/>
                     <a:p>
-                      <a:pPr indent="0" marL="0">
+                      <a:pPr marL="0" indent="0">
                         <a:buNone/>
                       </a:pPr>
                       <a:r>
@@ -17997,7 +16695,7 @@
                       </a:endParaRPr>
                     </a:p>
                   </a:txBody>
-                  <a:tcPr marL="91440" marR="91440" marT="45720" marB="45720">
+                  <a:tcPr>
                     <a:lnL w="9525" cap="flat" cmpd="sng" algn="ctr">
                       <a:solidFill>
                         <a:srgbClr val="E3E8ED"/>
@@ -18044,7 +16742,7 @@
                     <a:bodyPr/>
                     <a:lstStyle/>
                     <a:p>
-                      <a:pPr indent="0" marL="0">
+                      <a:pPr marL="0" indent="0">
                         <a:buNone/>
                       </a:pPr>
                       <a:r>
@@ -18065,7 +16763,7 @@
                       </a:endParaRPr>
                     </a:p>
                   </a:txBody>
-                  <a:tcPr marL="91440" marR="91440" marT="45720" marB="45720">
+                  <a:tcPr>
                     <a:lnL w="9525" cap="flat" cmpd="sng" algn="ctr">
                       <a:solidFill>
                         <a:srgbClr val="E3E8ED"/>
@@ -18107,6 +16805,11 @@
                     </a:solidFill>
                   </a:tcPr>
                 </a:tc>
+                <a:extLst>
+                  <a:ext uri="{0D108BD9-81ED-4DB2-BD59-A6C34878D82A}">
+                    <a16:rowId xmlns:a16="http://schemas.microsoft.com/office/drawing/2014/main" val="10002"/>
+                  </a:ext>
+                </a:extLst>
               </a:tr>
               <a:tr h="457200">
                 <a:tc>
@@ -18114,7 +16817,7 @@
                     <a:bodyPr/>
                     <a:lstStyle/>
                     <a:p>
-                      <a:pPr indent="0" marL="0">
+                      <a:pPr marL="0" indent="0">
                         <a:buNone/>
                       </a:pPr>
                       <a:r>
@@ -18135,7 +16838,7 @@
                       </a:endParaRPr>
                     </a:p>
                   </a:txBody>
-                  <a:tcPr marL="91440" marR="91440" marT="45720" marB="45720">
+                  <a:tcPr>
                     <a:lnL w="9525" cap="flat" cmpd="sng" algn="ctr">
                       <a:solidFill>
                         <a:srgbClr val="E3E8ED"/>
@@ -18182,7 +16885,7 @@
                     <a:bodyPr/>
                     <a:lstStyle/>
                     <a:p>
-                      <a:pPr indent="0" marL="0">
+                      <a:pPr marL="0" indent="0">
                         <a:buNone/>
                       </a:pPr>
                       <a:r>
@@ -18203,7 +16906,7 @@
                       </a:endParaRPr>
                     </a:p>
                   </a:txBody>
-                  <a:tcPr marL="91440" marR="91440" marT="45720" marB="45720">
+                  <a:tcPr>
                     <a:lnL w="9525" cap="flat" cmpd="sng" algn="ctr">
                       <a:solidFill>
                         <a:srgbClr val="E3E8ED"/>
@@ -18250,7 +16953,7 @@
                     <a:bodyPr/>
                     <a:lstStyle/>
                     <a:p>
-                      <a:pPr indent="0" marL="0">
+                      <a:pPr marL="0" indent="0">
                         <a:buNone/>
                       </a:pPr>
                       <a:r>
@@ -18271,7 +16974,7 @@
                       </a:endParaRPr>
                     </a:p>
                   </a:txBody>
-                  <a:tcPr marL="91440" marR="91440" marT="45720" marB="45720">
+                  <a:tcPr>
                     <a:lnL w="9525" cap="flat" cmpd="sng" algn="ctr">
                       <a:solidFill>
                         <a:srgbClr val="E3E8ED"/>
@@ -18313,6 +17016,11 @@
                     </a:solidFill>
                   </a:tcPr>
                 </a:tc>
+                <a:extLst>
+                  <a:ext uri="{0D108BD9-81ED-4DB2-BD59-A6C34878D82A}">
+                    <a16:rowId xmlns:a16="http://schemas.microsoft.com/office/drawing/2014/main" val="10003"/>
+                  </a:ext>
+                </a:extLst>
               </a:tr>
             </a:tbl>
           </a:graphicData>
@@ -18339,7 +17047,7 @@
           <a:bodyPr wrap="square" lIns="0" tIns="0" rIns="0" bIns="0" rtlCol="0" anchor="ctr"/>
           <a:lstStyle/>
           <a:p>
-            <a:pPr indent="0" marL="0">
+            <a:pPr marL="0" indent="0">
               <a:buNone/>
             </a:pPr>
             <a:r>
@@ -18373,6 +17081,7 @@
         <a:solidFill>
           <a:srgbClr val="17354C"/>
         </a:solidFill>
+        <a:effectLst/>
       </p:bgPr>
     </p:bg>
     <p:spTree>
@@ -18410,11 +17119,11 @@
           <a:bodyPr wrap="square" lIns="0" tIns="0" rIns="0" bIns="0" rtlCol="0" anchor="ctr"/>
           <a:lstStyle/>
           <a:p>
-            <a:pPr indent="0" marL="0">
-              <a:buNone/>
-            </a:pPr>
-            <a:r>
-              <a:rPr lang="en-US" sz="1100" b="1" spc="200" kern="0" dirty="0">
+            <a:pPr marL="0" indent="0">
+              <a:buNone/>
+            </a:pPr>
+            <a:r>
+              <a:rPr lang="en-US" sz="1100" b="1" kern="0" spc="200" dirty="0">
                 <a:solidFill>
                   <a:srgbClr val="73A5C4"/>
                 </a:solidFill>
@@ -18449,7 +17158,7 @@
           <a:bodyPr wrap="square" lIns="0" tIns="0" rIns="0" bIns="0" rtlCol="0" anchor="t"/>
           <a:lstStyle/>
           <a:p>
-            <a:pPr indent="0" marL="0">
+            <a:pPr marL="0" indent="0">
               <a:buNone/>
             </a:pPr>
             <a:r>
@@ -18488,7 +17197,7 @@
           <a:bodyPr wrap="square" lIns="0" tIns="0" rIns="0" bIns="0" rtlCol="0" anchor="ctr"/>
           <a:lstStyle/>
           <a:p>
-            <a:pPr algn="r" indent="0" marL="0">
+            <a:pPr marL="0" indent="0" algn="r">
               <a:buNone/>
             </a:pPr>
             <a:r>
@@ -18527,7 +17236,7 @@
           <a:bodyPr wrap="square" lIns="0" tIns="0" rIns="0" bIns="0" rtlCol="0" anchor="ctr"/>
           <a:lstStyle/>
           <a:p>
-            <a:pPr indent="0" marL="0">
+            <a:pPr marL="0" indent="0">
               <a:buNone/>
             </a:pPr>
             <a:r>
@@ -18566,7 +17275,7 @@
           <a:bodyPr wrap="square" lIns="0" tIns="0" rIns="0" bIns="0" rtlCol="0" anchor="t"/>
           <a:lstStyle/>
           <a:p>
-            <a:pPr indent="0" marL="0">
+            <a:pPr marL="0" indent="0">
               <a:buNone/>
             </a:pPr>
             <a:r>
@@ -18605,7 +17314,7 @@
           <a:bodyPr wrap="square" lIns="0" tIns="0" rIns="0" bIns="0" rtlCol="0" anchor="ctr"/>
           <a:lstStyle/>
           <a:p>
-            <a:pPr indent="0" marL="0">
+            <a:pPr marL="0" indent="0">
               <a:buNone/>
             </a:pPr>
             <a:r>
@@ -18644,7 +17353,7 @@
           <a:bodyPr wrap="square" lIns="0" tIns="0" rIns="0" bIns="0" rtlCol="0" anchor="t"/>
           <a:lstStyle/>
           <a:p>
-            <a:pPr indent="0" marL="0">
+            <a:pPr marL="0" indent="0">
               <a:buNone/>
             </a:pPr>
             <a:r>
@@ -18683,7 +17392,7 @@
           <a:bodyPr wrap="square" lIns="0" tIns="0" rIns="0" bIns="0" rtlCol="0" anchor="ctr"/>
           <a:lstStyle/>
           <a:p>
-            <a:pPr indent="0" marL="0">
+            <a:pPr marL="0" indent="0">
               <a:buNone/>
             </a:pPr>
             <a:r>
@@ -18722,7 +17431,7 @@
           <a:bodyPr wrap="square" lIns="0" tIns="0" rIns="0" bIns="0" rtlCol="0" anchor="t"/>
           <a:lstStyle/>
           <a:p>
-            <a:pPr indent="0" marL="0">
+            <a:pPr marL="0" indent="0">
               <a:buNone/>
             </a:pPr>
             <a:r>
@@ -18761,7 +17470,7 @@
           <a:bodyPr wrap="square" lIns="0" tIns="0" rIns="0" bIns="0" rtlCol="0" anchor="ctr"/>
           <a:lstStyle/>
           <a:p>
-            <a:pPr indent="0" marL="0">
+            <a:pPr marL="0" indent="0">
               <a:buNone/>
             </a:pPr>
             <a:r>
@@ -18800,7 +17509,7 @@
           <a:bodyPr wrap="square" lIns="0" tIns="0" rIns="0" bIns="0" rtlCol="0" anchor="t"/>
           <a:lstStyle/>
           <a:p>
-            <a:pPr indent="0" marL="0">
+            <a:pPr marL="0" indent="0">
               <a:buNone/>
             </a:pPr>
             <a:r>
@@ -18839,7 +17548,7 @@
           <a:bodyPr wrap="square" lIns="0" tIns="0" rIns="0" bIns="0" rtlCol="0" anchor="ctr"/>
           <a:lstStyle/>
           <a:p>
-            <a:pPr indent="0" marL="0">
+            <a:pPr marL="0" indent="0">
               <a:buNone/>
             </a:pPr>
             <a:r>
@@ -18878,7 +17587,7 @@
           <a:bodyPr wrap="square" lIns="0" tIns="0" rIns="0" bIns="0" rtlCol="0" anchor="t"/>
           <a:lstStyle/>
           <a:p>
-            <a:pPr indent="0" marL="0">
+            <a:pPr marL="0" indent="0">
               <a:buNone/>
             </a:pPr>
             <a:r>
@@ -18917,7 +17626,7 @@
           <a:bodyPr wrap="square" lIns="0" tIns="0" rIns="0" bIns="0" rtlCol="0" anchor="ctr"/>
           <a:lstStyle/>
           <a:p>
-            <a:pPr indent="0" marL="0">
+            <a:pPr marL="0" indent="0">
               <a:buNone/>
             </a:pPr>
             <a:r>
@@ -18956,7 +17665,7 @@
           <a:bodyPr wrap="square" lIns="0" tIns="0" rIns="0" bIns="0" rtlCol="0" anchor="t"/>
           <a:lstStyle/>
           <a:p>
-            <a:pPr indent="0" marL="0">
+            <a:pPr marL="0" indent="0">
               <a:buNone/>
             </a:pPr>
             <a:r>
@@ -19022,7 +17731,7 @@
           <a:bodyPr wrap="square" lIns="0" tIns="0" rIns="0" bIns="0" rtlCol="0" anchor="t"/>
           <a:lstStyle/>
           <a:p>
-            <a:pPr indent="0" marL="0">
+            <a:pPr marL="0" indent="0">
               <a:buNone/>
             </a:pPr>
             <a:r>
@@ -19036,9 +17745,6 @@
               </a:rPr>
               <a:t>Próximo: PC2 · 20/11/26 — </a:t>
             </a:r>
-            <a:pPr indent="0" marL="0">
-              <a:buNone/>
-            </a:pPr>
             <a:r>
               <a:rPr lang="en-US" sz="1800" dirty="0">
                 <a:solidFill>
@@ -19070,6 +17776,7 @@
         <a:solidFill>
           <a:srgbClr val="F6F8FA"/>
         </a:solidFill>
+        <a:effectLst/>
       </p:bgPr>
     </p:bg>
     <p:spTree>
@@ -19107,11 +17814,11 @@
           <a:bodyPr wrap="square" lIns="0" tIns="0" rIns="0" bIns="0" rtlCol="0" anchor="ctr"/>
           <a:lstStyle/>
           <a:p>
-            <a:pPr indent="0" marL="0">
-              <a:buNone/>
-            </a:pPr>
-            <a:r>
-              <a:rPr lang="en-US" sz="1100" b="1" spc="200" kern="0" dirty="0">
+            <a:pPr marL="0" indent="0">
+              <a:buNone/>
+            </a:pPr>
+            <a:r>
+              <a:rPr lang="en-US" sz="1100" b="1" kern="0" spc="200" dirty="0">
                 <a:solidFill>
                   <a:srgbClr val="3E7196"/>
                 </a:solidFill>
@@ -19146,7 +17853,7 @@
           <a:bodyPr wrap="square" lIns="0" tIns="0" rIns="0" bIns="0" rtlCol="0" anchor="t"/>
           <a:lstStyle/>
           <a:p>
-            <a:pPr indent="0" marL="0">
+            <a:pPr marL="0" indent="0">
               <a:buNone/>
             </a:pPr>
             <a:r>
@@ -19161,67 +17868,6 @@
               <a:t>Cómo trabaja hoy la agencia</a:t>
             </a:r>
             <a:endParaRPr lang="en-US" sz="3000" dirty="0"/>
-          </a:p>
-        </p:txBody>
-      </p:sp>
-      <p:sp>
-        <p:nvSpPr>
-          <p:cNvPr id="4" name="Shape 2"/>
-          <p:cNvSpPr/>
-          <p:nvPr/>
-        </p:nvSpPr>
-        <p:spPr>
-          <a:xfrm>
-            <a:off x="9722815" y="384048"/>
-            <a:ext cx="1920240" cy="365760"/>
-          </a:xfrm>
-          <a:prstGeom prst="roundRect">
-            <a:avLst>
-              <a:gd name="adj" fmla="val 50000"/>
-            </a:avLst>
-          </a:prstGeom>
-          <a:solidFill>
-            <a:srgbClr val="E9F1F7"/>
-          </a:solidFill>
-          <a:ln/>
-        </p:spPr>
-      </p:sp>
-      <p:sp>
-        <p:nvSpPr>
-          <p:cNvPr id="5" name="Text 3"/>
-          <p:cNvSpPr txBox="1"/>
-          <p:nvPr/>
-        </p:nvSpPr>
-        <p:spPr>
-          <a:xfrm>
-            <a:off x="9722815" y="384048"/>
-            <a:ext cx="1920240" cy="365760"/>
-          </a:xfrm>
-          <a:prstGeom prst="rect">
-            <a:avLst/>
-          </a:prstGeom>
-          <a:noFill/>
-          <a:ln/>
-        </p:spPr>
-        <p:txBody>
-          <a:bodyPr wrap="square" lIns="0" tIns="0" rIns="0" bIns="0" rtlCol="0" anchor="ctr"/>
-          <a:lstStyle/>
-          <a:p>
-            <a:pPr algn="ctr" indent="0" marL="0">
-              <a:buNone/>
-            </a:pPr>
-            <a:r>
-              <a:rPr lang="en-US" sz="1200" b="1" dirty="0">
-                <a:solidFill>
-                  <a:srgbClr val="22506F"/>
-                </a:solidFill>
-                <a:latin typeface="Calibri" pitchFamily="34" charset="0"/>
-                <a:ea typeface="Calibri" pitchFamily="34" charset="-122"/>
-                <a:cs typeface="Calibri" pitchFamily="34" charset="-120"/>
-              </a:rPr>
-              <a:t>Expone: Francisco</a:t>
-            </a:r>
-            <a:endParaRPr lang="en-US" sz="1200" dirty="0"/>
           </a:p>
         </p:txBody>
       </p:sp>
@@ -19246,7 +17892,7 @@
           <a:bodyPr wrap="square" lIns="0" tIns="0" rIns="0" bIns="0" rtlCol="0" anchor="ctr"/>
           <a:lstStyle/>
           <a:p>
-            <a:pPr algn="r" indent="0" marL="0">
+            <a:pPr marL="0" indent="0" algn="r">
               <a:buNone/>
             </a:pPr>
             <a:r>
@@ -19305,7 +17951,7 @@
           <a:bodyPr wrap="square" lIns="0" tIns="0" rIns="0" bIns="0" rtlCol="0" anchor="ctr"/>
           <a:lstStyle/>
           <a:p>
-            <a:pPr algn="ctr" indent="0" marL="0">
+            <a:pPr marL="0" indent="0" algn="ctr">
               <a:buNone/>
             </a:pPr>
             <a:r>
@@ -19344,7 +17990,7 @@
           <a:bodyPr wrap="square" lIns="0" tIns="0" rIns="0" bIns="0" rtlCol="0" anchor="ctr"/>
           <a:lstStyle/>
           <a:p>
-            <a:pPr indent="0" marL="0">
+            <a:pPr marL="0" indent="0">
               <a:buNone/>
             </a:pPr>
             <a:r>
@@ -19383,7 +18029,7 @@
           <a:bodyPr wrap="square" lIns="0" tIns="0" rIns="0" bIns="0" rtlCol="0" anchor="ctr"/>
           <a:lstStyle/>
           <a:p>
-            <a:pPr indent="0" marL="0">
+            <a:pPr marL="0" indent="0">
               <a:buNone/>
             </a:pPr>
             <a:r>
@@ -19442,7 +18088,7 @@
           <a:bodyPr wrap="square" lIns="0" tIns="0" rIns="0" bIns="0" rtlCol="0" anchor="ctr"/>
           <a:lstStyle/>
           <a:p>
-            <a:pPr algn="ctr" indent="0" marL="0">
+            <a:pPr marL="0" indent="0" algn="ctr">
               <a:buNone/>
             </a:pPr>
             <a:r>
@@ -19481,7 +18127,7 @@
           <a:bodyPr wrap="square" lIns="0" tIns="0" rIns="0" bIns="0" rtlCol="0" anchor="ctr"/>
           <a:lstStyle/>
           <a:p>
-            <a:pPr indent="0" marL="0">
+            <a:pPr marL="0" indent="0">
               <a:buNone/>
             </a:pPr>
             <a:r>
@@ -19520,7 +18166,7 @@
           <a:bodyPr wrap="square" lIns="0" tIns="0" rIns="0" bIns="0" rtlCol="0" anchor="ctr"/>
           <a:lstStyle/>
           <a:p>
-            <a:pPr indent="0" marL="0">
+            <a:pPr marL="0" indent="0">
               <a:buNone/>
             </a:pPr>
             <a:r>
@@ -19579,7 +18225,7 @@
           <a:bodyPr wrap="square" lIns="0" tIns="0" rIns="0" bIns="0" rtlCol="0" anchor="ctr"/>
           <a:lstStyle/>
           <a:p>
-            <a:pPr algn="ctr" indent="0" marL="0">
+            <a:pPr marL="0" indent="0" algn="ctr">
               <a:buNone/>
             </a:pPr>
             <a:r>
@@ -19618,7 +18264,7 @@
           <a:bodyPr wrap="square" lIns="0" tIns="0" rIns="0" bIns="0" rtlCol="0" anchor="ctr"/>
           <a:lstStyle/>
           <a:p>
-            <a:pPr indent="0" marL="0">
+            <a:pPr marL="0" indent="0">
               <a:buNone/>
             </a:pPr>
             <a:r>
@@ -19657,7 +18303,7 @@
           <a:bodyPr wrap="square" lIns="0" tIns="0" rIns="0" bIns="0" rtlCol="0" anchor="ctr"/>
           <a:lstStyle/>
           <a:p>
-            <a:pPr indent="0" marL="0">
+            <a:pPr marL="0" indent="0">
               <a:buNone/>
             </a:pPr>
             <a:r>
@@ -19716,7 +18362,7 @@
           <a:bodyPr wrap="square" lIns="0" tIns="0" rIns="0" bIns="0" rtlCol="0" anchor="ctr"/>
           <a:lstStyle/>
           <a:p>
-            <a:pPr algn="ctr" indent="0" marL="0">
+            <a:pPr marL="0" indent="0" algn="ctr">
               <a:buNone/>
             </a:pPr>
             <a:r>
@@ -19755,7 +18401,7 @@
           <a:bodyPr wrap="square" lIns="0" tIns="0" rIns="0" bIns="0" rtlCol="0" anchor="ctr"/>
           <a:lstStyle/>
           <a:p>
-            <a:pPr indent="0" marL="0">
+            <a:pPr marL="0" indent="0">
               <a:buNone/>
             </a:pPr>
             <a:r>
@@ -19794,7 +18440,7 @@
           <a:bodyPr wrap="square" lIns="0" tIns="0" rIns="0" bIns="0" rtlCol="0" anchor="ctr"/>
           <a:lstStyle/>
           <a:p>
-            <a:pPr indent="0" marL="0">
+            <a:pPr marL="0" indent="0">
               <a:buNone/>
             </a:pPr>
             <a:r>
@@ -19860,7 +18506,7 @@
           <a:bodyPr wrap="square" lIns="0" tIns="0" rIns="0" bIns="0" rtlCol="0" anchor="ctr"/>
           <a:lstStyle/>
           <a:p>
-            <a:pPr indent="0" marL="0">
+            <a:pPr marL="0" indent="0">
               <a:buNone/>
             </a:pPr>
             <a:r>
@@ -19899,7 +18545,7 @@
           <a:bodyPr wrap="square" lIns="0" tIns="0" rIns="0" bIns="0" rtlCol="0" anchor="ctr"/>
           <a:lstStyle/>
           <a:p>
-            <a:pPr indent="0" marL="0">
+            <a:pPr marL="0" indent="0">
               <a:spcAft>
                 <a:spcPts val="1000"/>
               </a:spcAft>
@@ -19919,7 +18565,7 @@
             <a:endParaRPr lang="en-US" sz="2200" dirty="0"/>
           </a:p>
           <a:p>
-            <a:pPr indent="0" marL="0">
+            <a:pPr marL="0" indent="0">
               <a:spcAft>
                 <a:spcPts val="1000"/>
               </a:spcAft>
@@ -19939,7 +18585,7 @@
             <a:endParaRPr lang="en-US" sz="2200" dirty="0"/>
           </a:p>
           <a:p>
-            <a:pPr indent="0" marL="0">
+            <a:pPr marL="0" indent="0">
               <a:spcAft>
                 <a:spcPts val="1000"/>
               </a:spcAft>
@@ -19981,7 +18627,7 @@
           <a:bodyPr wrap="square" lIns="0" tIns="0" rIns="0" bIns="0" rtlCol="0" anchor="ctr"/>
           <a:lstStyle/>
           <a:p>
-            <a:pPr indent="0" marL="0">
+            <a:pPr marL="0" indent="0">
               <a:buNone/>
             </a:pPr>
             <a:r>
@@ -20015,6 +18661,7 @@
         <a:solidFill>
           <a:srgbClr val="F6F8FA"/>
         </a:solidFill>
+        <a:effectLst/>
       </p:bgPr>
     </p:bg>
     <p:spTree>
@@ -20052,11 +18699,11 @@
           <a:bodyPr wrap="square" lIns="0" tIns="0" rIns="0" bIns="0" rtlCol="0" anchor="ctr"/>
           <a:lstStyle/>
           <a:p>
-            <a:pPr indent="0" marL="0">
-              <a:buNone/>
-            </a:pPr>
-            <a:r>
-              <a:rPr lang="en-US" sz="1100" b="1" spc="200" kern="0" dirty="0">
+            <a:pPr marL="0" indent="0">
+              <a:buNone/>
+            </a:pPr>
+            <a:r>
+              <a:rPr lang="en-US" sz="1100" b="1" kern="0" spc="200" dirty="0">
                 <a:solidFill>
                   <a:srgbClr val="3E7196"/>
                 </a:solidFill>
@@ -20091,7 +18738,7 @@
           <a:bodyPr wrap="square" lIns="0" tIns="0" rIns="0" bIns="0" rtlCol="0" anchor="t"/>
           <a:lstStyle/>
           <a:p>
-            <a:pPr indent="0" marL="0">
+            <a:pPr marL="0" indent="0">
               <a:buNone/>
             </a:pPr>
             <a:r>
@@ -20106,67 +18753,6 @@
               <a:t>Por qué no alcanzan las herramientas que existen</a:t>
             </a:r>
             <a:endParaRPr lang="en-US" sz="3000" dirty="0"/>
-          </a:p>
-        </p:txBody>
-      </p:sp>
-      <p:sp>
-        <p:nvSpPr>
-          <p:cNvPr id="4" name="Shape 2"/>
-          <p:cNvSpPr/>
-          <p:nvPr/>
-        </p:nvSpPr>
-        <p:spPr>
-          <a:xfrm>
-            <a:off x="9722815" y="384048"/>
-            <a:ext cx="1920240" cy="365760"/>
-          </a:xfrm>
-          <a:prstGeom prst="roundRect">
-            <a:avLst>
-              <a:gd name="adj" fmla="val 50000"/>
-            </a:avLst>
-          </a:prstGeom>
-          <a:solidFill>
-            <a:srgbClr val="E9F1F7"/>
-          </a:solidFill>
-          <a:ln/>
-        </p:spPr>
-      </p:sp>
-      <p:sp>
-        <p:nvSpPr>
-          <p:cNvPr id="5" name="Text 3"/>
-          <p:cNvSpPr txBox="1"/>
-          <p:nvPr/>
-        </p:nvSpPr>
-        <p:spPr>
-          <a:xfrm>
-            <a:off x="9722815" y="384048"/>
-            <a:ext cx="1920240" cy="365760"/>
-          </a:xfrm>
-          <a:prstGeom prst="rect">
-            <a:avLst/>
-          </a:prstGeom>
-          <a:noFill/>
-          <a:ln/>
-        </p:spPr>
-        <p:txBody>
-          <a:bodyPr wrap="square" lIns="0" tIns="0" rIns="0" bIns="0" rtlCol="0" anchor="ctr"/>
-          <a:lstStyle/>
-          <a:p>
-            <a:pPr algn="ctr" indent="0" marL="0">
-              <a:buNone/>
-            </a:pPr>
-            <a:r>
-              <a:rPr lang="en-US" sz="1200" b="1" dirty="0">
-                <a:solidFill>
-                  <a:srgbClr val="22506F"/>
-                </a:solidFill>
-                <a:latin typeface="Calibri" pitchFamily="34" charset="0"/>
-                <a:ea typeface="Calibri" pitchFamily="34" charset="-122"/>
-                <a:cs typeface="Calibri" pitchFamily="34" charset="-120"/>
-              </a:rPr>
-              <a:t>Expone: Francisco</a:t>
-            </a:r>
-            <a:endParaRPr lang="en-US" sz="1200" dirty="0"/>
           </a:p>
         </p:txBody>
       </p:sp>
@@ -20191,7 +18777,7 @@
           <a:bodyPr wrap="square" lIns="0" tIns="0" rIns="0" bIns="0" rtlCol="0" anchor="ctr"/>
           <a:lstStyle/>
           <a:p>
-            <a:pPr algn="r" indent="0" marL="0">
+            <a:pPr marL="0" indent="0" algn="r">
               <a:buNone/>
             </a:pPr>
             <a:r>
@@ -20211,7 +18797,7 @@
       </p:sp>
       <p:graphicFrame>
         <p:nvGraphicFramePr>
-          <p:cNvPr id="5" name="Table 0"/>
+          <p:cNvPr id="7" name="Table 0"/>
           <p:cNvGraphicFramePr>
             <a:graphicFrameLocks noGrp="1"/>
           </p:cNvGraphicFramePr>
@@ -20225,18 +18811,48 @@
         </p:nvGraphicFramePr>
         <p:xfrm>
           <a:off x="548640" y="1554480"/>
-          <a:ext cx="11094415" cy="914400"/>
+          <a:ext cx="11091672" cy="3803904"/>
         </p:xfrm>
         <a:graphic>
           <a:graphicData uri="http://schemas.openxmlformats.org/drawingml/2006/table">
             <a:tbl>
               <a:tblPr/>
               <a:tblGrid>
-                <a:gridCol w="3840480"/>
-                <a:gridCol w="1737360"/>
-                <a:gridCol w="1554480"/>
-                <a:gridCol w="2011680"/>
-                <a:gridCol w="1947672"/>
+                <a:gridCol w="3840480">
+                  <a:extLst>
+                    <a:ext uri="{9D8B030D-6E8A-4147-A177-3AD203B41FA5}">
+                      <a16:colId xmlns:a16="http://schemas.microsoft.com/office/drawing/2014/main" val="20000"/>
+                    </a:ext>
+                  </a:extLst>
+                </a:gridCol>
+                <a:gridCol w="1737360">
+                  <a:extLst>
+                    <a:ext uri="{9D8B030D-6E8A-4147-A177-3AD203B41FA5}">
+                      <a16:colId xmlns:a16="http://schemas.microsoft.com/office/drawing/2014/main" val="20001"/>
+                    </a:ext>
+                  </a:extLst>
+                </a:gridCol>
+                <a:gridCol w="1554480">
+                  <a:extLst>
+                    <a:ext uri="{9D8B030D-6E8A-4147-A177-3AD203B41FA5}">
+                      <a16:colId xmlns:a16="http://schemas.microsoft.com/office/drawing/2014/main" val="20002"/>
+                    </a:ext>
+                  </a:extLst>
+                </a:gridCol>
+                <a:gridCol w="2011680">
+                  <a:extLst>
+                    <a:ext uri="{9D8B030D-6E8A-4147-A177-3AD203B41FA5}">
+                      <a16:colId xmlns:a16="http://schemas.microsoft.com/office/drawing/2014/main" val="20003"/>
+                    </a:ext>
+                  </a:extLst>
+                </a:gridCol>
+                <a:gridCol w="1947672">
+                  <a:extLst>
+                    <a:ext uri="{9D8B030D-6E8A-4147-A177-3AD203B41FA5}">
+                      <a16:colId xmlns:a16="http://schemas.microsoft.com/office/drawing/2014/main" val="20004"/>
+                    </a:ext>
+                  </a:extLst>
+                </a:gridCol>
               </a:tblGrid>
               <a:tr h="475488">
                 <a:tc>
@@ -20244,7 +18860,7 @@
                     <a:bodyPr/>
                     <a:lstStyle/>
                     <a:p>
-                      <a:pPr algn="l" indent="0" marL="0">
+                      <a:pPr marL="0" indent="0" algn="l">
                         <a:buNone/>
                       </a:pPr>
                       <a:r>
@@ -20265,7 +18881,7 @@
                       </a:endParaRPr>
                     </a:p>
                   </a:txBody>
-                  <a:tcPr marL="91440" marR="91440" marT="45720" marB="45720" anchor="ctr">
+                  <a:tcPr anchor="ctr">
                     <a:lnL w="9525" cap="flat" cmpd="sng" algn="ctr">
                       <a:solidFill>
                         <a:srgbClr val="E3E8ED"/>
@@ -20312,7 +18928,7 @@
                     <a:bodyPr/>
                     <a:lstStyle/>
                     <a:p>
-                      <a:pPr algn="ctr" indent="0" marL="0">
+                      <a:pPr marL="0" indent="0" algn="ctr">
                         <a:buNone/>
                       </a:pPr>
                       <a:r>
@@ -20333,7 +18949,7 @@
                       </a:endParaRPr>
                     </a:p>
                   </a:txBody>
-                  <a:tcPr marL="91440" marR="91440" marT="45720" marB="45720" anchor="ctr">
+                  <a:tcPr anchor="ctr">
                     <a:lnL w="9525" cap="flat" cmpd="sng" algn="ctr">
                       <a:solidFill>
                         <a:srgbClr val="E3E8ED"/>
@@ -20380,7 +18996,7 @@
                     <a:bodyPr/>
                     <a:lstStyle/>
                     <a:p>
-                      <a:pPr algn="ctr" indent="0" marL="0">
+                      <a:pPr marL="0" indent="0" algn="ctr">
                         <a:buNone/>
                       </a:pPr>
                       <a:r>
@@ -20401,7 +19017,7 @@
                       </a:endParaRPr>
                     </a:p>
                   </a:txBody>
-                  <a:tcPr marL="91440" marR="91440" marT="45720" marB="45720" anchor="ctr">
+                  <a:tcPr anchor="ctr">
                     <a:lnL w="9525" cap="flat" cmpd="sng" algn="ctr">
                       <a:solidFill>
                         <a:srgbClr val="E3E8ED"/>
@@ -20448,7 +19064,7 @@
                     <a:bodyPr/>
                     <a:lstStyle/>
                     <a:p>
-                      <a:pPr algn="ctr" indent="0" marL="0">
+                      <a:pPr marL="0" indent="0" algn="ctr">
                         <a:buNone/>
                       </a:pPr>
                       <a:r>
@@ -20469,7 +19085,7 @@
                       </a:endParaRPr>
                     </a:p>
                   </a:txBody>
-                  <a:tcPr marL="91440" marR="91440" marT="45720" marB="45720" anchor="ctr">
+                  <a:tcPr anchor="ctr">
                     <a:lnL w="9525" cap="flat" cmpd="sng" algn="ctr">
                       <a:solidFill>
                         <a:srgbClr val="E3E8ED"/>
@@ -20516,7 +19132,7 @@
                     <a:bodyPr/>
                     <a:lstStyle/>
                     <a:p>
-                      <a:pPr algn="ctr" indent="0" marL="0">
+                      <a:pPr marL="0" indent="0" algn="ctr">
                         <a:buNone/>
                       </a:pPr>
                       <a:r>
@@ -20537,7 +19153,7 @@
                       </a:endParaRPr>
                     </a:p>
                   </a:txBody>
-                  <a:tcPr marL="91440" marR="91440" marT="45720" marB="45720" anchor="ctr">
+                  <a:tcPr anchor="ctr">
                     <a:lnL w="9525" cap="flat" cmpd="sng" algn="ctr">
                       <a:solidFill>
                         <a:srgbClr val="E3E8ED"/>
@@ -20579,6 +19195,11 @@
                     </a:solidFill>
                   </a:tcPr>
                 </a:tc>
+                <a:extLst>
+                  <a:ext uri="{0D108BD9-81ED-4DB2-BD59-A6C34878D82A}">
+                    <a16:rowId xmlns:a16="http://schemas.microsoft.com/office/drawing/2014/main" val="10000"/>
+                  </a:ext>
+                </a:extLst>
               </a:tr>
               <a:tr h="475488">
                 <a:tc>
@@ -20586,7 +19207,7 @@
                     <a:bodyPr/>
                     <a:lstStyle/>
                     <a:p>
-                      <a:pPr algn="l" indent="0" marL="0">
+                      <a:pPr marL="0" indent="0" algn="l">
                         <a:buNone/>
                       </a:pPr>
                       <a:r>
@@ -20607,7 +19228,7 @@
                       </a:endParaRPr>
                     </a:p>
                   </a:txBody>
-                  <a:tcPr marL="91440" marR="91440" marT="45720" marB="45720" anchor="ctr">
+                  <a:tcPr anchor="ctr">
                     <a:lnL w="9525" cap="flat" cmpd="sng" algn="ctr">
                       <a:solidFill>
                         <a:srgbClr val="E3E8ED"/>
@@ -20654,7 +19275,7 @@
                     <a:bodyPr/>
                     <a:lstStyle/>
                     <a:p>
-                      <a:pPr algn="ctr" indent="0" marL="0">
+                      <a:pPr marL="0" indent="0" algn="ctr">
                         <a:buNone/>
                       </a:pPr>
                       <a:r>
@@ -20675,7 +19296,7 @@
                       </a:endParaRPr>
                     </a:p>
                   </a:txBody>
-                  <a:tcPr marL="91440" marR="91440" marT="45720" marB="45720" anchor="ctr">
+                  <a:tcPr anchor="ctr">
                     <a:lnL w="9525" cap="flat" cmpd="sng" algn="ctr">
                       <a:solidFill>
                         <a:srgbClr val="E3E8ED"/>
@@ -20722,7 +19343,7 @@
                     <a:bodyPr/>
                     <a:lstStyle/>
                     <a:p>
-                      <a:pPr algn="ctr" indent="0" marL="0">
+                      <a:pPr marL="0" indent="0" algn="ctr">
                         <a:buNone/>
                       </a:pPr>
                       <a:r>
@@ -20743,7 +19364,7 @@
                       </a:endParaRPr>
                     </a:p>
                   </a:txBody>
-                  <a:tcPr marL="91440" marR="91440" marT="45720" marB="45720" anchor="ctr">
+                  <a:tcPr anchor="ctr">
                     <a:lnL w="9525" cap="flat" cmpd="sng" algn="ctr">
                       <a:solidFill>
                         <a:srgbClr val="E3E8ED"/>
@@ -20790,7 +19411,7 @@
                     <a:bodyPr/>
                     <a:lstStyle/>
                     <a:p>
-                      <a:pPr algn="ctr" indent="0" marL="0">
+                      <a:pPr marL="0" indent="0" algn="ctr">
                         <a:buNone/>
                       </a:pPr>
                       <a:r>
@@ -20811,7 +19432,7 @@
                       </a:endParaRPr>
                     </a:p>
                   </a:txBody>
-                  <a:tcPr marL="91440" marR="91440" marT="45720" marB="45720" anchor="ctr">
+                  <a:tcPr anchor="ctr">
                     <a:lnL w="9525" cap="flat" cmpd="sng" algn="ctr">
                       <a:solidFill>
                         <a:srgbClr val="E3E8ED"/>
@@ -20858,7 +19479,7 @@
                     <a:bodyPr/>
                     <a:lstStyle/>
                     <a:p>
-                      <a:pPr algn="ctr" indent="0" marL="0">
+                      <a:pPr marL="0" indent="0" algn="ctr">
                         <a:buNone/>
                       </a:pPr>
                       <a:r>
@@ -20879,7 +19500,7 @@
                       </a:endParaRPr>
                     </a:p>
                   </a:txBody>
-                  <a:tcPr marL="91440" marR="91440" marT="45720" marB="45720" anchor="ctr">
+                  <a:tcPr anchor="ctr">
                     <a:lnL w="9525" cap="flat" cmpd="sng" algn="ctr">
                       <a:solidFill>
                         <a:srgbClr val="E3E8ED"/>
@@ -20921,6 +19542,11 @@
                     </a:solidFill>
                   </a:tcPr>
                 </a:tc>
+                <a:extLst>
+                  <a:ext uri="{0D108BD9-81ED-4DB2-BD59-A6C34878D82A}">
+                    <a16:rowId xmlns:a16="http://schemas.microsoft.com/office/drawing/2014/main" val="10001"/>
+                  </a:ext>
+                </a:extLst>
               </a:tr>
               <a:tr h="475488">
                 <a:tc>
@@ -20928,7 +19554,7 @@
                     <a:bodyPr/>
                     <a:lstStyle/>
                     <a:p>
-                      <a:pPr algn="l" indent="0" marL="0">
+                      <a:pPr marL="0" indent="0" algn="l">
                         <a:buNone/>
                       </a:pPr>
                       <a:r>
@@ -20949,7 +19575,7 @@
                       </a:endParaRPr>
                     </a:p>
                   </a:txBody>
-                  <a:tcPr marL="91440" marR="91440" marT="45720" marB="45720" anchor="ctr">
+                  <a:tcPr anchor="ctr">
                     <a:lnL w="9525" cap="flat" cmpd="sng" algn="ctr">
                       <a:solidFill>
                         <a:srgbClr val="E3E8ED"/>
@@ -20996,7 +19622,7 @@
                     <a:bodyPr/>
                     <a:lstStyle/>
                     <a:p>
-                      <a:pPr algn="ctr" indent="0" marL="0">
+                      <a:pPr marL="0" indent="0" algn="ctr">
                         <a:buNone/>
                       </a:pPr>
                       <a:r>
@@ -21017,7 +19643,7 @@
                       </a:endParaRPr>
                     </a:p>
                   </a:txBody>
-                  <a:tcPr marL="91440" marR="91440" marT="45720" marB="45720" anchor="ctr">
+                  <a:tcPr anchor="ctr">
                     <a:lnL w="9525" cap="flat" cmpd="sng" algn="ctr">
                       <a:solidFill>
                         <a:srgbClr val="E3E8ED"/>
@@ -21064,7 +19690,7 @@
                     <a:bodyPr/>
                     <a:lstStyle/>
                     <a:p>
-                      <a:pPr algn="ctr" indent="0" marL="0">
+                      <a:pPr marL="0" indent="0" algn="ctr">
                         <a:buNone/>
                       </a:pPr>
                       <a:r>
@@ -21085,7 +19711,7 @@
                       </a:endParaRPr>
                     </a:p>
                   </a:txBody>
-                  <a:tcPr marL="91440" marR="91440" marT="45720" marB="45720" anchor="ctr">
+                  <a:tcPr anchor="ctr">
                     <a:lnL w="9525" cap="flat" cmpd="sng" algn="ctr">
                       <a:solidFill>
                         <a:srgbClr val="E3E8ED"/>
@@ -21132,7 +19758,7 @@
                     <a:bodyPr/>
                     <a:lstStyle/>
                     <a:p>
-                      <a:pPr algn="ctr" indent="0" marL="0">
+                      <a:pPr marL="0" indent="0" algn="ctr">
                         <a:buNone/>
                       </a:pPr>
                       <a:r>
@@ -21153,7 +19779,7 @@
                       </a:endParaRPr>
                     </a:p>
                   </a:txBody>
-                  <a:tcPr marL="91440" marR="91440" marT="45720" marB="45720" anchor="ctr">
+                  <a:tcPr anchor="ctr">
                     <a:lnL w="9525" cap="flat" cmpd="sng" algn="ctr">
                       <a:solidFill>
                         <a:srgbClr val="E3E8ED"/>
@@ -21200,7 +19826,7 @@
                     <a:bodyPr/>
                     <a:lstStyle/>
                     <a:p>
-                      <a:pPr algn="ctr" indent="0" marL="0">
+                      <a:pPr marL="0" indent="0" algn="ctr">
                         <a:buNone/>
                       </a:pPr>
                       <a:r>
@@ -21221,7 +19847,7 @@
                       </a:endParaRPr>
                     </a:p>
                   </a:txBody>
-                  <a:tcPr marL="91440" marR="91440" marT="45720" marB="45720" anchor="ctr">
+                  <a:tcPr anchor="ctr">
                     <a:lnL w="9525" cap="flat" cmpd="sng" algn="ctr">
                       <a:solidFill>
                         <a:srgbClr val="E3E8ED"/>
@@ -21263,6 +19889,11 @@
                     </a:solidFill>
                   </a:tcPr>
                 </a:tc>
+                <a:extLst>
+                  <a:ext uri="{0D108BD9-81ED-4DB2-BD59-A6C34878D82A}">
+                    <a16:rowId xmlns:a16="http://schemas.microsoft.com/office/drawing/2014/main" val="10002"/>
+                  </a:ext>
+                </a:extLst>
               </a:tr>
               <a:tr h="475488">
                 <a:tc>
@@ -21270,7 +19901,7 @@
                     <a:bodyPr/>
                     <a:lstStyle/>
                     <a:p>
-                      <a:pPr algn="l" indent="0" marL="0">
+                      <a:pPr marL="0" indent="0" algn="l">
                         <a:buNone/>
                       </a:pPr>
                       <a:r>
@@ -21291,7 +19922,7 @@
                       </a:endParaRPr>
                     </a:p>
                   </a:txBody>
-                  <a:tcPr marL="91440" marR="91440" marT="45720" marB="45720" anchor="ctr">
+                  <a:tcPr anchor="ctr">
                     <a:lnL w="9525" cap="flat" cmpd="sng" algn="ctr">
                       <a:solidFill>
                         <a:srgbClr val="E3E8ED"/>
@@ -21338,7 +19969,7 @@
                     <a:bodyPr/>
                     <a:lstStyle/>
                     <a:p>
-                      <a:pPr algn="ctr" indent="0" marL="0">
+                      <a:pPr marL="0" indent="0" algn="ctr">
                         <a:buNone/>
                       </a:pPr>
                       <a:r>
@@ -21359,7 +19990,7 @@
                       </a:endParaRPr>
                     </a:p>
                   </a:txBody>
-                  <a:tcPr marL="91440" marR="91440" marT="45720" marB="45720" anchor="ctr">
+                  <a:tcPr anchor="ctr">
                     <a:lnL w="9525" cap="flat" cmpd="sng" algn="ctr">
                       <a:solidFill>
                         <a:srgbClr val="E3E8ED"/>
@@ -21406,7 +20037,7 @@
                     <a:bodyPr/>
                     <a:lstStyle/>
                     <a:p>
-                      <a:pPr algn="ctr" indent="0" marL="0">
+                      <a:pPr marL="0" indent="0" algn="ctr">
                         <a:buNone/>
                       </a:pPr>
                       <a:r>
@@ -21427,7 +20058,7 @@
                       </a:endParaRPr>
                     </a:p>
                   </a:txBody>
-                  <a:tcPr marL="91440" marR="91440" marT="45720" marB="45720" anchor="ctr">
+                  <a:tcPr anchor="ctr">
                     <a:lnL w="9525" cap="flat" cmpd="sng" algn="ctr">
                       <a:solidFill>
                         <a:srgbClr val="E3E8ED"/>
@@ -21474,7 +20105,7 @@
                     <a:bodyPr/>
                     <a:lstStyle/>
                     <a:p>
-                      <a:pPr algn="ctr" indent="0" marL="0">
+                      <a:pPr marL="0" indent="0" algn="ctr">
                         <a:buNone/>
                       </a:pPr>
                       <a:r>
@@ -21495,7 +20126,7 @@
                       </a:endParaRPr>
                     </a:p>
                   </a:txBody>
-                  <a:tcPr marL="91440" marR="91440" marT="45720" marB="45720" anchor="ctr">
+                  <a:tcPr anchor="ctr">
                     <a:lnL w="9525" cap="flat" cmpd="sng" algn="ctr">
                       <a:solidFill>
                         <a:srgbClr val="E3E8ED"/>
@@ -21542,7 +20173,7 @@
                     <a:bodyPr/>
                     <a:lstStyle/>
                     <a:p>
-                      <a:pPr algn="ctr" indent="0" marL="0">
+                      <a:pPr marL="0" indent="0" algn="ctr">
                         <a:buNone/>
                       </a:pPr>
                       <a:r>
@@ -21563,7 +20194,7 @@
                       </a:endParaRPr>
                     </a:p>
                   </a:txBody>
-                  <a:tcPr marL="91440" marR="91440" marT="45720" marB="45720" anchor="ctr">
+                  <a:tcPr anchor="ctr">
                     <a:lnL w="9525" cap="flat" cmpd="sng" algn="ctr">
                       <a:solidFill>
                         <a:srgbClr val="E3E8ED"/>
@@ -21605,6 +20236,11 @@
                     </a:solidFill>
                   </a:tcPr>
                 </a:tc>
+                <a:extLst>
+                  <a:ext uri="{0D108BD9-81ED-4DB2-BD59-A6C34878D82A}">
+                    <a16:rowId xmlns:a16="http://schemas.microsoft.com/office/drawing/2014/main" val="10003"/>
+                  </a:ext>
+                </a:extLst>
               </a:tr>
               <a:tr h="475488">
                 <a:tc>
@@ -21612,7 +20248,7 @@
                     <a:bodyPr/>
                     <a:lstStyle/>
                     <a:p>
-                      <a:pPr algn="l" indent="0" marL="0">
+                      <a:pPr marL="0" indent="0" algn="l">
                         <a:buNone/>
                       </a:pPr>
                       <a:r>
@@ -21633,7 +20269,7 @@
                       </a:endParaRPr>
                     </a:p>
                   </a:txBody>
-                  <a:tcPr marL="91440" marR="91440" marT="45720" marB="45720" anchor="ctr">
+                  <a:tcPr anchor="ctr">
                     <a:lnL w="9525" cap="flat" cmpd="sng" algn="ctr">
                       <a:solidFill>
                         <a:srgbClr val="E3E8ED"/>
@@ -21680,7 +20316,7 @@
                     <a:bodyPr/>
                     <a:lstStyle/>
                     <a:p>
-                      <a:pPr algn="ctr" indent="0" marL="0">
+                      <a:pPr marL="0" indent="0" algn="ctr">
                         <a:buNone/>
                       </a:pPr>
                       <a:r>
@@ -21701,7 +20337,7 @@
                       </a:endParaRPr>
                     </a:p>
                   </a:txBody>
-                  <a:tcPr marL="91440" marR="91440" marT="45720" marB="45720" anchor="ctr">
+                  <a:tcPr anchor="ctr">
                     <a:lnL w="9525" cap="flat" cmpd="sng" algn="ctr">
                       <a:solidFill>
                         <a:srgbClr val="E3E8ED"/>
@@ -21748,7 +20384,7 @@
                     <a:bodyPr/>
                     <a:lstStyle/>
                     <a:p>
-                      <a:pPr algn="ctr" indent="0" marL="0">
+                      <a:pPr marL="0" indent="0" algn="ctr">
                         <a:buNone/>
                       </a:pPr>
                       <a:r>
@@ -21769,7 +20405,7 @@
                       </a:endParaRPr>
                     </a:p>
                   </a:txBody>
-                  <a:tcPr marL="91440" marR="91440" marT="45720" marB="45720" anchor="ctr">
+                  <a:tcPr anchor="ctr">
                     <a:lnL w="9525" cap="flat" cmpd="sng" algn="ctr">
                       <a:solidFill>
                         <a:srgbClr val="E3E8ED"/>
@@ -21816,7 +20452,7 @@
                     <a:bodyPr/>
                     <a:lstStyle/>
                     <a:p>
-                      <a:pPr algn="ctr" indent="0" marL="0">
+                      <a:pPr marL="0" indent="0" algn="ctr">
                         <a:buNone/>
                       </a:pPr>
                       <a:r>
@@ -21837,7 +20473,7 @@
                       </a:endParaRPr>
                     </a:p>
                   </a:txBody>
-                  <a:tcPr marL="91440" marR="91440" marT="45720" marB="45720" anchor="ctr">
+                  <a:tcPr anchor="ctr">
                     <a:lnL w="9525" cap="flat" cmpd="sng" algn="ctr">
                       <a:solidFill>
                         <a:srgbClr val="E3E8ED"/>
@@ -21884,7 +20520,7 @@
                     <a:bodyPr/>
                     <a:lstStyle/>
                     <a:p>
-                      <a:pPr algn="ctr" indent="0" marL="0">
+                      <a:pPr marL="0" indent="0" algn="ctr">
                         <a:buNone/>
                       </a:pPr>
                       <a:r>
@@ -21905,7 +20541,7 @@
                       </a:endParaRPr>
                     </a:p>
                   </a:txBody>
-                  <a:tcPr marL="91440" marR="91440" marT="45720" marB="45720" anchor="ctr">
+                  <a:tcPr anchor="ctr">
                     <a:lnL w="9525" cap="flat" cmpd="sng" algn="ctr">
                       <a:solidFill>
                         <a:srgbClr val="E3E8ED"/>
@@ -21947,6 +20583,11 @@
                     </a:solidFill>
                   </a:tcPr>
                 </a:tc>
+                <a:extLst>
+                  <a:ext uri="{0D108BD9-81ED-4DB2-BD59-A6C34878D82A}">
+                    <a16:rowId xmlns:a16="http://schemas.microsoft.com/office/drawing/2014/main" val="10004"/>
+                  </a:ext>
+                </a:extLst>
               </a:tr>
               <a:tr h="475488">
                 <a:tc>
@@ -21954,7 +20595,7 @@
                     <a:bodyPr/>
                     <a:lstStyle/>
                     <a:p>
-                      <a:pPr algn="l" indent="0" marL="0">
+                      <a:pPr marL="0" indent="0" algn="l">
                         <a:buNone/>
                       </a:pPr>
                       <a:r>
@@ -21975,7 +20616,7 @@
                       </a:endParaRPr>
                     </a:p>
                   </a:txBody>
-                  <a:tcPr marL="91440" marR="91440" marT="45720" marB="45720" anchor="ctr">
+                  <a:tcPr anchor="ctr">
                     <a:lnL w="9525" cap="flat" cmpd="sng" algn="ctr">
                       <a:solidFill>
                         <a:srgbClr val="E3E8ED"/>
@@ -22022,7 +20663,7 @@
                     <a:bodyPr/>
                     <a:lstStyle/>
                     <a:p>
-                      <a:pPr algn="ctr" indent="0" marL="0">
+                      <a:pPr marL="0" indent="0" algn="ctr">
                         <a:buNone/>
                       </a:pPr>
                       <a:r>
@@ -22043,7 +20684,7 @@
                       </a:endParaRPr>
                     </a:p>
                   </a:txBody>
-                  <a:tcPr marL="91440" marR="91440" marT="45720" marB="45720" anchor="ctr">
+                  <a:tcPr anchor="ctr">
                     <a:lnL w="9525" cap="flat" cmpd="sng" algn="ctr">
                       <a:solidFill>
                         <a:srgbClr val="E3E8ED"/>
@@ -22090,7 +20731,7 @@
                     <a:bodyPr/>
                     <a:lstStyle/>
                     <a:p>
-                      <a:pPr algn="ctr" indent="0" marL="0">
+                      <a:pPr marL="0" indent="0" algn="ctr">
                         <a:buNone/>
                       </a:pPr>
                       <a:r>
@@ -22111,7 +20752,7 @@
                       </a:endParaRPr>
                     </a:p>
                   </a:txBody>
-                  <a:tcPr marL="91440" marR="91440" marT="45720" marB="45720" anchor="ctr">
+                  <a:tcPr anchor="ctr">
                     <a:lnL w="9525" cap="flat" cmpd="sng" algn="ctr">
                       <a:solidFill>
                         <a:srgbClr val="E3E8ED"/>
@@ -22158,7 +20799,7 @@
                     <a:bodyPr/>
                     <a:lstStyle/>
                     <a:p>
-                      <a:pPr algn="ctr" indent="0" marL="0">
+                      <a:pPr marL="0" indent="0" algn="ctr">
                         <a:buNone/>
                       </a:pPr>
                       <a:r>
@@ -22179,7 +20820,7 @@
                       </a:endParaRPr>
                     </a:p>
                   </a:txBody>
-                  <a:tcPr marL="91440" marR="91440" marT="45720" marB="45720" anchor="ctr">
+                  <a:tcPr anchor="ctr">
                     <a:lnL w="9525" cap="flat" cmpd="sng" algn="ctr">
                       <a:solidFill>
                         <a:srgbClr val="E3E8ED"/>
@@ -22226,7 +20867,7 @@
                     <a:bodyPr/>
                     <a:lstStyle/>
                     <a:p>
-                      <a:pPr algn="ctr" indent="0" marL="0">
+                      <a:pPr marL="0" indent="0" algn="ctr">
                         <a:buNone/>
                       </a:pPr>
                       <a:r>
@@ -22247,7 +20888,7 @@
                       </a:endParaRPr>
                     </a:p>
                   </a:txBody>
-                  <a:tcPr marL="91440" marR="91440" marT="45720" marB="45720" anchor="ctr">
+                  <a:tcPr anchor="ctr">
                     <a:lnL w="9525" cap="flat" cmpd="sng" algn="ctr">
                       <a:solidFill>
                         <a:srgbClr val="E3E8ED"/>
@@ -22289,6 +20930,11 @@
                     </a:solidFill>
                   </a:tcPr>
                 </a:tc>
+                <a:extLst>
+                  <a:ext uri="{0D108BD9-81ED-4DB2-BD59-A6C34878D82A}">
+                    <a16:rowId xmlns:a16="http://schemas.microsoft.com/office/drawing/2014/main" val="10005"/>
+                  </a:ext>
+                </a:extLst>
               </a:tr>
               <a:tr h="475488">
                 <a:tc>
@@ -22296,7 +20942,7 @@
                     <a:bodyPr/>
                     <a:lstStyle/>
                     <a:p>
-                      <a:pPr algn="l" indent="0" marL="0">
+                      <a:pPr marL="0" indent="0" algn="l">
                         <a:buNone/>
                       </a:pPr>
                       <a:r>
@@ -22317,7 +20963,7 @@
                       </a:endParaRPr>
                     </a:p>
                   </a:txBody>
-                  <a:tcPr marL="91440" marR="91440" marT="45720" marB="45720" anchor="ctr">
+                  <a:tcPr anchor="ctr">
                     <a:lnL w="9525" cap="flat" cmpd="sng" algn="ctr">
                       <a:solidFill>
                         <a:srgbClr val="E3E8ED"/>
@@ -22364,7 +21010,7 @@
                     <a:bodyPr/>
                     <a:lstStyle/>
                     <a:p>
-                      <a:pPr algn="ctr" indent="0" marL="0">
+                      <a:pPr marL="0" indent="0" algn="ctr">
                         <a:buNone/>
                       </a:pPr>
                       <a:r>
@@ -22385,7 +21031,7 @@
                       </a:endParaRPr>
                     </a:p>
                   </a:txBody>
-                  <a:tcPr marL="91440" marR="91440" marT="45720" marB="45720" anchor="ctr">
+                  <a:tcPr anchor="ctr">
                     <a:lnL w="9525" cap="flat" cmpd="sng" algn="ctr">
                       <a:solidFill>
                         <a:srgbClr val="E3E8ED"/>
@@ -22432,7 +21078,7 @@
                     <a:bodyPr/>
                     <a:lstStyle/>
                     <a:p>
-                      <a:pPr algn="ctr" indent="0" marL="0">
+                      <a:pPr marL="0" indent="0" algn="ctr">
                         <a:buNone/>
                       </a:pPr>
                       <a:r>
@@ -22453,7 +21099,7 @@
                       </a:endParaRPr>
                     </a:p>
                   </a:txBody>
-                  <a:tcPr marL="91440" marR="91440" marT="45720" marB="45720" anchor="ctr">
+                  <a:tcPr anchor="ctr">
                     <a:lnL w="9525" cap="flat" cmpd="sng" algn="ctr">
                       <a:solidFill>
                         <a:srgbClr val="E3E8ED"/>
@@ -22500,7 +21146,7 @@
                     <a:bodyPr/>
                     <a:lstStyle/>
                     <a:p>
-                      <a:pPr algn="ctr" indent="0" marL="0">
+                      <a:pPr marL="0" indent="0" algn="ctr">
                         <a:buNone/>
                       </a:pPr>
                       <a:r>
@@ -22521,7 +21167,7 @@
                       </a:endParaRPr>
                     </a:p>
                   </a:txBody>
-                  <a:tcPr marL="91440" marR="91440" marT="45720" marB="45720" anchor="ctr">
+                  <a:tcPr anchor="ctr">
                     <a:lnL w="9525" cap="flat" cmpd="sng" algn="ctr">
                       <a:solidFill>
                         <a:srgbClr val="E3E8ED"/>
@@ -22568,7 +21214,7 @@
                     <a:bodyPr/>
                     <a:lstStyle/>
                     <a:p>
-                      <a:pPr algn="ctr" indent="0" marL="0">
+                      <a:pPr marL="0" indent="0" algn="ctr">
                         <a:buNone/>
                       </a:pPr>
                       <a:r>
@@ -22589,7 +21235,7 @@
                       </a:endParaRPr>
                     </a:p>
                   </a:txBody>
-                  <a:tcPr marL="91440" marR="91440" marT="45720" marB="45720" anchor="ctr">
+                  <a:tcPr anchor="ctr">
                     <a:lnL w="9525" cap="flat" cmpd="sng" algn="ctr">
                       <a:solidFill>
                         <a:srgbClr val="E3E8ED"/>
@@ -22631,6 +21277,11 @@
                     </a:solidFill>
                   </a:tcPr>
                 </a:tc>
+                <a:extLst>
+                  <a:ext uri="{0D108BD9-81ED-4DB2-BD59-A6C34878D82A}">
+                    <a16:rowId xmlns:a16="http://schemas.microsoft.com/office/drawing/2014/main" val="10006"/>
+                  </a:ext>
+                </a:extLst>
               </a:tr>
               <a:tr h="475488">
                 <a:tc>
@@ -22638,7 +21289,7 @@
                     <a:bodyPr/>
                     <a:lstStyle/>
                     <a:p>
-                      <a:pPr algn="l" indent="0" marL="0">
+                      <a:pPr marL="0" indent="0" algn="l">
                         <a:buNone/>
                       </a:pPr>
                       <a:r>
@@ -22659,7 +21310,7 @@
                       </a:endParaRPr>
                     </a:p>
                   </a:txBody>
-                  <a:tcPr marL="91440" marR="91440" marT="45720" marB="45720" anchor="ctr">
+                  <a:tcPr anchor="ctr">
                     <a:lnL w="9525" cap="flat" cmpd="sng" algn="ctr">
                       <a:solidFill>
                         <a:srgbClr val="E3E8ED"/>
@@ -22706,7 +21357,7 @@
                     <a:bodyPr/>
                     <a:lstStyle/>
                     <a:p>
-                      <a:pPr algn="ctr" indent="0" marL="0">
+                      <a:pPr marL="0" indent="0" algn="ctr">
                         <a:buNone/>
                       </a:pPr>
                       <a:r>
@@ -22727,7 +21378,7 @@
                       </a:endParaRPr>
                     </a:p>
                   </a:txBody>
-                  <a:tcPr marL="91440" marR="91440" marT="45720" marB="45720" anchor="ctr">
+                  <a:tcPr anchor="ctr">
                     <a:lnL w="9525" cap="flat" cmpd="sng" algn="ctr">
                       <a:solidFill>
                         <a:srgbClr val="E3E8ED"/>
@@ -22774,7 +21425,7 @@
                     <a:bodyPr/>
                     <a:lstStyle/>
                     <a:p>
-                      <a:pPr algn="ctr" indent="0" marL="0">
+                      <a:pPr marL="0" indent="0" algn="ctr">
                         <a:buNone/>
                       </a:pPr>
                       <a:r>
@@ -22795,7 +21446,7 @@
                       </a:endParaRPr>
                     </a:p>
                   </a:txBody>
-                  <a:tcPr marL="91440" marR="91440" marT="45720" marB="45720" anchor="ctr">
+                  <a:tcPr anchor="ctr">
                     <a:lnL w="9525" cap="flat" cmpd="sng" algn="ctr">
                       <a:solidFill>
                         <a:srgbClr val="E3E8ED"/>
@@ -22842,7 +21493,7 @@
                     <a:bodyPr/>
                     <a:lstStyle/>
                     <a:p>
-                      <a:pPr algn="ctr" indent="0" marL="0">
+                      <a:pPr marL="0" indent="0" algn="ctr">
                         <a:buNone/>
                       </a:pPr>
                       <a:r>
@@ -22863,7 +21514,7 @@
                       </a:endParaRPr>
                     </a:p>
                   </a:txBody>
-                  <a:tcPr marL="91440" marR="91440" marT="45720" marB="45720" anchor="ctr">
+                  <a:tcPr anchor="ctr">
                     <a:lnL w="9525" cap="flat" cmpd="sng" algn="ctr">
                       <a:solidFill>
                         <a:srgbClr val="E3E8ED"/>
@@ -22910,7 +21561,7 @@
                     <a:bodyPr/>
                     <a:lstStyle/>
                     <a:p>
-                      <a:pPr algn="ctr" indent="0" marL="0">
+                      <a:pPr marL="0" indent="0" algn="ctr">
                         <a:buNone/>
                       </a:pPr>
                       <a:r>
@@ -22931,7 +21582,7 @@
                       </a:endParaRPr>
                     </a:p>
                   </a:txBody>
-                  <a:tcPr marL="91440" marR="91440" marT="45720" marB="45720" anchor="ctr">
+                  <a:tcPr anchor="ctr">
                     <a:lnL w="9525" cap="flat" cmpd="sng" algn="ctr">
                       <a:solidFill>
                         <a:srgbClr val="E3E8ED"/>
@@ -22973,6 +21624,11 @@
                     </a:solidFill>
                   </a:tcPr>
                 </a:tc>
+                <a:extLst>
+                  <a:ext uri="{0D108BD9-81ED-4DB2-BD59-A6C34878D82A}">
+                    <a16:rowId xmlns:a16="http://schemas.microsoft.com/office/drawing/2014/main" val="10007"/>
+                  </a:ext>
+                </a:extLst>
               </a:tr>
             </a:tbl>
           </a:graphicData>
@@ -22999,7 +21655,7 @@
           <a:bodyPr wrap="square" lIns="0" tIns="0" rIns="0" bIns="0" rtlCol="0" anchor="ctr"/>
           <a:lstStyle/>
           <a:p>
-            <a:pPr indent="0" marL="0">
+            <a:pPr marL="0" indent="0">
               <a:buNone/>
             </a:pPr>
             <a:r>
@@ -23033,6 +21689,7 @@
         <a:solidFill>
           <a:srgbClr val="F6F8FA"/>
         </a:solidFill>
+        <a:effectLst/>
       </p:bgPr>
     </p:bg>
     <p:spTree>
@@ -23070,11 +21727,11 @@
           <a:bodyPr wrap="square" lIns="0" tIns="0" rIns="0" bIns="0" rtlCol="0" anchor="ctr"/>
           <a:lstStyle/>
           <a:p>
-            <a:pPr indent="0" marL="0">
-              <a:buNone/>
-            </a:pPr>
-            <a:r>
-              <a:rPr lang="en-US" sz="1100" b="1" spc="200" kern="0" dirty="0">
+            <a:pPr marL="0" indent="0">
+              <a:buNone/>
+            </a:pPr>
+            <a:r>
+              <a:rPr lang="en-US" sz="1100" b="1" kern="0" spc="200" dirty="0">
                 <a:solidFill>
                   <a:srgbClr val="3E7196"/>
                 </a:solidFill>
@@ -23109,7 +21766,7 @@
           <a:bodyPr wrap="square" lIns="0" tIns="0" rIns="0" bIns="0" rtlCol="0" anchor="t"/>
           <a:lstStyle/>
           <a:p>
-            <a:pPr indent="0" marL="0">
+            <a:pPr marL="0" indent="0">
               <a:buNone/>
             </a:pPr>
             <a:r>
@@ -23124,67 +21781,6 @@
               <a:t>Qué busca resolver Rumbo</a:t>
             </a:r>
             <a:endParaRPr lang="en-US" sz="3000" dirty="0"/>
-          </a:p>
-        </p:txBody>
-      </p:sp>
-      <p:sp>
-        <p:nvSpPr>
-          <p:cNvPr id="4" name="Shape 2"/>
-          <p:cNvSpPr/>
-          <p:nvPr/>
-        </p:nvSpPr>
-        <p:spPr>
-          <a:xfrm>
-            <a:off x="9722815" y="384048"/>
-            <a:ext cx="1920240" cy="365760"/>
-          </a:xfrm>
-          <a:prstGeom prst="roundRect">
-            <a:avLst>
-              <a:gd name="adj" fmla="val 50000"/>
-            </a:avLst>
-          </a:prstGeom>
-          <a:solidFill>
-            <a:srgbClr val="E9F1F7"/>
-          </a:solidFill>
-          <a:ln/>
-        </p:spPr>
-      </p:sp>
-      <p:sp>
-        <p:nvSpPr>
-          <p:cNvPr id="5" name="Text 3"/>
-          <p:cNvSpPr txBox="1"/>
-          <p:nvPr/>
-        </p:nvSpPr>
-        <p:spPr>
-          <a:xfrm>
-            <a:off x="9722815" y="384048"/>
-            <a:ext cx="1920240" cy="365760"/>
-          </a:xfrm>
-          <a:prstGeom prst="rect">
-            <a:avLst/>
-          </a:prstGeom>
-          <a:noFill/>
-          <a:ln/>
-        </p:spPr>
-        <p:txBody>
-          <a:bodyPr wrap="square" lIns="0" tIns="0" rIns="0" bIns="0" rtlCol="0" anchor="ctr"/>
-          <a:lstStyle/>
-          <a:p>
-            <a:pPr algn="ctr" indent="0" marL="0">
-              <a:buNone/>
-            </a:pPr>
-            <a:r>
-              <a:rPr lang="en-US" sz="1200" b="1" dirty="0">
-                <a:solidFill>
-                  <a:srgbClr val="22506F"/>
-                </a:solidFill>
-                <a:latin typeface="Calibri" pitchFamily="34" charset="0"/>
-                <a:ea typeface="Calibri" pitchFamily="34" charset="-122"/>
-                <a:cs typeface="Calibri" pitchFamily="34" charset="-120"/>
-              </a:rPr>
-              <a:t>Expone: Francisco</a:t>
-            </a:r>
-            <a:endParaRPr lang="en-US" sz="1200" dirty="0"/>
           </a:p>
         </p:txBody>
       </p:sp>
@@ -23209,7 +21805,7 @@
           <a:bodyPr wrap="square" lIns="0" tIns="0" rIns="0" bIns="0" rtlCol="0" anchor="ctr"/>
           <a:lstStyle/>
           <a:p>
-            <a:pPr algn="r" indent="0" marL="0">
+            <a:pPr marL="0" indent="0" algn="r">
               <a:buNone/>
             </a:pPr>
             <a:r>
@@ -23295,7 +21891,7 @@
           <a:bodyPr wrap="square" lIns="0" tIns="0" rIns="0" bIns="0" rtlCol="0" anchor="ctr"/>
           <a:lstStyle/>
           <a:p>
-            <a:pPr algn="ctr" indent="0" marL="0">
+            <a:pPr marL="0" indent="0" algn="ctr">
               <a:buNone/>
             </a:pPr>
             <a:r>
@@ -23334,7 +21930,7 @@
           <a:bodyPr wrap="square" lIns="0" tIns="0" rIns="0" bIns="0" rtlCol="0" anchor="ctr"/>
           <a:lstStyle/>
           <a:p>
-            <a:pPr indent="0" marL="0">
+            <a:pPr marL="0" indent="0">
               <a:buNone/>
             </a:pPr>
             <a:r>
@@ -23373,7 +21969,7 @@
           <a:bodyPr wrap="square" lIns="0" tIns="0" rIns="0" bIns="0" rtlCol="0" anchor="ctr"/>
           <a:lstStyle/>
           <a:p>
-            <a:pPr indent="0" marL="0">
+            <a:pPr marL="0" indent="0">
               <a:buNone/>
             </a:pPr>
             <a:r>
@@ -23459,7 +22055,7 @@
           <a:bodyPr wrap="square" lIns="0" tIns="0" rIns="0" bIns="0" rtlCol="0" anchor="ctr"/>
           <a:lstStyle/>
           <a:p>
-            <a:pPr algn="ctr" indent="0" marL="0">
+            <a:pPr marL="0" indent="0" algn="ctr">
               <a:buNone/>
             </a:pPr>
             <a:r>
@@ -23498,7 +22094,7 @@
           <a:bodyPr wrap="square" lIns="0" tIns="0" rIns="0" bIns="0" rtlCol="0" anchor="ctr"/>
           <a:lstStyle/>
           <a:p>
-            <a:pPr indent="0" marL="0">
+            <a:pPr marL="0" indent="0">
               <a:buNone/>
             </a:pPr>
             <a:r>
@@ -23537,7 +22133,7 @@
           <a:bodyPr wrap="square" lIns="0" tIns="0" rIns="0" bIns="0" rtlCol="0" anchor="ctr"/>
           <a:lstStyle/>
           <a:p>
-            <a:pPr indent="0" marL="0">
+            <a:pPr marL="0" indent="0">
               <a:buNone/>
             </a:pPr>
             <a:r>
@@ -23623,7 +22219,7 @@
           <a:bodyPr wrap="square" lIns="0" tIns="0" rIns="0" bIns="0" rtlCol="0" anchor="ctr"/>
           <a:lstStyle/>
           <a:p>
-            <a:pPr algn="ctr" indent="0" marL="0">
+            <a:pPr marL="0" indent="0" algn="ctr">
               <a:buNone/>
             </a:pPr>
             <a:r>
@@ -23662,7 +22258,7 @@
           <a:bodyPr wrap="square" lIns="0" tIns="0" rIns="0" bIns="0" rtlCol="0" anchor="ctr"/>
           <a:lstStyle/>
           <a:p>
-            <a:pPr indent="0" marL="0">
+            <a:pPr marL="0" indent="0">
               <a:buNone/>
             </a:pPr>
             <a:r>
@@ -23701,7 +22297,7 @@
           <a:bodyPr wrap="square" lIns="0" tIns="0" rIns="0" bIns="0" rtlCol="0" anchor="ctr"/>
           <a:lstStyle/>
           <a:p>
-            <a:pPr indent="0" marL="0">
+            <a:pPr marL="0" indent="0">
               <a:buNone/>
             </a:pPr>
             <a:r>
@@ -23787,7 +22383,7 @@
           <a:bodyPr wrap="square" lIns="0" tIns="0" rIns="0" bIns="0" rtlCol="0" anchor="ctr"/>
           <a:lstStyle/>
           <a:p>
-            <a:pPr algn="ctr" indent="0" marL="0">
+            <a:pPr marL="0" indent="0" algn="ctr">
               <a:buNone/>
             </a:pPr>
             <a:r>
@@ -23826,7 +22422,7 @@
           <a:bodyPr wrap="square" lIns="0" tIns="0" rIns="0" bIns="0" rtlCol="0" anchor="ctr"/>
           <a:lstStyle/>
           <a:p>
-            <a:pPr indent="0" marL="0">
+            <a:pPr marL="0" indent="0">
               <a:buNone/>
             </a:pPr>
             <a:r>
@@ -23865,7 +22461,7 @@
           <a:bodyPr wrap="square" lIns="0" tIns="0" rIns="0" bIns="0" rtlCol="0" anchor="ctr"/>
           <a:lstStyle/>
           <a:p>
-            <a:pPr indent="0" marL="0">
+            <a:pPr marL="0" indent="0">
               <a:buNone/>
             </a:pPr>
             <a:r>
@@ -23951,7 +22547,7 @@
           <a:bodyPr wrap="square" lIns="0" tIns="0" rIns="0" bIns="0" rtlCol="0" anchor="ctr"/>
           <a:lstStyle/>
           <a:p>
-            <a:pPr algn="ctr" indent="0" marL="0">
+            <a:pPr marL="0" indent="0" algn="ctr">
               <a:buNone/>
             </a:pPr>
             <a:r>
@@ -23990,7 +22586,7 @@
           <a:bodyPr wrap="square" lIns="0" tIns="0" rIns="0" bIns="0" rtlCol="0" anchor="ctr"/>
           <a:lstStyle/>
           <a:p>
-            <a:pPr indent="0" marL="0">
+            <a:pPr marL="0" indent="0">
               <a:buNone/>
             </a:pPr>
             <a:r>
@@ -24029,7 +22625,7 @@
           <a:bodyPr wrap="square" lIns="0" tIns="0" rIns="0" bIns="0" rtlCol="0" anchor="ctr"/>
           <a:lstStyle/>
           <a:p>
-            <a:pPr indent="0" marL="0">
+            <a:pPr marL="0" indent="0">
               <a:buNone/>
             </a:pPr>
             <a:r>
@@ -24115,7 +22711,7 @@
           <a:bodyPr wrap="square" lIns="0" tIns="0" rIns="0" bIns="0" rtlCol="0" anchor="ctr"/>
           <a:lstStyle/>
           <a:p>
-            <a:pPr algn="ctr" indent="0" marL="0">
+            <a:pPr marL="0" indent="0" algn="ctr">
               <a:buNone/>
             </a:pPr>
             <a:r>
@@ -24154,7 +22750,7 @@
           <a:bodyPr wrap="square" lIns="0" tIns="0" rIns="0" bIns="0" rtlCol="0" anchor="ctr"/>
           <a:lstStyle/>
           <a:p>
-            <a:pPr indent="0" marL="0">
+            <a:pPr marL="0" indent="0">
               <a:buNone/>
             </a:pPr>
             <a:r>
@@ -24193,7 +22789,7 @@
           <a:bodyPr wrap="square" lIns="0" tIns="0" rIns="0" bIns="0" rtlCol="0" anchor="ctr"/>
           <a:lstStyle/>
           <a:p>
-            <a:pPr indent="0" marL="0">
+            <a:pPr marL="0" indent="0">
               <a:buNone/>
             </a:pPr>
             <a:r>
@@ -24227,6 +22823,7 @@
         <a:solidFill>
           <a:srgbClr val="F6F8FA"/>
         </a:solidFill>
+        <a:effectLst/>
       </p:bgPr>
     </p:bg>
     <p:spTree>
@@ -24264,11 +22861,11 @@
           <a:bodyPr wrap="square" lIns="0" tIns="0" rIns="0" bIns="0" rtlCol="0" anchor="ctr"/>
           <a:lstStyle/>
           <a:p>
-            <a:pPr indent="0" marL="0">
-              <a:buNone/>
-            </a:pPr>
-            <a:r>
-              <a:rPr lang="en-US" sz="1100" b="1" spc="200" kern="0" dirty="0">
+            <a:pPr marL="0" indent="0">
+              <a:buNone/>
+            </a:pPr>
+            <a:r>
+              <a:rPr lang="en-US" sz="1100" b="1" kern="0" spc="200" dirty="0">
                 <a:solidFill>
                   <a:srgbClr val="3E7196"/>
                 </a:solidFill>
@@ -24303,7 +22900,7 @@
           <a:bodyPr wrap="square" lIns="0" tIns="0" rIns="0" bIns="0" rtlCol="0" anchor="t"/>
           <a:lstStyle/>
           <a:p>
-            <a:pPr indent="0" marL="0">
+            <a:pPr marL="0" indent="0">
               <a:buNone/>
             </a:pPr>
             <a:r>
@@ -24318,67 +22915,6 @@
               <a:t>Alcance y límites</a:t>
             </a:r>
             <a:endParaRPr lang="en-US" sz="3000" dirty="0"/>
-          </a:p>
-        </p:txBody>
-      </p:sp>
-      <p:sp>
-        <p:nvSpPr>
-          <p:cNvPr id="4" name="Shape 2"/>
-          <p:cNvSpPr/>
-          <p:nvPr/>
-        </p:nvSpPr>
-        <p:spPr>
-          <a:xfrm>
-            <a:off x="9722815" y="384048"/>
-            <a:ext cx="1920240" cy="365760"/>
-          </a:xfrm>
-          <a:prstGeom prst="roundRect">
-            <a:avLst>
-              <a:gd name="adj" fmla="val 50000"/>
-            </a:avLst>
-          </a:prstGeom>
-          <a:solidFill>
-            <a:srgbClr val="E9F1F7"/>
-          </a:solidFill>
-          <a:ln/>
-        </p:spPr>
-      </p:sp>
-      <p:sp>
-        <p:nvSpPr>
-          <p:cNvPr id="5" name="Text 3"/>
-          <p:cNvSpPr txBox="1"/>
-          <p:nvPr/>
-        </p:nvSpPr>
-        <p:spPr>
-          <a:xfrm>
-            <a:off x="9722815" y="384048"/>
-            <a:ext cx="1920240" cy="365760"/>
-          </a:xfrm>
-          <a:prstGeom prst="rect">
-            <a:avLst/>
-          </a:prstGeom>
-          <a:noFill/>
-          <a:ln/>
-        </p:spPr>
-        <p:txBody>
-          <a:bodyPr wrap="square" lIns="0" tIns="0" rIns="0" bIns="0" rtlCol="0" anchor="ctr"/>
-          <a:lstStyle/>
-          <a:p>
-            <a:pPr algn="ctr" indent="0" marL="0">
-              <a:buNone/>
-            </a:pPr>
-            <a:r>
-              <a:rPr lang="en-US" sz="1200" b="1" dirty="0">
-                <a:solidFill>
-                  <a:srgbClr val="22506F"/>
-                </a:solidFill>
-                <a:latin typeface="Calibri" pitchFamily="34" charset="0"/>
-                <a:ea typeface="Calibri" pitchFamily="34" charset="-122"/>
-                <a:cs typeface="Calibri" pitchFamily="34" charset="-120"/>
-              </a:rPr>
-              <a:t>Expone: Francisco</a:t>
-            </a:r>
-            <a:endParaRPr lang="en-US" sz="1200" dirty="0"/>
           </a:p>
         </p:txBody>
       </p:sp>
@@ -24403,7 +22939,7 @@
           <a:bodyPr wrap="square" lIns="0" tIns="0" rIns="0" bIns="0" rtlCol="0" anchor="ctr"/>
           <a:lstStyle/>
           <a:p>
-            <a:pPr algn="r" indent="0" marL="0">
+            <a:pPr marL="0" indent="0" algn="r">
               <a:buNone/>
             </a:pPr>
             <a:r>
@@ -24442,7 +22978,7 @@
           <a:bodyPr wrap="square" lIns="0" tIns="0" rIns="0" bIns="0" rtlCol="0" anchor="ctr"/>
           <a:lstStyle/>
           <a:p>
-            <a:pPr indent="0" marL="0">
+            <a:pPr marL="0" indent="0">
               <a:buNone/>
             </a:pPr>
             <a:r>
@@ -24503,7 +23039,7 @@
           <a:bodyPr wrap="square" lIns="0" tIns="0" rIns="0" bIns="0" rtlCol="0" anchor="ctr"/>
           <a:lstStyle/>
           <a:p>
-            <a:pPr indent="0" marL="0">
+            <a:pPr marL="0" indent="0">
               <a:buNone/>
             </a:pPr>
             <a:r>
@@ -24564,7 +23100,7 @@
           <a:bodyPr wrap="square" lIns="0" tIns="0" rIns="0" bIns="0" rtlCol="0" anchor="ctr"/>
           <a:lstStyle/>
           <a:p>
-            <a:pPr indent="0" marL="0">
+            <a:pPr marL="0" indent="0">
               <a:buNone/>
             </a:pPr>
             <a:r>
@@ -24625,7 +23161,7 @@
           <a:bodyPr wrap="square" lIns="0" tIns="0" rIns="0" bIns="0" rtlCol="0" anchor="ctr"/>
           <a:lstStyle/>
           <a:p>
-            <a:pPr indent="0" marL="0">
+            <a:pPr marL="0" indent="0">
               <a:buNone/>
             </a:pPr>
             <a:r>
@@ -24686,7 +23222,7 @@
           <a:bodyPr wrap="square" lIns="0" tIns="0" rIns="0" bIns="0" rtlCol="0" anchor="ctr"/>
           <a:lstStyle/>
           <a:p>
-            <a:pPr indent="0" marL="0">
+            <a:pPr marL="0" indent="0">
               <a:buNone/>
             </a:pPr>
             <a:r>
@@ -24747,7 +23283,7 @@
           <a:bodyPr wrap="square" lIns="0" tIns="0" rIns="0" bIns="0" rtlCol="0" anchor="ctr"/>
           <a:lstStyle/>
           <a:p>
-            <a:pPr indent="0" marL="0">
+            <a:pPr marL="0" indent="0">
               <a:buNone/>
             </a:pPr>
             <a:r>
@@ -24808,7 +23344,7 @@
           <a:bodyPr wrap="square" lIns="0" tIns="0" rIns="0" bIns="0" rtlCol="0" anchor="ctr"/>
           <a:lstStyle/>
           <a:p>
-            <a:pPr indent="0" marL="0">
+            <a:pPr marL="0" indent="0">
               <a:buNone/>
             </a:pPr>
             <a:r>
@@ -24869,7 +23405,7 @@
           <a:bodyPr wrap="square" lIns="0" tIns="0" rIns="0" bIns="0" rtlCol="0" anchor="ctr"/>
           <a:lstStyle/>
           <a:p>
-            <a:pPr indent="0" marL="0">
+            <a:pPr marL="0" indent="0">
               <a:buNone/>
             </a:pPr>
             <a:r>
@@ -24930,7 +23466,7 @@
           <a:bodyPr wrap="square" lIns="0" tIns="0" rIns="0" bIns="0" rtlCol="0" anchor="ctr"/>
           <a:lstStyle/>
           <a:p>
-            <a:pPr indent="0" marL="0">
+            <a:pPr marL="0" indent="0">
               <a:buNone/>
             </a:pPr>
             <a:r>
@@ -24991,7 +23527,7 @@
           <a:bodyPr wrap="square" lIns="0" tIns="0" rIns="0" bIns="0" rtlCol="0" anchor="ctr"/>
           <a:lstStyle/>
           <a:p>
-            <a:pPr indent="0" marL="0">
+            <a:pPr marL="0" indent="0">
               <a:buNone/>
             </a:pPr>
             <a:r>
@@ -25052,7 +23588,7 @@
           <a:bodyPr wrap="square" lIns="0" tIns="0" rIns="0" bIns="0" rtlCol="0" anchor="ctr"/>
           <a:lstStyle/>
           <a:p>
-            <a:pPr indent="0" marL="0">
+            <a:pPr marL="0" indent="0">
               <a:buNone/>
             </a:pPr>
             <a:r>
@@ -25113,7 +23649,7 @@
           <a:bodyPr wrap="square" lIns="0" tIns="0" rIns="0" bIns="0" rtlCol="0" anchor="ctr"/>
           <a:lstStyle/>
           <a:p>
-            <a:pPr indent="0" marL="0">
+            <a:pPr marL="0" indent="0">
               <a:buNone/>
             </a:pPr>
             <a:r>
@@ -25179,7 +23715,7 @@
           <a:bodyPr wrap="square" lIns="0" tIns="0" rIns="0" bIns="0" rtlCol="0" anchor="ctr"/>
           <a:lstStyle/>
           <a:p>
-            <a:pPr indent="0" marL="0">
+            <a:pPr marL="0" indent="0">
               <a:buNone/>
             </a:pPr>
             <a:r>
@@ -25366,7 +23902,7 @@
           <a:bodyPr wrap="square" lIns="0" tIns="0" rIns="0" bIns="0" rtlCol="0" anchor="ctr"/>
           <a:lstStyle/>
           <a:p>
-            <a:pPr indent="0" marL="0">
+            <a:pPr marL="0" indent="0">
               <a:buNone/>
             </a:pPr>
             <a:r>
@@ -25400,6 +23936,7 @@
         <a:solidFill>
           <a:srgbClr val="F6F8FA"/>
         </a:solidFill>
+        <a:effectLst/>
       </p:bgPr>
     </p:bg>
     <p:spTree>
@@ -25437,11 +23974,11 @@
           <a:bodyPr wrap="square" lIns="0" tIns="0" rIns="0" bIns="0" rtlCol="0" anchor="ctr"/>
           <a:lstStyle/>
           <a:p>
-            <a:pPr indent="0" marL="0">
-              <a:buNone/>
-            </a:pPr>
-            <a:r>
-              <a:rPr lang="en-US" sz="1100" b="1" spc="200" kern="0" dirty="0">
+            <a:pPr marL="0" indent="0">
+              <a:buNone/>
+            </a:pPr>
+            <a:r>
+              <a:rPr lang="en-US" sz="1100" b="1" kern="0" spc="200" dirty="0">
                 <a:solidFill>
                   <a:srgbClr val="3E7196"/>
                 </a:solidFill>
@@ -25476,7 +24013,7 @@
           <a:bodyPr wrap="square" lIns="0" tIns="0" rIns="0" bIns="0" rtlCol="0" anchor="t"/>
           <a:lstStyle/>
           <a:p>
-            <a:pPr indent="0" marL="0">
+            <a:pPr marL="0" indent="0">
               <a:buNone/>
             </a:pPr>
             <a:r>
@@ -25491,67 +24028,6 @@
               <a:t>Actores y casos de uso</a:t>
             </a:r>
             <a:endParaRPr lang="en-US" sz="3000" dirty="0"/>
-          </a:p>
-        </p:txBody>
-      </p:sp>
-      <p:sp>
-        <p:nvSpPr>
-          <p:cNvPr id="4" name="Shape 2"/>
-          <p:cNvSpPr/>
-          <p:nvPr/>
-        </p:nvSpPr>
-        <p:spPr>
-          <a:xfrm>
-            <a:off x="9722815" y="384048"/>
-            <a:ext cx="1920240" cy="365760"/>
-          </a:xfrm>
-          <a:prstGeom prst="roundRect">
-            <a:avLst>
-              <a:gd name="adj" fmla="val 50000"/>
-            </a:avLst>
-          </a:prstGeom>
-          <a:solidFill>
-            <a:srgbClr val="E9F1F7"/>
-          </a:solidFill>
-          <a:ln/>
-        </p:spPr>
-      </p:sp>
-      <p:sp>
-        <p:nvSpPr>
-          <p:cNvPr id="5" name="Text 3"/>
-          <p:cNvSpPr txBox="1"/>
-          <p:nvPr/>
-        </p:nvSpPr>
-        <p:spPr>
-          <a:xfrm>
-            <a:off x="9722815" y="384048"/>
-            <a:ext cx="1920240" cy="365760"/>
-          </a:xfrm>
-          <a:prstGeom prst="rect">
-            <a:avLst/>
-          </a:prstGeom>
-          <a:noFill/>
-          <a:ln/>
-        </p:spPr>
-        <p:txBody>
-          <a:bodyPr wrap="square" lIns="0" tIns="0" rIns="0" bIns="0" rtlCol="0" anchor="ctr"/>
-          <a:lstStyle/>
-          <a:p>
-            <a:pPr algn="ctr" indent="0" marL="0">
-              <a:buNone/>
-            </a:pPr>
-            <a:r>
-              <a:rPr lang="en-US" sz="1200" b="1" dirty="0">
-                <a:solidFill>
-                  <a:srgbClr val="22506F"/>
-                </a:solidFill>
-                <a:latin typeface="Calibri" pitchFamily="34" charset="0"/>
-                <a:ea typeface="Calibri" pitchFamily="34" charset="-122"/>
-                <a:cs typeface="Calibri" pitchFamily="34" charset="-120"/>
-              </a:rPr>
-              <a:t>Expone: Francisco</a:t>
-            </a:r>
-            <a:endParaRPr lang="en-US" sz="1200" dirty="0"/>
           </a:p>
         </p:txBody>
       </p:sp>
@@ -25576,7 +24052,7 @@
           <a:bodyPr wrap="square" lIns="0" tIns="0" rIns="0" bIns="0" rtlCol="0" anchor="ctr"/>
           <a:lstStyle/>
           <a:p>
-            <a:pPr algn="r" indent="0" marL="0">
+            <a:pPr marL="0" indent="0" algn="r">
               <a:buNone/>
             </a:pPr>
             <a:r>
@@ -25642,7 +24118,7 @@
           <a:bodyPr wrap="square" lIns="0" tIns="0" rIns="0" bIns="0" rtlCol="0" anchor="ctr"/>
           <a:lstStyle/>
           <a:p>
-            <a:pPr indent="0" marL="0">
+            <a:pPr marL="0" indent="0">
               <a:buNone/>
             </a:pPr>
             <a:r>
@@ -25681,7 +24157,7 @@
           <a:bodyPr wrap="square" lIns="0" tIns="0" rIns="0" bIns="0" rtlCol="0" anchor="ctr"/>
           <a:lstStyle/>
           <a:p>
-            <a:pPr indent="0" marL="0">
+            <a:pPr marL="0" indent="0">
               <a:buNone/>
             </a:pPr>
             <a:r>
@@ -25720,7 +24196,7 @@
           <a:bodyPr wrap="square" lIns="0" tIns="0" rIns="0" bIns="0" rtlCol="0" anchor="t"/>
           <a:lstStyle/>
           <a:p>
-            <a:pPr indent="0" marL="0">
+            <a:pPr marL="0" indent="0">
               <a:buNone/>
             </a:pPr>
             <a:r>
@@ -25786,7 +24262,7 @@
           <a:bodyPr wrap="square" lIns="0" tIns="0" rIns="0" bIns="0" rtlCol="0" anchor="ctr"/>
           <a:lstStyle/>
           <a:p>
-            <a:pPr indent="0" marL="0">
+            <a:pPr marL="0" indent="0">
               <a:buNone/>
             </a:pPr>
             <a:r>
@@ -25825,7 +24301,7 @@
           <a:bodyPr wrap="square" lIns="0" tIns="0" rIns="0" bIns="0" rtlCol="0" anchor="ctr"/>
           <a:lstStyle/>
           <a:p>
-            <a:pPr indent="0" marL="0">
+            <a:pPr marL="0" indent="0">
               <a:buNone/>
             </a:pPr>
             <a:r>
@@ -25864,7 +24340,7 @@
           <a:bodyPr wrap="square" lIns="0" tIns="0" rIns="0" bIns="0" rtlCol="0" anchor="t"/>
           <a:lstStyle/>
           <a:p>
-            <a:pPr indent="0" marL="0">
+            <a:pPr marL="0" indent="0">
               <a:buNone/>
             </a:pPr>
             <a:r>
@@ -25930,7 +24406,7 @@
           <a:bodyPr wrap="square" lIns="0" tIns="0" rIns="0" bIns="0" rtlCol="0" anchor="ctr"/>
           <a:lstStyle/>
           <a:p>
-            <a:pPr indent="0" marL="0">
+            <a:pPr marL="0" indent="0">
               <a:buNone/>
             </a:pPr>
             <a:r>
@@ -25969,7 +24445,7 @@
           <a:bodyPr wrap="square" lIns="0" tIns="0" rIns="0" bIns="0" rtlCol="0" anchor="ctr"/>
           <a:lstStyle/>
           <a:p>
-            <a:pPr indent="0" marL="0">
+            <a:pPr marL="0" indent="0">
               <a:buNone/>
             </a:pPr>
             <a:r>
@@ -26008,7 +24484,7 @@
           <a:bodyPr wrap="square" lIns="0" tIns="0" rIns="0" bIns="0" rtlCol="0" anchor="t"/>
           <a:lstStyle/>
           <a:p>
-            <a:pPr indent="0" marL="0">
+            <a:pPr marL="0" indent="0">
               <a:buNone/>
             </a:pPr>
             <a:r>
@@ -26074,7 +24550,7 @@
           <a:bodyPr wrap="square" lIns="0" tIns="0" rIns="0" bIns="0" rtlCol="0" anchor="ctr"/>
           <a:lstStyle/>
           <a:p>
-            <a:pPr indent="0" marL="0">
+            <a:pPr marL="0" indent="0">
               <a:buNone/>
             </a:pPr>
             <a:r>
@@ -26113,7 +24589,7 @@
           <a:bodyPr wrap="square" lIns="0" tIns="0" rIns="0" bIns="0" rtlCol="0" anchor="ctr"/>
           <a:lstStyle/>
           <a:p>
-            <a:pPr indent="0" marL="0">
+            <a:pPr marL="0" indent="0">
               <a:buNone/>
             </a:pPr>
             <a:r>
@@ -26152,7 +24628,7 @@
           <a:bodyPr wrap="square" lIns="0" tIns="0" rIns="0" bIns="0" rtlCol="0" anchor="t"/>
           <a:lstStyle/>
           <a:p>
-            <a:pPr indent="0" marL="0">
+            <a:pPr marL="0" indent="0">
               <a:buNone/>
             </a:pPr>
             <a:r>
@@ -26218,7 +24694,7 @@
           <a:bodyPr wrap="square" lIns="0" tIns="0" rIns="0" bIns="0" rtlCol="0" anchor="ctr"/>
           <a:lstStyle/>
           <a:p>
-            <a:pPr indent="0" marL="0">
+            <a:pPr marL="0" indent="0">
               <a:buNone/>
             </a:pPr>
             <a:r>
@@ -26257,7 +24733,7 @@
           <a:bodyPr wrap="square" lIns="0" tIns="0" rIns="0" bIns="0" rtlCol="0" anchor="ctr"/>
           <a:lstStyle/>
           <a:p>
-            <a:pPr indent="0" marL="0">
+            <a:pPr marL="0" indent="0">
               <a:buNone/>
             </a:pPr>
             <a:r>
@@ -26296,7 +24772,7 @@
           <a:bodyPr wrap="square" lIns="0" tIns="0" rIns="0" bIns="0" rtlCol="0" anchor="t"/>
           <a:lstStyle/>
           <a:p>
-            <a:pPr indent="0" marL="0">
+            <a:pPr marL="0" indent="0">
               <a:buNone/>
             </a:pPr>
             <a:r>
@@ -26335,7 +24811,7 @@
           <a:bodyPr wrap="square" lIns="0" tIns="0" rIns="0" bIns="0" rtlCol="0" anchor="ctr"/>
           <a:lstStyle/>
           <a:p>
-            <a:pPr indent="0" marL="0">
+            <a:pPr marL="0" indent="0">
               <a:buNone/>
             </a:pPr>
             <a:r>
@@ -26374,7 +24850,7 @@
           <a:bodyPr wrap="square" lIns="0" tIns="0" rIns="0" bIns="0" rtlCol="0" anchor="t"/>
           <a:lstStyle/>
           <a:p>
-            <a:pPr indent="0" marL="0">
+            <a:pPr marL="0" indent="0">
               <a:buNone/>
             </a:pPr>
             <a:r>
@@ -26413,7 +24889,7 @@
           <a:bodyPr wrap="square" lIns="0" tIns="0" rIns="0" bIns="0" rtlCol="0" anchor="ctr"/>
           <a:lstStyle/>
           <a:p>
-            <a:pPr indent="0" marL="0">
+            <a:pPr marL="0" indent="0">
               <a:buNone/>
             </a:pPr>
             <a:r>
@@ -26452,7 +24928,7 @@
           <a:bodyPr wrap="square" lIns="0" tIns="0" rIns="0" bIns="0" rtlCol="0" anchor="t"/>
           <a:lstStyle/>
           <a:p>
-            <a:pPr indent="0" marL="0">
+            <a:pPr marL="0" indent="0">
               <a:buNone/>
             </a:pPr>
             <a:r>
@@ -26491,7 +24967,7 @@
           <a:bodyPr wrap="square" lIns="0" tIns="0" rIns="0" bIns="0" rtlCol="0" anchor="ctr"/>
           <a:lstStyle/>
           <a:p>
-            <a:pPr indent="0" marL="0">
+            <a:pPr marL="0" indent="0">
               <a:buNone/>
             </a:pPr>
             <a:r>
@@ -26530,7 +25006,7 @@
           <a:bodyPr wrap="square" lIns="0" tIns="0" rIns="0" bIns="0" rtlCol="0" anchor="t"/>
           <a:lstStyle/>
           <a:p>
-            <a:pPr indent="0" marL="0">
+            <a:pPr marL="0" indent="0">
               <a:buNone/>
             </a:pPr>
             <a:r>
@@ -26564,6 +25040,7 @@
         <a:solidFill>
           <a:srgbClr val="F6F8FA"/>
         </a:solidFill>
+        <a:effectLst/>
       </p:bgPr>
     </p:bg>
     <p:spTree>
@@ -26601,11 +25078,11 @@
           <a:bodyPr wrap="square" lIns="0" tIns="0" rIns="0" bIns="0" rtlCol="0" anchor="ctr"/>
           <a:lstStyle/>
           <a:p>
-            <a:pPr indent="0" marL="0">
-              <a:buNone/>
-            </a:pPr>
-            <a:r>
-              <a:rPr lang="en-US" sz="1100" b="1" spc="200" kern="0" dirty="0">
+            <a:pPr marL="0" indent="0">
+              <a:buNone/>
+            </a:pPr>
+            <a:r>
+              <a:rPr lang="en-US" sz="1100" b="1" kern="0" spc="200" dirty="0">
                 <a:solidFill>
                   <a:srgbClr val="3E7196"/>
                 </a:solidFill>
@@ -26640,7 +25117,7 @@
           <a:bodyPr wrap="square" lIns="0" tIns="0" rIns="0" bIns="0" rtlCol="0" anchor="t"/>
           <a:lstStyle/>
           <a:p>
-            <a:pPr indent="0" marL="0">
+            <a:pPr marL="0" indent="0">
               <a:buNone/>
             </a:pPr>
             <a:r>
@@ -26655,67 +25132,6 @@
               <a:t>Tres capas: frontend, backend y base de datos</a:t>
             </a:r>
             <a:endParaRPr lang="en-US" sz="3000" dirty="0"/>
-          </a:p>
-        </p:txBody>
-      </p:sp>
-      <p:sp>
-        <p:nvSpPr>
-          <p:cNvPr id="4" name="Shape 2"/>
-          <p:cNvSpPr/>
-          <p:nvPr/>
-        </p:nvSpPr>
-        <p:spPr>
-          <a:xfrm>
-            <a:off x="9722815" y="384048"/>
-            <a:ext cx="1920240" cy="365760"/>
-          </a:xfrm>
-          <a:prstGeom prst="roundRect">
-            <a:avLst>
-              <a:gd name="adj" fmla="val 50000"/>
-            </a:avLst>
-          </a:prstGeom>
-          <a:solidFill>
-            <a:srgbClr val="E9F1F7"/>
-          </a:solidFill>
-          <a:ln/>
-        </p:spPr>
-      </p:sp>
-      <p:sp>
-        <p:nvSpPr>
-          <p:cNvPr id="5" name="Text 3"/>
-          <p:cNvSpPr txBox="1"/>
-          <p:nvPr/>
-        </p:nvSpPr>
-        <p:spPr>
-          <a:xfrm>
-            <a:off x="9722815" y="384048"/>
-            <a:ext cx="1920240" cy="365760"/>
-          </a:xfrm>
-          <a:prstGeom prst="rect">
-            <a:avLst/>
-          </a:prstGeom>
-          <a:noFill/>
-          <a:ln/>
-        </p:spPr>
-        <p:txBody>
-          <a:bodyPr wrap="square" lIns="0" tIns="0" rIns="0" bIns="0" rtlCol="0" anchor="ctr"/>
-          <a:lstStyle/>
-          <a:p>
-            <a:pPr algn="ctr" indent="0" marL="0">
-              <a:buNone/>
-            </a:pPr>
-            <a:r>
-              <a:rPr lang="en-US" sz="1200" b="1" dirty="0">
-                <a:solidFill>
-                  <a:srgbClr val="22506F"/>
-                </a:solidFill>
-                <a:latin typeface="Calibri" pitchFamily="34" charset="0"/>
-                <a:ea typeface="Calibri" pitchFamily="34" charset="-122"/>
-                <a:cs typeface="Calibri" pitchFamily="34" charset="-120"/>
-              </a:rPr>
-              <a:t>Expone: Francisco</a:t>
-            </a:r>
-            <a:endParaRPr lang="en-US" sz="1200" dirty="0"/>
           </a:p>
         </p:txBody>
       </p:sp>
@@ -26740,7 +25156,7 @@
           <a:bodyPr wrap="square" lIns="0" tIns="0" rIns="0" bIns="0" rtlCol="0" anchor="ctr"/>
           <a:lstStyle/>
           <a:p>
-            <a:pPr algn="r" indent="0" marL="0">
+            <a:pPr marL="0" indent="0" algn="r">
               <a:buNone/>
             </a:pPr>
             <a:r>
@@ -26760,14 +25176,14 @@
       </p:sp>
       <p:pic>
         <p:nvPicPr>
-          <p:cNvPr id="7" name="Image 0" descr="C:\Users\Usuario\Desktop\Vault-Rumbo\05-Diseño\Arquitectura\img\ARQ-capas-conceptual.png">    </p:cNvPr>
+          <p:cNvPr id="7" name="Image 0" descr="C:\Users\Usuario\Desktop\Vault-Rumbo\05-Diseño\Arquitectura\img\ARQ-capas-conceptual.png"/>
           <p:cNvPicPr>
             <a:picLocks noChangeAspect="1"/>
           </p:cNvPicPr>
           <p:nvPr/>
         </p:nvPicPr>
         <p:blipFill>
-          <a:blip r:embed="rId1"/>
+          <a:blip r:embed="rId3"/>
           <a:stretch>
             <a:fillRect/>
           </a:stretch>
@@ -26830,7 +25246,7 @@
           <a:bodyPr wrap="square" lIns="0" tIns="0" rIns="0" bIns="0" rtlCol="0" anchor="ctr"/>
           <a:lstStyle/>
           <a:p>
-            <a:pPr indent="0" marL="0">
+            <a:pPr marL="0" indent="0">
               <a:buNone/>
             </a:pPr>
             <a:r>
@@ -26869,7 +25285,7 @@
           <a:bodyPr wrap="square" lIns="0" tIns="0" rIns="0" bIns="0" rtlCol="0" anchor="t"/>
           <a:lstStyle/>
           <a:p>
-            <a:pPr indent="0" marL="0">
+            <a:pPr marL="0" indent="0">
               <a:buNone/>
             </a:pPr>
             <a:r>
@@ -26935,7 +25351,7 @@
           <a:bodyPr wrap="square" lIns="0" tIns="0" rIns="0" bIns="0" rtlCol="0" anchor="ctr"/>
           <a:lstStyle/>
           <a:p>
-            <a:pPr indent="0" marL="0">
+            <a:pPr marL="0" indent="0">
               <a:buNone/>
             </a:pPr>
             <a:r>
@@ -26974,7 +25390,7 @@
           <a:bodyPr wrap="square" lIns="0" tIns="0" rIns="0" bIns="0" rtlCol="0" anchor="t"/>
           <a:lstStyle/>
           <a:p>
-            <a:pPr indent="0" marL="0">
+            <a:pPr marL="0" indent="0">
               <a:buNone/>
             </a:pPr>
             <a:r>
@@ -27040,7 +25456,7 @@
           <a:bodyPr wrap="square" lIns="0" tIns="0" rIns="0" bIns="0" rtlCol="0" anchor="ctr"/>
           <a:lstStyle/>
           <a:p>
-            <a:pPr indent="0" marL="0">
+            <a:pPr marL="0" indent="0">
               <a:buNone/>
             </a:pPr>
             <a:r>
@@ -27079,7 +25495,7 @@
           <a:bodyPr wrap="square" lIns="0" tIns="0" rIns="0" bIns="0" rtlCol="0" anchor="t"/>
           <a:lstStyle/>
           <a:p>
-            <a:pPr indent="0" marL="0">
+            <a:pPr marL="0" indent="0">
               <a:buNone/>
             </a:pPr>
             <a:r>
@@ -27113,6 +25529,7 @@
         <a:solidFill>
           <a:srgbClr val="F6F8FA"/>
         </a:solidFill>
+        <a:effectLst/>
       </p:bgPr>
     </p:bg>
     <p:spTree>
@@ -27150,11 +25567,11 @@
           <a:bodyPr wrap="square" lIns="0" tIns="0" rIns="0" bIns="0" rtlCol="0" anchor="ctr"/>
           <a:lstStyle/>
           <a:p>
-            <a:pPr indent="0" marL="0">
-              <a:buNone/>
-            </a:pPr>
-            <a:r>
-              <a:rPr lang="en-US" sz="1100" b="1" spc="200" kern="0" dirty="0">
+            <a:pPr marL="0" indent="0">
+              <a:buNone/>
+            </a:pPr>
+            <a:r>
+              <a:rPr lang="en-US" sz="1100" b="1" kern="0" spc="200" dirty="0">
                 <a:solidFill>
                   <a:srgbClr val="3E7196"/>
                 </a:solidFill>
@@ -27189,7 +25606,7 @@
           <a:bodyPr wrap="square" lIns="0" tIns="0" rIns="0" bIns="0" rtlCol="0" anchor="t"/>
           <a:lstStyle/>
           <a:p>
-            <a:pPr indent="0" marL="0">
+            <a:pPr marL="0" indent="0">
               <a:buNone/>
             </a:pPr>
             <a:r>
@@ -27204,67 +25621,6 @@
               <a:t>Interfaces gráficas: prototipo en Figma</a:t>
             </a:r>
             <a:endParaRPr lang="en-US" sz="3000" dirty="0"/>
-          </a:p>
-        </p:txBody>
-      </p:sp>
-      <p:sp>
-        <p:nvSpPr>
-          <p:cNvPr id="4" name="Shape 2"/>
-          <p:cNvSpPr/>
-          <p:nvPr/>
-        </p:nvSpPr>
-        <p:spPr>
-          <a:xfrm>
-            <a:off x="9722815" y="384048"/>
-            <a:ext cx="1920240" cy="365760"/>
-          </a:xfrm>
-          <a:prstGeom prst="roundRect">
-            <a:avLst>
-              <a:gd name="adj" fmla="val 50000"/>
-            </a:avLst>
-          </a:prstGeom>
-          <a:solidFill>
-            <a:srgbClr val="E9F1F7"/>
-          </a:solidFill>
-          <a:ln/>
-        </p:spPr>
-      </p:sp>
-      <p:sp>
-        <p:nvSpPr>
-          <p:cNvPr id="5" name="Text 3"/>
-          <p:cNvSpPr txBox="1"/>
-          <p:nvPr/>
-        </p:nvSpPr>
-        <p:spPr>
-          <a:xfrm>
-            <a:off x="9722815" y="384048"/>
-            <a:ext cx="1920240" cy="365760"/>
-          </a:xfrm>
-          <a:prstGeom prst="rect">
-            <a:avLst/>
-          </a:prstGeom>
-          <a:noFill/>
-          <a:ln/>
-        </p:spPr>
-        <p:txBody>
-          <a:bodyPr wrap="square" lIns="0" tIns="0" rIns="0" bIns="0" rtlCol="0" anchor="ctr"/>
-          <a:lstStyle/>
-          <a:p>
-            <a:pPr algn="ctr" indent="0" marL="0">
-              <a:buNone/>
-            </a:pPr>
-            <a:r>
-              <a:rPr lang="en-US" sz="1200" b="1" dirty="0">
-                <a:solidFill>
-                  <a:srgbClr val="22506F"/>
-                </a:solidFill>
-                <a:latin typeface="Calibri" pitchFamily="34" charset="0"/>
-                <a:ea typeface="Calibri" pitchFamily="34" charset="-122"/>
-                <a:cs typeface="Calibri" pitchFamily="34" charset="-120"/>
-              </a:rPr>
-              <a:t>Expone: Paloma</a:t>
-            </a:r>
-            <a:endParaRPr lang="en-US" sz="1200" dirty="0"/>
           </a:p>
         </p:txBody>
       </p:sp>
@@ -27289,7 +25645,7 @@
           <a:bodyPr wrap="square" lIns="0" tIns="0" rIns="0" bIns="0" rtlCol="0" anchor="ctr"/>
           <a:lstStyle/>
           <a:p>
-            <a:pPr algn="r" indent="0" marL="0">
+            <a:pPr marL="0" indent="0" algn="r">
               <a:buNone/>
             </a:pPr>
             <a:r>
@@ -27309,14 +25665,14 @@
       </p:sp>
       <p:pic>
         <p:nvPicPr>
-          <p:cNvPr id="7" name="Image 0" descr="C:\Users\Usuario\Desktop\Vault-Rumbo\07-Entregables\Prototipo\img\03-cu14-agenda.png">    </p:cNvPr>
+          <p:cNvPr id="7" name="Image 0" descr="C:\Users\Usuario\Desktop\Vault-Rumbo\07-Entregables\Prototipo\img\03-cu14-agenda.png"/>
           <p:cNvPicPr>
             <a:picLocks noChangeAspect="1"/>
           </p:cNvPicPr>
           <p:nvPr/>
         </p:nvPicPr>
         <p:blipFill>
-          <a:blip r:embed="rId1"/>
+          <a:blip r:embed="rId3"/>
           <a:stretch>
             <a:fillRect/>
           </a:stretch>
@@ -27394,7 +25750,7 @@
           <a:bodyPr wrap="square" lIns="0" tIns="0" rIns="0" bIns="0" rtlCol="0" anchor="ctr"/>
           <a:lstStyle/>
           <a:p>
-            <a:pPr algn="ctr" indent="0" marL="0">
+            <a:pPr marL="0" indent="0" algn="ctr">
               <a:buNone/>
             </a:pPr>
             <a:r>
@@ -27433,7 +25789,7 @@
           <a:bodyPr wrap="square" lIns="0" tIns="0" rIns="0" bIns="0" rtlCol="0" anchor="t"/>
           <a:lstStyle/>
           <a:p>
-            <a:pPr indent="0" marL="0">
+            <a:pPr marL="0" indent="0">
               <a:buNone/>
             </a:pPr>
             <a:r>
@@ -27492,7 +25848,7 @@
           <a:bodyPr wrap="square" lIns="0" tIns="0" rIns="0" bIns="0" rtlCol="0" anchor="ctr"/>
           <a:lstStyle/>
           <a:p>
-            <a:pPr algn="ctr" indent="0" marL="0">
+            <a:pPr marL="0" indent="0" algn="ctr">
               <a:buNone/>
             </a:pPr>
             <a:r>
@@ -27531,7 +25887,7 @@
           <a:bodyPr wrap="square" lIns="0" tIns="0" rIns="0" bIns="0" rtlCol="0" anchor="t"/>
           <a:lstStyle/>
           <a:p>
-            <a:pPr indent="0" marL="0">
+            <a:pPr marL="0" indent="0">
               <a:buNone/>
             </a:pPr>
             <a:r>
@@ -27590,7 +25946,7 @@
           <a:bodyPr wrap="square" lIns="0" tIns="0" rIns="0" bIns="0" rtlCol="0" anchor="ctr"/>
           <a:lstStyle/>
           <a:p>
-            <a:pPr algn="ctr" indent="0" marL="0">
+            <a:pPr marL="0" indent="0" algn="ctr">
               <a:buNone/>
             </a:pPr>
             <a:r>
@@ -27629,7 +25985,7 @@
           <a:bodyPr wrap="square" lIns="0" tIns="0" rIns="0" bIns="0" rtlCol="0" anchor="t"/>
           <a:lstStyle/>
           <a:p>
-            <a:pPr indent="0" marL="0">
+            <a:pPr marL="0" indent="0">
               <a:buNone/>
             </a:pPr>
             <a:r>
@@ -27688,7 +26044,7 @@
           <a:bodyPr wrap="square" lIns="0" tIns="0" rIns="0" bIns="0" rtlCol="0" anchor="ctr"/>
           <a:lstStyle/>
           <a:p>
-            <a:pPr algn="ctr" indent="0" marL="0">
+            <a:pPr marL="0" indent="0" algn="ctr">
               <a:buNone/>
             </a:pPr>
             <a:r>
@@ -27727,7 +26083,7 @@
           <a:bodyPr wrap="square" lIns="0" tIns="0" rIns="0" bIns="0" rtlCol="0" anchor="t"/>
           <a:lstStyle/>
           <a:p>
-            <a:pPr indent="0" marL="0">
+            <a:pPr marL="0" indent="0">
               <a:buNone/>
             </a:pPr>
             <a:r>
@@ -27786,7 +26142,7 @@
           <a:bodyPr wrap="square" lIns="0" tIns="0" rIns="0" bIns="0" rtlCol="0" anchor="ctr"/>
           <a:lstStyle/>
           <a:p>
-            <a:pPr algn="ctr" indent="0" marL="0">
+            <a:pPr marL="0" indent="0" algn="ctr">
               <a:buNone/>
             </a:pPr>
             <a:r>
@@ -27825,7 +26181,7 @@
           <a:bodyPr wrap="square" lIns="0" tIns="0" rIns="0" bIns="0" rtlCol="0" anchor="t"/>
           <a:lstStyle/>
           <a:p>
-            <a:pPr indent="0" marL="0">
+            <a:pPr marL="0" indent="0">
               <a:buNone/>
             </a:pPr>
             <a:r>
@@ -27864,7 +26220,7 @@
           <a:bodyPr wrap="square" lIns="0" tIns="0" rIns="0" bIns="0" rtlCol="0" anchor="ctr"/>
           <a:lstStyle/>
           <a:p>
-            <a:pPr indent="0" marL="0">
+            <a:pPr marL="0" indent="0">
               <a:buNone/>
             </a:pPr>
             <a:r>
@@ -28183,4 +26539,299 @@
     </a:ext>
   </a:extLst>
 </a:theme>
+</file>
+
+<file path=ppt/theme/theme2.xml><?xml version="1.0" encoding="utf-8"?>
+<a:theme xmlns:a="http://schemas.openxmlformats.org/drawingml/2006/main" name="Tema de Office">
+  <a:themeElements>
+    <a:clrScheme name="Office">
+      <a:dk1>
+        <a:sysClr val="windowText" lastClr="000000"/>
+      </a:dk1>
+      <a:lt1>
+        <a:sysClr val="window" lastClr="FFFFFF"/>
+      </a:lt1>
+      <a:dk2>
+        <a:srgbClr val="44546A"/>
+      </a:dk2>
+      <a:lt2>
+        <a:srgbClr val="E7E6E6"/>
+      </a:lt2>
+      <a:accent1>
+        <a:srgbClr val="4472C4"/>
+      </a:accent1>
+      <a:accent2>
+        <a:srgbClr val="ED7D31"/>
+      </a:accent2>
+      <a:accent3>
+        <a:srgbClr val="A5A5A5"/>
+      </a:accent3>
+      <a:accent4>
+        <a:srgbClr val="FFC000"/>
+      </a:accent4>
+      <a:accent5>
+        <a:srgbClr val="5B9BD5"/>
+      </a:accent5>
+      <a:accent6>
+        <a:srgbClr val="70AD47"/>
+      </a:accent6>
+      <a:hlink>
+        <a:srgbClr val="0563C1"/>
+      </a:hlink>
+      <a:folHlink>
+        <a:srgbClr val="954F72"/>
+      </a:folHlink>
+    </a:clrScheme>
+    <a:fontScheme name="Office">
+      <a:majorFont>
+        <a:latin typeface="Calibri Light" panose="020F0302020204030204"/>
+        <a:ea typeface=""/>
+        <a:cs typeface=""/>
+        <a:font script="Jpan" typeface="游ゴシック Light"/>
+        <a:font script="Hang" typeface="맑은 고딕"/>
+        <a:font script="Hans" typeface="等线 Light"/>
+        <a:font script="Hant" typeface="新細明體"/>
+        <a:font script="Arab" typeface="Times New Roman"/>
+        <a:font script="Hebr" typeface="Times New Roman"/>
+        <a:font script="Thai" typeface="Angsana New"/>
+        <a:font script="Ethi" typeface="Nyala"/>
+        <a:font script="Beng" typeface="Vrinda"/>
+        <a:font script="Gujr" typeface="Shruti"/>
+        <a:font script="Khmr" typeface="MoolBoran"/>
+        <a:font script="Knda" typeface="Tunga"/>
+        <a:font script="Guru" typeface="Raavi"/>
+        <a:font script="Cans" typeface="Euphemia"/>
+        <a:font script="Cher" typeface="Plantagenet Cherokee"/>
+        <a:font script="Yiii" typeface="Microsoft Yi Baiti"/>
+        <a:font script="Tibt" typeface="Microsoft Himalaya"/>
+        <a:font script="Thaa" typeface="MV Boli"/>
+        <a:font script="Deva" typeface="Mangal"/>
+        <a:font script="Telu" typeface="Gautami"/>
+        <a:font script="Taml" typeface="Latha"/>
+        <a:font script="Syrc" typeface="Estrangelo Edessa"/>
+        <a:font script="Orya" typeface="Kalinga"/>
+        <a:font script="Mlym" typeface="Kartika"/>
+        <a:font script="Laoo" typeface="DokChampa"/>
+        <a:font script="Sinh" typeface="Iskoola Pota"/>
+        <a:font script="Mong" typeface="Mongolian Baiti"/>
+        <a:font script="Viet" typeface="Times New Roman"/>
+        <a:font script="Uigh" typeface="Microsoft Uighur"/>
+        <a:font script="Geor" typeface="Sylfaen"/>
+        <a:font script="Armn" typeface="Arial"/>
+        <a:font script="Bugi" typeface="Leelawadee UI"/>
+        <a:font script="Bopo" typeface="Microsoft JhengHei"/>
+        <a:font script="Java" typeface="Javanese Text"/>
+        <a:font script="Lisu" typeface="Segoe UI"/>
+        <a:font script="Mymr" typeface="Myanmar Text"/>
+        <a:font script="Nkoo" typeface="Ebrima"/>
+        <a:font script="Olck" typeface="Nirmala UI"/>
+        <a:font script="Osma" typeface="Ebrima"/>
+        <a:font script="Phag" typeface="Phagspa"/>
+        <a:font script="Syrn" typeface="Estrangelo Edessa"/>
+        <a:font script="Syrj" typeface="Estrangelo Edessa"/>
+        <a:font script="Syre" typeface="Estrangelo Edessa"/>
+        <a:font script="Sora" typeface="Nirmala UI"/>
+        <a:font script="Tale" typeface="Microsoft Tai Le"/>
+        <a:font script="Talu" typeface="Microsoft New Tai Lue"/>
+        <a:font script="Tfng" typeface="Ebrima"/>
+      </a:majorFont>
+      <a:minorFont>
+        <a:latin typeface="Calibri" panose="020F0502020204030204"/>
+        <a:ea typeface=""/>
+        <a:cs typeface=""/>
+        <a:font script="Jpan" typeface="游ゴシック"/>
+        <a:font script="Hang" typeface="맑은 고딕"/>
+        <a:font script="Hans" typeface="等线"/>
+        <a:font script="Hant" typeface="新細明體"/>
+        <a:font script="Arab" typeface="Arial"/>
+        <a:font script="Hebr" typeface="Arial"/>
+        <a:font script="Thai" typeface="Cordia New"/>
+        <a:font script="Ethi" typeface="Nyala"/>
+        <a:font script="Beng" typeface="Vrinda"/>
+        <a:font script="Gujr" typeface="Shruti"/>
+        <a:font script="Khmr" typeface="DaunPenh"/>
+        <a:font script="Knda" typeface="Tunga"/>
+        <a:font script="Guru" typeface="Raavi"/>
+        <a:font script="Cans" typeface="Euphemia"/>
+        <a:font script="Cher" typeface="Plantagenet Cherokee"/>
+        <a:font script="Yiii" typeface="Microsoft Yi Baiti"/>
+        <a:font script="Tibt" typeface="Microsoft Himalaya"/>
+        <a:font script="Thaa" typeface="MV Boli"/>
+        <a:font script="Deva" typeface="Mangal"/>
+        <a:font script="Telu" typeface="Gautami"/>
+        <a:font script="Taml" typeface="Latha"/>
+        <a:font script="Syrc" typeface="Estrangelo Edessa"/>
+        <a:font script="Orya" typeface="Kalinga"/>
+        <a:font script="Mlym" typeface="Kartika"/>
+        <a:font script="Laoo" typeface="DokChampa"/>
+        <a:font script="Sinh" typeface="Iskoola Pota"/>
+        <a:font script="Mong" typeface="Mongolian Baiti"/>
+        <a:font script="Viet" typeface="Arial"/>
+        <a:font script="Uigh" typeface="Microsoft Uighur"/>
+        <a:font script="Geor" typeface="Sylfaen"/>
+        <a:font script="Armn" typeface="Arial"/>
+        <a:font script="Bugi" typeface="Leelawadee UI"/>
+        <a:font script="Bopo" typeface="Microsoft JhengHei"/>
+        <a:font script="Java" typeface="Javanese Text"/>
+        <a:font script="Lisu" typeface="Segoe UI"/>
+        <a:font script="Mymr" typeface="Myanmar Text"/>
+        <a:font script="Nkoo" typeface="Ebrima"/>
+        <a:font script="Olck" typeface="Nirmala UI"/>
+        <a:font script="Osma" typeface="Ebrima"/>
+        <a:font script="Phag" typeface="Phagspa"/>
+        <a:font script="Syrn" typeface="Estrangelo Edessa"/>
+        <a:font script="Syrj" typeface="Estrangelo Edessa"/>
+        <a:font script="Syre" typeface="Estrangelo Edessa"/>
+        <a:font script="Sora" typeface="Nirmala UI"/>
+        <a:font script="Tale" typeface="Microsoft Tai Le"/>
+        <a:font script="Talu" typeface="Microsoft New Tai Lue"/>
+        <a:font script="Tfng" typeface="Ebrima"/>
+      </a:minorFont>
+    </a:fontScheme>
+    <a:fmtScheme name="Office">
+      <a:fillStyleLst>
+        <a:solidFill>
+          <a:schemeClr val="phClr"/>
+        </a:solidFill>
+        <a:gradFill rotWithShape="1">
+          <a:gsLst>
+            <a:gs pos="0">
+              <a:schemeClr val="phClr">
+                <a:lumMod val="110000"/>
+                <a:satMod val="105000"/>
+                <a:tint val="67000"/>
+              </a:schemeClr>
+            </a:gs>
+            <a:gs pos="50000">
+              <a:schemeClr val="phClr">
+                <a:lumMod val="105000"/>
+                <a:satMod val="103000"/>
+                <a:tint val="73000"/>
+              </a:schemeClr>
+            </a:gs>
+            <a:gs pos="100000">
+              <a:schemeClr val="phClr">
+                <a:lumMod val="105000"/>
+                <a:satMod val="109000"/>
+                <a:tint val="81000"/>
+              </a:schemeClr>
+            </a:gs>
+          </a:gsLst>
+          <a:lin ang="5400000" scaled="0"/>
+        </a:gradFill>
+        <a:gradFill rotWithShape="1">
+          <a:gsLst>
+            <a:gs pos="0">
+              <a:schemeClr val="phClr">
+                <a:satMod val="103000"/>
+                <a:lumMod val="102000"/>
+                <a:tint val="94000"/>
+              </a:schemeClr>
+            </a:gs>
+            <a:gs pos="50000">
+              <a:schemeClr val="phClr">
+                <a:satMod val="110000"/>
+                <a:lumMod val="100000"/>
+                <a:shade val="100000"/>
+              </a:schemeClr>
+            </a:gs>
+            <a:gs pos="100000">
+              <a:schemeClr val="phClr">
+                <a:lumMod val="99000"/>
+                <a:satMod val="120000"/>
+                <a:shade val="78000"/>
+              </a:schemeClr>
+            </a:gs>
+          </a:gsLst>
+          <a:lin ang="5400000" scaled="0"/>
+        </a:gradFill>
+      </a:fillStyleLst>
+      <a:lnStyleLst>
+        <a:ln w="6350" cap="flat" cmpd="sng" algn="ctr">
+          <a:solidFill>
+            <a:schemeClr val="phClr"/>
+          </a:solidFill>
+          <a:prstDash val="solid"/>
+          <a:miter lim="800000"/>
+        </a:ln>
+        <a:ln w="12700" cap="flat" cmpd="sng" algn="ctr">
+          <a:solidFill>
+            <a:schemeClr val="phClr"/>
+          </a:solidFill>
+          <a:prstDash val="solid"/>
+          <a:miter lim="800000"/>
+        </a:ln>
+        <a:ln w="19050" cap="flat" cmpd="sng" algn="ctr">
+          <a:solidFill>
+            <a:schemeClr val="phClr"/>
+          </a:solidFill>
+          <a:prstDash val="solid"/>
+          <a:miter lim="800000"/>
+        </a:ln>
+      </a:lnStyleLst>
+      <a:effectStyleLst>
+        <a:effectStyle>
+          <a:effectLst/>
+        </a:effectStyle>
+        <a:effectStyle>
+          <a:effectLst/>
+        </a:effectStyle>
+        <a:effectStyle>
+          <a:effectLst>
+            <a:outerShdw blurRad="57150" dist="19050" dir="5400000" algn="ctr" rotWithShape="0">
+              <a:srgbClr val="000000">
+                <a:alpha val="63000"/>
+              </a:srgbClr>
+            </a:outerShdw>
+          </a:effectLst>
+        </a:effectStyle>
+      </a:effectStyleLst>
+      <a:bgFillStyleLst>
+        <a:solidFill>
+          <a:schemeClr val="phClr"/>
+        </a:solidFill>
+        <a:solidFill>
+          <a:schemeClr val="phClr">
+            <a:tint val="95000"/>
+            <a:satMod val="170000"/>
+          </a:schemeClr>
+        </a:solidFill>
+        <a:gradFill rotWithShape="1">
+          <a:gsLst>
+            <a:gs pos="0">
+              <a:schemeClr val="phClr">
+                <a:tint val="93000"/>
+                <a:satMod val="150000"/>
+                <a:shade val="98000"/>
+                <a:lumMod val="102000"/>
+              </a:schemeClr>
+            </a:gs>
+            <a:gs pos="50000">
+              <a:schemeClr val="phClr">
+                <a:tint val="98000"/>
+                <a:satMod val="130000"/>
+                <a:shade val="90000"/>
+                <a:lumMod val="103000"/>
+              </a:schemeClr>
+            </a:gs>
+            <a:gs pos="100000">
+              <a:schemeClr val="phClr">
+                <a:shade val="63000"/>
+                <a:satMod val="120000"/>
+              </a:schemeClr>
+            </a:gs>
+          </a:gsLst>
+          <a:lin ang="5400000" scaled="0"/>
+        </a:gradFill>
+      </a:bgFillStyleLst>
+    </a:fmtScheme>
+  </a:themeElements>
+  <a:objectDefaults/>
+  <a:extraClrSchemeLst/>
+  <a:extLst>
+    <a:ext uri="{05A4C25C-085E-4340-85A3-A5531E510DB2}">
+      <thm15:themeFamily xmlns:thm15="http://schemas.microsoft.com/office/thememl/2012/main" name="Office Theme" id="{62F939B6-93AF-4DB8-9C6B-D6C7DFDC589F}" vid="{4A3C46E8-61CC-4603-A589-7422A47A8E4A}"/>
+    </a:ext>
+  </a:extLst>
+</a:theme>
 </file>
--- a/07-Entregables/PC1/Rumbo — PC1 (presentación).pptx
+++ b/07-Entregables/PC1/Rumbo — PC1 (presentación).pptx
@@ -15359,8 +15359,8 @@
         </p:blipFill>
         <p:spPr>
           <a:xfrm>
-            <a:off x="1390902" y="1371600"/>
-            <a:ext cx="9407149" cy="2651760"/>
+            <a:off x="1837600" y="1371600"/>
+            <a:ext cx="8513750" cy="2780000"/>
           </a:xfrm>
           <a:prstGeom prst="rect">
             <a:avLst/>

--- a/07-Entregables/PC1/Rumbo — PC1 (presentación).pptx
+++ b/07-Entregables/PC1/Rumbo — PC1 (presentación).pptx
@@ -1761,7 +1761,7 @@
           <a:p>
             <a:r>
               <a:rPr lang="en-US" dirty="0"/>
-              <a:t>Una iteración por punto de control: PC1 análisis y diseño (02/10), PC2 código (20/11), PC3 pruebas y documentación (04/12). Cada cierre deja un tag en Git.</a:t>
+              <a:t>Una iteración por punto de control: PC1 análisis y diseño (02/10), PC2 código (30/10), PC3 pruebas y documentación (13/11). Cada cierre deja un tag en Git.</a:t>
             </a:r>
           </a:p>
         </p:txBody>
@@ -17743,7 +17743,7 @@
                 <a:ea typeface="Calibri" pitchFamily="34" charset="-122"/>
                 <a:cs typeface="Calibri" pitchFamily="34" charset="-120"/>
               </a:rPr>
-              <a:t>Próximo: PC2 · 20/11/26 — </a:t>
+              <a:t>Próximo: PC2 · 30/10/26 — </a:t>
             </a:r>
             <a:r>
               <a:rPr lang="en-US" sz="1800" dirty="0">
